--- a/projects/GSE262271_TALL_relapse_scRNAseq/07_Student_Handoff/01_Summary/Leukemia_scRNAseq_STAT5B_reviewed.pptx
+++ b/projects/GSE262271_TALL_relapse_scRNAseq/07_Student_Handoff/01_Summary/Leukemia_scRNAseq_STAT5B_reviewed.pptx
@@ -2,26 +2,26 @@
 <file path=ppt/presentation.xml><?xml version="1.0" encoding="utf-8"?>
 <p:presentation xmlns:p="http://schemas.openxmlformats.org/presentationml/2006/main">
   <p:sldMasterIdLst>
-    <p:sldMasterId xmlns:r="http://schemas.openxmlformats.org/officeDocument/2006/relationships" id="2147483648" r:id="R862b9637226448d7"/>
+    <p:sldMasterId xmlns:r="http://schemas.openxmlformats.org/officeDocument/2006/relationships" id="2147483648" r:id="R17a29904a7e34fe2"/>
   </p:sldMasterIdLst>
   <p:notesMasterIdLst>
-    <p:notesMasterId xmlns:r="http://schemas.openxmlformats.org/officeDocument/2006/relationships" r:id="Rfcc81316096747b3"/>
+    <p:notesMasterId xmlns:r="http://schemas.openxmlformats.org/officeDocument/2006/relationships" r:id="Rc89f8f8522f54fba"/>
   </p:notesMasterIdLst>
   <p:sldIdLst>
-    <p:sldId xmlns:r="http://schemas.openxmlformats.org/officeDocument/2006/relationships" id="256" r:id="R27644708646d48dd"/>
-    <p:sldId xmlns:r="http://schemas.openxmlformats.org/officeDocument/2006/relationships" id="257" r:id="R05a3aa08f6cf42d3"/>
-    <p:sldId xmlns:r="http://schemas.openxmlformats.org/officeDocument/2006/relationships" id="258" r:id="R0cf7bfbe439043ca"/>
-    <p:sldId xmlns:r="http://schemas.openxmlformats.org/officeDocument/2006/relationships" id="259" r:id="Raf25a8bfaaa34210"/>
-    <p:sldId xmlns:r="http://schemas.openxmlformats.org/officeDocument/2006/relationships" id="260" r:id="Re99f3f73e59a4ea7"/>
-    <p:sldId xmlns:r="http://schemas.openxmlformats.org/officeDocument/2006/relationships" id="261" r:id="R8e04d5bc91a844b1"/>
-    <p:sldId xmlns:r="http://schemas.openxmlformats.org/officeDocument/2006/relationships" id="262" r:id="Rf7a00533549d4f3e"/>
-    <p:sldId xmlns:r="http://schemas.openxmlformats.org/officeDocument/2006/relationships" id="263" r:id="R2f4518e083334ba8"/>
-    <p:sldId xmlns:r="http://schemas.openxmlformats.org/officeDocument/2006/relationships" id="264" r:id="R4f610c0a8fb449bf"/>
-    <p:sldId xmlns:r="http://schemas.openxmlformats.org/officeDocument/2006/relationships" id="265" r:id="R2749d3d868554636"/>
-    <p:sldId xmlns:r="http://schemas.openxmlformats.org/officeDocument/2006/relationships" id="266" r:id="Ra7e8a73963734bbb"/>
-    <p:sldId xmlns:r="http://schemas.openxmlformats.org/officeDocument/2006/relationships" id="267" r:id="R2e8a7d9547c149e0"/>
-    <p:sldId xmlns:r="http://schemas.openxmlformats.org/officeDocument/2006/relationships" id="268" r:id="R7f3459db959f42fa"/>
-    <p:sldId xmlns:r="http://schemas.openxmlformats.org/officeDocument/2006/relationships" id="269" r:id="R52defa739df044b4"/>
+    <p:sldId xmlns:r="http://schemas.openxmlformats.org/officeDocument/2006/relationships" id="256" r:id="R5f60c4c641da4cd4"/>
+    <p:sldId xmlns:r="http://schemas.openxmlformats.org/officeDocument/2006/relationships" id="257" r:id="Rb9f0b3cf3e2948d9"/>
+    <p:sldId xmlns:r="http://schemas.openxmlformats.org/officeDocument/2006/relationships" id="258" r:id="Re2de27cb1ef2427c"/>
+    <p:sldId xmlns:r="http://schemas.openxmlformats.org/officeDocument/2006/relationships" id="259" r:id="R7317dfb164c948e2"/>
+    <p:sldId xmlns:r="http://schemas.openxmlformats.org/officeDocument/2006/relationships" id="260" r:id="R47d507ef7ccf4b49"/>
+    <p:sldId xmlns:r="http://schemas.openxmlformats.org/officeDocument/2006/relationships" id="261" r:id="R005ab2211d4b404c"/>
+    <p:sldId xmlns:r="http://schemas.openxmlformats.org/officeDocument/2006/relationships" id="262" r:id="Ra415a6cf4b6c4d4d"/>
+    <p:sldId xmlns:r="http://schemas.openxmlformats.org/officeDocument/2006/relationships" id="263" r:id="Rb424d6403ddd4ace"/>
+    <p:sldId xmlns:r="http://schemas.openxmlformats.org/officeDocument/2006/relationships" id="264" r:id="R08eaef45b97842b9"/>
+    <p:sldId xmlns:r="http://schemas.openxmlformats.org/officeDocument/2006/relationships" id="265" r:id="Rdbb11098723946d1"/>
+    <p:sldId xmlns:r="http://schemas.openxmlformats.org/officeDocument/2006/relationships" id="266" r:id="Rb7a87ab838614feb"/>
+    <p:sldId xmlns:r="http://schemas.openxmlformats.org/officeDocument/2006/relationships" id="267" r:id="Re9f330a615234426"/>
+    <p:sldId xmlns:r="http://schemas.openxmlformats.org/officeDocument/2006/relationships" id="268" r:id="R4b6d1588762b407f"/>
+    <p:sldId xmlns:r="http://schemas.openxmlformats.org/officeDocument/2006/relationships" id="269" r:id="Rcd730057a98f43b3"/>
   </p:sldIdLst>
   <p:sldSz cx="12192000" cy="6858000"/>
   <p:notesSz cx="6858000" cy="9144000"/>
@@ -1295,7 +1295,7 @@
           <a:lstStyle xmlns:a="http://schemas.openxmlformats.org/drawingml/2006/main"/>
           <a:p xmlns:a="http://schemas.openxmlformats.org/drawingml/2006/main">
             <a:r>
-              <a:t>Figure05 restricts the universe to common tested canonical pathway names. It does not silently call pathways missing from one catalog non-significant. Circle area is schematic. Table06 has all membership; Table07 lists every shared pathway.</a:t>
+              <a:t>Figure05 restricts the universe to common tested canonical pathway names. It does not call pathways missing from one catalog non-significant. Circle area is schematic. Table06 has all membership; Table07 lists all40 primary shared pathways. TableS05 retains global25 sensitivity. Primary display uses within15 as requested, while cutoff selection remains exploratory.</a:t>
             </a:r>
           </a:p>
         </p:txBody>
@@ -1433,7 +1433,7 @@
   </p:cSld>
   <p:clrMap bg1="lt1" tx1="dk1" bg2="lt2" tx2="dk2" accent1="accent1" accent2="accent2" accent3="accent3" accent4="accent4" accent5="accent5" accent6="accent6" hlink="hlink" folHlink="folHlink"/>
   <p:sldLayoutIdLst>
-    <p:sldLayoutId xmlns:r="http://schemas.openxmlformats.org/officeDocument/2006/relationships" id="2147483649" r:id="Rcaa202b71504494e"/>
+    <p:sldLayoutId xmlns:r="http://schemas.openxmlformats.org/officeDocument/2006/relationships" id="2147483649" r:id="R484a6def0a1f47ac"/>
   </p:sldLayoutIdLst>
   <p:txStyles>
     <p:titleStyle>
@@ -1984,7 +1984,7 @@
           <p:cNvPr id="9" name="">
             <a:extLst xmlns:a="http://schemas.openxmlformats.org/drawingml/2006/main">
               <a:ext uri="{FF2B5EF4-FFF2-40B4-BE49-F238E27FC236}">
-                <a16:creationId xmlns:a16="http://schemas.microsoft.com/office/drawing/2014/main" id="{534470FE-957C-4270-B9F1-1A0E2C18C814}"/>
+                <a16:creationId xmlns:a16="http://schemas.microsoft.com/office/drawing/2014/main" id="{91E6CCD2-64CB-4CF5-8FFF-3B6F4AE356E8}"/>
               </a:ext>
             </a:extLst>
           </p:cNvPr>
@@ -2041,7 +2041,7 @@
           <p:cNvPr id="2" name="">
             <a:extLst xmlns:a="http://schemas.openxmlformats.org/drawingml/2006/main">
               <a:ext uri="{FF2B5EF4-FFF2-40B4-BE49-F238E27FC236}">
-                <a16:creationId xmlns:a16="http://schemas.microsoft.com/office/drawing/2014/main" id="{A3CE88A7-A640-4747-8EEB-0CF188730E1D}"/>
+                <a16:creationId xmlns:a16="http://schemas.microsoft.com/office/drawing/2014/main" id="{7C4495CA-8855-41A1-883D-F5C67CAC1CB9}"/>
               </a:ext>
             </a:extLst>
           </p:cNvPr>
@@ -2098,7 +2098,7 @@
           <p:cNvPr id="3" name="">
             <a:extLst xmlns:a="http://schemas.openxmlformats.org/drawingml/2006/main">
               <a:ext uri="{FF2B5EF4-FFF2-40B4-BE49-F238E27FC236}">
-                <a16:creationId xmlns:a16="http://schemas.microsoft.com/office/drawing/2014/main" id="{CFABA575-067B-4DA4-8C03-0550626C2236}"/>
+                <a16:creationId xmlns:a16="http://schemas.microsoft.com/office/drawing/2014/main" id="{E23FD51F-4C69-4A5E-91DD-2AD394910338}"/>
               </a:ext>
             </a:extLst>
           </p:cNvPr>
@@ -2155,7 +2155,7 @@
           <p:cNvPr id="4" name="">
             <a:extLst xmlns:a="http://schemas.openxmlformats.org/drawingml/2006/main">
               <a:ext uri="{FF2B5EF4-FFF2-40B4-BE49-F238E27FC236}">
-                <a16:creationId xmlns:a16="http://schemas.microsoft.com/office/drawing/2014/main" id="{5FCE1A43-DF86-42DB-8336-0633A4E45D66}"/>
+                <a16:creationId xmlns:a16="http://schemas.microsoft.com/office/drawing/2014/main" id="{5171ECF3-CA9D-4DF3-9A0B-C8FF76109732}"/>
               </a:ext>
             </a:extLst>
           </p:cNvPr>
@@ -2212,7 +2212,7 @@
           <p:cNvPr id="5" name="">
             <a:extLst xmlns:a="http://schemas.openxmlformats.org/drawingml/2006/main">
               <a:ext uri="{FF2B5EF4-FFF2-40B4-BE49-F238E27FC236}">
-                <a16:creationId xmlns:a16="http://schemas.microsoft.com/office/drawing/2014/main" id="{78A6A0B8-F957-436A-AE3D-C2C198940922}"/>
+                <a16:creationId xmlns:a16="http://schemas.microsoft.com/office/drawing/2014/main" id="{80B564FF-33D8-48D4-9435-B6A225DA249F}"/>
               </a:ext>
             </a:extLst>
           </p:cNvPr>
@@ -2269,7 +2269,7 @@
           <p:cNvPr id="6" name="">
             <a:extLst xmlns:a="http://schemas.openxmlformats.org/drawingml/2006/main">
               <a:ext uri="{FF2B5EF4-FFF2-40B4-BE49-F238E27FC236}">
-                <a16:creationId xmlns:a16="http://schemas.microsoft.com/office/drawing/2014/main" id="{E30BD7D0-8541-4B65-AAB2-DBEEA8E05E1D}"/>
+                <a16:creationId xmlns:a16="http://schemas.microsoft.com/office/drawing/2014/main" id="{D5C9457E-489D-4013-810B-050DD8BCE50E}"/>
               </a:ext>
             </a:extLst>
           </p:cNvPr>
@@ -2326,7 +2326,7 @@
           <p:cNvPr id="7" name="">
             <a:extLst xmlns:a="http://schemas.openxmlformats.org/drawingml/2006/main">
               <a:ext uri="{FF2B5EF4-FFF2-40B4-BE49-F238E27FC236}">
-                <a16:creationId xmlns:a16="http://schemas.microsoft.com/office/drawing/2014/main" id="{DB50B662-FF67-426D-AF3B-CADA352ADF49}"/>
+                <a16:creationId xmlns:a16="http://schemas.microsoft.com/office/drawing/2014/main" id="{13FFD5BF-1F61-4284-B90C-F642024AC01E}"/>
               </a:ext>
             </a:extLst>
           </p:cNvPr>
@@ -2406,7 +2406,7 @@
           <p:cNvPr id="8" name="">
             <a:extLst xmlns:a="http://schemas.openxmlformats.org/drawingml/2006/main">
               <a:ext uri="{FF2B5EF4-FFF2-40B4-BE49-F238E27FC236}">
-                <a16:creationId xmlns:a16="http://schemas.microsoft.com/office/drawing/2014/main" id="{83411D25-E94C-463B-AF04-DBF5417E5172}"/>
+                <a16:creationId xmlns:a16="http://schemas.microsoft.com/office/drawing/2014/main" id="{88D95EB9-C8F0-4256-BB11-BA59D12168D5}"/>
               </a:ext>
             </a:extLst>
           </p:cNvPr>
@@ -2453,7 +2453,7 @@
                 <a:ea typeface="Microsoft JhengHei"/>
                 <a:cs typeface="Microsoft JhengHei"/>
               </a:rPr>
-              <a:t>本報告保留原始 top 25% 結果，另列 exploratory within-sample top 15%。</a:t>
+              <a:t>主分析固定 within-sample CNV top 15%，pathway 與交集皆採完整 KEGG FDR &lt; 0.05。</a:t>
             </a:r>
           </a:p>
         </p:txBody>
@@ -2461,7 +2461,7 @@
     </p:spTree>
     <p:extLst>
       <p:ext uri="{BB962C8B-B14F-4D97-AF65-F5344CB8AC3E}">
-        <p14:creationId xmlns:p14="http://schemas.microsoft.com/office/powerpoint/2010/main" val="116414465"/>
+        <p14:creationId xmlns:p14="http://schemas.microsoft.com/office/powerpoint/2010/main" val="1423246754"/>
       </p:ext>
     </p:extLst>
   </p:cSld>
@@ -2492,7 +2492,7 @@
           <p:cNvPr id="7" name="">
             <a:extLst xmlns:a="http://schemas.openxmlformats.org/drawingml/2006/main">
               <a:ext uri="{FF2B5EF4-FFF2-40B4-BE49-F238E27FC236}">
-                <a16:creationId xmlns:a16="http://schemas.microsoft.com/office/drawing/2014/main" id="{902F3ADE-6AF7-4F46-861D-1AA3CB653C8E}"/>
+                <a16:creationId xmlns:a16="http://schemas.microsoft.com/office/drawing/2014/main" id="{1506798B-E2B7-4D0A-B89A-B8DB57C3AFB3}"/>
               </a:ext>
             </a:extLst>
           </p:cNvPr>
@@ -2549,7 +2549,7 @@
           <p:cNvPr id="2" name="">
             <a:extLst xmlns:a="http://schemas.openxmlformats.org/drawingml/2006/main">
               <a:ext uri="{FF2B5EF4-FFF2-40B4-BE49-F238E27FC236}">
-                <a16:creationId xmlns:a16="http://schemas.microsoft.com/office/drawing/2014/main" id="{C93CA159-CC1B-498A-A245-2BA0938F1732}"/>
+                <a16:creationId xmlns:a16="http://schemas.microsoft.com/office/drawing/2014/main" id="{322AD55F-4621-40A3-94F4-A56C980EF2D3}"/>
               </a:ext>
             </a:extLst>
           </p:cNvPr>
@@ -2606,7 +2606,7 @@
           <p:cNvPr id="3" name="">
             <a:extLst xmlns:a="http://schemas.openxmlformats.org/drawingml/2006/main">
               <a:ext uri="{FF2B5EF4-FFF2-40B4-BE49-F238E27FC236}">
-                <a16:creationId xmlns:a16="http://schemas.microsoft.com/office/drawing/2014/main" id="{8423E76E-C803-4CDC-9ACA-76C85A020216}"/>
+                <a16:creationId xmlns:a16="http://schemas.microsoft.com/office/drawing/2014/main" id="{95820BA2-F3C6-4C8A-AABB-F0D889B99201}"/>
               </a:ext>
             </a:extLst>
           </p:cNvPr>
@@ -2663,7 +2663,7 @@
           <p:cNvPr id="4" name="">
             <a:extLst xmlns:a="http://schemas.openxmlformats.org/drawingml/2006/main">
               <a:ext uri="{FF2B5EF4-FFF2-40B4-BE49-F238E27FC236}">
-                <a16:creationId xmlns:a16="http://schemas.microsoft.com/office/drawing/2014/main" id="{29F93DF2-C0BB-402B-A446-360BC4116B61}"/>
+                <a16:creationId xmlns:a16="http://schemas.microsoft.com/office/drawing/2014/main" id="{28C3B606-FF48-4635-8410-518A9A3BF68E}"/>
               </a:ext>
             </a:extLst>
           </p:cNvPr>
@@ -2724,13 +2724,13 @@
           <p:nvPr/>
         </p:nvPicPr>
         <p:blipFill>
-          <a:blip xmlns:r="http://schemas.openxmlformats.org/officeDocument/2006/relationships" xmlns:a="http://schemas.openxmlformats.org/drawingml/2006/main" r:embed="Reb3db202c20d4eb6"/>
+          <a:blip xmlns:r="http://schemas.openxmlformats.org/officeDocument/2006/relationships" xmlns:a="http://schemas.openxmlformats.org/drawingml/2006/main" r:embed="R2ebcdfadf305483f"/>
           <a:stretch xmlns:a="http://schemas.openxmlformats.org/drawingml/2006/main"/>
         </p:blipFill>
         <p:spPr>
           <a:xfrm xmlns:a="http://schemas.openxmlformats.org/drawingml/2006/main">
-            <a:off x="1239242" y="1362075"/>
-            <a:ext cx="9713516" cy="4238625"/>
+            <a:off x="2122289" y="1362075"/>
+            <a:ext cx="7947422" cy="4238625"/>
           </a:xfrm>
           <a:prstGeom xmlns:a="http://schemas.openxmlformats.org/drawingml/2006/main" prst="rect">
             <a:avLst/>
@@ -2742,7 +2742,7 @@
           <p:cNvPr id="6" name="">
             <a:extLst xmlns:a="http://schemas.openxmlformats.org/drawingml/2006/main">
               <a:ext uri="{FF2B5EF4-FFF2-40B4-BE49-F238E27FC236}">
-                <a16:creationId xmlns:a16="http://schemas.microsoft.com/office/drawing/2014/main" id="{6A72D360-64AD-40C7-901C-5AF3B72457C4}"/>
+                <a16:creationId xmlns:a16="http://schemas.microsoft.com/office/drawing/2014/main" id="{8E33C5E0-D39D-4A3D-9D9F-A366AEE9BDC3}"/>
               </a:ext>
             </a:extLst>
           </p:cNvPr>
@@ -2789,7 +2789,7 @@
                 <a:ea typeface="Microsoft JhengHei"/>
                 <a:cs typeface="Microsoft JhengHei"/>
               </a:rPr>
-              <a:t>這兩條的 NES 是正值：relapse 與 N642H 都較高。Top 15% 的顯著性不能套用到原始 top 25%。</a:t>
+              <a:t>Proteasome、mitophagy 均上調，兩組資料的完整 KEGG FDR 都小於 0.05。</a:t>
             </a:r>
           </a:p>
         </p:txBody>
@@ -2797,7 +2797,7 @@
     </p:spTree>
     <p:extLst>
       <p:ext uri="{BB962C8B-B14F-4D97-AF65-F5344CB8AC3E}">
-        <p14:creationId xmlns:p14="http://schemas.microsoft.com/office/powerpoint/2010/main" val="71367776"/>
+        <p14:creationId xmlns:p14="http://schemas.microsoft.com/office/powerpoint/2010/main" val="1479276253"/>
       </p:ext>
     </p:extLst>
   </p:cSld>
@@ -2828,7 +2828,7 @@
           <p:cNvPr id="8" name="">
             <a:extLst xmlns:a="http://schemas.openxmlformats.org/drawingml/2006/main">
               <a:ext uri="{FF2B5EF4-FFF2-40B4-BE49-F238E27FC236}">
-                <a16:creationId xmlns:a16="http://schemas.microsoft.com/office/drawing/2014/main" id="{CF75FB2D-A5C8-421C-9932-BBD72553F593}"/>
+                <a16:creationId xmlns:a16="http://schemas.microsoft.com/office/drawing/2014/main" id="{12B8CB02-5257-434D-909A-2D70F1C5FD71}"/>
               </a:ext>
             </a:extLst>
           </p:cNvPr>
@@ -2885,7 +2885,7 @@
           <p:cNvPr id="2" name="">
             <a:extLst xmlns:a="http://schemas.openxmlformats.org/drawingml/2006/main">
               <a:ext uri="{FF2B5EF4-FFF2-40B4-BE49-F238E27FC236}">
-                <a16:creationId xmlns:a16="http://schemas.microsoft.com/office/drawing/2014/main" id="{8CD33002-7136-4C7A-B7A0-09084D0D8370}"/>
+                <a16:creationId xmlns:a16="http://schemas.microsoft.com/office/drawing/2014/main" id="{DA9F256B-A29C-4BB5-A07F-D03909475925}"/>
               </a:ext>
             </a:extLst>
           </p:cNvPr>
@@ -2942,7 +2942,7 @@
           <p:cNvPr id="3" name="">
             <a:extLst xmlns:a="http://schemas.openxmlformats.org/drawingml/2006/main">
               <a:ext uri="{FF2B5EF4-FFF2-40B4-BE49-F238E27FC236}">
-                <a16:creationId xmlns:a16="http://schemas.microsoft.com/office/drawing/2014/main" id="{3C06545B-E70F-42C3-82B9-C363548C294F}"/>
+                <a16:creationId xmlns:a16="http://schemas.microsoft.com/office/drawing/2014/main" id="{A5E5A68D-BBEE-4D32-B7AD-AAFDD731B600}"/>
               </a:ext>
             </a:extLst>
           </p:cNvPr>
@@ -2999,7 +2999,7 @@
           <p:cNvPr id="4" name="">
             <a:extLst xmlns:a="http://schemas.openxmlformats.org/drawingml/2006/main">
               <a:ext uri="{FF2B5EF4-FFF2-40B4-BE49-F238E27FC236}">
-                <a16:creationId xmlns:a16="http://schemas.microsoft.com/office/drawing/2014/main" id="{F86FB53C-7803-4ABE-B6BF-6F4DAFC23FD6}"/>
+                <a16:creationId xmlns:a16="http://schemas.microsoft.com/office/drawing/2014/main" id="{4BBDAC00-A282-48CD-AADC-89B5CCA0B19A}"/>
               </a:ext>
             </a:extLst>
           </p:cNvPr>
@@ -3060,7 +3060,7 @@
           <p:nvPr/>
         </p:nvPicPr>
         <p:blipFill>
-          <a:blip xmlns:r="http://schemas.openxmlformats.org/officeDocument/2006/relationships" xmlns:a="http://schemas.openxmlformats.org/drawingml/2006/main" r:embed="Rf21f4457506f4d4d"/>
+          <a:blip xmlns:r="http://schemas.openxmlformats.org/officeDocument/2006/relationships" xmlns:a="http://schemas.openxmlformats.org/drawingml/2006/main" r:embed="R25388103743748b3"/>
           <a:stretch xmlns:a="http://schemas.openxmlformats.org/drawingml/2006/main"/>
         </p:blipFill>
         <p:spPr>
@@ -3078,7 +3078,7 @@
           <p:cNvPr id="6" name="">
             <a:extLst xmlns:a="http://schemas.openxmlformats.org/drawingml/2006/main">
               <a:ext uri="{FF2B5EF4-FFF2-40B4-BE49-F238E27FC236}">
-                <a16:creationId xmlns:a16="http://schemas.microsoft.com/office/drawing/2014/main" id="{19EBCE93-7A9C-4F47-9738-96DCD44F8388}"/>
+                <a16:creationId xmlns:a16="http://schemas.microsoft.com/office/drawing/2014/main" id="{33D19D66-5BD8-4E65-AAFC-A2349521F3DE}"/>
               </a:ext>
             </a:extLst>
           </p:cNvPr>
@@ -3135,7 +3135,7 @@
           <p:cNvPr id="7" name="">
             <a:extLst xmlns:a="http://schemas.openxmlformats.org/drawingml/2006/main">
               <a:ext uri="{FF2B5EF4-FFF2-40B4-BE49-F238E27FC236}">
-                <a16:creationId xmlns:a16="http://schemas.microsoft.com/office/drawing/2014/main" id="{E9381DF5-A212-4436-99C1-D8041F8B19A0}"/>
+                <a16:creationId xmlns:a16="http://schemas.microsoft.com/office/drawing/2014/main" id="{88378425-E98D-456B-B9C4-4A99F125D1F1}"/>
               </a:ext>
             </a:extLst>
           </p:cNvPr>
@@ -3210,7 +3210,7 @@
                 <a:ea typeface="Microsoft JhengHei"/>
                 <a:cs typeface="Microsoft JhengHei"/>
               </a:rPr>
-              <a:t>方向檢查是描述性證據，不能再當成獨立驗證。</a:t>
+              <a:t>這裡只描述三位病人的方向，不作額外的獨立驗證。</a:t>
             </a:r>
           </a:p>
         </p:txBody>
@@ -3218,7 +3218,7 @@
     </p:spTree>
     <p:extLst>
       <p:ext uri="{BB962C8B-B14F-4D97-AF65-F5344CB8AC3E}">
-        <p14:creationId xmlns:p14="http://schemas.microsoft.com/office/powerpoint/2010/main" val="1483495777"/>
+        <p14:creationId xmlns:p14="http://schemas.microsoft.com/office/powerpoint/2010/main" val="1241329555"/>
       </p:ext>
     </p:extLst>
   </p:cSld>
@@ -3249,7 +3249,7 @@
           <p:cNvPr id="9" name="">
             <a:extLst xmlns:a="http://schemas.openxmlformats.org/drawingml/2006/main">
               <a:ext uri="{FF2B5EF4-FFF2-40B4-BE49-F238E27FC236}">
-                <a16:creationId xmlns:a16="http://schemas.microsoft.com/office/drawing/2014/main" id="{46652140-EFF0-4494-9179-726A45039239}"/>
+                <a16:creationId xmlns:a16="http://schemas.microsoft.com/office/drawing/2014/main" id="{16E4BF93-4904-4CFE-A168-264AD43FFBEC}"/>
               </a:ext>
             </a:extLst>
           </p:cNvPr>
@@ -3306,7 +3306,7 @@
           <p:cNvPr id="2" name="">
             <a:extLst xmlns:a="http://schemas.openxmlformats.org/drawingml/2006/main">
               <a:ext uri="{FF2B5EF4-FFF2-40B4-BE49-F238E27FC236}">
-                <a16:creationId xmlns:a16="http://schemas.microsoft.com/office/drawing/2014/main" id="{17FC26FE-3004-4658-96F8-13D49CDFB60C}"/>
+                <a16:creationId xmlns:a16="http://schemas.microsoft.com/office/drawing/2014/main" id="{DC4E71E9-075A-441D-BFA4-B928E5E43046}"/>
               </a:ext>
             </a:extLst>
           </p:cNvPr>
@@ -3353,7 +3353,7 @@
                 <a:ea typeface="Microsoft JhengHei"/>
                 <a:cs typeface="Microsoft JhengHei"/>
               </a:rPr>
-              <a:t>15% 的依據與限制</a:t>
+              <a:t>CNV top 15% 設定與 reference 對照</a:t>
             </a:r>
           </a:p>
         </p:txBody>
@@ -3363,7 +3363,7 @@
           <p:cNvPr id="3" name="">
             <a:extLst xmlns:a="http://schemas.openxmlformats.org/drawingml/2006/main">
               <a:ext uri="{FF2B5EF4-FFF2-40B4-BE49-F238E27FC236}">
-                <a16:creationId xmlns:a16="http://schemas.microsoft.com/office/drawing/2014/main" id="{46E87C88-9273-488C-9A64-690BFEE6F749}"/>
+                <a16:creationId xmlns:a16="http://schemas.microsoft.com/office/drawing/2014/main" id="{ADBFA3F9-2002-4E63-8CCB-7687217D1DB6}"/>
               </a:ext>
             </a:extLst>
           </p:cNvPr>
@@ -3420,7 +3420,7 @@
           <p:cNvPr id="4" name="">
             <a:extLst xmlns:a="http://schemas.openxmlformats.org/drawingml/2006/main">
               <a:ext uri="{FF2B5EF4-FFF2-40B4-BE49-F238E27FC236}">
-                <a16:creationId xmlns:a16="http://schemas.microsoft.com/office/drawing/2014/main" id="{273D9AA2-4383-4E7C-ABE8-A4F8EFE84788}"/>
+                <a16:creationId xmlns:a16="http://schemas.microsoft.com/office/drawing/2014/main" id="{E77A0E46-2EC3-4566-BF4E-0D97F1B54169}"/>
               </a:ext>
             </a:extLst>
           </p:cNvPr>
@@ -3477,7 +3477,7 @@
           <p:cNvPr id="5" name="">
             <a:extLst xmlns:a="http://schemas.openxmlformats.org/drawingml/2006/main">
               <a:ext uri="{FF2B5EF4-FFF2-40B4-BE49-F238E27FC236}">
-                <a16:creationId xmlns:a16="http://schemas.microsoft.com/office/drawing/2014/main" id="{BD3F7252-C7B0-4770-8911-2F2F38212DB8}"/>
+                <a16:creationId xmlns:a16="http://schemas.microsoft.com/office/drawing/2014/main" id="{E7BC03BA-BAA7-4829-B6A5-AC8145BF22E0}"/>
               </a:ext>
             </a:extLst>
           </p:cNvPr>
@@ -3524,7 +3524,7 @@
                 <a:ea typeface="Microsoft JhengHei"/>
                 <a:cs typeface="Microsoft JhengHei"/>
               </a:rPr>
-              <a:t>正常 reference 的 q95 與 within-sample top 15% 是兩個不同規則</a:t>
+              <a:t>每個 sample 保留 CNV score 最高的 15%，作為相對高 CNV 的 T-lineage core</a:t>
             </a:r>
           </a:p>
         </p:txBody>
@@ -3637,7 +3637,82 @@
                           <a:ea typeface="Microsoft JhengHei"/>
                           <a:cs typeface="Microsoft JhengHei"/>
                         </a:rPr>
-                        <a:t>Absolute reference q95</a:t>
+                        <a:t>主分析：sample top 15%</a:t>
+                      </a:r>
+                    </a:p>
+                  </a:txBody>
+                  <a:tcPr marL="91440" marR="91440" marT="45720" marB="45720"/>
+                </a:tc>
+                <a:tc>
+                  <a:txBody>
+                    <a:bodyPr/>
+                    <a:lstStyle/>
+                    <a:p>
+                      <a:r>
+                        <a:rPr sz="1575">
+                          <a:solidFill>
+                            <a:srgbClr val="142F43"/>
+                          </a:solidFill>
+                          <a:latin typeface="Microsoft JhengHei"/>
+                          <a:ea typeface="Microsoft JhengHei"/>
+                          <a:cs typeface="Microsoft JhengHei"/>
+                        </a:rPr>
+                        <a:t>每個 sample 各自選 CNV score 最高 15%</a:t>
+                      </a:r>
+                    </a:p>
+                  </a:txBody>
+                  <a:tcPr marL="91440" marR="91440" marT="45720" marB="45720"/>
+                </a:tc>
+                <a:tc>
+                  <a:txBody>
+                    <a:bodyPr/>
+                    <a:lstStyle/>
+                    <a:p>
+                      <a:r>
+                        <a:rPr sz="1575">
+                          <a:solidFill>
+                            <a:srgbClr val="142F43"/>
+                          </a:solidFill>
+                          <a:latin typeface="Microsoft JhengHei"/>
+                          <a:ea typeface="Microsoft JhengHei"/>
+                          <a:cs typeface="Microsoft JhengHei"/>
+                        </a:rPr>
+                        <a:t>1,926 cells</a:t>
+                      </a:r>
+                    </a:p>
+                    <a:p>
+                      <a:r>
+                        <a:rPr sz="1575">
+                          <a:solidFill>
+                            <a:srgbClr val="142F43"/>
+                          </a:solidFill>
+                          <a:latin typeface="Microsoft JhengHei"/>
+                          <a:ea typeface="Microsoft JhengHei"/>
+                          <a:cs typeface="Microsoft JhengHei"/>
+                        </a:rPr>
+                        <a:t>最小 sample 107</a:t>
+                      </a:r>
+                    </a:p>
+                  </a:txBody>
+                  <a:tcPr marL="91440" marR="91440" marT="45720" marB="45720"/>
+                </a:tc>
+              </a:tr>
+              <a:tr h="790575">
+                <a:tc>
+                  <a:txBody>
+                    <a:bodyPr/>
+                    <a:lstStyle/>
+                    <a:p>
+                      <a:r>
+                        <a:rPr sz="1575">
+                          <a:solidFill>
+                            <a:srgbClr val="142F43"/>
+                          </a:solidFill>
+                          <a:latin typeface="Microsoft JhengHei"/>
+                          <a:ea typeface="Microsoft JhengHei"/>
+                          <a:cs typeface="Microsoft JhengHei"/>
+                        </a:rPr>
+                        <a:t>Non-T reference q95</a:t>
                       </a:r>
                     </a:p>
                   </a:txBody>
@@ -3697,81 +3772,6 @@
                   <a:tcPr marL="91440" marR="91440" marT="45720" marB="45720"/>
                 </a:tc>
               </a:tr>
-              <a:tr h="790575">
-                <a:tc>
-                  <a:txBody>
-                    <a:bodyPr/>
-                    <a:lstStyle/>
-                    <a:p>
-                      <a:r>
-                        <a:rPr sz="1575">
-                          <a:solidFill>
-                            <a:srgbClr val="142F43"/>
-                          </a:solidFill>
-                          <a:latin typeface="Microsoft JhengHei"/>
-                          <a:ea typeface="Microsoft JhengHei"/>
-                          <a:cs typeface="Microsoft JhengHei"/>
-                        </a:rPr>
-                        <a:t>Within-sample top 15%</a:t>
-                      </a:r>
-                    </a:p>
-                  </a:txBody>
-                  <a:tcPr marL="91440" marR="91440" marT="45720" marB="45720"/>
-                </a:tc>
-                <a:tc>
-                  <a:txBody>
-                    <a:bodyPr/>
-                    <a:lstStyle/>
-                    <a:p>
-                      <a:r>
-                        <a:rPr sz="1575">
-                          <a:solidFill>
-                            <a:srgbClr val="142F43"/>
-                          </a:solidFill>
-                          <a:latin typeface="Microsoft JhengHei"/>
-                          <a:ea typeface="Microsoft JhengHei"/>
-                          <a:cs typeface="Microsoft JhengHei"/>
-                        </a:rPr>
-                        <a:t>每個 sample 各自選 CNV score 最高 15%</a:t>
-                      </a:r>
-                    </a:p>
-                  </a:txBody>
-                  <a:tcPr marL="91440" marR="91440" marT="45720" marB="45720"/>
-                </a:tc>
-                <a:tc>
-                  <a:txBody>
-                    <a:bodyPr/>
-                    <a:lstStyle/>
-                    <a:p>
-                      <a:r>
-                        <a:rPr sz="1575">
-                          <a:solidFill>
-                            <a:srgbClr val="142F43"/>
-                          </a:solidFill>
-                          <a:latin typeface="Microsoft JhengHei"/>
-                          <a:ea typeface="Microsoft JhengHei"/>
-                          <a:cs typeface="Microsoft JhengHei"/>
-                        </a:rPr>
-                        <a:t>1,926 cells</a:t>
-                      </a:r>
-                    </a:p>
-                    <a:p>
-                      <a:r>
-                        <a:rPr sz="1575">
-                          <a:solidFill>
-                            <a:srgbClr val="142F43"/>
-                          </a:solidFill>
-                          <a:latin typeface="Microsoft JhengHei"/>
-                          <a:ea typeface="Microsoft JhengHei"/>
-                          <a:cs typeface="Microsoft JhengHei"/>
-                        </a:rPr>
-                        <a:t>最小 sample 107</a:t>
-                      </a:r>
-                    </a:p>
-                  </a:txBody>
-                  <a:tcPr marL="91440" marR="91440" marT="45720" marB="45720"/>
-                </a:tc>
-              </a:tr>
             </a:tbl>
           </a:graphicData>
         </a:graphic>
@@ -3781,7 +3781,7 @@
           <p:cNvPr id="7" name="">
             <a:extLst xmlns:a="http://schemas.openxmlformats.org/drawingml/2006/main">
               <a:ext uri="{FF2B5EF4-FFF2-40B4-BE49-F238E27FC236}">
-                <a16:creationId xmlns:a16="http://schemas.microsoft.com/office/drawing/2014/main" id="{1C57D718-55CC-49C2-862B-C72E856272B8}"/>
+                <a16:creationId xmlns:a16="http://schemas.microsoft.com/office/drawing/2014/main" id="{67465EEF-2553-4B36-A006-89BDD098131D}"/>
               </a:ext>
             </a:extLst>
           </p:cNvPr>
@@ -3793,7 +3793,7 @@
         <p:spPr>
           <a:xfrm xmlns:a="http://schemas.openxmlformats.org/drawingml/2006/main">
             <a:off x="619125" y="4667250"/>
-            <a:ext cx="10668000" cy="733425"/>
+            <a:ext cx="10668000" cy="828675"/>
           </a:xfrm>
           <a:prstGeom xmlns:a="http://schemas.openxmlformats.org/drawingml/2006/main" prst="rect">
             <a:avLst/>
@@ -3810,25 +3810,25 @@
           <a:lstStyle xmlns:a="http://schemas.openxmlformats.org/drawingml/2006/main"/>
           <a:p xmlns:a="http://schemas.openxmlformats.org/drawingml/2006/main">
             <a:pPr>
-              <a:defRPr sz="1800" b="0">
-                <a:solidFill>
-                  <a:srgbClr val="D55E00"/>
-                </a:solidFill>
-                <a:latin typeface="Microsoft JhengHei"/>
-                <a:ea typeface="Microsoft JhengHei"/>
-                <a:cs typeface="Microsoft JhengHei"/>
-              </a:defRPr>
-            </a:pPr>
-            <a:r>
-              <a:rPr sz="1800" b="0">
-                <a:solidFill>
-                  <a:srgbClr val="D55E00"/>
-                </a:solidFill>
-                <a:latin typeface="Microsoft JhengHei"/>
-                <a:ea typeface="Microsoft JhengHei"/>
-                <a:cs typeface="Microsoft JhengHei"/>
-              </a:rPr>
-              <a:t>15.4% 高於 pooled reference q95，只是近似的描述性對照，不能把選 15% 說成 unbiased。</a:t>
+              <a:defRPr sz="1725" b="0">
+                <a:solidFill>
+                  <a:srgbClr val="142F43"/>
+                </a:solidFill>
+                <a:latin typeface="Microsoft JhengHei"/>
+                <a:ea typeface="Microsoft JhengHei"/>
+                <a:cs typeface="Microsoft JhengHei"/>
+              </a:defRPr>
+            </a:pPr>
+            <a:r>
+              <a:rPr sz="1725" b="0">
+                <a:solidFill>
+                  <a:srgbClr val="142F43"/>
+                </a:solidFill>
+                <a:latin typeface="Microsoft JhengHei"/>
+                <a:ea typeface="Microsoft JhengHei"/>
+                <a:cs typeface="Microsoft JhengHei"/>
+              </a:rPr>
+              <a:t>Reference q95 提供比例尺度對照。Top 15% 中有 1,407 / 1,926 cells（73.1%）高於 q95，兩種規則選到的細胞並不相同。</a:t>
             </a:r>
           </a:p>
         </p:txBody>
@@ -3838,7 +3838,7 @@
           <p:cNvPr id="8" name="">
             <a:extLst xmlns:a="http://schemas.openxmlformats.org/drawingml/2006/main">
               <a:ext uri="{FF2B5EF4-FFF2-40B4-BE49-F238E27FC236}">
-                <a16:creationId xmlns:a16="http://schemas.microsoft.com/office/drawing/2014/main" id="{3CF934D7-E343-4A9B-92C9-B419B75943E5}"/>
+                <a16:creationId xmlns:a16="http://schemas.microsoft.com/office/drawing/2014/main" id="{158ED145-073F-44BC-A535-02A3E63E1818}"/>
               </a:ext>
             </a:extLst>
           </p:cNvPr>
@@ -3867,25 +3867,25 @@
           <a:lstStyle xmlns:a="http://schemas.openxmlformats.org/drawingml/2006/main"/>
           <a:p xmlns:a="http://schemas.openxmlformats.org/drawingml/2006/main">
             <a:pPr>
-              <a:defRPr sz="1650" b="0">
-                <a:solidFill>
-                  <a:srgbClr val="142F43"/>
-                </a:solidFill>
-                <a:latin typeface="Microsoft JhengHei"/>
-                <a:ea typeface="Microsoft JhengHei"/>
-                <a:cs typeface="Microsoft JhengHei"/>
-              </a:defRPr>
-            </a:pPr>
-            <a:r>
-              <a:rPr sz="1650" b="0">
-                <a:solidFill>
-                  <a:srgbClr val="142F43"/>
-                </a:solidFill>
-                <a:latin typeface="Microsoft JhengHei"/>
-                <a:ea typeface="Microsoft JhengHei"/>
-                <a:cs typeface="Microsoft JhengHei"/>
-              </a:rPr>
-              <a:t>完整 KEGG FDR 只校正該次 pathway 測試，沒有校正嘗試多套篩選條件後再挑選的影響。</a:t>
+              <a:defRPr sz="1575" b="0">
+                <a:solidFill>
+                  <a:srgbClr val="D55E00"/>
+                </a:solidFill>
+                <a:latin typeface="Microsoft JhengHei"/>
+                <a:ea typeface="Microsoft JhengHei"/>
+                <a:cs typeface="Microsoft JhengHei"/>
+              </a:defRPr>
+            </a:pPr>
+            <a:r>
+              <a:rPr sz="1575" b="0">
+                <a:solidFill>
+                  <a:srgbClr val="D55E00"/>
+                </a:solidFill>
+                <a:latin typeface="Microsoft JhengHei"/>
+                <a:ea typeface="Microsoft JhengHei"/>
+                <a:cs typeface="Microsoft JhengHei"/>
+              </a:rPr>
+              <a:t>Top 15% 在 sensitivity 檢查後固定為主分析。FDR &lt; 0.05 是 pathway 門檻，沒有額外校正選擇分析條件的影響。</a:t>
             </a:r>
           </a:p>
         </p:txBody>
@@ -3893,7 +3893,7 @@
     </p:spTree>
     <p:extLst>
       <p:ext uri="{BB962C8B-B14F-4D97-AF65-F5344CB8AC3E}">
-        <p14:creationId xmlns:p14="http://schemas.microsoft.com/office/powerpoint/2010/main" val="1532590862"/>
+        <p14:creationId xmlns:p14="http://schemas.microsoft.com/office/powerpoint/2010/main" val="1078628514"/>
       </p:ext>
     </p:extLst>
   </p:cSld>
@@ -3924,7 +3924,7 @@
           <p:cNvPr id="8" name="">
             <a:extLst xmlns:a="http://schemas.openxmlformats.org/drawingml/2006/main">
               <a:ext uri="{FF2B5EF4-FFF2-40B4-BE49-F238E27FC236}">
-                <a16:creationId xmlns:a16="http://schemas.microsoft.com/office/drawing/2014/main" id="{2BB479EF-9A00-497F-A41C-D100C274179D}"/>
+                <a16:creationId xmlns:a16="http://schemas.microsoft.com/office/drawing/2014/main" id="{41678ED5-EAC8-47C3-83D1-9FF178B6FAC5}"/>
               </a:ext>
             </a:extLst>
           </p:cNvPr>
@@ -3981,7 +3981,7 @@
           <p:cNvPr id="2" name="">
             <a:extLst xmlns:a="http://schemas.openxmlformats.org/drawingml/2006/main">
               <a:ext uri="{FF2B5EF4-FFF2-40B4-BE49-F238E27FC236}">
-                <a16:creationId xmlns:a16="http://schemas.microsoft.com/office/drawing/2014/main" id="{C63E8DCC-0903-4087-9DB4-A7A6834D55CC}"/>
+                <a16:creationId xmlns:a16="http://schemas.microsoft.com/office/drawing/2014/main" id="{5DCCD8A8-51A4-4D94-B940-D6CCE072FD56}"/>
               </a:ext>
             </a:extLst>
           </p:cNvPr>
@@ -4038,7 +4038,7 @@
           <p:cNvPr id="3" name="">
             <a:extLst xmlns:a="http://schemas.openxmlformats.org/drawingml/2006/main">
               <a:ext uri="{FF2B5EF4-FFF2-40B4-BE49-F238E27FC236}">
-                <a16:creationId xmlns:a16="http://schemas.microsoft.com/office/drawing/2014/main" id="{E8C73163-5C27-4CA8-961E-068DAC10F12C}"/>
+                <a16:creationId xmlns:a16="http://schemas.microsoft.com/office/drawing/2014/main" id="{5C8AA5BD-8D05-480C-B80D-F1DB047F262D}"/>
               </a:ext>
             </a:extLst>
           </p:cNvPr>
@@ -4095,7 +4095,7 @@
           <p:cNvPr id="4" name="">
             <a:extLst xmlns:a="http://schemas.openxmlformats.org/drawingml/2006/main">
               <a:ext uri="{FF2B5EF4-FFF2-40B4-BE49-F238E27FC236}">
-                <a16:creationId xmlns:a16="http://schemas.microsoft.com/office/drawing/2014/main" id="{8E739B79-1495-4D18-8A45-9E28B626D3A5}"/>
+                <a16:creationId xmlns:a16="http://schemas.microsoft.com/office/drawing/2014/main" id="{71503BDF-C64F-4677-BCCF-B58C4A7203EE}"/>
               </a:ext>
             </a:extLst>
           </p:cNvPr>
@@ -4152,7 +4152,7 @@
           <p:cNvPr id="5" name="">
             <a:extLst xmlns:a="http://schemas.openxmlformats.org/drawingml/2006/main">
               <a:ext uri="{FF2B5EF4-FFF2-40B4-BE49-F238E27FC236}">
-                <a16:creationId xmlns:a16="http://schemas.microsoft.com/office/drawing/2014/main" id="{181E41DB-99DE-448D-916E-5F60DE541C94}"/>
+                <a16:creationId xmlns:a16="http://schemas.microsoft.com/office/drawing/2014/main" id="{B9EF9F9D-40E9-4AF5-89B7-B9B364D0E26E}"/>
               </a:ext>
             </a:extLst>
           </p:cNvPr>
@@ -4209,7 +4209,7 @@
           <p:cNvPr id="6" name="">
             <a:extLst xmlns:a="http://schemas.openxmlformats.org/drawingml/2006/main">
               <a:ext uri="{FF2B5EF4-FFF2-40B4-BE49-F238E27FC236}">
-                <a16:creationId xmlns:a16="http://schemas.microsoft.com/office/drawing/2014/main" id="{3169BA53-B9DF-4DEA-9DA8-EA23C7E6FC8A}"/>
+                <a16:creationId xmlns:a16="http://schemas.microsoft.com/office/drawing/2014/main" id="{33E8C953-0726-4F5C-AF81-ACEEDCD3E75F}"/>
               </a:ext>
             </a:extLst>
           </p:cNvPr>
@@ -4266,7 +4266,7 @@
           <p:cNvPr id="7" name="">
             <a:extLst xmlns:a="http://schemas.openxmlformats.org/drawingml/2006/main">
               <a:ext uri="{FF2B5EF4-FFF2-40B4-BE49-F238E27FC236}">
-                <a16:creationId xmlns:a16="http://schemas.microsoft.com/office/drawing/2014/main" id="{21E264F4-0596-4214-ABCB-45C4306D929C}"/>
+                <a16:creationId xmlns:a16="http://schemas.microsoft.com/office/drawing/2014/main" id="{84A85ABF-F71C-43AB-99E2-BC8911647396}"/>
               </a:ext>
             </a:extLst>
           </p:cNvPr>
@@ -4321,7 +4321,7 @@
     </p:spTree>
     <p:extLst>
       <p:ext uri="{BB962C8B-B14F-4D97-AF65-F5344CB8AC3E}">
-        <p14:creationId xmlns:p14="http://schemas.microsoft.com/office/powerpoint/2010/main" val="836903781"/>
+        <p14:creationId xmlns:p14="http://schemas.microsoft.com/office/powerpoint/2010/main" val="1428910776"/>
       </p:ext>
     </p:extLst>
   </p:cSld>
@@ -4352,7 +4352,7 @@
           <p:cNvPr id="8" name="">
             <a:extLst xmlns:a="http://schemas.openxmlformats.org/drawingml/2006/main">
               <a:ext uri="{FF2B5EF4-FFF2-40B4-BE49-F238E27FC236}">
-                <a16:creationId xmlns:a16="http://schemas.microsoft.com/office/drawing/2014/main" id="{5A1567BD-D6CA-4D4C-A426-CE61C6C205E6}"/>
+                <a16:creationId xmlns:a16="http://schemas.microsoft.com/office/drawing/2014/main" id="{B636F826-3F4A-4AF4-93AB-DB9310AD131F}"/>
               </a:ext>
             </a:extLst>
           </p:cNvPr>
@@ -4409,7 +4409,7 @@
           <p:cNvPr id="2" name="">
             <a:extLst xmlns:a="http://schemas.openxmlformats.org/drawingml/2006/main">
               <a:ext uri="{FF2B5EF4-FFF2-40B4-BE49-F238E27FC236}">
-                <a16:creationId xmlns:a16="http://schemas.microsoft.com/office/drawing/2014/main" id="{954BB178-3B76-4F1A-9E29-52FAF28AEFF7}"/>
+                <a16:creationId xmlns:a16="http://schemas.microsoft.com/office/drawing/2014/main" id="{63D410B5-0D76-4248-8019-D8988B7C500D}"/>
               </a:ext>
             </a:extLst>
           </p:cNvPr>
@@ -4466,7 +4466,7 @@
           <p:cNvPr id="3" name="">
             <a:extLst xmlns:a="http://schemas.openxmlformats.org/drawingml/2006/main">
               <a:ext uri="{FF2B5EF4-FFF2-40B4-BE49-F238E27FC236}">
-                <a16:creationId xmlns:a16="http://schemas.microsoft.com/office/drawing/2014/main" id="{A1CF8BA5-DAF7-4FA9-BD44-EF1105CA6A61}"/>
+                <a16:creationId xmlns:a16="http://schemas.microsoft.com/office/drawing/2014/main" id="{B474F5DE-0917-41A3-8098-26B595BD082A}"/>
               </a:ext>
             </a:extLst>
           </p:cNvPr>
@@ -4523,7 +4523,7 @@
           <p:cNvPr id="4" name="">
             <a:extLst xmlns:a="http://schemas.openxmlformats.org/drawingml/2006/main">
               <a:ext uri="{FF2B5EF4-FFF2-40B4-BE49-F238E27FC236}">
-                <a16:creationId xmlns:a16="http://schemas.microsoft.com/office/drawing/2014/main" id="{75524C2F-4055-403A-8485-640F5E41361E}"/>
+                <a16:creationId xmlns:a16="http://schemas.microsoft.com/office/drawing/2014/main" id="{806FB2D0-3099-4D8A-9968-CE88BB0ADA64}"/>
               </a:ext>
             </a:extLst>
           </p:cNvPr>
@@ -4862,7 +4862,7 @@
           <p:cNvPr id="6" name="">
             <a:extLst xmlns:a="http://schemas.openxmlformats.org/drawingml/2006/main">
               <a:ext uri="{FF2B5EF4-FFF2-40B4-BE49-F238E27FC236}">
-                <a16:creationId xmlns:a16="http://schemas.microsoft.com/office/drawing/2014/main" id="{F4B1BB58-4591-4B32-8232-715F452405A6}"/>
+                <a16:creationId xmlns:a16="http://schemas.microsoft.com/office/drawing/2014/main" id="{D32E4F07-AFA0-46F0-857E-7048B70629C1}"/>
               </a:ext>
             </a:extLst>
           </p:cNvPr>
@@ -4919,7 +4919,7 @@
           <p:cNvPr id="7" name="">
             <a:extLst xmlns:a="http://schemas.openxmlformats.org/drawingml/2006/main">
               <a:ext uri="{FF2B5EF4-FFF2-40B4-BE49-F238E27FC236}">
-                <a16:creationId xmlns:a16="http://schemas.microsoft.com/office/drawing/2014/main" id="{A4DC28A9-7DC8-41A9-8976-DC4477161803}"/>
+                <a16:creationId xmlns:a16="http://schemas.microsoft.com/office/drawing/2014/main" id="{2CB4E885-DD31-41B2-AEB3-3AD275012F1B}"/>
               </a:ext>
             </a:extLst>
           </p:cNvPr>
@@ -4974,7 +4974,7 @@
     </p:spTree>
     <p:extLst>
       <p:ext uri="{BB962C8B-B14F-4D97-AF65-F5344CB8AC3E}">
-        <p14:creationId xmlns:p14="http://schemas.microsoft.com/office/powerpoint/2010/main" val="1410996092"/>
+        <p14:creationId xmlns:p14="http://schemas.microsoft.com/office/powerpoint/2010/main" val="1037664592"/>
       </p:ext>
     </p:extLst>
   </p:cSld>
@@ -5005,7 +5005,7 @@
           <p:cNvPr id="7" name="">
             <a:extLst xmlns:a="http://schemas.openxmlformats.org/drawingml/2006/main">
               <a:ext uri="{FF2B5EF4-FFF2-40B4-BE49-F238E27FC236}">
-                <a16:creationId xmlns:a16="http://schemas.microsoft.com/office/drawing/2014/main" id="{80184479-6286-4CF3-8AFD-4F4EB6388B23}"/>
+                <a16:creationId xmlns:a16="http://schemas.microsoft.com/office/drawing/2014/main" id="{6EF0FA12-371D-4576-AEFD-685B8497BA68}"/>
               </a:ext>
             </a:extLst>
           </p:cNvPr>
@@ -5062,7 +5062,7 @@
           <p:cNvPr id="2" name="">
             <a:extLst xmlns:a="http://schemas.openxmlformats.org/drawingml/2006/main">
               <a:ext uri="{FF2B5EF4-FFF2-40B4-BE49-F238E27FC236}">
-                <a16:creationId xmlns:a16="http://schemas.microsoft.com/office/drawing/2014/main" id="{A1B194F2-4BDC-4070-9E4B-D43557AB8E40}"/>
+                <a16:creationId xmlns:a16="http://schemas.microsoft.com/office/drawing/2014/main" id="{6DF789B7-C11F-4601-912E-AE304B0A7790}"/>
               </a:ext>
             </a:extLst>
           </p:cNvPr>
@@ -5119,7 +5119,7 @@
           <p:cNvPr id="3" name="">
             <a:extLst xmlns:a="http://schemas.openxmlformats.org/drawingml/2006/main">
               <a:ext uri="{FF2B5EF4-FFF2-40B4-BE49-F238E27FC236}">
-                <a16:creationId xmlns:a16="http://schemas.microsoft.com/office/drawing/2014/main" id="{EA587805-9FF3-4BE7-A69D-33624AB916E6}"/>
+                <a16:creationId xmlns:a16="http://schemas.microsoft.com/office/drawing/2014/main" id="{CA60FDA1-DF61-4F9D-B939-81BDFFD9FA5D}"/>
               </a:ext>
             </a:extLst>
           </p:cNvPr>
@@ -5176,7 +5176,7 @@
           <p:cNvPr id="4" name="">
             <a:extLst xmlns:a="http://schemas.openxmlformats.org/drawingml/2006/main">
               <a:ext uri="{FF2B5EF4-FFF2-40B4-BE49-F238E27FC236}">
-                <a16:creationId xmlns:a16="http://schemas.microsoft.com/office/drawing/2014/main" id="{03E1E5FD-F856-4C18-B206-BD116ECD3EC7}"/>
+                <a16:creationId xmlns:a16="http://schemas.microsoft.com/office/drawing/2014/main" id="{498F86D3-575B-45ED-A0DA-02B7AFC3A0A3}"/>
               </a:ext>
             </a:extLst>
           </p:cNvPr>
@@ -5610,7 +5610,7 @@
           <p:cNvPr id="6" name="">
             <a:extLst xmlns:a="http://schemas.openxmlformats.org/drawingml/2006/main">
               <a:ext uri="{FF2B5EF4-FFF2-40B4-BE49-F238E27FC236}">
-                <a16:creationId xmlns:a16="http://schemas.microsoft.com/office/drawing/2014/main" id="{B16CBBE1-BAEF-4150-94EE-BD2A0AD71C3D}"/>
+                <a16:creationId xmlns:a16="http://schemas.microsoft.com/office/drawing/2014/main" id="{C4F1B731-AEC3-4A3B-A671-CD49BA9248D1}"/>
               </a:ext>
             </a:extLst>
           </p:cNvPr>
@@ -5665,7 +5665,7 @@
     </p:spTree>
     <p:extLst>
       <p:ext uri="{BB962C8B-B14F-4D97-AF65-F5344CB8AC3E}">
-        <p14:creationId xmlns:p14="http://schemas.microsoft.com/office/powerpoint/2010/main" val="955592408"/>
+        <p14:creationId xmlns:p14="http://schemas.microsoft.com/office/powerpoint/2010/main" val="2050427488"/>
       </p:ext>
     </p:extLst>
   </p:cSld>
@@ -5696,7 +5696,7 @@
           <p:cNvPr id="9" name="">
             <a:extLst xmlns:a="http://schemas.openxmlformats.org/drawingml/2006/main">
               <a:ext uri="{FF2B5EF4-FFF2-40B4-BE49-F238E27FC236}">
-                <a16:creationId xmlns:a16="http://schemas.microsoft.com/office/drawing/2014/main" id="{85BE3630-6317-4372-8E04-7480A23B72FD}"/>
+                <a16:creationId xmlns:a16="http://schemas.microsoft.com/office/drawing/2014/main" id="{A3044CC2-C80B-4B43-AE4D-E8BA5ED6BF30}"/>
               </a:ext>
             </a:extLst>
           </p:cNvPr>
@@ -5753,7 +5753,7 @@
           <p:cNvPr id="2" name="">
             <a:extLst xmlns:a="http://schemas.openxmlformats.org/drawingml/2006/main">
               <a:ext uri="{FF2B5EF4-FFF2-40B4-BE49-F238E27FC236}">
-                <a16:creationId xmlns:a16="http://schemas.microsoft.com/office/drawing/2014/main" id="{73BA0504-3266-4FBF-BFC2-ABEAB72814BD}"/>
+                <a16:creationId xmlns:a16="http://schemas.microsoft.com/office/drawing/2014/main" id="{3E9C4ADE-4E98-4DC7-82B7-FE2F33A6761F}"/>
               </a:ext>
             </a:extLst>
           </p:cNvPr>
@@ -5810,7 +5810,7 @@
           <p:cNvPr id="3" name="">
             <a:extLst xmlns:a="http://schemas.openxmlformats.org/drawingml/2006/main">
               <a:ext uri="{FF2B5EF4-FFF2-40B4-BE49-F238E27FC236}">
-                <a16:creationId xmlns:a16="http://schemas.microsoft.com/office/drawing/2014/main" id="{515287D8-1FF8-45DB-82BA-D0B16A83C69E}"/>
+                <a16:creationId xmlns:a16="http://schemas.microsoft.com/office/drawing/2014/main" id="{3900DDB9-4454-4822-954D-216C2AB5EC1A}"/>
               </a:ext>
             </a:extLst>
           </p:cNvPr>
@@ -5867,7 +5867,7 @@
           <p:cNvPr id="4" name="">
             <a:extLst xmlns:a="http://schemas.openxmlformats.org/drawingml/2006/main">
               <a:ext uri="{FF2B5EF4-FFF2-40B4-BE49-F238E27FC236}">
-                <a16:creationId xmlns:a16="http://schemas.microsoft.com/office/drawing/2014/main" id="{360BF55F-2236-459F-A279-13526A4AC589}"/>
+                <a16:creationId xmlns:a16="http://schemas.microsoft.com/office/drawing/2014/main" id="{475E32B0-2484-41DB-B3E7-123E064FA3B2}"/>
               </a:ext>
             </a:extLst>
           </p:cNvPr>
@@ -5928,7 +5928,7 @@
           <p:nvPr/>
         </p:nvPicPr>
         <p:blipFill>
-          <a:blip xmlns:r="http://schemas.openxmlformats.org/officeDocument/2006/relationships" xmlns:a="http://schemas.openxmlformats.org/drawingml/2006/main" r:embed="R77227873a4144c01"/>
+          <a:blip xmlns:r="http://schemas.openxmlformats.org/officeDocument/2006/relationships" xmlns:a="http://schemas.openxmlformats.org/drawingml/2006/main" r:embed="R2e2d4a77c50848c4"/>
           <a:stretch xmlns:a="http://schemas.openxmlformats.org/drawingml/2006/main"/>
         </p:blipFill>
         <p:spPr>
@@ -5946,7 +5946,7 @@
           <p:cNvPr id="6" name="">
             <a:extLst xmlns:a="http://schemas.openxmlformats.org/drawingml/2006/main">
               <a:ext uri="{FF2B5EF4-FFF2-40B4-BE49-F238E27FC236}">
-                <a16:creationId xmlns:a16="http://schemas.microsoft.com/office/drawing/2014/main" id="{00B3FD40-3F20-4963-A5EE-3D239EC83CA7}"/>
+                <a16:creationId xmlns:a16="http://schemas.microsoft.com/office/drawing/2014/main" id="{C6959A2F-8919-4DD7-84D2-BCF6731BFF7D}"/>
               </a:ext>
             </a:extLst>
           </p:cNvPr>
@@ -6003,7 +6003,7 @@
           <p:cNvPr id="7" name="">
             <a:extLst xmlns:a="http://schemas.openxmlformats.org/drawingml/2006/main">
               <a:ext uri="{FF2B5EF4-FFF2-40B4-BE49-F238E27FC236}">
-                <a16:creationId xmlns:a16="http://schemas.microsoft.com/office/drawing/2014/main" id="{26DEF7CE-DF6E-4F07-85A4-C05437632528}"/>
+                <a16:creationId xmlns:a16="http://schemas.microsoft.com/office/drawing/2014/main" id="{0907C1F4-889E-42F3-834A-44652244D8A7}"/>
               </a:ext>
             </a:extLst>
           </p:cNvPr>
@@ -6129,7 +6129,7 @@
           <p:cNvPr id="8" name="">
             <a:extLst xmlns:a="http://schemas.openxmlformats.org/drawingml/2006/main">
               <a:ext uri="{FF2B5EF4-FFF2-40B4-BE49-F238E27FC236}">
-                <a16:creationId xmlns:a16="http://schemas.microsoft.com/office/drawing/2014/main" id="{6DCF0182-E068-4576-BA22-7F0536A6A751}"/>
+                <a16:creationId xmlns:a16="http://schemas.microsoft.com/office/drawing/2014/main" id="{640398A2-DC75-4DF5-94A8-FBB3C75D5279}"/>
               </a:ext>
             </a:extLst>
           </p:cNvPr>
@@ -6184,7 +6184,7 @@
     </p:spTree>
     <p:extLst>
       <p:ext uri="{BB962C8B-B14F-4D97-AF65-F5344CB8AC3E}">
-        <p14:creationId xmlns:p14="http://schemas.microsoft.com/office/powerpoint/2010/main" val="1140263419"/>
+        <p14:creationId xmlns:p14="http://schemas.microsoft.com/office/powerpoint/2010/main" val="1736468625"/>
       </p:ext>
     </p:extLst>
   </p:cSld>
@@ -6215,7 +6215,7 @@
           <p:cNvPr id="7" name="">
             <a:extLst xmlns:a="http://schemas.openxmlformats.org/drawingml/2006/main">
               <a:ext uri="{FF2B5EF4-FFF2-40B4-BE49-F238E27FC236}">
-                <a16:creationId xmlns:a16="http://schemas.microsoft.com/office/drawing/2014/main" id="{665C7346-8213-43DF-B2AC-B3017B73BBBD}"/>
+                <a16:creationId xmlns:a16="http://schemas.microsoft.com/office/drawing/2014/main" id="{F5DE7D9F-5127-4DAE-A974-E8B4BF8ADFE9}"/>
               </a:ext>
             </a:extLst>
           </p:cNvPr>
@@ -6272,7 +6272,7 @@
           <p:cNvPr id="2" name="">
             <a:extLst xmlns:a="http://schemas.openxmlformats.org/drawingml/2006/main">
               <a:ext uri="{FF2B5EF4-FFF2-40B4-BE49-F238E27FC236}">
-                <a16:creationId xmlns:a16="http://schemas.microsoft.com/office/drawing/2014/main" id="{BA0E54AB-ABA9-4A30-B064-2FF6EF4F5AC2}"/>
+                <a16:creationId xmlns:a16="http://schemas.microsoft.com/office/drawing/2014/main" id="{005CDB88-888D-4305-904B-4273DF561050}"/>
               </a:ext>
             </a:extLst>
           </p:cNvPr>
@@ -6329,7 +6329,7 @@
           <p:cNvPr id="3" name="">
             <a:extLst xmlns:a="http://schemas.openxmlformats.org/drawingml/2006/main">
               <a:ext uri="{FF2B5EF4-FFF2-40B4-BE49-F238E27FC236}">
-                <a16:creationId xmlns:a16="http://schemas.microsoft.com/office/drawing/2014/main" id="{17F6192F-FFAB-4625-A51C-25FF90AE0574}"/>
+                <a16:creationId xmlns:a16="http://schemas.microsoft.com/office/drawing/2014/main" id="{3A97FCAF-D020-443C-A79B-769ED23AC9EC}"/>
               </a:ext>
             </a:extLst>
           </p:cNvPr>
@@ -6386,7 +6386,7 @@
           <p:cNvPr id="4" name="">
             <a:extLst xmlns:a="http://schemas.openxmlformats.org/drawingml/2006/main">
               <a:ext uri="{FF2B5EF4-FFF2-40B4-BE49-F238E27FC236}">
-                <a16:creationId xmlns:a16="http://schemas.microsoft.com/office/drawing/2014/main" id="{93E19EB1-2222-4E5D-8F96-7C4960F13446}"/>
+                <a16:creationId xmlns:a16="http://schemas.microsoft.com/office/drawing/2014/main" id="{66477DE0-CDE2-47A0-9D9A-1C1CE9D20B24}"/>
               </a:ext>
             </a:extLst>
           </p:cNvPr>
@@ -6447,7 +6447,7 @@
           <p:nvPr/>
         </p:nvPicPr>
         <p:blipFill>
-          <a:blip xmlns:r="http://schemas.openxmlformats.org/officeDocument/2006/relationships" xmlns:a="http://schemas.openxmlformats.org/drawingml/2006/main" r:embed="R2ae4e1b5eaf14d93"/>
+          <a:blip xmlns:r="http://schemas.openxmlformats.org/officeDocument/2006/relationships" xmlns:a="http://schemas.openxmlformats.org/drawingml/2006/main" r:embed="R4b0c1ab8beeb4088"/>
           <a:stretch xmlns:a="http://schemas.openxmlformats.org/drawingml/2006/main"/>
         </p:blipFill>
         <p:spPr>
@@ -6465,7 +6465,7 @@
           <p:cNvPr id="6" name="">
             <a:extLst xmlns:a="http://schemas.openxmlformats.org/drawingml/2006/main">
               <a:ext uri="{FF2B5EF4-FFF2-40B4-BE49-F238E27FC236}">
-                <a16:creationId xmlns:a16="http://schemas.microsoft.com/office/drawing/2014/main" id="{DDD43BD3-6802-4259-AB8B-A7DDD6C8A21E}"/>
+                <a16:creationId xmlns:a16="http://schemas.microsoft.com/office/drawing/2014/main" id="{46FBBF90-A6F6-4721-A91C-5D148221DE05}"/>
               </a:ext>
             </a:extLst>
           </p:cNvPr>
@@ -6520,7 +6520,7 @@
     </p:spTree>
     <p:extLst>
       <p:ext uri="{BB962C8B-B14F-4D97-AF65-F5344CB8AC3E}">
-        <p14:creationId xmlns:p14="http://schemas.microsoft.com/office/powerpoint/2010/main" val="1680776509"/>
+        <p14:creationId xmlns:p14="http://schemas.microsoft.com/office/powerpoint/2010/main" val="911398487"/>
       </p:ext>
     </p:extLst>
   </p:cSld>
@@ -6551,7 +6551,7 @@
           <p:cNvPr id="10" name="">
             <a:extLst xmlns:a="http://schemas.openxmlformats.org/drawingml/2006/main">
               <a:ext uri="{FF2B5EF4-FFF2-40B4-BE49-F238E27FC236}">
-                <a16:creationId xmlns:a16="http://schemas.microsoft.com/office/drawing/2014/main" id="{5F1CB16F-6231-4F0B-9223-F7BF449B6CE0}"/>
+                <a16:creationId xmlns:a16="http://schemas.microsoft.com/office/drawing/2014/main" id="{A54718FC-1433-4090-AF29-DC2E87BFA205}"/>
               </a:ext>
             </a:extLst>
           </p:cNvPr>
@@ -6608,7 +6608,7 @@
           <p:cNvPr id="2" name="">
             <a:extLst xmlns:a="http://schemas.openxmlformats.org/drawingml/2006/main">
               <a:ext uri="{FF2B5EF4-FFF2-40B4-BE49-F238E27FC236}">
-                <a16:creationId xmlns:a16="http://schemas.microsoft.com/office/drawing/2014/main" id="{ACB53B2D-1DA9-4561-A82C-E54D962728D0}"/>
+                <a16:creationId xmlns:a16="http://schemas.microsoft.com/office/drawing/2014/main" id="{BE479827-CC9C-4A8E-BDAB-9DAA948A9360}"/>
               </a:ext>
             </a:extLst>
           </p:cNvPr>
@@ -6665,7 +6665,7 @@
           <p:cNvPr id="3" name="">
             <a:extLst xmlns:a="http://schemas.openxmlformats.org/drawingml/2006/main">
               <a:ext uri="{FF2B5EF4-FFF2-40B4-BE49-F238E27FC236}">
-                <a16:creationId xmlns:a16="http://schemas.microsoft.com/office/drawing/2014/main" id="{EAA7C5BD-BC7A-4501-8A40-7E0C8F907992}"/>
+                <a16:creationId xmlns:a16="http://schemas.microsoft.com/office/drawing/2014/main" id="{938F7DBE-09F0-4623-A30B-B89052EE4851}"/>
               </a:ext>
             </a:extLst>
           </p:cNvPr>
@@ -6722,7 +6722,7 @@
           <p:cNvPr id="4" name="">
             <a:extLst xmlns:a="http://schemas.openxmlformats.org/drawingml/2006/main">
               <a:ext uri="{FF2B5EF4-FFF2-40B4-BE49-F238E27FC236}">
-                <a16:creationId xmlns:a16="http://schemas.microsoft.com/office/drawing/2014/main" id="{0E8FBF13-7CCC-4056-A21F-7754FB71A663}"/>
+                <a16:creationId xmlns:a16="http://schemas.microsoft.com/office/drawing/2014/main" id="{545BC78F-BB33-4975-872D-2ED07904796D}"/>
               </a:ext>
             </a:extLst>
           </p:cNvPr>
@@ -6783,13 +6783,13 @@
           <p:nvPr/>
         </p:nvPicPr>
         <p:blipFill>
-          <a:blip xmlns:r="http://schemas.openxmlformats.org/officeDocument/2006/relationships" xmlns:a="http://schemas.openxmlformats.org/drawingml/2006/main" r:embed="R139a6bdbabce44c4"/>
+          <a:blip xmlns:r="http://schemas.openxmlformats.org/officeDocument/2006/relationships" xmlns:a="http://schemas.openxmlformats.org/drawingml/2006/main" r:embed="R2a135bdfb7144324"/>
           <a:stretch xmlns:a="http://schemas.openxmlformats.org/drawingml/2006/main"/>
         </p:blipFill>
         <p:spPr>
           <a:xfrm xmlns:a="http://schemas.openxmlformats.org/drawingml/2006/main">
-            <a:off x="381000" y="1304925"/>
-            <a:ext cx="7620000" cy="3905250"/>
+            <a:off x="557561" y="1066800"/>
+            <a:ext cx="7266878" cy="4381500"/>
           </a:xfrm>
           <a:prstGeom xmlns:a="http://schemas.openxmlformats.org/drawingml/2006/main" prst="rect">
             <a:avLst/>
@@ -6801,7 +6801,7 @@
           <p:cNvPr id="6" name="">
             <a:extLst xmlns:a="http://schemas.openxmlformats.org/drawingml/2006/main">
               <a:ext uri="{FF2B5EF4-FFF2-40B4-BE49-F238E27FC236}">
-                <a16:creationId xmlns:a16="http://schemas.microsoft.com/office/drawing/2014/main" id="{48FCDFAB-4A6E-4966-AA89-47ABD520A984}"/>
+                <a16:creationId xmlns:a16="http://schemas.microsoft.com/office/drawing/2014/main" id="{18933FD7-3E6D-47B4-9CD9-2C4D72AC6B42}"/>
               </a:ext>
             </a:extLst>
           </p:cNvPr>
@@ -6813,7 +6813,7 @@
         <p:spPr>
           <a:xfrm xmlns:a="http://schemas.openxmlformats.org/drawingml/2006/main">
             <a:off x="8143875" y="1428750"/>
-            <a:ext cx="3524250" cy="904875"/>
+            <a:ext cx="3524250" cy="1000125"/>
           </a:xfrm>
           <a:prstGeom xmlns:a="http://schemas.openxmlformats.org/drawingml/2006/main" prst="rect">
             <a:avLst/>
@@ -6848,7 +6848,7 @@
                 <a:ea typeface="Microsoft JhengHei"/>
                 <a:cs typeface="Microsoft JhengHei"/>
               </a:rPr>
-              <a:t>原始：global top 25%</a:t>
+              <a:t>主分析：within-sample top 15%</a:t>
             </a:r>
           </a:p>
           <a:p xmlns:a="http://schemas.openxmlformats.org/drawingml/2006/main">
@@ -6871,7 +6871,7 @@
                 <a:ea typeface="Microsoft JhengHei"/>
                 <a:cs typeface="Microsoft JhengHei"/>
               </a:rPr>
-              <a:t>3,207 cells，最小 sample 140</a:t>
+              <a:t>1,926 cells，最小 sample 107</a:t>
             </a:r>
           </a:p>
         </p:txBody>
@@ -6881,7 +6881,7 @@
           <p:cNvPr id="7" name="">
             <a:extLst xmlns:a="http://schemas.openxmlformats.org/drawingml/2006/main">
               <a:ext uri="{FF2B5EF4-FFF2-40B4-BE49-F238E27FC236}">
-                <a16:creationId xmlns:a16="http://schemas.microsoft.com/office/drawing/2014/main" id="{B2475294-CCE4-4C30-86A8-8E683920B25B}"/>
+                <a16:creationId xmlns:a16="http://schemas.microsoft.com/office/drawing/2014/main" id="{6718DFE0-760D-4349-966A-EF63D10C55D5}"/>
               </a:ext>
             </a:extLst>
           </p:cNvPr>
@@ -6892,7 +6892,7 @@
         </p:nvSpPr>
         <p:spPr>
           <a:xfrm xmlns:a="http://schemas.openxmlformats.org/drawingml/2006/main">
-            <a:off x="8143875" y="2762250"/>
+            <a:off x="8143875" y="2905125"/>
             <a:ext cx="3524250" cy="1047750"/>
           </a:xfrm>
           <a:prstGeom xmlns:a="http://schemas.openxmlformats.org/drawingml/2006/main" prst="rect">
@@ -6910,48 +6910,48 @@
           <a:lstStyle xmlns:a="http://schemas.openxmlformats.org/drawingml/2006/main"/>
           <a:p xmlns:a="http://schemas.openxmlformats.org/drawingml/2006/main">
             <a:pPr>
-              <a:defRPr sz="1650" b="1">
-                <a:solidFill>
-                  <a:srgbClr val="142F43"/>
-                </a:solidFill>
-                <a:latin typeface="Microsoft JhengHei"/>
-                <a:ea typeface="Microsoft JhengHei"/>
-                <a:cs typeface="Microsoft JhengHei"/>
-              </a:defRPr>
-            </a:pPr>
-            <a:r>
-              <a:rPr sz="1650" b="1">
-                <a:solidFill>
-                  <a:srgbClr val="142F43"/>
-                </a:solidFill>
-                <a:latin typeface="Microsoft JhengHei"/>
-                <a:ea typeface="Microsoft JhengHei"/>
-                <a:cs typeface="Microsoft JhengHei"/>
-              </a:rPr>
-              <a:t>探索型：within-sample top 15%</a:t>
-            </a:r>
-          </a:p>
-          <a:p xmlns:a="http://schemas.openxmlformats.org/drawingml/2006/main">
-            <a:pPr>
-              <a:defRPr sz="1650" b="1">
-                <a:solidFill>
-                  <a:srgbClr val="142F43"/>
-                </a:solidFill>
-                <a:latin typeface="Microsoft JhengHei"/>
-                <a:ea typeface="Microsoft JhengHei"/>
-                <a:cs typeface="Microsoft JhengHei"/>
-              </a:defRPr>
-            </a:pPr>
-            <a:r>
-              <a:rPr sz="1650" b="1">
-                <a:solidFill>
-                  <a:srgbClr val="142F43"/>
-                </a:solidFill>
-                <a:latin typeface="Microsoft JhengHei"/>
-                <a:ea typeface="Microsoft JhengHei"/>
-                <a:cs typeface="Microsoft JhengHei"/>
-              </a:rPr>
-              <a:t>1,926 cells，最小 sample 107</a:t>
+              <a:defRPr sz="1650" b="0">
+                <a:solidFill>
+                  <a:srgbClr val="142F43"/>
+                </a:solidFill>
+                <a:latin typeface="Microsoft JhengHei"/>
+                <a:ea typeface="Microsoft JhengHei"/>
+                <a:cs typeface="Microsoft JhengHei"/>
+              </a:defRPr>
+            </a:pPr>
+            <a:r>
+              <a:rPr sz="1650" b="0">
+                <a:solidFill>
+                  <a:srgbClr val="142F43"/>
+                </a:solidFill>
+                <a:latin typeface="Microsoft JhengHei"/>
+                <a:ea typeface="Microsoft JhengHei"/>
+                <a:cs typeface="Microsoft JhengHei"/>
+              </a:rPr>
+              <a:t>Non-T reference q95 = 0.0269</a:t>
+            </a:r>
+          </a:p>
+          <a:p xmlns:a="http://schemas.openxmlformats.org/drawingml/2006/main">
+            <a:pPr>
+              <a:defRPr sz="1650" b="0">
+                <a:solidFill>
+                  <a:srgbClr val="142F43"/>
+                </a:solidFill>
+                <a:latin typeface="Microsoft JhengHei"/>
+                <a:ea typeface="Microsoft JhengHei"/>
+                <a:cs typeface="Microsoft JhengHei"/>
+              </a:defRPr>
+            </a:pPr>
+            <a:r>
+              <a:rPr sz="1650" b="0">
+                <a:solidFill>
+                  <a:srgbClr val="142F43"/>
+                </a:solidFill>
+                <a:latin typeface="Microsoft JhengHei"/>
+                <a:ea typeface="Microsoft JhengHei"/>
+                <a:cs typeface="Microsoft JhengHei"/>
+              </a:rPr>
+              <a:t>全體候選 T 細胞有 15.4% 高於此值</a:t>
             </a:r>
           </a:p>
         </p:txBody>
@@ -6961,7 +6961,7 @@
           <p:cNvPr id="8" name="">
             <a:extLst xmlns:a="http://schemas.openxmlformats.org/drawingml/2006/main">
               <a:ext uri="{FF2B5EF4-FFF2-40B4-BE49-F238E27FC236}">
-                <a16:creationId xmlns:a16="http://schemas.microsoft.com/office/drawing/2014/main" id="{B41E4724-0244-4F98-82E8-ED1612850E74}"/>
+                <a16:creationId xmlns:a16="http://schemas.microsoft.com/office/drawing/2014/main" id="{E32BF426-9997-4D82-83A2-6067645965FF}"/>
               </a:ext>
             </a:extLst>
           </p:cNvPr>
@@ -7064,7 +7064,7 @@
           <p:cNvPr id="9" name="">
             <a:extLst xmlns:a="http://schemas.openxmlformats.org/drawingml/2006/main">
               <a:ext uri="{FF2B5EF4-FFF2-40B4-BE49-F238E27FC236}">
-                <a16:creationId xmlns:a16="http://schemas.microsoft.com/office/drawing/2014/main" id="{4586BD25-77FA-4533-A640-E9153A04E35F}"/>
+                <a16:creationId xmlns:a16="http://schemas.microsoft.com/office/drawing/2014/main" id="{B04DC160-02C5-4068-A4F8-3781A23A1E4C}"/>
               </a:ext>
             </a:extLst>
           </p:cNvPr>
@@ -7119,7 +7119,7 @@
     </p:spTree>
     <p:extLst>
       <p:ext uri="{BB962C8B-B14F-4D97-AF65-F5344CB8AC3E}">
-        <p14:creationId xmlns:p14="http://schemas.microsoft.com/office/powerpoint/2010/main" val="841834283"/>
+        <p14:creationId xmlns:p14="http://schemas.microsoft.com/office/powerpoint/2010/main" val="842116807"/>
       </p:ext>
     </p:extLst>
   </p:cSld>
@@ -7150,7 +7150,7 @@
           <p:cNvPr id="8" name="">
             <a:extLst xmlns:a="http://schemas.openxmlformats.org/drawingml/2006/main">
               <a:ext uri="{FF2B5EF4-FFF2-40B4-BE49-F238E27FC236}">
-                <a16:creationId xmlns:a16="http://schemas.microsoft.com/office/drawing/2014/main" id="{42461AAF-F423-4891-9602-4BA16D281DF5}"/>
+                <a16:creationId xmlns:a16="http://schemas.microsoft.com/office/drawing/2014/main" id="{41CD04B5-04CD-4445-A7A2-ABF050D949A5}"/>
               </a:ext>
             </a:extLst>
           </p:cNvPr>
@@ -7207,7 +7207,7 @@
           <p:cNvPr id="2" name="">
             <a:extLst xmlns:a="http://schemas.openxmlformats.org/drawingml/2006/main">
               <a:ext uri="{FF2B5EF4-FFF2-40B4-BE49-F238E27FC236}">
-                <a16:creationId xmlns:a16="http://schemas.microsoft.com/office/drawing/2014/main" id="{8F633B17-95B6-4BE8-9920-CF494D60CC8C}"/>
+                <a16:creationId xmlns:a16="http://schemas.microsoft.com/office/drawing/2014/main" id="{87031196-2DE0-41E9-B3E3-75A6780EFD82}"/>
               </a:ext>
             </a:extLst>
           </p:cNvPr>
@@ -7264,7 +7264,7 @@
           <p:cNvPr id="3" name="">
             <a:extLst xmlns:a="http://schemas.openxmlformats.org/drawingml/2006/main">
               <a:ext uri="{FF2B5EF4-FFF2-40B4-BE49-F238E27FC236}">
-                <a16:creationId xmlns:a16="http://schemas.microsoft.com/office/drawing/2014/main" id="{8B1742DA-107E-4AB3-8CF6-8F65F7B7A7D3}"/>
+                <a16:creationId xmlns:a16="http://schemas.microsoft.com/office/drawing/2014/main" id="{2E1E7897-68E0-4FE6-8507-3881C9A03162}"/>
               </a:ext>
             </a:extLst>
           </p:cNvPr>
@@ -7321,7 +7321,7 @@
           <p:cNvPr id="4" name="">
             <a:extLst xmlns:a="http://schemas.openxmlformats.org/drawingml/2006/main">
               <a:ext uri="{FF2B5EF4-FFF2-40B4-BE49-F238E27FC236}">
-                <a16:creationId xmlns:a16="http://schemas.microsoft.com/office/drawing/2014/main" id="{57977740-B7FB-41CD-9000-BB89525D1437}"/>
+                <a16:creationId xmlns:a16="http://schemas.microsoft.com/office/drawing/2014/main" id="{4485641B-7CD0-4153-B8C4-B67A119BFC3D}"/>
               </a:ext>
             </a:extLst>
           </p:cNvPr>
@@ -7382,7 +7382,7 @@
           <p:nvPr/>
         </p:nvPicPr>
         <p:blipFill>
-          <a:blip xmlns:r="http://schemas.openxmlformats.org/officeDocument/2006/relationships" xmlns:a="http://schemas.openxmlformats.org/drawingml/2006/main" r:embed="R667665bc9e9d4c06"/>
+          <a:blip xmlns:r="http://schemas.openxmlformats.org/officeDocument/2006/relationships" xmlns:a="http://schemas.openxmlformats.org/drawingml/2006/main" r:embed="R36d106b8f7af4b74"/>
           <a:stretch xmlns:a="http://schemas.openxmlformats.org/drawingml/2006/main"/>
         </p:blipFill>
         <p:spPr>
@@ -7400,7 +7400,7 @@
           <p:cNvPr id="6" name="">
             <a:extLst xmlns:a="http://schemas.openxmlformats.org/drawingml/2006/main">
               <a:ext uri="{FF2B5EF4-FFF2-40B4-BE49-F238E27FC236}">
-                <a16:creationId xmlns:a16="http://schemas.microsoft.com/office/drawing/2014/main" id="{8DB392AF-8657-4503-91F0-CA4B89339C22}"/>
+                <a16:creationId xmlns:a16="http://schemas.microsoft.com/office/drawing/2014/main" id="{AB4C1A17-10B5-4CD8-ACA1-97837ACE30E8}"/>
               </a:ext>
             </a:extLst>
           </p:cNvPr>
@@ -7447,7 +7447,7 @@
                 <a:ea typeface="Microsoft JhengHei"/>
                 <a:cs typeface="Microsoft JhengHei"/>
               </a:rPr>
-              <a:t>FDR &lt; 0.10</a:t>
+              <a:t>FDR &lt; 0.05</a:t>
             </a:r>
           </a:p>
           <a:p xmlns:a="http://schemas.openxmlformats.org/drawingml/2006/main">
@@ -7475,7 +7475,7 @@
                 <a:ea typeface="Microsoft JhengHei"/>
                 <a:cs typeface="Microsoft JhengHei"/>
               </a:rPr>
-              <a:t>上調 83 條</a:t>
+              <a:t>上調 61 條</a:t>
             </a:r>
           </a:p>
           <a:p xmlns:a="http://schemas.openxmlformats.org/drawingml/2006/main">
@@ -7498,7 +7498,7 @@
                 <a:ea typeface="Microsoft JhengHei"/>
                 <a:cs typeface="Microsoft JhengHei"/>
               </a:rPr>
-              <a:t>下調 5 條</a:t>
+              <a:t>下調 2 條</a:t>
             </a:r>
           </a:p>
         </p:txBody>
@@ -7508,7 +7508,7 @@
           <p:cNvPr id="7" name="">
             <a:extLst xmlns:a="http://schemas.openxmlformats.org/drawingml/2006/main">
               <a:ext uri="{FF2B5EF4-FFF2-40B4-BE49-F238E27FC236}">
-                <a16:creationId xmlns:a16="http://schemas.microsoft.com/office/drawing/2014/main" id="{C5ACCFD8-D017-4514-8BBB-5866E93FED35}"/>
+                <a16:creationId xmlns:a16="http://schemas.microsoft.com/office/drawing/2014/main" id="{48FA257F-C71E-4958-B7B5-3066DBC2D33F}"/>
               </a:ext>
             </a:extLst>
           </p:cNvPr>
@@ -7555,7 +7555,7 @@
                 <a:ea typeface="Microsoft JhengHei"/>
                 <a:cs typeface="Microsoft JhengHei"/>
               </a:rPr>
-              <a:t>圖依 FDR 排序，沒有預先只挑 mitophagy。完整結果在 Table04。</a:t>
+              <a:t>主圖依 FDR 排序。完整結果在 Table04，顯著清單在 Table11。</a:t>
             </a:r>
           </a:p>
         </p:txBody>
@@ -7563,7 +7563,7 @@
     </p:spTree>
     <p:extLst>
       <p:ext uri="{BB962C8B-B14F-4D97-AF65-F5344CB8AC3E}">
-        <p14:creationId xmlns:p14="http://schemas.microsoft.com/office/powerpoint/2010/main" val="2059000664"/>
+        <p14:creationId xmlns:p14="http://schemas.microsoft.com/office/powerpoint/2010/main" val="1497007802"/>
       </p:ext>
     </p:extLst>
   </p:cSld>
@@ -7594,7 +7594,7 @@
           <p:cNvPr id="8" name="">
             <a:extLst xmlns:a="http://schemas.openxmlformats.org/drawingml/2006/main">
               <a:ext uri="{FF2B5EF4-FFF2-40B4-BE49-F238E27FC236}">
-                <a16:creationId xmlns:a16="http://schemas.microsoft.com/office/drawing/2014/main" id="{EF456B34-CD88-48EE-A756-AA23B8226E38}"/>
+                <a16:creationId xmlns:a16="http://schemas.microsoft.com/office/drawing/2014/main" id="{5585420B-6562-4AD6-AA37-3C0841E2AC8C}"/>
               </a:ext>
             </a:extLst>
           </p:cNvPr>
@@ -7651,7 +7651,7 @@
           <p:cNvPr id="2" name="">
             <a:extLst xmlns:a="http://schemas.openxmlformats.org/drawingml/2006/main">
               <a:ext uri="{FF2B5EF4-FFF2-40B4-BE49-F238E27FC236}">
-                <a16:creationId xmlns:a16="http://schemas.microsoft.com/office/drawing/2014/main" id="{74C41D35-6D40-4B23-BC05-67D6238DA63A}"/>
+                <a16:creationId xmlns:a16="http://schemas.microsoft.com/office/drawing/2014/main" id="{7F224BA5-4DD5-48A7-A96B-49E4D3D686EA}"/>
               </a:ext>
             </a:extLst>
           </p:cNvPr>
@@ -7708,7 +7708,7 @@
           <p:cNvPr id="3" name="">
             <a:extLst xmlns:a="http://schemas.openxmlformats.org/drawingml/2006/main">
               <a:ext uri="{FF2B5EF4-FFF2-40B4-BE49-F238E27FC236}">
-                <a16:creationId xmlns:a16="http://schemas.microsoft.com/office/drawing/2014/main" id="{B180788D-AD72-42A7-958D-CEA95FCDE1E5}"/>
+                <a16:creationId xmlns:a16="http://schemas.microsoft.com/office/drawing/2014/main" id="{5B1CE012-158D-45B1-AD00-EFC3171821E8}"/>
               </a:ext>
             </a:extLst>
           </p:cNvPr>
@@ -7765,7 +7765,7 @@
           <p:cNvPr id="4" name="">
             <a:extLst xmlns:a="http://schemas.openxmlformats.org/drawingml/2006/main">
               <a:ext uri="{FF2B5EF4-FFF2-40B4-BE49-F238E27FC236}">
-                <a16:creationId xmlns:a16="http://schemas.microsoft.com/office/drawing/2014/main" id="{4D70E678-35E7-4EED-A53A-01838DE8FD9D}"/>
+                <a16:creationId xmlns:a16="http://schemas.microsoft.com/office/drawing/2014/main" id="{BCD2D41D-7969-47AC-87CD-BDF247E3A23D}"/>
               </a:ext>
             </a:extLst>
           </p:cNvPr>
@@ -7826,7 +7826,7 @@
           <p:nvPr/>
         </p:nvPicPr>
         <p:blipFill>
-          <a:blip xmlns:r="http://schemas.openxmlformats.org/officeDocument/2006/relationships" xmlns:a="http://schemas.openxmlformats.org/drawingml/2006/main" r:embed="R82e0dafb98dc4516"/>
+          <a:blip xmlns:r="http://schemas.openxmlformats.org/officeDocument/2006/relationships" xmlns:a="http://schemas.openxmlformats.org/drawingml/2006/main" r:embed="R366b61e122d04a50"/>
           <a:stretch xmlns:a="http://schemas.openxmlformats.org/drawingml/2006/main"/>
         </p:blipFill>
         <p:spPr>
@@ -7844,7 +7844,7 @@
           <p:cNvPr id="6" name="">
             <a:extLst xmlns:a="http://schemas.openxmlformats.org/drawingml/2006/main">
               <a:ext uri="{FF2B5EF4-FFF2-40B4-BE49-F238E27FC236}">
-                <a16:creationId xmlns:a16="http://schemas.microsoft.com/office/drawing/2014/main" id="{EF8E344A-4DA3-4A3B-80B2-33044D220FE4}"/>
+                <a16:creationId xmlns:a16="http://schemas.microsoft.com/office/drawing/2014/main" id="{0F21EEF9-5BDC-4BD1-B897-F92658ED9FC7}"/>
               </a:ext>
             </a:extLst>
           </p:cNvPr>
@@ -7891,7 +7891,7 @@
                 <a:ea typeface="Microsoft JhengHei"/>
                 <a:cs typeface="Microsoft JhengHei"/>
               </a:rPr>
-              <a:t>FDR &lt; 0.10</a:t>
+              <a:t>FDR &lt; 0.05</a:t>
             </a:r>
           </a:p>
           <a:p xmlns:a="http://schemas.openxmlformats.org/drawingml/2006/main">
@@ -7919,7 +7919,7 @@
                 <a:ea typeface="Microsoft JhengHei"/>
                 <a:cs typeface="Microsoft JhengHei"/>
               </a:rPr>
-              <a:t>上調 128 條</a:t>
+              <a:t>上調 107 條</a:t>
             </a:r>
           </a:p>
           <a:p xmlns:a="http://schemas.openxmlformats.org/drawingml/2006/main">
@@ -7942,7 +7942,7 @@
                 <a:ea typeface="Microsoft JhengHei"/>
                 <a:cs typeface="Microsoft JhengHei"/>
               </a:rPr>
-              <a:t>下調 8 條</a:t>
+              <a:t>下調 6 條</a:t>
             </a:r>
           </a:p>
         </p:txBody>
@@ -7952,7 +7952,7 @@
           <p:cNvPr id="7" name="">
             <a:extLst xmlns:a="http://schemas.openxmlformats.org/drawingml/2006/main">
               <a:ext uri="{FF2B5EF4-FFF2-40B4-BE49-F238E27FC236}">
-                <a16:creationId xmlns:a16="http://schemas.microsoft.com/office/drawing/2014/main" id="{53A9DAF5-2EFD-405F-A1DA-05F75DAFBEEC}"/>
+                <a16:creationId xmlns:a16="http://schemas.microsoft.com/office/drawing/2014/main" id="{D0EE8720-3CC8-4591-8C7E-AA5DA4FB8CCD}"/>
               </a:ext>
             </a:extLst>
           </p:cNvPr>
@@ -8007,7 +8007,7 @@
     </p:spTree>
     <p:extLst>
       <p:ext uri="{BB962C8B-B14F-4D97-AF65-F5344CB8AC3E}">
-        <p14:creationId xmlns:p14="http://schemas.microsoft.com/office/powerpoint/2010/main" val="257407119"/>
+        <p14:creationId xmlns:p14="http://schemas.microsoft.com/office/powerpoint/2010/main" val="1502474852"/>
       </p:ext>
     </p:extLst>
   </p:cSld>
@@ -8038,7 +8038,7 @@
           <p:cNvPr id="8" name="">
             <a:extLst xmlns:a="http://schemas.openxmlformats.org/drawingml/2006/main">
               <a:ext uri="{FF2B5EF4-FFF2-40B4-BE49-F238E27FC236}">
-                <a16:creationId xmlns:a16="http://schemas.microsoft.com/office/drawing/2014/main" id="{ABFBA07B-0737-498A-B3C1-196D402FDBBA}"/>
+                <a16:creationId xmlns:a16="http://schemas.microsoft.com/office/drawing/2014/main" id="{11BEEBD0-94F0-45E8-A7EE-0F0352A002BF}"/>
               </a:ext>
             </a:extLst>
           </p:cNvPr>
@@ -8095,7 +8095,7 @@
           <p:cNvPr id="2" name="">
             <a:extLst xmlns:a="http://schemas.openxmlformats.org/drawingml/2006/main">
               <a:ext uri="{FF2B5EF4-FFF2-40B4-BE49-F238E27FC236}">
-                <a16:creationId xmlns:a16="http://schemas.microsoft.com/office/drawing/2014/main" id="{058E1832-485A-48B0-B0F0-9A68D4A322D8}"/>
+                <a16:creationId xmlns:a16="http://schemas.microsoft.com/office/drawing/2014/main" id="{CBD6F2B0-CC4F-4435-B351-BC77803F5F04}"/>
               </a:ext>
             </a:extLst>
           </p:cNvPr>
@@ -8142,7 +8142,7 @@
                 <a:ea typeface="Microsoft JhengHei"/>
                 <a:cs typeface="Microsoft JhengHei"/>
               </a:rPr>
-              <a:t>先看同方向 pathway 交集</a:t>
+              <a:t>同方向 pathway 交集</a:t>
             </a:r>
           </a:p>
         </p:txBody>
@@ -8152,7 +8152,7 @@
           <p:cNvPr id="3" name="">
             <a:extLst xmlns:a="http://schemas.openxmlformats.org/drawingml/2006/main">
               <a:ext uri="{FF2B5EF4-FFF2-40B4-BE49-F238E27FC236}">
-                <a16:creationId xmlns:a16="http://schemas.microsoft.com/office/drawing/2014/main" id="{094C2F5F-B061-4675-8E8A-70FF1131C038}"/>
+                <a16:creationId xmlns:a16="http://schemas.microsoft.com/office/drawing/2014/main" id="{D2580DD0-8BCC-44DD-8E6B-60CB6298F1EB}"/>
               </a:ext>
             </a:extLst>
           </p:cNvPr>
@@ -8209,7 +8209,7 @@
           <p:cNvPr id="4" name="">
             <a:extLst xmlns:a="http://schemas.openxmlformats.org/drawingml/2006/main">
               <a:ext uri="{FF2B5EF4-FFF2-40B4-BE49-F238E27FC236}">
-                <a16:creationId xmlns:a16="http://schemas.microsoft.com/office/drawing/2014/main" id="{05BC2725-7318-4ED4-A8D9-3A3C476F67C8}"/>
+                <a16:creationId xmlns:a16="http://schemas.microsoft.com/office/drawing/2014/main" id="{AB6E04EB-E947-4F2E-BEAF-49C277A31268}"/>
               </a:ext>
             </a:extLst>
           </p:cNvPr>
@@ -8270,13 +8270,13 @@
           <p:nvPr/>
         </p:nvPicPr>
         <p:blipFill>
-          <a:blip xmlns:r="http://schemas.openxmlformats.org/officeDocument/2006/relationships" xmlns:a="http://schemas.openxmlformats.org/drawingml/2006/main" r:embed="R01ed2fedac68481d"/>
+          <a:blip xmlns:r="http://schemas.openxmlformats.org/officeDocument/2006/relationships" xmlns:a="http://schemas.openxmlformats.org/drawingml/2006/main" r:embed="Rdbe2b0facf844927"/>
           <a:stretch xmlns:a="http://schemas.openxmlformats.org/drawingml/2006/main"/>
         </p:blipFill>
         <p:spPr>
           <a:xfrm xmlns:a="http://schemas.openxmlformats.org/drawingml/2006/main">
-            <a:off x="1539666" y="1038225"/>
-            <a:ext cx="6350418" cy="5362575"/>
+            <a:off x="333375" y="1381125"/>
+            <a:ext cx="8763000" cy="4381500"/>
           </a:xfrm>
           <a:prstGeom xmlns:a="http://schemas.openxmlformats.org/drawingml/2006/main" prst="rect">
             <a:avLst/>
@@ -8288,7 +8288,7 @@
           <p:cNvPr id="6" name="">
             <a:extLst xmlns:a="http://schemas.openxmlformats.org/drawingml/2006/main">
               <a:ext uri="{FF2B5EF4-FFF2-40B4-BE49-F238E27FC236}">
-                <a16:creationId xmlns:a16="http://schemas.microsoft.com/office/drawing/2014/main" id="{FCBA34F6-98B2-4490-8653-09B37489988A}"/>
+                <a16:creationId xmlns:a16="http://schemas.microsoft.com/office/drawing/2014/main" id="{F3CC6C2C-3BAD-419E-8D01-FDE1EB7AC304}"/>
               </a:ext>
             </a:extLst>
           </p:cNvPr>
@@ -8363,7 +8363,7 @@
                 <a:ea typeface="Microsoft JhengHei"/>
                 <a:cs typeface="Microsoft JhengHei"/>
               </a:rPr>
-              <a:t>共同上調 54 條</a:t>
+              <a:t>共同上調 40 條</a:t>
             </a:r>
           </a:p>
           <a:p xmlns:a="http://schemas.openxmlformats.org/drawingml/2006/main">
@@ -8396,7 +8396,7 @@
           <p:cNvPr id="7" name="">
             <a:extLst xmlns:a="http://schemas.openxmlformats.org/drawingml/2006/main">
               <a:ext uri="{FF2B5EF4-FFF2-40B4-BE49-F238E27FC236}">
-                <a16:creationId xmlns:a16="http://schemas.microsoft.com/office/drawing/2014/main" id="{58871E48-9A76-439B-8DA9-CA66AC485F80}"/>
+                <a16:creationId xmlns:a16="http://schemas.microsoft.com/office/drawing/2014/main" id="{97EADBA2-9B4E-4212-8C4A-68360E225BC5}"/>
               </a:ext>
             </a:extLst>
           </p:cNvPr>
@@ -8466,7 +8466,7 @@
                 <a:ea typeface="Microsoft JhengHei"/>
                 <a:cs typeface="Microsoft JhengHei"/>
               </a:rPr>
-              <a:t>兩邊都需 FDR &lt; 0.10，且 NES 同號。</a:t>
+              <a:t>兩邊都需 FDR &lt; 0.05，且 NES 同號。</a:t>
             </a:r>
           </a:p>
           <a:p xmlns:a="http://schemas.openxmlformats.org/drawingml/2006/main">
@@ -8494,7 +8494,7 @@
                 <a:ea typeface="Microsoft JhengHei"/>
                 <a:cs typeface="Microsoft JhengHei"/>
               </a:rPr>
-              <a:t>下排保留原始 top 25% 對照。</a:t>
+              <a:t>其他 cutoff 與原始 top 25% 放在補充分析。</a:t>
             </a:r>
           </a:p>
         </p:txBody>
@@ -8502,7 +8502,7 @@
     </p:spTree>
     <p:extLst>
       <p:ext uri="{BB962C8B-B14F-4D97-AF65-F5344CB8AC3E}">
-        <p14:creationId xmlns:p14="http://schemas.microsoft.com/office/powerpoint/2010/main" val="1499049048"/>
+        <p14:creationId xmlns:p14="http://schemas.microsoft.com/office/powerpoint/2010/main" val="1831706074"/>
       </p:ext>
     </p:extLst>
   </p:cSld>
@@ -8533,7 +8533,7 @@
           <p:cNvPr id="6" name="">
             <a:extLst xmlns:a="http://schemas.openxmlformats.org/drawingml/2006/main">
               <a:ext uri="{FF2B5EF4-FFF2-40B4-BE49-F238E27FC236}">
-                <a16:creationId xmlns:a16="http://schemas.microsoft.com/office/drawing/2014/main" id="{74F4C97A-DCB2-4A9F-82EF-61F4ED0F508B}"/>
+                <a16:creationId xmlns:a16="http://schemas.microsoft.com/office/drawing/2014/main" id="{8A70EF99-7DD2-468C-B6E2-8966A3306C3B}"/>
               </a:ext>
             </a:extLst>
           </p:cNvPr>
@@ -8590,7 +8590,7 @@
           <p:cNvPr id="2" name="">
             <a:extLst xmlns:a="http://schemas.openxmlformats.org/drawingml/2006/main">
               <a:ext uri="{FF2B5EF4-FFF2-40B4-BE49-F238E27FC236}">
-                <a16:creationId xmlns:a16="http://schemas.microsoft.com/office/drawing/2014/main" id="{899E793D-6341-4C9B-8DF6-9B34856806D9}"/>
+                <a16:creationId xmlns:a16="http://schemas.microsoft.com/office/drawing/2014/main" id="{D9C6E819-3921-4805-81E8-14F91803176A}"/>
               </a:ext>
             </a:extLst>
           </p:cNvPr>
@@ -8647,7 +8647,7 @@
           <p:cNvPr id="3" name="">
             <a:extLst xmlns:a="http://schemas.openxmlformats.org/drawingml/2006/main">
               <a:ext uri="{FF2B5EF4-FFF2-40B4-BE49-F238E27FC236}">
-                <a16:creationId xmlns:a16="http://schemas.microsoft.com/office/drawing/2014/main" id="{9ABBF5DD-5D6F-4651-84E8-9BEADBEBEAC9}"/>
+                <a16:creationId xmlns:a16="http://schemas.microsoft.com/office/drawing/2014/main" id="{A7823722-F1B2-44F5-BEA2-74CC8E95C381}"/>
               </a:ext>
             </a:extLst>
           </p:cNvPr>
@@ -8704,7 +8704,7 @@
           <p:cNvPr id="4" name="">
             <a:extLst xmlns:a="http://schemas.openxmlformats.org/drawingml/2006/main">
               <a:ext uri="{FF2B5EF4-FFF2-40B4-BE49-F238E27FC236}">
-                <a16:creationId xmlns:a16="http://schemas.microsoft.com/office/drawing/2014/main" id="{D28D0706-0B17-4049-8DDC-55BCCA2F3D46}"/>
+                <a16:creationId xmlns:a16="http://schemas.microsoft.com/office/drawing/2014/main" id="{82BA95E4-B578-4F9A-B433-027904FB0ABB}"/>
               </a:ext>
             </a:extLst>
           </p:cNvPr>
@@ -8765,7 +8765,7 @@
           <p:nvPr/>
         </p:nvPicPr>
         <p:blipFill>
-          <a:blip xmlns:r="http://schemas.openxmlformats.org/officeDocument/2006/relationships" xmlns:a="http://schemas.openxmlformats.org/drawingml/2006/main" r:embed="Rad93e427406f497f"/>
+          <a:blip xmlns:r="http://schemas.openxmlformats.org/officeDocument/2006/relationships" xmlns:a="http://schemas.openxmlformats.org/drawingml/2006/main" r:embed="R50fb8ae6ac74409d"/>
           <a:stretch xmlns:a="http://schemas.openxmlformats.org/drawingml/2006/main"/>
         </p:blipFill>
         <p:spPr>
@@ -8781,7 +8781,7 @@
     </p:spTree>
     <p:extLst>
       <p:ext uri="{BB962C8B-B14F-4D97-AF65-F5344CB8AC3E}">
-        <p14:creationId xmlns:p14="http://schemas.microsoft.com/office/powerpoint/2010/main" val="1828861557"/>
+        <p14:creationId xmlns:p14="http://schemas.microsoft.com/office/powerpoint/2010/main" val="1542495709"/>
       </p:ext>
     </p:extLst>
   </p:cSld>

--- a/projects/GSE262271_TALL_relapse_scRNAseq/07_Student_Handoff/01_Summary/Leukemia_scRNAseq_STAT5B_reviewed.pptx
+++ b/projects/GSE262271_TALL_relapse_scRNAseq/07_Student_Handoff/01_Summary/Leukemia_scRNAseq_STAT5B_reviewed.pptx
@@ -2,26 +2,27 @@
 <file path=ppt/presentation.xml><?xml version="1.0" encoding="utf-8"?>
 <p:presentation xmlns:p="http://schemas.openxmlformats.org/presentationml/2006/main">
   <p:sldMasterIdLst>
-    <p:sldMasterId xmlns:r="http://schemas.openxmlformats.org/officeDocument/2006/relationships" id="2147483648" r:id="R17a29904a7e34fe2"/>
+    <p:sldMasterId xmlns:r="http://schemas.openxmlformats.org/officeDocument/2006/relationships" id="2147483648" r:id="R7c6c7086868e4eba"/>
   </p:sldMasterIdLst>
   <p:notesMasterIdLst>
-    <p:notesMasterId xmlns:r="http://schemas.openxmlformats.org/officeDocument/2006/relationships" r:id="Rc89f8f8522f54fba"/>
+    <p:notesMasterId xmlns:r="http://schemas.openxmlformats.org/officeDocument/2006/relationships" r:id="Rdb32df5b10ae4582"/>
   </p:notesMasterIdLst>
   <p:sldIdLst>
-    <p:sldId xmlns:r="http://schemas.openxmlformats.org/officeDocument/2006/relationships" id="256" r:id="R5f60c4c641da4cd4"/>
-    <p:sldId xmlns:r="http://schemas.openxmlformats.org/officeDocument/2006/relationships" id="257" r:id="Rb9f0b3cf3e2948d9"/>
-    <p:sldId xmlns:r="http://schemas.openxmlformats.org/officeDocument/2006/relationships" id="258" r:id="Re2de27cb1ef2427c"/>
-    <p:sldId xmlns:r="http://schemas.openxmlformats.org/officeDocument/2006/relationships" id="259" r:id="R7317dfb164c948e2"/>
-    <p:sldId xmlns:r="http://schemas.openxmlformats.org/officeDocument/2006/relationships" id="260" r:id="R47d507ef7ccf4b49"/>
-    <p:sldId xmlns:r="http://schemas.openxmlformats.org/officeDocument/2006/relationships" id="261" r:id="R005ab2211d4b404c"/>
-    <p:sldId xmlns:r="http://schemas.openxmlformats.org/officeDocument/2006/relationships" id="262" r:id="Ra415a6cf4b6c4d4d"/>
-    <p:sldId xmlns:r="http://schemas.openxmlformats.org/officeDocument/2006/relationships" id="263" r:id="Rb424d6403ddd4ace"/>
-    <p:sldId xmlns:r="http://schemas.openxmlformats.org/officeDocument/2006/relationships" id="264" r:id="R08eaef45b97842b9"/>
-    <p:sldId xmlns:r="http://schemas.openxmlformats.org/officeDocument/2006/relationships" id="265" r:id="Rdbb11098723946d1"/>
-    <p:sldId xmlns:r="http://schemas.openxmlformats.org/officeDocument/2006/relationships" id="266" r:id="Rb7a87ab838614feb"/>
-    <p:sldId xmlns:r="http://schemas.openxmlformats.org/officeDocument/2006/relationships" id="267" r:id="Re9f330a615234426"/>
-    <p:sldId xmlns:r="http://schemas.openxmlformats.org/officeDocument/2006/relationships" id="268" r:id="R4b6d1588762b407f"/>
-    <p:sldId xmlns:r="http://schemas.openxmlformats.org/officeDocument/2006/relationships" id="269" r:id="Rcd730057a98f43b3"/>
+    <p:sldId xmlns:r="http://schemas.openxmlformats.org/officeDocument/2006/relationships" id="256" r:id="R64e882b4751a4568"/>
+    <p:sldId xmlns:r="http://schemas.openxmlformats.org/officeDocument/2006/relationships" id="257" r:id="Re738212d4ff94b28"/>
+    <p:sldId xmlns:r="http://schemas.openxmlformats.org/officeDocument/2006/relationships" id="258" r:id="Ref3cb69697354ddf"/>
+    <p:sldId xmlns:r="http://schemas.openxmlformats.org/officeDocument/2006/relationships" id="259" r:id="R5a351d7f7c484907"/>
+    <p:sldId xmlns:r="http://schemas.openxmlformats.org/officeDocument/2006/relationships" id="260" r:id="R6856b2e685384d7f"/>
+    <p:sldId xmlns:r="http://schemas.openxmlformats.org/officeDocument/2006/relationships" id="261" r:id="R7c1c2bc854e54a00"/>
+    <p:sldId xmlns:r="http://schemas.openxmlformats.org/officeDocument/2006/relationships" id="262" r:id="R83b2088941524f63"/>
+    <p:sldId xmlns:r="http://schemas.openxmlformats.org/officeDocument/2006/relationships" id="263" r:id="R8ef5c3e5c1014c04"/>
+    <p:sldId xmlns:r="http://schemas.openxmlformats.org/officeDocument/2006/relationships" id="264" r:id="R59bac43f2caa4213"/>
+    <p:sldId xmlns:r="http://schemas.openxmlformats.org/officeDocument/2006/relationships" id="265" r:id="R22dc68c251bc4425"/>
+    <p:sldId xmlns:r="http://schemas.openxmlformats.org/officeDocument/2006/relationships" id="266" r:id="Rc364a3d5dbbe400b"/>
+    <p:sldId xmlns:r="http://schemas.openxmlformats.org/officeDocument/2006/relationships" id="267" r:id="Rc370e7c0d8974607"/>
+    <p:sldId xmlns:r="http://schemas.openxmlformats.org/officeDocument/2006/relationships" id="268" r:id="R7562d54a582045db"/>
+    <p:sldId xmlns:r="http://schemas.openxmlformats.org/officeDocument/2006/relationships" id="269" r:id="R039c8bc954f44473"/>
+    <p:sldId xmlns:r="http://schemas.openxmlformats.org/officeDocument/2006/relationships" id="270" r:id="R95706312c62f4dc7"/>
   </p:sldIdLst>
   <p:sldSz cx="12192000" cy="6858000"/>
   <p:notesSz cx="6858000" cy="9144000"/>
@@ -525,7 +526,7 @@
           <a:lstStyle xmlns:a="http://schemas.openxmlformats.org/drawingml/2006/main"/>
           <a:p xmlns:a="http://schemas.openxmlformats.org/drawingml/2006/main">
             <a:r>
-              <a:t>Numeric results are read from regenerated tables, not hard-coded historical values. q means whole KEGG BH, not nominal P or two-target correction. Within15 is exploratory because cutoff was selected after multiverse results.</a:t>
+              <a:t>Continuation of the complete40-pathway intersection. Both datasets use full-collection BH FDR&lt;0.05. Positive NES means higher in relapse (left) or N642H (right). scRNAseq Proteasome FDR=0.00837925505996343, Mitophagy=0.0131970176091592; bulk Proteasome=0.00107780111297412, Mitophagy=0.028233910102446. Disease/infection-labeled gene sets do not establish those diagnoses. Abbreviated display labels retain exact original names in Table07.</a:t>
             </a:r>
           </a:p>
         </p:txBody>
@@ -595,7 +596,7 @@
           <a:lstStyle xmlns:a="http://schemas.openxmlformats.org/drawingml/2006/main"/>
           <a:p xmlns:a="http://schemas.openxmlformats.org/drawingml/2006/main">
             <a:r>
-              <a:t>Three patients limit inference. A gene need not rise in all three pairs for fitting a paired model. Gene-level DEG FDR and gene-set GSEA FDR answer different hypotheses.</a:t>
+              <a:t>Numeric results are read from regenerated tables, not hard-coded historical values. q means whole KEGG BH, not nominal P or two-target correction. Within15 is exploratory because cutoff was selected after multiverse results.</a:t>
             </a:r>
           </a:p>
         </p:txBody>
@@ -665,7 +666,7 @@
           <a:lstStyle xmlns:a="http://schemas.openxmlformats.org/drawingml/2006/main"/>
           <a:p xmlns:a="http://schemas.openxmlformats.org/drawingml/2006/main">
             <a:r>
-              <a:t>inferCNV score is RNA-based deviation from reference, not measured DNA copy number, a probability of cancer, or a patient-independent validated specificity threshold. Reference sample/cell-type composition is unbalanced. Official workflow: https://github.com/broadinstitute/inferCNV/wiki/Running-InferCNV</a:t>
+              <a:t>Three patients limit inference. A gene need not rise in all three pairs for fitting a paired model. Gene-level DEG FDR and gene-set GSEA FDR answer different hypotheses.</a:t>
             </a:r>
           </a:p>
         </p:txBody>
@@ -735,7 +736,7 @@
           <a:lstStyle xmlns:a="http://schemas.openxmlformats.org/drawingml/2006/main"/>
           <a:p xmlns:a="http://schemas.openxmlformats.org/drawingml/2006/main">
             <a:r>
-              <a:t>These are limits of the actual contrasts. General autophagy is not interchangeable with mitophagy. Inspect shared leading-edge genes and full FDR tables before choosing individual targets.</a:t>
+              <a:t>inferCNV score is RNA-based deviation from reference, not measured DNA copy number, a probability of cancer, or a patient-independent validated specificity threshold. Reference sample/cell-type composition is unbalanced. Official workflow: https://github.com/broadinstitute/inferCNV/wiki/Running-InferCNV</a:t>
             </a:r>
           </a:p>
         </p:txBody>
@@ -805,6 +806,76 @@
           <a:lstStyle xmlns:a="http://schemas.openxmlformats.org/drawingml/2006/main"/>
           <a:p xmlns:a="http://schemas.openxmlformats.org/drawingml/2006/main">
             <a:r>
+              <a:t>These are limits of the actual contrasts. General autophagy is not interchangeable with mitophagy. Inspect shared leading-edge genes and full FDR tables before choosing individual targets.</a:t>
+            </a:r>
+          </a:p>
+        </p:txBody>
+      </p:sp>
+      <p:sp>
+        <p:nvSpPr>
+          <p:cNvPr id="4" name="Slide Number Placeholder 3"/>
+          <p:cNvSpPr>
+            <a:spLocks xmlns:a="http://schemas.openxmlformats.org/drawingml/2006/main" noGrp="1"/>
+          </p:cNvSpPr>
+          <p:nvPr>
+            <p:ph type="sldNum" idx="5"/>
+          </p:nvPr>
+        </p:nvSpPr>
+        <p:spPr/>
+        <p:txBody>
+          <a:bodyPr xmlns:a="http://schemas.openxmlformats.org/drawingml/2006/main"/>
+          <a:lstStyle xmlns:a="http://schemas.openxmlformats.org/drawingml/2006/main"/>
+          <a:p xmlns:a="http://schemas.openxmlformats.org/drawingml/2006/main"/>
+        </p:txBody>
+      </p:sp>
+    </p:spTree>
+  </p:cSld>
+  <p:clrMapOvr>
+    <a:masterClrMapping xmlns:a="http://schemas.openxmlformats.org/drawingml/2006/main"/>
+  </p:clrMapOvr>
+</p:notes>
+</file>
+
+<file path=ppt/notesSlides/notesSlide15.xml><?xml version="1.0" encoding="utf-8"?>
+<p:notes xmlns:p="http://schemas.openxmlformats.org/presentationml/2006/main">
+  <p:cSld>
+    <p:spTree>
+      <p:nvGrpSpPr>
+        <p:cNvPr id="1" name=""/>
+        <p:cNvGrpSpPr/>
+        <p:nvPr/>
+      </p:nvGrpSpPr>
+      <p:grpSpPr>
+        <a:xfrm xmlns:a="http://schemas.openxmlformats.org/drawingml/2006/main"/>
+      </p:grpSpPr>
+      <p:sp>
+        <p:nvSpPr>
+          <p:cNvPr id="2" name="Slide Image Placeholder 1"/>
+          <p:cNvSpPr>
+            <a:spLocks xmlns:a="http://schemas.openxmlformats.org/drawingml/2006/main" noGrp="1"/>
+          </p:cNvSpPr>
+          <p:nvPr>
+            <p:ph type="sldImg" idx="0"/>
+          </p:nvPr>
+        </p:nvSpPr>
+        <p:spPr/>
+      </p:sp>
+      <p:sp>
+        <p:nvSpPr>
+          <p:cNvPr id="3" name="Notes Placeholder 2"/>
+          <p:cNvSpPr>
+            <a:spLocks xmlns:a="http://schemas.openxmlformats.org/drawingml/2006/main" noGrp="1"/>
+          </p:cNvSpPr>
+          <p:nvPr>
+            <p:ph type="body" idx="1"/>
+          </p:nvPr>
+        </p:nvSpPr>
+        <p:spPr/>
+        <p:txBody>
+          <a:bodyPr xmlns:a="http://schemas.openxmlformats.org/drawingml/2006/main"/>
+          <a:lstStyle xmlns:a="http://schemas.openxmlformats.org/drawingml/2006/main"/>
+          <a:p xmlns:a="http://schemas.openxmlformats.org/drawingml/2006/main">
+            <a:r>
               <a:t>Code22 recomputes count-based models and high-precision GSEA. Code23 renders reader figures/tables. The audit reports historical discrepancies rather than silently replacing provenance. No raw data, patient identifiers or large R objects are uploaded.</a:t>
             </a:r>
           </a:p>
@@ -1365,7 +1436,7 @@
           <a:lstStyle xmlns:a="http://schemas.openxmlformats.org/drawingml/2006/main"/>
           <a:p xmlns:a="http://schemas.openxmlformats.org/drawingml/2006/main">
             <a:r>
-              <a:t>All same-direction intersections are provided in Table07 and full Figure06. This slide shows at most15 pathways ranked by the worse FDR across the two datasets, not a target-selected list. Each tile contains NES and whole-collection significance.</a:t>
+              <a:t>Table07 and complete Figure06 use exactly the same order: increasing max(sc_FDR, bulk_FDR), with alphabetical pathway-name ties. The maximum is a display ordering key, not a combined FDR. Position indicates NES; color indicates full-catalog BH FDR on a -log10 scale capped at6. All40 satisfy FDR&lt;0.05 in both datasets. Bold labels identify hypothesis targets without changing ordering. Layout reference: Reis-de-Oliveira et al., Nature Communications (2024), Figures3B and4D, https://www.nature.com/articles/s41467-024-50875-z . Only the plot layout is adapted; the reference article uses other enrichment statistics.</a:t>
             </a:r>
           </a:p>
         </p:txBody>
@@ -1433,7 +1504,7 @@
   </p:cSld>
   <p:clrMap bg1="lt1" tx1="dk1" bg2="lt2" tx2="dk2" accent1="accent1" accent2="accent2" accent3="accent3" accent4="accent4" accent5="accent5" accent6="accent6" hlink="hlink" folHlink="folHlink"/>
   <p:sldLayoutIdLst>
-    <p:sldLayoutId xmlns:r="http://schemas.openxmlformats.org/officeDocument/2006/relationships" id="2147483649" r:id="R484a6def0a1f47ac"/>
+    <p:sldLayoutId xmlns:r="http://schemas.openxmlformats.org/officeDocument/2006/relationships" id="2147483649" r:id="Rcdb8ce7ff1fc401f"/>
   </p:sldLayoutIdLst>
   <p:txStyles>
     <p:titleStyle>
@@ -1984,7 +2055,7 @@
           <p:cNvPr id="9" name="">
             <a:extLst xmlns:a="http://schemas.openxmlformats.org/drawingml/2006/main">
               <a:ext uri="{FF2B5EF4-FFF2-40B4-BE49-F238E27FC236}">
-                <a16:creationId xmlns:a16="http://schemas.microsoft.com/office/drawing/2014/main" id="{91E6CCD2-64CB-4CF5-8FFF-3B6F4AE356E8}"/>
+                <a16:creationId xmlns:a16="http://schemas.microsoft.com/office/drawing/2014/main" id="{6F224678-8C24-4F87-9716-A5EE6242E567}"/>
               </a:ext>
             </a:extLst>
           </p:cNvPr>
@@ -2041,7 +2112,7 @@
           <p:cNvPr id="2" name="">
             <a:extLst xmlns:a="http://schemas.openxmlformats.org/drawingml/2006/main">
               <a:ext uri="{FF2B5EF4-FFF2-40B4-BE49-F238E27FC236}">
-                <a16:creationId xmlns:a16="http://schemas.microsoft.com/office/drawing/2014/main" id="{7C4495CA-8855-41A1-883D-F5C67CAC1CB9}"/>
+                <a16:creationId xmlns:a16="http://schemas.microsoft.com/office/drawing/2014/main" id="{122D88E6-AA0E-4C5F-8A23-E23046F0663F}"/>
               </a:ext>
             </a:extLst>
           </p:cNvPr>
@@ -2098,7 +2169,7 @@
           <p:cNvPr id="3" name="">
             <a:extLst xmlns:a="http://schemas.openxmlformats.org/drawingml/2006/main">
               <a:ext uri="{FF2B5EF4-FFF2-40B4-BE49-F238E27FC236}">
-                <a16:creationId xmlns:a16="http://schemas.microsoft.com/office/drawing/2014/main" id="{E23FD51F-4C69-4A5E-91DD-2AD394910338}"/>
+                <a16:creationId xmlns:a16="http://schemas.microsoft.com/office/drawing/2014/main" id="{65A36042-BEBA-46ED-A3BF-FACFF76487EB}"/>
               </a:ext>
             </a:extLst>
           </p:cNvPr>
@@ -2155,7 +2226,7 @@
           <p:cNvPr id="4" name="">
             <a:extLst xmlns:a="http://schemas.openxmlformats.org/drawingml/2006/main">
               <a:ext uri="{FF2B5EF4-FFF2-40B4-BE49-F238E27FC236}">
-                <a16:creationId xmlns:a16="http://schemas.microsoft.com/office/drawing/2014/main" id="{5171ECF3-CA9D-4DF3-9A0B-C8FF76109732}"/>
+                <a16:creationId xmlns:a16="http://schemas.microsoft.com/office/drawing/2014/main" id="{81F97B9C-E2A5-43CB-95DA-5D23850B34A5}"/>
               </a:ext>
             </a:extLst>
           </p:cNvPr>
@@ -2212,7 +2283,7 @@
           <p:cNvPr id="5" name="">
             <a:extLst xmlns:a="http://schemas.openxmlformats.org/drawingml/2006/main">
               <a:ext uri="{FF2B5EF4-FFF2-40B4-BE49-F238E27FC236}">
-                <a16:creationId xmlns:a16="http://schemas.microsoft.com/office/drawing/2014/main" id="{80B564FF-33D8-48D4-9435-B6A225DA249F}"/>
+                <a16:creationId xmlns:a16="http://schemas.microsoft.com/office/drawing/2014/main" id="{57C1A7F6-574B-469D-8FDB-5F674B6C73AC}"/>
               </a:ext>
             </a:extLst>
           </p:cNvPr>
@@ -2269,7 +2340,7 @@
           <p:cNvPr id="6" name="">
             <a:extLst xmlns:a="http://schemas.openxmlformats.org/drawingml/2006/main">
               <a:ext uri="{FF2B5EF4-FFF2-40B4-BE49-F238E27FC236}">
-                <a16:creationId xmlns:a16="http://schemas.microsoft.com/office/drawing/2014/main" id="{D5C9457E-489D-4013-810B-050DD8BCE50E}"/>
+                <a16:creationId xmlns:a16="http://schemas.microsoft.com/office/drawing/2014/main" id="{C8BC944C-3F0C-48B4-9950-1211FC761091}"/>
               </a:ext>
             </a:extLst>
           </p:cNvPr>
@@ -2326,7 +2397,7 @@
           <p:cNvPr id="7" name="">
             <a:extLst xmlns:a="http://schemas.openxmlformats.org/drawingml/2006/main">
               <a:ext uri="{FF2B5EF4-FFF2-40B4-BE49-F238E27FC236}">
-                <a16:creationId xmlns:a16="http://schemas.microsoft.com/office/drawing/2014/main" id="{13FFD5BF-1F61-4284-B90C-F642024AC01E}"/>
+                <a16:creationId xmlns:a16="http://schemas.microsoft.com/office/drawing/2014/main" id="{0279CE60-8AED-4E8A-8155-174922105606}"/>
               </a:ext>
             </a:extLst>
           </p:cNvPr>
@@ -2406,7 +2477,7 @@
           <p:cNvPr id="8" name="">
             <a:extLst xmlns:a="http://schemas.openxmlformats.org/drawingml/2006/main">
               <a:ext uri="{FF2B5EF4-FFF2-40B4-BE49-F238E27FC236}">
-                <a16:creationId xmlns:a16="http://schemas.microsoft.com/office/drawing/2014/main" id="{88D95EB9-C8F0-4256-BB11-BA59D12168D5}"/>
+                <a16:creationId xmlns:a16="http://schemas.microsoft.com/office/drawing/2014/main" id="{7EB7DFBE-A3FA-42E0-A525-5991A038F32F}"/>
               </a:ext>
             </a:extLst>
           </p:cNvPr>
@@ -2461,7 +2532,7 @@
     </p:spTree>
     <p:extLst>
       <p:ext uri="{BB962C8B-B14F-4D97-AF65-F5344CB8AC3E}">
-        <p14:creationId xmlns:p14="http://schemas.microsoft.com/office/powerpoint/2010/main" val="1423246754"/>
+        <p14:creationId xmlns:p14="http://schemas.microsoft.com/office/powerpoint/2010/main" val="770387514"/>
       </p:ext>
     </p:extLst>
   </p:cSld>
@@ -2492,7 +2563,7 @@
           <p:cNvPr id="7" name="">
             <a:extLst xmlns:a="http://schemas.openxmlformats.org/drawingml/2006/main">
               <a:ext uri="{FF2B5EF4-FFF2-40B4-BE49-F238E27FC236}">
-                <a16:creationId xmlns:a16="http://schemas.microsoft.com/office/drawing/2014/main" id="{1506798B-E2B7-4D0A-B89A-B8DB57C3AFB3}"/>
+                <a16:creationId xmlns:a16="http://schemas.microsoft.com/office/drawing/2014/main" id="{825A1070-2C9E-44C1-B90B-BEB0EA9639C1}"/>
               </a:ext>
             </a:extLst>
           </p:cNvPr>
@@ -2539,7 +2610,7 @@
                 <a:ea typeface="Microsoft JhengHei"/>
                 <a:cs typeface="Microsoft JhengHei"/>
               </a:rPr>
-              <a:t>TARGET PATHWAYS</a:t>
+              <a:t>SHARED PROGRAMS</a:t>
             </a:r>
           </a:p>
         </p:txBody>
@@ -2549,7 +2620,7 @@
           <p:cNvPr id="2" name="">
             <a:extLst xmlns:a="http://schemas.openxmlformats.org/drawingml/2006/main">
               <a:ext uri="{FF2B5EF4-FFF2-40B4-BE49-F238E27FC236}">
-                <a16:creationId xmlns:a16="http://schemas.microsoft.com/office/drawing/2014/main" id="{322AD55F-4621-40A3-94F4-A56C980EF2D3}"/>
+                <a16:creationId xmlns:a16="http://schemas.microsoft.com/office/drawing/2014/main" id="{8035CBBB-1CDC-421E-841C-5FC30B4FE5C8}"/>
               </a:ext>
             </a:extLst>
           </p:cNvPr>
@@ -2596,7 +2667,7 @@
                 <a:ea typeface="Microsoft JhengHei"/>
                 <a:cs typeface="Microsoft JhengHei"/>
               </a:rPr>
-              <a:t>Proteasome 與 mitophagy 的結果核對</a:t>
+              <a:t>40 條共同上調 pathway：第 21–40 條</a:t>
             </a:r>
           </a:p>
         </p:txBody>
@@ -2606,7 +2677,7 @@
           <p:cNvPr id="3" name="">
             <a:extLst xmlns:a="http://schemas.openxmlformats.org/drawingml/2006/main">
               <a:ext uri="{FF2B5EF4-FFF2-40B4-BE49-F238E27FC236}">
-                <a16:creationId xmlns:a16="http://schemas.microsoft.com/office/drawing/2014/main" id="{95820BA2-F3C6-4C8A-AABB-F0D889B99201}"/>
+                <a16:creationId xmlns:a16="http://schemas.microsoft.com/office/drawing/2014/main" id="{36F1A355-FAA6-443D-9F5C-028F2B274F5E}"/>
               </a:ext>
             </a:extLst>
           </p:cNvPr>
@@ -2663,7 +2734,7 @@
           <p:cNvPr id="4" name="">
             <a:extLst xmlns:a="http://schemas.openxmlformats.org/drawingml/2006/main">
               <a:ext uri="{FF2B5EF4-FFF2-40B4-BE49-F238E27FC236}">
-                <a16:creationId xmlns:a16="http://schemas.microsoft.com/office/drawing/2014/main" id="{28C3B606-FF48-4635-8410-518A9A3BF68E}"/>
+                <a16:creationId xmlns:a16="http://schemas.microsoft.com/office/drawing/2014/main" id="{D78F14E2-07AD-4036-AF80-246D46842A42}"/>
               </a:ext>
             </a:extLst>
           </p:cNvPr>
@@ -2724,13 +2795,13 @@
           <p:nvPr/>
         </p:nvPicPr>
         <p:blipFill>
-          <a:blip xmlns:r="http://schemas.openxmlformats.org/officeDocument/2006/relationships" xmlns:a="http://schemas.openxmlformats.org/drawingml/2006/main" r:embed="R2ebcdfadf305483f"/>
+          <a:blip xmlns:r="http://schemas.openxmlformats.org/officeDocument/2006/relationships" xmlns:a="http://schemas.openxmlformats.org/drawingml/2006/main" r:embed="R4b279703e6344050"/>
           <a:stretch xmlns:a="http://schemas.openxmlformats.org/drawingml/2006/main"/>
         </p:blipFill>
         <p:spPr>
           <a:xfrm xmlns:a="http://schemas.openxmlformats.org/drawingml/2006/main">
-            <a:off x="2122289" y="1362075"/>
-            <a:ext cx="7947422" cy="4238625"/>
+            <a:off x="1262884" y="1028700"/>
+            <a:ext cx="9666233" cy="5143500"/>
           </a:xfrm>
           <a:prstGeom xmlns:a="http://schemas.openxmlformats.org/drawingml/2006/main" prst="rect">
             <a:avLst/>
@@ -2742,7 +2813,7 @@
           <p:cNvPr id="6" name="">
             <a:extLst xmlns:a="http://schemas.openxmlformats.org/drawingml/2006/main">
               <a:ext uri="{FF2B5EF4-FFF2-40B4-BE49-F238E27FC236}">
-                <a16:creationId xmlns:a16="http://schemas.microsoft.com/office/drawing/2014/main" id="{8E33C5E0-D39D-4A3D-9D9F-A366AEE9BDC3}"/>
+                <a16:creationId xmlns:a16="http://schemas.microsoft.com/office/drawing/2014/main" id="{937FEB36-2968-49ED-AA2B-596A44687713}"/>
               </a:ext>
             </a:extLst>
           </p:cNvPr>
@@ -2753,8 +2824,8 @@
         </p:nvSpPr>
         <p:spPr>
           <a:xfrm xmlns:a="http://schemas.openxmlformats.org/drawingml/2006/main">
-            <a:off x="619125" y="5791200"/>
-            <a:ext cx="10953750" cy="561975"/>
+            <a:off x="619125" y="6191250"/>
+            <a:ext cx="10953750" cy="285750"/>
           </a:xfrm>
           <a:prstGeom xmlns:a="http://schemas.openxmlformats.org/drawingml/2006/main" prst="rect">
             <a:avLst/>
@@ -2766,30 +2837,30 @@
         </p:spPr>
         <p:txBody>
           <a:bodyPr xmlns:a="http://schemas.openxmlformats.org/drawingml/2006/main">
-            <a:normAutofit fontScale="100000"/>
+            <a:normAutofit fontScale="94444"/>
           </a:bodyPr>
           <a:lstStyle xmlns:a="http://schemas.openxmlformats.org/drawingml/2006/main"/>
           <a:p xmlns:a="http://schemas.openxmlformats.org/drawingml/2006/main">
             <a:pPr>
-              <a:defRPr sz="1650" b="1">
-                <a:solidFill>
-                  <a:srgbClr val="D55E00"/>
-                </a:solidFill>
-                <a:latin typeface="Microsoft JhengHei"/>
-                <a:ea typeface="Microsoft JhengHei"/>
-                <a:cs typeface="Microsoft JhengHei"/>
-              </a:defRPr>
-            </a:pPr>
-            <a:r>
-              <a:rPr sz="1650" b="1">
-                <a:solidFill>
-                  <a:srgbClr val="D55E00"/>
-                </a:solidFill>
-                <a:latin typeface="Microsoft JhengHei"/>
-                <a:ea typeface="Microsoft JhengHei"/>
-                <a:cs typeface="Microsoft JhengHei"/>
-              </a:rPr>
-              <a:t>Proteasome、mitophagy 均上調，兩組資料的完整 KEGG FDR 都小於 0.05。</a:t>
+              <a:defRPr sz="1350" b="0">
+                <a:solidFill>
+                  <a:srgbClr val="142F43"/>
+                </a:solidFill>
+                <a:latin typeface="Microsoft JhengHei"/>
+                <a:ea typeface="Microsoft JhengHei"/>
+                <a:cs typeface="Microsoft JhengHei"/>
+              </a:defRPr>
+            </a:pPr>
+            <a:r>
+              <a:rPr sz="1350" b="0">
+                <a:solidFill>
+                  <a:srgbClr val="142F43"/>
+                </a:solidFill>
+                <a:latin typeface="Microsoft JhengHei"/>
+                <a:ea typeface="Microsoft JhengHei"/>
+                <a:cs typeface="Microsoft JhengHei"/>
+              </a:rPr>
+              <a:t>Mitophagy 位於第 28 條。Single-cell FDR = 0.0132，bulk FDR = 0.0282。</a:t>
             </a:r>
           </a:p>
         </p:txBody>
@@ -2797,7 +2868,7 @@
     </p:spTree>
     <p:extLst>
       <p:ext uri="{BB962C8B-B14F-4D97-AF65-F5344CB8AC3E}">
-        <p14:creationId xmlns:p14="http://schemas.microsoft.com/office/powerpoint/2010/main" val="1479276253"/>
+        <p14:creationId xmlns:p14="http://schemas.microsoft.com/office/powerpoint/2010/main" val="251180789"/>
       </p:ext>
     </p:extLst>
   </p:cSld>
@@ -2825,10 +2896,10 @@
       </p:grpSpPr>
       <p:sp>
         <p:nvSpPr>
-          <p:cNvPr id="8" name="">
+          <p:cNvPr id="7" name="">
             <a:extLst xmlns:a="http://schemas.openxmlformats.org/drawingml/2006/main">
               <a:ext uri="{FF2B5EF4-FFF2-40B4-BE49-F238E27FC236}">
-                <a16:creationId xmlns:a16="http://schemas.microsoft.com/office/drawing/2014/main" id="{12B8CB02-5257-434D-909A-2D70F1C5FD71}"/>
+                <a16:creationId xmlns:a16="http://schemas.microsoft.com/office/drawing/2014/main" id="{5AD6739D-8028-45FD-946F-9EFFE3BE8B90}"/>
               </a:ext>
             </a:extLst>
           </p:cNvPr>
@@ -2875,7 +2946,7 @@
                 <a:ea typeface="Microsoft JhengHei"/>
                 <a:cs typeface="Microsoft JhengHei"/>
               </a:rPr>
-              <a:t>PAIRED DIRECTION</a:t>
+              <a:t>TARGET PATHWAYS</a:t>
             </a:r>
           </a:p>
         </p:txBody>
@@ -2885,7 +2956,7 @@
           <p:cNvPr id="2" name="">
             <a:extLst xmlns:a="http://schemas.openxmlformats.org/drawingml/2006/main">
               <a:ext uri="{FF2B5EF4-FFF2-40B4-BE49-F238E27FC236}">
-                <a16:creationId xmlns:a16="http://schemas.microsoft.com/office/drawing/2014/main" id="{DA9F256B-A29C-4BB5-A07F-D03909475925}"/>
+                <a16:creationId xmlns:a16="http://schemas.microsoft.com/office/drawing/2014/main" id="{9677DF46-6302-4306-9B68-3F01DFD855ED}"/>
               </a:ext>
             </a:extLst>
           </p:cNvPr>
@@ -2932,7 +3003,7 @@
                 <a:ea typeface="Microsoft JhengHei"/>
                 <a:cs typeface="Microsoft JhengHei"/>
               </a:rPr>
-              <a:t>三位病人的變化方向</a:t>
+              <a:t>Proteasome 與 mitophagy 的結果核對</a:t>
             </a:r>
           </a:p>
         </p:txBody>
@@ -2942,7 +3013,7 @@
           <p:cNvPr id="3" name="">
             <a:extLst xmlns:a="http://schemas.openxmlformats.org/drawingml/2006/main">
               <a:ext uri="{FF2B5EF4-FFF2-40B4-BE49-F238E27FC236}">
-                <a16:creationId xmlns:a16="http://schemas.microsoft.com/office/drawing/2014/main" id="{A5E5A68D-BBEE-4D32-B7AD-AAFDD731B600}"/>
+                <a16:creationId xmlns:a16="http://schemas.microsoft.com/office/drawing/2014/main" id="{2FD45CC3-0939-43EC-8E84-A04DCEE196E4}"/>
               </a:ext>
             </a:extLst>
           </p:cNvPr>
@@ -2999,7 +3070,7 @@
           <p:cNvPr id="4" name="">
             <a:extLst xmlns:a="http://schemas.openxmlformats.org/drawingml/2006/main">
               <a:ext uri="{FF2B5EF4-FFF2-40B4-BE49-F238E27FC236}">
-                <a16:creationId xmlns:a16="http://schemas.microsoft.com/office/drawing/2014/main" id="{4BBDAC00-A282-48CD-AADC-89B5CCA0B19A}"/>
+                <a16:creationId xmlns:a16="http://schemas.microsoft.com/office/drawing/2014/main" id="{01C0D05B-6291-4220-9D7A-C7532218FD16}"/>
               </a:ext>
             </a:extLst>
           </p:cNvPr>
@@ -3053,20 +3124,20 @@
       </p:sp>
       <p:pic>
         <p:nvPicPr>
-          <p:cNvPr id="12" name=""/>
+          <p:cNvPr id="11" name=""/>
           <p:cNvPicPr>
             <a:picLocks xmlns:a="http://schemas.openxmlformats.org/drawingml/2006/main" noChangeAspect="1"/>
           </p:cNvPicPr>
           <p:nvPr/>
         </p:nvPicPr>
         <p:blipFill>
-          <a:blip xmlns:r="http://schemas.openxmlformats.org/officeDocument/2006/relationships" xmlns:a="http://schemas.openxmlformats.org/drawingml/2006/main" r:embed="R25388103743748b3"/>
+          <a:blip xmlns:r="http://schemas.openxmlformats.org/officeDocument/2006/relationships" xmlns:a="http://schemas.openxmlformats.org/drawingml/2006/main" r:embed="R3f44a7801bfa485f"/>
           <a:stretch xmlns:a="http://schemas.openxmlformats.org/drawingml/2006/main"/>
         </p:blipFill>
         <p:spPr>
           <a:xfrm xmlns:a="http://schemas.openxmlformats.org/drawingml/2006/main">
-            <a:off x="445943" y="1190625"/>
-            <a:ext cx="8442614" cy="4953000"/>
+            <a:off x="2122289" y="1362075"/>
+            <a:ext cx="7947422" cy="4238625"/>
           </a:xfrm>
           <a:prstGeom xmlns:a="http://schemas.openxmlformats.org/drawingml/2006/main" prst="rect">
             <a:avLst/>
@@ -3078,7 +3149,7 @@
           <p:cNvPr id="6" name="">
             <a:extLst xmlns:a="http://schemas.openxmlformats.org/drawingml/2006/main">
               <a:ext uri="{FF2B5EF4-FFF2-40B4-BE49-F238E27FC236}">
-                <a16:creationId xmlns:a16="http://schemas.microsoft.com/office/drawing/2014/main" id="{33D19D66-5BD8-4E65-AAFC-A2349521F3DE}"/>
+                <a16:creationId xmlns:a16="http://schemas.microsoft.com/office/drawing/2014/main" id="{91488D28-98AE-498C-B876-ECD76EC87DC9}"/>
               </a:ext>
             </a:extLst>
           </p:cNvPr>
@@ -3089,8 +3160,8 @@
         </p:nvSpPr>
         <p:spPr>
           <a:xfrm xmlns:a="http://schemas.openxmlformats.org/drawingml/2006/main">
-            <a:off x="9239250" y="1905000"/>
-            <a:ext cx="2476500" cy="619125"/>
+            <a:off x="619125" y="5791200"/>
+            <a:ext cx="10953750" cy="561975"/>
           </a:xfrm>
           <a:prstGeom xmlns:a="http://schemas.openxmlformats.org/drawingml/2006/main" prst="rect">
             <a:avLst/>
@@ -3107,110 +3178,25 @@
           <a:lstStyle xmlns:a="http://schemas.openxmlformats.org/drawingml/2006/main"/>
           <a:p xmlns:a="http://schemas.openxmlformats.org/drawingml/2006/main">
             <a:pPr>
-              <a:defRPr sz="1875" b="1">
-                <a:solidFill>
-                  <a:srgbClr val="142F43"/>
-                </a:solidFill>
-                <a:latin typeface="Microsoft JhengHei"/>
-                <a:ea typeface="Microsoft JhengHei"/>
-                <a:cs typeface="Microsoft JhengHei"/>
-              </a:defRPr>
-            </a:pPr>
-            <a:r>
-              <a:rPr sz="1875" b="1">
-                <a:solidFill>
-                  <a:srgbClr val="142F43"/>
-                </a:solidFill>
-                <a:latin typeface="Microsoft JhengHei"/>
-                <a:ea typeface="Microsoft JhengHei"/>
-                <a:cs typeface="Microsoft JhengHei"/>
-              </a:rPr>
-              <a:t>每條線是一位病人</a:t>
-            </a:r>
-          </a:p>
-        </p:txBody>
-      </p:sp>
-      <p:sp>
-        <p:nvSpPr>
-          <p:cNvPr id="7" name="">
-            <a:extLst xmlns:a="http://schemas.openxmlformats.org/drawingml/2006/main">
-              <a:ext uri="{FF2B5EF4-FFF2-40B4-BE49-F238E27FC236}">
-                <a16:creationId xmlns:a16="http://schemas.microsoft.com/office/drawing/2014/main" id="{88378425-E98D-456B-B9C4-4A99F125D1F1}"/>
-              </a:ext>
-            </a:extLst>
-          </p:cNvPr>
-          <p:cNvSpPr>
-            <a:spLocks xmlns:a="http://schemas.openxmlformats.org/drawingml/2006/main" noGrp="1"/>
-          </p:cNvSpPr>
-          <p:nvPr/>
-        </p:nvSpPr>
-        <p:spPr>
-          <a:xfrm xmlns:a="http://schemas.openxmlformats.org/drawingml/2006/main">
-            <a:off x="9239250" y="2857500"/>
-            <a:ext cx="2476500" cy="2190750"/>
-          </a:xfrm>
-          <a:prstGeom xmlns:a="http://schemas.openxmlformats.org/drawingml/2006/main" prst="rect">
-            <a:avLst/>
-          </a:prstGeom>
-          <a:noFill xmlns:a="http://schemas.openxmlformats.org/drawingml/2006/main"/>
-          <a:ln xmlns:a="http://schemas.openxmlformats.org/drawingml/2006/main" w="0">
-            <a:noFill/>
-          </a:ln>
-        </p:spPr>
-        <p:txBody>
-          <a:bodyPr xmlns:a="http://schemas.openxmlformats.org/drawingml/2006/main">
-            <a:normAutofit fontScale="100000"/>
-          </a:bodyPr>
-          <a:lstStyle xmlns:a="http://schemas.openxmlformats.org/drawingml/2006/main"/>
-          <a:p xmlns:a="http://schemas.openxmlformats.org/drawingml/2006/main">
-            <a:pPr>
-              <a:defRPr sz="1650" b="0">
-                <a:solidFill>
-                  <a:srgbClr val="142F43"/>
-                </a:solidFill>
-                <a:latin typeface="Microsoft JhengHei"/>
-                <a:ea typeface="Microsoft JhengHei"/>
-                <a:cs typeface="Microsoft JhengHei"/>
-              </a:defRPr>
-            </a:pPr>
-            <a:r>
-              <a:rPr sz="1650" b="0">
-                <a:solidFill>
-                  <a:srgbClr val="142F43"/>
-                </a:solidFill>
-                <a:latin typeface="Microsoft JhengHei"/>
-                <a:ea typeface="Microsoft JhengHei"/>
-                <a:cs typeface="Microsoft JhengHei"/>
-              </a:rPr>
-              <a:t>Leading-edge genes 由同一份 GSEA 選出。</a:t>
-            </a:r>
-          </a:p>
-          <a:p xmlns:a="http://schemas.openxmlformats.org/drawingml/2006/main">
-            <a:r>
-              <a:t/>
-            </a:r>
-          </a:p>
-          <a:p xmlns:a="http://schemas.openxmlformats.org/drawingml/2006/main">
-            <a:pPr>
-              <a:defRPr sz="1650" b="0">
-                <a:solidFill>
-                  <a:srgbClr val="142F43"/>
-                </a:solidFill>
-                <a:latin typeface="Microsoft JhengHei"/>
-                <a:ea typeface="Microsoft JhengHei"/>
-                <a:cs typeface="Microsoft JhengHei"/>
-              </a:defRPr>
-            </a:pPr>
-            <a:r>
-              <a:rPr sz="1650" b="0">
-                <a:solidFill>
-                  <a:srgbClr val="142F43"/>
-                </a:solidFill>
-                <a:latin typeface="Microsoft JhengHei"/>
-                <a:ea typeface="Microsoft JhengHei"/>
-                <a:cs typeface="Microsoft JhengHei"/>
-              </a:rPr>
-              <a:t>這裡只描述三位病人的方向，不作額外的獨立驗證。</a:t>
+              <a:defRPr sz="1650" b="1">
+                <a:solidFill>
+                  <a:srgbClr val="D55E00"/>
+                </a:solidFill>
+                <a:latin typeface="Microsoft JhengHei"/>
+                <a:ea typeface="Microsoft JhengHei"/>
+                <a:cs typeface="Microsoft JhengHei"/>
+              </a:defRPr>
+            </a:pPr>
+            <a:r>
+              <a:rPr sz="1650" b="1">
+                <a:solidFill>
+                  <a:srgbClr val="D55E00"/>
+                </a:solidFill>
+                <a:latin typeface="Microsoft JhengHei"/>
+                <a:ea typeface="Microsoft JhengHei"/>
+                <a:cs typeface="Microsoft JhengHei"/>
+              </a:rPr>
+              <a:t>Proteasome、mitophagy 均上調，兩組資料的完整 KEGG FDR 都小於 0.05。</a:t>
             </a:r>
           </a:p>
         </p:txBody>
@@ -3218,7 +3204,7 @@
     </p:spTree>
     <p:extLst>
       <p:ext uri="{BB962C8B-B14F-4D97-AF65-F5344CB8AC3E}">
-        <p14:creationId xmlns:p14="http://schemas.microsoft.com/office/powerpoint/2010/main" val="1241329555"/>
+        <p14:creationId xmlns:p14="http://schemas.microsoft.com/office/powerpoint/2010/main" val="1317863225"/>
       </p:ext>
     </p:extLst>
   </p:cSld>
@@ -3246,10 +3232,10 @@
       </p:grpSpPr>
       <p:sp>
         <p:nvSpPr>
-          <p:cNvPr id="9" name="">
+          <p:cNvPr id="8" name="">
             <a:extLst xmlns:a="http://schemas.openxmlformats.org/drawingml/2006/main">
               <a:ext uri="{FF2B5EF4-FFF2-40B4-BE49-F238E27FC236}">
-                <a16:creationId xmlns:a16="http://schemas.microsoft.com/office/drawing/2014/main" id="{16E4BF93-4904-4CFE-A168-264AD43FFBEC}"/>
+                <a16:creationId xmlns:a16="http://schemas.microsoft.com/office/drawing/2014/main" id="{EAFDFD02-A2B2-4D6F-BD1C-909C6FF26F01}"/>
               </a:ext>
             </a:extLst>
           </p:cNvPr>
@@ -3296,7 +3282,7 @@
                 <a:ea typeface="Microsoft JhengHei"/>
                 <a:cs typeface="Microsoft JhengHei"/>
               </a:rPr>
-              <a:t>CUTOFF INTERPRETATION</a:t>
+              <a:t>PAIRED DIRECTION</a:t>
             </a:r>
           </a:p>
         </p:txBody>
@@ -3306,7 +3292,7 @@
           <p:cNvPr id="2" name="">
             <a:extLst xmlns:a="http://schemas.openxmlformats.org/drawingml/2006/main">
               <a:ext uri="{FF2B5EF4-FFF2-40B4-BE49-F238E27FC236}">
-                <a16:creationId xmlns:a16="http://schemas.microsoft.com/office/drawing/2014/main" id="{DC4E71E9-075A-441D-BFA4-B928E5E43046}"/>
+                <a16:creationId xmlns:a16="http://schemas.microsoft.com/office/drawing/2014/main" id="{5E1AC2A5-43A5-4526-82C3-664B0D45091E}"/>
               </a:ext>
             </a:extLst>
           </p:cNvPr>
@@ -3353,7 +3339,7 @@
                 <a:ea typeface="Microsoft JhengHei"/>
                 <a:cs typeface="Microsoft JhengHei"/>
               </a:rPr>
-              <a:t>CNV top 15% 設定與 reference 對照</a:t>
+              <a:t>三位病人的變化方向</a:t>
             </a:r>
           </a:p>
         </p:txBody>
@@ -3363,7 +3349,7 @@
           <p:cNvPr id="3" name="">
             <a:extLst xmlns:a="http://schemas.openxmlformats.org/drawingml/2006/main">
               <a:ext uri="{FF2B5EF4-FFF2-40B4-BE49-F238E27FC236}">
-                <a16:creationId xmlns:a16="http://schemas.microsoft.com/office/drawing/2014/main" id="{ADBFA3F9-2002-4E63-8CCB-7687217D1DB6}"/>
+                <a16:creationId xmlns:a16="http://schemas.microsoft.com/office/drawing/2014/main" id="{41FF9BE0-0B89-4E6C-BFA0-4F2150322561}"/>
               </a:ext>
             </a:extLst>
           </p:cNvPr>
@@ -3420,7 +3406,7 @@
           <p:cNvPr id="4" name="">
             <a:extLst xmlns:a="http://schemas.openxmlformats.org/drawingml/2006/main">
               <a:ext uri="{FF2B5EF4-FFF2-40B4-BE49-F238E27FC236}">
-                <a16:creationId xmlns:a16="http://schemas.microsoft.com/office/drawing/2014/main" id="{E77A0E46-2EC3-4566-BF4E-0D97F1B54169}"/>
+                <a16:creationId xmlns:a16="http://schemas.microsoft.com/office/drawing/2014/main" id="{25BEAA8F-1092-4694-A7B9-4623CA62B3DC}"/>
               </a:ext>
             </a:extLst>
           </p:cNvPr>
@@ -3472,12 +3458,433 @@
           </a:p>
         </p:txBody>
       </p:sp>
+      <p:pic>
+        <p:nvPicPr>
+          <p:cNvPr id="12" name=""/>
+          <p:cNvPicPr>
+            <a:picLocks xmlns:a="http://schemas.openxmlformats.org/drawingml/2006/main" noChangeAspect="1"/>
+          </p:cNvPicPr>
+          <p:nvPr/>
+        </p:nvPicPr>
+        <p:blipFill>
+          <a:blip xmlns:r="http://schemas.openxmlformats.org/officeDocument/2006/relationships" xmlns:a="http://schemas.openxmlformats.org/drawingml/2006/main" r:embed="Rc7155f9de3334533"/>
+          <a:stretch xmlns:a="http://schemas.openxmlformats.org/drawingml/2006/main"/>
+        </p:blipFill>
+        <p:spPr>
+          <a:xfrm xmlns:a="http://schemas.openxmlformats.org/drawingml/2006/main">
+            <a:off x="445943" y="1190625"/>
+            <a:ext cx="8442614" cy="4953000"/>
+          </a:xfrm>
+          <a:prstGeom xmlns:a="http://schemas.openxmlformats.org/drawingml/2006/main" prst="rect">
+            <a:avLst/>
+          </a:prstGeom>
+        </p:spPr>
+      </p:pic>
+      <p:sp>
+        <p:nvSpPr>
+          <p:cNvPr id="6" name="">
+            <a:extLst xmlns:a="http://schemas.openxmlformats.org/drawingml/2006/main">
+              <a:ext uri="{FF2B5EF4-FFF2-40B4-BE49-F238E27FC236}">
+                <a16:creationId xmlns:a16="http://schemas.microsoft.com/office/drawing/2014/main" id="{FB1673DC-F9F3-4C15-B598-21BA31B6C16C}"/>
+              </a:ext>
+            </a:extLst>
+          </p:cNvPr>
+          <p:cNvSpPr>
+            <a:spLocks xmlns:a="http://schemas.openxmlformats.org/drawingml/2006/main" noGrp="1"/>
+          </p:cNvSpPr>
+          <p:nvPr/>
+        </p:nvSpPr>
+        <p:spPr>
+          <a:xfrm xmlns:a="http://schemas.openxmlformats.org/drawingml/2006/main">
+            <a:off x="9239250" y="1905000"/>
+            <a:ext cx="2476500" cy="619125"/>
+          </a:xfrm>
+          <a:prstGeom xmlns:a="http://schemas.openxmlformats.org/drawingml/2006/main" prst="rect">
+            <a:avLst/>
+          </a:prstGeom>
+          <a:noFill xmlns:a="http://schemas.openxmlformats.org/drawingml/2006/main"/>
+          <a:ln xmlns:a="http://schemas.openxmlformats.org/drawingml/2006/main" w="0">
+            <a:noFill/>
+          </a:ln>
+        </p:spPr>
+        <p:txBody>
+          <a:bodyPr xmlns:a="http://schemas.openxmlformats.org/drawingml/2006/main">
+            <a:normAutofit fontScale="100000"/>
+          </a:bodyPr>
+          <a:lstStyle xmlns:a="http://schemas.openxmlformats.org/drawingml/2006/main"/>
+          <a:p xmlns:a="http://schemas.openxmlformats.org/drawingml/2006/main">
+            <a:pPr>
+              <a:defRPr sz="1875" b="1">
+                <a:solidFill>
+                  <a:srgbClr val="142F43"/>
+                </a:solidFill>
+                <a:latin typeface="Microsoft JhengHei"/>
+                <a:ea typeface="Microsoft JhengHei"/>
+                <a:cs typeface="Microsoft JhengHei"/>
+              </a:defRPr>
+            </a:pPr>
+            <a:r>
+              <a:rPr sz="1875" b="1">
+                <a:solidFill>
+                  <a:srgbClr val="142F43"/>
+                </a:solidFill>
+                <a:latin typeface="Microsoft JhengHei"/>
+                <a:ea typeface="Microsoft JhengHei"/>
+                <a:cs typeface="Microsoft JhengHei"/>
+              </a:rPr>
+              <a:t>每條線是一位病人</a:t>
+            </a:r>
+          </a:p>
+        </p:txBody>
+      </p:sp>
+      <p:sp>
+        <p:nvSpPr>
+          <p:cNvPr id="7" name="">
+            <a:extLst xmlns:a="http://schemas.openxmlformats.org/drawingml/2006/main">
+              <a:ext uri="{FF2B5EF4-FFF2-40B4-BE49-F238E27FC236}">
+                <a16:creationId xmlns:a16="http://schemas.microsoft.com/office/drawing/2014/main" id="{1552A820-E265-4E1E-AF48-07FCB494E0C3}"/>
+              </a:ext>
+            </a:extLst>
+          </p:cNvPr>
+          <p:cNvSpPr>
+            <a:spLocks xmlns:a="http://schemas.openxmlformats.org/drawingml/2006/main" noGrp="1"/>
+          </p:cNvSpPr>
+          <p:nvPr/>
+        </p:nvSpPr>
+        <p:spPr>
+          <a:xfrm xmlns:a="http://schemas.openxmlformats.org/drawingml/2006/main">
+            <a:off x="9239250" y="2857500"/>
+            <a:ext cx="2476500" cy="2190750"/>
+          </a:xfrm>
+          <a:prstGeom xmlns:a="http://schemas.openxmlformats.org/drawingml/2006/main" prst="rect">
+            <a:avLst/>
+          </a:prstGeom>
+          <a:noFill xmlns:a="http://schemas.openxmlformats.org/drawingml/2006/main"/>
+          <a:ln xmlns:a="http://schemas.openxmlformats.org/drawingml/2006/main" w="0">
+            <a:noFill/>
+          </a:ln>
+        </p:spPr>
+        <p:txBody>
+          <a:bodyPr xmlns:a="http://schemas.openxmlformats.org/drawingml/2006/main">
+            <a:normAutofit fontScale="100000"/>
+          </a:bodyPr>
+          <a:lstStyle xmlns:a="http://schemas.openxmlformats.org/drawingml/2006/main"/>
+          <a:p xmlns:a="http://schemas.openxmlformats.org/drawingml/2006/main">
+            <a:pPr>
+              <a:defRPr sz="1650" b="0">
+                <a:solidFill>
+                  <a:srgbClr val="142F43"/>
+                </a:solidFill>
+                <a:latin typeface="Microsoft JhengHei"/>
+                <a:ea typeface="Microsoft JhengHei"/>
+                <a:cs typeface="Microsoft JhengHei"/>
+              </a:defRPr>
+            </a:pPr>
+            <a:r>
+              <a:rPr sz="1650" b="0">
+                <a:solidFill>
+                  <a:srgbClr val="142F43"/>
+                </a:solidFill>
+                <a:latin typeface="Microsoft JhengHei"/>
+                <a:ea typeface="Microsoft JhengHei"/>
+                <a:cs typeface="Microsoft JhengHei"/>
+              </a:rPr>
+              <a:t>Leading-edge genes 由同一份 GSEA 選出。</a:t>
+            </a:r>
+          </a:p>
+          <a:p xmlns:a="http://schemas.openxmlformats.org/drawingml/2006/main">
+            <a:r>
+              <a:t/>
+            </a:r>
+          </a:p>
+          <a:p xmlns:a="http://schemas.openxmlformats.org/drawingml/2006/main">
+            <a:pPr>
+              <a:defRPr sz="1650" b="0">
+                <a:solidFill>
+                  <a:srgbClr val="142F43"/>
+                </a:solidFill>
+                <a:latin typeface="Microsoft JhengHei"/>
+                <a:ea typeface="Microsoft JhengHei"/>
+                <a:cs typeface="Microsoft JhengHei"/>
+              </a:defRPr>
+            </a:pPr>
+            <a:r>
+              <a:rPr sz="1650" b="0">
+                <a:solidFill>
+                  <a:srgbClr val="142F43"/>
+                </a:solidFill>
+                <a:latin typeface="Microsoft JhengHei"/>
+                <a:ea typeface="Microsoft JhengHei"/>
+                <a:cs typeface="Microsoft JhengHei"/>
+              </a:rPr>
+              <a:t>這裡只描述三位病人的方向，不作額外的獨立驗證。</a:t>
+            </a:r>
+          </a:p>
+        </p:txBody>
+      </p:sp>
+    </p:spTree>
+    <p:extLst>
+      <p:ext uri="{BB962C8B-B14F-4D97-AF65-F5344CB8AC3E}">
+        <p14:creationId xmlns:p14="http://schemas.microsoft.com/office/powerpoint/2010/main" val="429133491"/>
+      </p:ext>
+    </p:extLst>
+  </p:cSld>
+</p:sld>
+</file>
+
+<file path=ppt/slides/slide13.xml><?xml version="1.0" encoding="utf-8"?>
+<p:sld xmlns:p="http://schemas.openxmlformats.org/presentationml/2006/main">
+  <p:cSld>
+    <p:bg>
+      <p:bgPr>
+        <a:solidFill xmlns:a="http://schemas.openxmlformats.org/drawingml/2006/main">
+          <a:srgbClr val="FFFFFF"/>
+        </a:solidFill>
+      </p:bgPr>
+    </p:bg>
+    <p:spTree>
+      <p:nvGrpSpPr>
+        <p:cNvPr id="1" name=""/>
+        <p:cNvGrpSpPr/>
+        <p:nvPr/>
+      </p:nvGrpSpPr>
+      <p:grpSpPr>
+        <a:xfrm xmlns:a="http://schemas.openxmlformats.org/drawingml/2006/main"/>
+      </p:grpSpPr>
+      <p:sp>
+        <p:nvSpPr>
+          <p:cNvPr id="9" name="">
+            <a:extLst xmlns:a="http://schemas.openxmlformats.org/drawingml/2006/main">
+              <a:ext uri="{FF2B5EF4-FFF2-40B4-BE49-F238E27FC236}">
+                <a16:creationId xmlns:a16="http://schemas.microsoft.com/office/drawing/2014/main" id="{321236D8-FB1E-4557-80CC-AB72AFBB6E21}"/>
+              </a:ext>
+            </a:extLst>
+          </p:cNvPr>
+          <p:cNvSpPr>
+            <a:spLocks xmlns:a="http://schemas.openxmlformats.org/drawingml/2006/main" noGrp="1"/>
+          </p:cNvSpPr>
+          <p:nvPr/>
+        </p:nvSpPr>
+        <p:spPr>
+          <a:xfrm xmlns:a="http://schemas.openxmlformats.org/drawingml/2006/main">
+            <a:off x="476250" y="190500"/>
+            <a:ext cx="10477500" cy="209550"/>
+          </a:xfrm>
+          <a:prstGeom xmlns:a="http://schemas.openxmlformats.org/drawingml/2006/main" prst="rect">
+            <a:avLst/>
+          </a:prstGeom>
+          <a:noFill xmlns:a="http://schemas.openxmlformats.org/drawingml/2006/main"/>
+          <a:ln xmlns:a="http://schemas.openxmlformats.org/drawingml/2006/main" w="0">
+            <a:noFill/>
+          </a:ln>
+        </p:spPr>
+        <p:txBody>
+          <a:bodyPr xmlns:a="http://schemas.openxmlformats.org/drawingml/2006/main">
+            <a:normAutofit fontScale="79487"/>
+          </a:bodyPr>
+          <a:lstStyle xmlns:a="http://schemas.openxmlformats.org/drawingml/2006/main"/>
+          <a:p xmlns:a="http://schemas.openxmlformats.org/drawingml/2006/main">
+            <a:pPr>
+              <a:defRPr sz="975" b="1">
+                <a:solidFill>
+                  <a:srgbClr val="D55E00"/>
+                </a:solidFill>
+                <a:latin typeface="Microsoft JhengHei"/>
+                <a:ea typeface="Microsoft JhengHei"/>
+                <a:cs typeface="Microsoft JhengHei"/>
+              </a:defRPr>
+            </a:pPr>
+            <a:r>
+              <a:rPr sz="975" b="1">
+                <a:solidFill>
+                  <a:srgbClr val="D55E00"/>
+                </a:solidFill>
+                <a:latin typeface="Microsoft JhengHei"/>
+                <a:ea typeface="Microsoft JhengHei"/>
+                <a:cs typeface="Microsoft JhengHei"/>
+              </a:rPr>
+              <a:t>CUTOFF INTERPRETATION</a:t>
+            </a:r>
+          </a:p>
+        </p:txBody>
+      </p:sp>
+      <p:sp>
+        <p:nvSpPr>
+          <p:cNvPr id="2" name="">
+            <a:extLst xmlns:a="http://schemas.openxmlformats.org/drawingml/2006/main">
+              <a:ext uri="{FF2B5EF4-FFF2-40B4-BE49-F238E27FC236}">
+                <a16:creationId xmlns:a16="http://schemas.microsoft.com/office/drawing/2014/main" id="{46A21852-B7D9-4EB2-90F7-0DCFA28D4ED5}"/>
+              </a:ext>
+            </a:extLst>
+          </p:cNvPr>
+          <p:cNvSpPr>
+            <a:spLocks xmlns:a="http://schemas.openxmlformats.org/drawingml/2006/main" noGrp="1"/>
+          </p:cNvSpPr>
+          <p:nvPr/>
+        </p:nvSpPr>
+        <p:spPr>
+          <a:xfrm xmlns:a="http://schemas.openxmlformats.org/drawingml/2006/main">
+            <a:off x="476250" y="523875"/>
+            <a:ext cx="11144250" cy="476250"/>
+          </a:xfrm>
+          <a:prstGeom xmlns:a="http://schemas.openxmlformats.org/drawingml/2006/main" prst="rect">
+            <a:avLst/>
+          </a:prstGeom>
+          <a:noFill xmlns:a="http://schemas.openxmlformats.org/drawingml/2006/main"/>
+          <a:ln xmlns:a="http://schemas.openxmlformats.org/drawingml/2006/main" w="0">
+            <a:noFill/>
+          </a:ln>
+        </p:spPr>
+        <p:txBody>
+          <a:bodyPr xmlns:a="http://schemas.openxmlformats.org/drawingml/2006/main">
+            <a:normAutofit fontScale="100000"/>
+          </a:bodyPr>
+          <a:lstStyle xmlns:a="http://schemas.openxmlformats.org/drawingml/2006/main"/>
+          <a:p xmlns:a="http://schemas.openxmlformats.org/drawingml/2006/main">
+            <a:pPr>
+              <a:defRPr sz="2400" b="1">
+                <a:solidFill>
+                  <a:srgbClr val="142F43"/>
+                </a:solidFill>
+                <a:latin typeface="Microsoft JhengHei"/>
+                <a:ea typeface="Microsoft JhengHei"/>
+                <a:cs typeface="Microsoft JhengHei"/>
+              </a:defRPr>
+            </a:pPr>
+            <a:r>
+              <a:rPr sz="2400" b="1">
+                <a:solidFill>
+                  <a:srgbClr val="142F43"/>
+                </a:solidFill>
+                <a:latin typeface="Microsoft JhengHei"/>
+                <a:ea typeface="Microsoft JhengHei"/>
+                <a:cs typeface="Microsoft JhengHei"/>
+              </a:rPr>
+              <a:t>CNV top 15% 設定與 reference 對照</a:t>
+            </a:r>
+          </a:p>
+        </p:txBody>
+      </p:sp>
+      <p:sp>
+        <p:nvSpPr>
+          <p:cNvPr id="3" name="">
+            <a:extLst xmlns:a="http://schemas.openxmlformats.org/drawingml/2006/main">
+              <a:ext uri="{FF2B5EF4-FFF2-40B4-BE49-F238E27FC236}">
+                <a16:creationId xmlns:a16="http://schemas.microsoft.com/office/drawing/2014/main" id="{0C3FB69E-FC5D-4853-A2BA-302591086F7A}"/>
+              </a:ext>
+            </a:extLst>
+          </p:cNvPr>
+          <p:cNvSpPr>
+            <a:spLocks xmlns:a="http://schemas.openxmlformats.org/drawingml/2006/main" noGrp="1"/>
+          </p:cNvSpPr>
+          <p:nvPr/>
+        </p:nvSpPr>
+        <p:spPr>
+          <a:xfrm xmlns:a="http://schemas.openxmlformats.org/drawingml/2006/main">
+            <a:off x="476250" y="6543675"/>
+            <a:ext cx="10287000" cy="171450"/>
+          </a:xfrm>
+          <a:prstGeom xmlns:a="http://schemas.openxmlformats.org/drawingml/2006/main" prst="rect">
+            <a:avLst/>
+          </a:prstGeom>
+          <a:noFill xmlns:a="http://schemas.openxmlformats.org/drawingml/2006/main"/>
+          <a:ln xmlns:a="http://schemas.openxmlformats.org/drawingml/2006/main" w="0">
+            <a:noFill/>
+          </a:ln>
+        </p:spPr>
+        <p:txBody>
+          <a:bodyPr xmlns:a="http://schemas.openxmlformats.org/drawingml/2006/main">
+            <a:normAutofit fontScale="63636"/>
+          </a:bodyPr>
+          <a:lstStyle xmlns:a="http://schemas.openxmlformats.org/drawingml/2006/main"/>
+          <a:p xmlns:a="http://schemas.openxmlformats.org/drawingml/2006/main">
+            <a:pPr>
+              <a:defRPr sz="825" b="0">
+                <a:solidFill>
+                  <a:srgbClr val="4D5B66"/>
+                </a:solidFill>
+                <a:latin typeface="Microsoft JhengHei"/>
+                <a:ea typeface="Microsoft JhengHei"/>
+                <a:cs typeface="Microsoft JhengHei"/>
+              </a:defRPr>
+            </a:pPr>
+            <a:r>
+              <a:rPr sz="825" b="0">
+                <a:solidFill>
+                  <a:srgbClr val="4D5B66"/>
+                </a:solidFill>
+                <a:latin typeface="Microsoft JhengHei"/>
+                <a:ea typeface="Microsoft JhengHei"/>
+                <a:cs typeface="Microsoft JhengHei"/>
+              </a:rPr>
+              <a:t>GSE262271 / GSE218858  |  Reviewed 15 September 2026</a:t>
+            </a:r>
+          </a:p>
+        </p:txBody>
+      </p:sp>
+      <p:sp>
+        <p:nvSpPr>
+          <p:cNvPr id="4" name="">
+            <a:extLst xmlns:a="http://schemas.openxmlformats.org/drawingml/2006/main">
+              <a:ext uri="{FF2B5EF4-FFF2-40B4-BE49-F238E27FC236}">
+                <a16:creationId xmlns:a16="http://schemas.microsoft.com/office/drawing/2014/main" id="{359327B8-83C0-4826-9705-87F39F2BFC30}"/>
+              </a:ext>
+            </a:extLst>
+          </p:cNvPr>
+          <p:cNvSpPr>
+            <a:spLocks xmlns:a="http://schemas.openxmlformats.org/drawingml/2006/main" noGrp="1"/>
+          </p:cNvSpPr>
+          <p:nvPr/>
+        </p:nvSpPr>
+        <p:spPr>
+          <a:xfrm xmlns:a="http://schemas.openxmlformats.org/drawingml/2006/main">
+            <a:off x="11334750" y="6543675"/>
+            <a:ext cx="381000" cy="171450"/>
+          </a:xfrm>
+          <a:prstGeom xmlns:a="http://schemas.openxmlformats.org/drawingml/2006/main" prst="rect">
+            <a:avLst/>
+          </a:prstGeom>
+          <a:noFill xmlns:a="http://schemas.openxmlformats.org/drawingml/2006/main"/>
+          <a:ln xmlns:a="http://schemas.openxmlformats.org/drawingml/2006/main" w="0">
+            <a:noFill/>
+          </a:ln>
+        </p:spPr>
+        <p:txBody>
+          <a:bodyPr xmlns:a="http://schemas.openxmlformats.org/drawingml/2006/main">
+            <a:normAutofit fontScale="63636"/>
+          </a:bodyPr>
+          <a:lstStyle xmlns:a="http://schemas.openxmlformats.org/drawingml/2006/main"/>
+          <a:p xmlns:a="http://schemas.openxmlformats.org/drawingml/2006/main">
+            <a:pPr>
+              <a:defRPr sz="825" b="0">
+                <a:solidFill>
+                  <a:srgbClr val="142F43"/>
+                </a:solidFill>
+                <a:latin typeface="Microsoft JhengHei"/>
+                <a:ea typeface="Microsoft JhengHei"/>
+                <a:cs typeface="Microsoft JhengHei"/>
+              </a:defRPr>
+            </a:pPr>
+            <a:r>
+              <a:rPr sz="825" b="0">
+                <a:solidFill>
+                  <a:srgbClr val="142F43"/>
+                </a:solidFill>
+                <a:latin typeface="Microsoft JhengHei"/>
+                <a:ea typeface="Microsoft JhengHei"/>
+                <a:cs typeface="Microsoft JhengHei"/>
+              </a:rPr>
+              <a:t>13</a:t>
+            </a:r>
+          </a:p>
+        </p:txBody>
+      </p:sp>
       <p:sp>
         <p:nvSpPr>
           <p:cNvPr id="5" name="">
             <a:extLst xmlns:a="http://schemas.openxmlformats.org/drawingml/2006/main">
               <a:ext uri="{FF2B5EF4-FFF2-40B4-BE49-F238E27FC236}">
-                <a16:creationId xmlns:a16="http://schemas.microsoft.com/office/drawing/2014/main" id="{E7BC03BA-BAA7-4829-B6A5-AC8145BF22E0}"/>
+                <a16:creationId xmlns:a16="http://schemas.microsoft.com/office/drawing/2014/main" id="{F960B70B-F035-4B04-A321-DE2F57BB4E13}"/>
               </a:ext>
             </a:extLst>
           </p:cNvPr>
@@ -3781,7 +4188,7 @@
           <p:cNvPr id="7" name="">
             <a:extLst xmlns:a="http://schemas.openxmlformats.org/drawingml/2006/main">
               <a:ext uri="{FF2B5EF4-FFF2-40B4-BE49-F238E27FC236}">
-                <a16:creationId xmlns:a16="http://schemas.microsoft.com/office/drawing/2014/main" id="{67465EEF-2553-4B36-A006-89BDD098131D}"/>
+                <a16:creationId xmlns:a16="http://schemas.microsoft.com/office/drawing/2014/main" id="{48618F6B-73F6-4DF0-9582-24A61344881A}"/>
               </a:ext>
             </a:extLst>
           </p:cNvPr>
@@ -3838,7 +4245,7 @@
           <p:cNvPr id="8" name="">
             <a:extLst xmlns:a="http://schemas.openxmlformats.org/drawingml/2006/main">
               <a:ext uri="{FF2B5EF4-FFF2-40B4-BE49-F238E27FC236}">
-                <a16:creationId xmlns:a16="http://schemas.microsoft.com/office/drawing/2014/main" id="{158ED145-073F-44BC-A535-02A3E63E1818}"/>
+                <a16:creationId xmlns:a16="http://schemas.microsoft.com/office/drawing/2014/main" id="{D091CFC0-FBA9-4B3E-AD70-A1C8E3B44D33}"/>
               </a:ext>
             </a:extLst>
           </p:cNvPr>
@@ -3893,435 +4300,7 @@
     </p:spTree>
     <p:extLst>
       <p:ext uri="{BB962C8B-B14F-4D97-AF65-F5344CB8AC3E}">
-        <p14:creationId xmlns:p14="http://schemas.microsoft.com/office/powerpoint/2010/main" val="1078628514"/>
-      </p:ext>
-    </p:extLst>
-  </p:cSld>
-</p:sld>
-</file>
-
-<file path=ppt/slides/slide13.xml><?xml version="1.0" encoding="utf-8"?>
-<p:sld xmlns:p="http://schemas.openxmlformats.org/presentationml/2006/main">
-  <p:cSld>
-    <p:bg>
-      <p:bgPr>
-        <a:solidFill xmlns:a="http://schemas.openxmlformats.org/drawingml/2006/main">
-          <a:srgbClr val="FFFFFF"/>
-        </a:solidFill>
-      </p:bgPr>
-    </p:bg>
-    <p:spTree>
-      <p:nvGrpSpPr>
-        <p:cNvPr id="1" name=""/>
-        <p:cNvGrpSpPr/>
-        <p:nvPr/>
-      </p:nvGrpSpPr>
-      <p:grpSpPr>
-        <a:xfrm xmlns:a="http://schemas.openxmlformats.org/drawingml/2006/main"/>
-      </p:grpSpPr>
-      <p:sp>
-        <p:nvSpPr>
-          <p:cNvPr id="8" name="">
-            <a:extLst xmlns:a="http://schemas.openxmlformats.org/drawingml/2006/main">
-              <a:ext uri="{FF2B5EF4-FFF2-40B4-BE49-F238E27FC236}">
-                <a16:creationId xmlns:a16="http://schemas.microsoft.com/office/drawing/2014/main" id="{41678ED5-EAC8-47C3-83D1-9FF178B6FAC5}"/>
-              </a:ext>
-            </a:extLst>
-          </p:cNvPr>
-          <p:cNvSpPr>
-            <a:spLocks xmlns:a="http://schemas.openxmlformats.org/drawingml/2006/main" noGrp="1"/>
-          </p:cNvSpPr>
-          <p:nvPr/>
-        </p:nvSpPr>
-        <p:spPr>
-          <a:xfrm xmlns:a="http://schemas.openxmlformats.org/drawingml/2006/main">
-            <a:off x="476250" y="190500"/>
-            <a:ext cx="10477500" cy="209550"/>
-          </a:xfrm>
-          <a:prstGeom xmlns:a="http://schemas.openxmlformats.org/drawingml/2006/main" prst="rect">
-            <a:avLst/>
-          </a:prstGeom>
-          <a:noFill xmlns:a="http://schemas.openxmlformats.org/drawingml/2006/main"/>
-          <a:ln xmlns:a="http://schemas.openxmlformats.org/drawingml/2006/main" w="0">
-            <a:noFill/>
-          </a:ln>
-        </p:spPr>
-        <p:txBody>
-          <a:bodyPr xmlns:a="http://schemas.openxmlformats.org/drawingml/2006/main">
-            <a:normAutofit fontScale="79487"/>
-          </a:bodyPr>
-          <a:lstStyle xmlns:a="http://schemas.openxmlformats.org/drawingml/2006/main"/>
-          <a:p xmlns:a="http://schemas.openxmlformats.org/drawingml/2006/main">
-            <a:pPr>
-              <a:defRPr sz="975" b="1">
-                <a:solidFill>
-                  <a:srgbClr val="D55E00"/>
-                </a:solidFill>
-                <a:latin typeface="Microsoft JhengHei"/>
-                <a:ea typeface="Microsoft JhengHei"/>
-                <a:cs typeface="Microsoft JhengHei"/>
-              </a:defRPr>
-            </a:pPr>
-            <a:r>
-              <a:rPr sz="975" b="1">
-                <a:solidFill>
-                  <a:srgbClr val="D55E00"/>
-                </a:solidFill>
-                <a:latin typeface="Microsoft JhengHei"/>
-                <a:ea typeface="Microsoft JhengHei"/>
-                <a:cs typeface="Microsoft JhengHei"/>
-              </a:rPr>
-              <a:t>INTERPRETATION</a:t>
-            </a:r>
-          </a:p>
-        </p:txBody>
-      </p:sp>
-      <p:sp>
-        <p:nvSpPr>
-          <p:cNvPr id="2" name="">
-            <a:extLst xmlns:a="http://schemas.openxmlformats.org/drawingml/2006/main">
-              <a:ext uri="{FF2B5EF4-FFF2-40B4-BE49-F238E27FC236}">
-                <a16:creationId xmlns:a16="http://schemas.microsoft.com/office/drawing/2014/main" id="{5DCCD8A8-51A4-4D94-B940-D6CCE072FD56}"/>
-              </a:ext>
-            </a:extLst>
-          </p:cNvPr>
-          <p:cNvSpPr>
-            <a:spLocks xmlns:a="http://schemas.openxmlformats.org/drawingml/2006/main" noGrp="1"/>
-          </p:cNvSpPr>
-          <p:nvPr/>
-        </p:nvSpPr>
-        <p:spPr>
-          <a:xfrm xmlns:a="http://schemas.openxmlformats.org/drawingml/2006/main">
-            <a:off x="476250" y="523875"/>
-            <a:ext cx="11144250" cy="476250"/>
-          </a:xfrm>
-          <a:prstGeom xmlns:a="http://schemas.openxmlformats.org/drawingml/2006/main" prst="rect">
-            <a:avLst/>
-          </a:prstGeom>
-          <a:noFill xmlns:a="http://schemas.openxmlformats.org/drawingml/2006/main"/>
-          <a:ln xmlns:a="http://schemas.openxmlformats.org/drawingml/2006/main" w="0">
-            <a:noFill/>
-          </a:ln>
-        </p:spPr>
-        <p:txBody>
-          <a:bodyPr xmlns:a="http://schemas.openxmlformats.org/drawingml/2006/main">
-            <a:normAutofit fontScale="100000"/>
-          </a:bodyPr>
-          <a:lstStyle xmlns:a="http://schemas.openxmlformats.org/drawingml/2006/main"/>
-          <a:p xmlns:a="http://schemas.openxmlformats.org/drawingml/2006/main">
-            <a:pPr>
-              <a:defRPr sz="2400" b="1">
-                <a:solidFill>
-                  <a:srgbClr val="142F43"/>
-                </a:solidFill>
-                <a:latin typeface="Microsoft JhengHei"/>
-                <a:ea typeface="Microsoft JhengHei"/>
-                <a:cs typeface="Microsoft JhengHei"/>
-              </a:defRPr>
-            </a:pPr>
-            <a:r>
-              <a:rPr sz="2400" b="1">
-                <a:solidFill>
-                  <a:srgbClr val="142F43"/>
-                </a:solidFill>
-                <a:latin typeface="Microsoft JhengHei"/>
-                <a:ea typeface="Microsoft JhengHei"/>
-                <a:cs typeface="Microsoft JhengHei"/>
-              </a:rPr>
-              <a:t>生物意義與待驗證問題</a:t>
-            </a:r>
-          </a:p>
-        </p:txBody>
-      </p:sp>
-      <p:sp>
-        <p:nvSpPr>
-          <p:cNvPr id="3" name="">
-            <a:extLst xmlns:a="http://schemas.openxmlformats.org/drawingml/2006/main">
-              <a:ext uri="{FF2B5EF4-FFF2-40B4-BE49-F238E27FC236}">
-                <a16:creationId xmlns:a16="http://schemas.microsoft.com/office/drawing/2014/main" id="{5C8AA5BD-8D05-480C-B80D-F1DB047F262D}"/>
-              </a:ext>
-            </a:extLst>
-          </p:cNvPr>
-          <p:cNvSpPr>
-            <a:spLocks xmlns:a="http://schemas.openxmlformats.org/drawingml/2006/main" noGrp="1"/>
-          </p:cNvSpPr>
-          <p:nvPr/>
-        </p:nvSpPr>
-        <p:spPr>
-          <a:xfrm xmlns:a="http://schemas.openxmlformats.org/drawingml/2006/main">
-            <a:off x="476250" y="6543675"/>
-            <a:ext cx="10287000" cy="171450"/>
-          </a:xfrm>
-          <a:prstGeom xmlns:a="http://schemas.openxmlformats.org/drawingml/2006/main" prst="rect">
-            <a:avLst/>
-          </a:prstGeom>
-          <a:noFill xmlns:a="http://schemas.openxmlformats.org/drawingml/2006/main"/>
-          <a:ln xmlns:a="http://schemas.openxmlformats.org/drawingml/2006/main" w="0">
-            <a:noFill/>
-          </a:ln>
-        </p:spPr>
-        <p:txBody>
-          <a:bodyPr xmlns:a="http://schemas.openxmlformats.org/drawingml/2006/main">
-            <a:normAutofit fontScale="63636"/>
-          </a:bodyPr>
-          <a:lstStyle xmlns:a="http://schemas.openxmlformats.org/drawingml/2006/main"/>
-          <a:p xmlns:a="http://schemas.openxmlformats.org/drawingml/2006/main">
-            <a:pPr>
-              <a:defRPr sz="825" b="0">
-                <a:solidFill>
-                  <a:srgbClr val="4D5B66"/>
-                </a:solidFill>
-                <a:latin typeface="Microsoft JhengHei"/>
-                <a:ea typeface="Microsoft JhengHei"/>
-                <a:cs typeface="Microsoft JhengHei"/>
-              </a:defRPr>
-            </a:pPr>
-            <a:r>
-              <a:rPr sz="825" b="0">
-                <a:solidFill>
-                  <a:srgbClr val="4D5B66"/>
-                </a:solidFill>
-                <a:latin typeface="Microsoft JhengHei"/>
-                <a:ea typeface="Microsoft JhengHei"/>
-                <a:cs typeface="Microsoft JhengHei"/>
-              </a:rPr>
-              <a:t>GSE262271 / GSE218858  |  Reviewed 15 September 2026</a:t>
-            </a:r>
-          </a:p>
-        </p:txBody>
-      </p:sp>
-      <p:sp>
-        <p:nvSpPr>
-          <p:cNvPr id="4" name="">
-            <a:extLst xmlns:a="http://schemas.openxmlformats.org/drawingml/2006/main">
-              <a:ext uri="{FF2B5EF4-FFF2-40B4-BE49-F238E27FC236}">
-                <a16:creationId xmlns:a16="http://schemas.microsoft.com/office/drawing/2014/main" id="{71503BDF-C64F-4677-BCCF-B58C4A7203EE}"/>
-              </a:ext>
-            </a:extLst>
-          </p:cNvPr>
-          <p:cNvSpPr>
-            <a:spLocks xmlns:a="http://schemas.openxmlformats.org/drawingml/2006/main" noGrp="1"/>
-          </p:cNvSpPr>
-          <p:nvPr/>
-        </p:nvSpPr>
-        <p:spPr>
-          <a:xfrm xmlns:a="http://schemas.openxmlformats.org/drawingml/2006/main">
-            <a:off x="11334750" y="6543675"/>
-            <a:ext cx="381000" cy="171450"/>
-          </a:xfrm>
-          <a:prstGeom xmlns:a="http://schemas.openxmlformats.org/drawingml/2006/main" prst="rect">
-            <a:avLst/>
-          </a:prstGeom>
-          <a:noFill xmlns:a="http://schemas.openxmlformats.org/drawingml/2006/main"/>
-          <a:ln xmlns:a="http://schemas.openxmlformats.org/drawingml/2006/main" w="0">
-            <a:noFill/>
-          </a:ln>
-        </p:spPr>
-        <p:txBody>
-          <a:bodyPr xmlns:a="http://schemas.openxmlformats.org/drawingml/2006/main">
-            <a:normAutofit fontScale="63636"/>
-          </a:bodyPr>
-          <a:lstStyle xmlns:a="http://schemas.openxmlformats.org/drawingml/2006/main"/>
-          <a:p xmlns:a="http://schemas.openxmlformats.org/drawingml/2006/main">
-            <a:pPr>
-              <a:defRPr sz="825" b="0">
-                <a:solidFill>
-                  <a:srgbClr val="142F43"/>
-                </a:solidFill>
-                <a:latin typeface="Microsoft JhengHei"/>
-                <a:ea typeface="Microsoft JhengHei"/>
-                <a:cs typeface="Microsoft JhengHei"/>
-              </a:defRPr>
-            </a:pPr>
-            <a:r>
-              <a:rPr sz="825" b="0">
-                <a:solidFill>
-                  <a:srgbClr val="142F43"/>
-                </a:solidFill>
-                <a:latin typeface="Microsoft JhengHei"/>
-                <a:ea typeface="Microsoft JhengHei"/>
-                <a:cs typeface="Microsoft JhengHei"/>
-              </a:rPr>
-              <a:t>13</a:t>
-            </a:r>
-          </a:p>
-        </p:txBody>
-      </p:sp>
-      <p:sp>
-        <p:nvSpPr>
-          <p:cNvPr id="5" name="">
-            <a:extLst xmlns:a="http://schemas.openxmlformats.org/drawingml/2006/main">
-              <a:ext uri="{FF2B5EF4-FFF2-40B4-BE49-F238E27FC236}">
-                <a16:creationId xmlns:a16="http://schemas.microsoft.com/office/drawing/2014/main" id="{B9EF9F9D-40E9-4AF5-89B7-B9B364D0E26E}"/>
-              </a:ext>
-            </a:extLst>
-          </p:cNvPr>
-          <p:cNvSpPr>
-            <a:spLocks xmlns:a="http://schemas.openxmlformats.org/drawingml/2006/main" noGrp="1"/>
-          </p:cNvSpPr>
-          <p:nvPr/>
-        </p:nvSpPr>
-        <p:spPr>
-          <a:xfrm xmlns:a="http://schemas.openxmlformats.org/drawingml/2006/main">
-            <a:off x="619125" y="1428750"/>
-            <a:ext cx="10668000" cy="1000125"/>
-          </a:xfrm>
-          <a:prstGeom xmlns:a="http://schemas.openxmlformats.org/drawingml/2006/main" prst="rect">
-            <a:avLst/>
-          </a:prstGeom>
-          <a:noFill xmlns:a="http://schemas.openxmlformats.org/drawingml/2006/main"/>
-          <a:ln xmlns:a="http://schemas.openxmlformats.org/drawingml/2006/main" w="0">
-            <a:noFill/>
-          </a:ln>
-        </p:spPr>
-        <p:txBody>
-          <a:bodyPr xmlns:a="http://schemas.openxmlformats.org/drawingml/2006/main">
-            <a:normAutofit fontScale="100000"/>
-          </a:bodyPr>
-          <a:lstStyle xmlns:a="http://schemas.openxmlformats.org/drawingml/2006/main"/>
-          <a:p xmlns:a="http://schemas.openxmlformats.org/drawingml/2006/main">
-            <a:pPr>
-              <a:defRPr sz="2175" b="1">
-                <a:solidFill>
-                  <a:srgbClr val="142F43"/>
-                </a:solidFill>
-                <a:latin typeface="Microsoft JhengHei"/>
-                <a:ea typeface="Microsoft JhengHei"/>
-                <a:cs typeface="Microsoft JhengHei"/>
-              </a:defRPr>
-            </a:pPr>
-            <a:r>
-              <a:rPr sz="2175" b="1">
-                <a:solidFill>
-                  <a:srgbClr val="142F43"/>
-                </a:solidFill>
-                <a:latin typeface="Microsoft JhengHei"/>
-                <a:ea typeface="Microsoft JhengHei"/>
-                <a:cs typeface="Microsoft JhengHei"/>
-              </a:rPr>
-              <a:t>共同富集支持：復發與 STAT5B 活化可能伴隨相似的蛋白質穩態與代謝程式。</a:t>
-            </a:r>
-          </a:p>
-        </p:txBody>
-      </p:sp>
-      <p:sp>
-        <p:nvSpPr>
-          <p:cNvPr id="6" name="">
-            <a:extLst xmlns:a="http://schemas.openxmlformats.org/drawingml/2006/main">
-              <a:ext uri="{FF2B5EF4-FFF2-40B4-BE49-F238E27FC236}">
-                <a16:creationId xmlns:a16="http://schemas.microsoft.com/office/drawing/2014/main" id="{33E8C953-0726-4F5C-AF81-ACEEDCD3E75F}"/>
-              </a:ext>
-            </a:extLst>
-          </p:cNvPr>
-          <p:cNvSpPr>
-            <a:spLocks xmlns:a="http://schemas.openxmlformats.org/drawingml/2006/main" noGrp="1"/>
-          </p:cNvSpPr>
-          <p:nvPr/>
-        </p:nvSpPr>
-        <p:spPr>
-          <a:xfrm xmlns:a="http://schemas.openxmlformats.org/drawingml/2006/main">
-            <a:off x="619125" y="2952750"/>
-            <a:ext cx="10668000" cy="1285875"/>
-          </a:xfrm>
-          <a:prstGeom xmlns:a="http://schemas.openxmlformats.org/drawingml/2006/main" prst="rect">
-            <a:avLst/>
-          </a:prstGeom>
-          <a:noFill xmlns:a="http://schemas.openxmlformats.org/drawingml/2006/main"/>
-          <a:ln xmlns:a="http://schemas.openxmlformats.org/drawingml/2006/main" w="0">
-            <a:noFill/>
-          </a:ln>
-        </p:spPr>
-        <p:txBody>
-          <a:bodyPr xmlns:a="http://schemas.openxmlformats.org/drawingml/2006/main">
-            <a:normAutofit fontScale="100000"/>
-          </a:bodyPr>
-          <a:lstStyle xmlns:a="http://schemas.openxmlformats.org/drawingml/2006/main"/>
-          <a:p xmlns:a="http://schemas.openxmlformats.org/drawingml/2006/main">
-            <a:pPr>
-              <a:defRPr sz="1950" b="0">
-                <a:solidFill>
-                  <a:srgbClr val="142F43"/>
-                </a:solidFill>
-                <a:latin typeface="Microsoft JhengHei"/>
-                <a:ea typeface="Microsoft JhengHei"/>
-                <a:cs typeface="Microsoft JhengHei"/>
-              </a:defRPr>
-            </a:pPr>
-            <a:r>
-              <a:rPr sz="1950" b="0">
-                <a:solidFill>
-                  <a:srgbClr val="142F43"/>
-                </a:solidFill>
-                <a:latin typeface="Microsoft JhengHei"/>
-                <a:ea typeface="Microsoft JhengHei"/>
-                <a:cs typeface="Microsoft JhengHei"/>
-              </a:rPr>
-              <a:t>Proteasome / mitophagy 的 transcript enrichment 可以用來形成後續假說。它尚未證明蛋白質降解活性、mitophagy flux 或 STAT5 的粒線體定位。</a:t>
-            </a:r>
-          </a:p>
-        </p:txBody>
-      </p:sp>
-      <p:sp>
-        <p:nvSpPr>
-          <p:cNvPr id="7" name="">
-            <a:extLst xmlns:a="http://schemas.openxmlformats.org/drawingml/2006/main">
-              <a:ext uri="{FF2B5EF4-FFF2-40B4-BE49-F238E27FC236}">
-                <a16:creationId xmlns:a16="http://schemas.microsoft.com/office/drawing/2014/main" id="{84A85ABF-F71C-43AB-99E2-BC8911647396}"/>
-              </a:ext>
-            </a:extLst>
-          </p:cNvPr>
-          <p:cNvSpPr>
-            <a:spLocks xmlns:a="http://schemas.openxmlformats.org/drawingml/2006/main" noGrp="1"/>
-          </p:cNvSpPr>
-          <p:nvPr/>
-        </p:nvSpPr>
-        <p:spPr>
-          <a:xfrm xmlns:a="http://schemas.openxmlformats.org/drawingml/2006/main">
-            <a:off x="619125" y="4791075"/>
-            <a:ext cx="10668000" cy="1190625"/>
-          </a:xfrm>
-          <a:prstGeom xmlns:a="http://schemas.openxmlformats.org/drawingml/2006/main" prst="rect">
-            <a:avLst/>
-          </a:prstGeom>
-          <a:noFill xmlns:a="http://schemas.openxmlformats.org/drawingml/2006/main"/>
-          <a:ln xmlns:a="http://schemas.openxmlformats.org/drawingml/2006/main" w="0">
-            <a:noFill/>
-          </a:ln>
-        </p:spPr>
-        <p:txBody>
-          <a:bodyPr xmlns:a="http://schemas.openxmlformats.org/drawingml/2006/main">
-            <a:normAutofit fontScale="100000"/>
-          </a:bodyPr>
-          <a:lstStyle xmlns:a="http://schemas.openxmlformats.org/drawingml/2006/main"/>
-          <a:p xmlns:a="http://schemas.openxmlformats.org/drawingml/2006/main">
-            <a:pPr>
-              <a:defRPr sz="1875" b="0">
-                <a:solidFill>
-                  <a:srgbClr val="D55E00"/>
-                </a:solidFill>
-                <a:latin typeface="Microsoft JhengHei"/>
-                <a:ea typeface="Microsoft JhengHei"/>
-                <a:cs typeface="Microsoft JhengHei"/>
-              </a:defRPr>
-            </a:pPr>
-            <a:r>
-              <a:rPr sz="1875" b="0">
-                <a:solidFill>
-                  <a:srgbClr val="D55E00"/>
-                </a:solidFill>
-                <a:latin typeface="Microsoft JhengHei"/>
-                <a:ea typeface="Microsoft JhengHei"/>
-                <a:cs typeface="Microsoft JhengHei"/>
-              </a:rPr>
-              <a:t>這兩組資料也沒有直接比較 bortezomib responder 與 resistant samples，因此不能從交集直接推論 proteasome inhibitor resistance。</a:t>
-            </a:r>
-          </a:p>
-        </p:txBody>
-      </p:sp>
-    </p:spTree>
-    <p:extLst>
-      <p:ext uri="{BB962C8B-B14F-4D97-AF65-F5344CB8AC3E}">
-        <p14:creationId xmlns:p14="http://schemas.microsoft.com/office/powerpoint/2010/main" val="1428910776"/>
+        <p14:creationId xmlns:p14="http://schemas.microsoft.com/office/powerpoint/2010/main" val="1116444970"/>
       </p:ext>
     </p:extLst>
   </p:cSld>
@@ -4352,7 +4331,7 @@
           <p:cNvPr id="8" name="">
             <a:extLst xmlns:a="http://schemas.openxmlformats.org/drawingml/2006/main">
               <a:ext uri="{FF2B5EF4-FFF2-40B4-BE49-F238E27FC236}">
-                <a16:creationId xmlns:a16="http://schemas.microsoft.com/office/drawing/2014/main" id="{B636F826-3F4A-4AF4-93AB-DB9310AD131F}"/>
+                <a16:creationId xmlns:a16="http://schemas.microsoft.com/office/drawing/2014/main" id="{1F97F416-7675-4BBF-9CBB-B2C9C1DAB26D}"/>
               </a:ext>
             </a:extLst>
           </p:cNvPr>
@@ -4399,7 +4378,7 @@
                 <a:ea typeface="Microsoft JhengHei"/>
                 <a:cs typeface="Microsoft JhengHei"/>
               </a:rPr>
-              <a:t>HANDOFF</a:t>
+              <a:t>INTERPRETATION</a:t>
             </a:r>
           </a:p>
         </p:txBody>
@@ -4409,7 +4388,7 @@
           <p:cNvPr id="2" name="">
             <a:extLst xmlns:a="http://schemas.openxmlformats.org/drawingml/2006/main">
               <a:ext uri="{FF2B5EF4-FFF2-40B4-BE49-F238E27FC236}">
-                <a16:creationId xmlns:a16="http://schemas.microsoft.com/office/drawing/2014/main" id="{63D410B5-0D76-4248-8019-D8988B7C500D}"/>
+                <a16:creationId xmlns:a16="http://schemas.microsoft.com/office/drawing/2014/main" id="{26DADC63-782C-4170-AC67-09EFD30EE3D8}"/>
               </a:ext>
             </a:extLst>
           </p:cNvPr>
@@ -4456,7 +4435,7 @@
                 <a:ea typeface="Microsoft JhengHei"/>
                 <a:cs typeface="Microsoft JhengHei"/>
               </a:rPr>
-              <a:t>交接檔案與可重現性</a:t>
+              <a:t>生物意義與待驗證問題</a:t>
             </a:r>
           </a:p>
         </p:txBody>
@@ -4466,7 +4445,7 @@
           <p:cNvPr id="3" name="">
             <a:extLst xmlns:a="http://schemas.openxmlformats.org/drawingml/2006/main">
               <a:ext uri="{FF2B5EF4-FFF2-40B4-BE49-F238E27FC236}">
-                <a16:creationId xmlns:a16="http://schemas.microsoft.com/office/drawing/2014/main" id="{B474F5DE-0917-41A3-8098-26B595BD082A}"/>
+                <a16:creationId xmlns:a16="http://schemas.microsoft.com/office/drawing/2014/main" id="{25D14D91-BF95-40EF-AA52-BDB2ED23ECE6}"/>
               </a:ext>
             </a:extLst>
           </p:cNvPr>
@@ -4523,7 +4502,7 @@
           <p:cNvPr id="4" name="">
             <a:extLst xmlns:a="http://schemas.openxmlformats.org/drawingml/2006/main">
               <a:ext uri="{FF2B5EF4-FFF2-40B4-BE49-F238E27FC236}">
-                <a16:creationId xmlns:a16="http://schemas.microsoft.com/office/drawing/2014/main" id="{806FB2D0-3099-4D8A-9968-CE88BB0ADA64}"/>
+                <a16:creationId xmlns:a16="http://schemas.microsoft.com/office/drawing/2014/main" id="{526BDCE2-2A62-483A-81C4-0F6F332561DD}"/>
               </a:ext>
             </a:extLst>
           </p:cNvPr>
@@ -4571,6 +4550,434 @@
                 <a:cs typeface="Microsoft JhengHei"/>
               </a:rPr>
               <a:t>14</a:t>
+            </a:r>
+          </a:p>
+        </p:txBody>
+      </p:sp>
+      <p:sp>
+        <p:nvSpPr>
+          <p:cNvPr id="5" name="">
+            <a:extLst xmlns:a="http://schemas.openxmlformats.org/drawingml/2006/main">
+              <a:ext uri="{FF2B5EF4-FFF2-40B4-BE49-F238E27FC236}">
+                <a16:creationId xmlns:a16="http://schemas.microsoft.com/office/drawing/2014/main" id="{811B6381-9765-4E66-B3AF-6C2AAC391449}"/>
+              </a:ext>
+            </a:extLst>
+          </p:cNvPr>
+          <p:cNvSpPr>
+            <a:spLocks xmlns:a="http://schemas.openxmlformats.org/drawingml/2006/main" noGrp="1"/>
+          </p:cNvSpPr>
+          <p:nvPr/>
+        </p:nvSpPr>
+        <p:spPr>
+          <a:xfrm xmlns:a="http://schemas.openxmlformats.org/drawingml/2006/main">
+            <a:off x="619125" y="1428750"/>
+            <a:ext cx="10668000" cy="1000125"/>
+          </a:xfrm>
+          <a:prstGeom xmlns:a="http://schemas.openxmlformats.org/drawingml/2006/main" prst="rect">
+            <a:avLst/>
+          </a:prstGeom>
+          <a:noFill xmlns:a="http://schemas.openxmlformats.org/drawingml/2006/main"/>
+          <a:ln xmlns:a="http://schemas.openxmlformats.org/drawingml/2006/main" w="0">
+            <a:noFill/>
+          </a:ln>
+        </p:spPr>
+        <p:txBody>
+          <a:bodyPr xmlns:a="http://schemas.openxmlformats.org/drawingml/2006/main">
+            <a:normAutofit fontScale="100000"/>
+          </a:bodyPr>
+          <a:lstStyle xmlns:a="http://schemas.openxmlformats.org/drawingml/2006/main"/>
+          <a:p xmlns:a="http://schemas.openxmlformats.org/drawingml/2006/main">
+            <a:pPr>
+              <a:defRPr sz="2175" b="1">
+                <a:solidFill>
+                  <a:srgbClr val="142F43"/>
+                </a:solidFill>
+                <a:latin typeface="Microsoft JhengHei"/>
+                <a:ea typeface="Microsoft JhengHei"/>
+                <a:cs typeface="Microsoft JhengHei"/>
+              </a:defRPr>
+            </a:pPr>
+            <a:r>
+              <a:rPr sz="2175" b="1">
+                <a:solidFill>
+                  <a:srgbClr val="142F43"/>
+                </a:solidFill>
+                <a:latin typeface="Microsoft JhengHei"/>
+                <a:ea typeface="Microsoft JhengHei"/>
+                <a:cs typeface="Microsoft JhengHei"/>
+              </a:rPr>
+              <a:t>共同富集支持：復發與 STAT5B 活化可能伴隨相似的蛋白質穩態與代謝程式。</a:t>
+            </a:r>
+          </a:p>
+        </p:txBody>
+      </p:sp>
+      <p:sp>
+        <p:nvSpPr>
+          <p:cNvPr id="6" name="">
+            <a:extLst xmlns:a="http://schemas.openxmlformats.org/drawingml/2006/main">
+              <a:ext uri="{FF2B5EF4-FFF2-40B4-BE49-F238E27FC236}">
+                <a16:creationId xmlns:a16="http://schemas.microsoft.com/office/drawing/2014/main" id="{D3B13E93-F698-4527-9C07-2BE3F971BFE1}"/>
+              </a:ext>
+            </a:extLst>
+          </p:cNvPr>
+          <p:cNvSpPr>
+            <a:spLocks xmlns:a="http://schemas.openxmlformats.org/drawingml/2006/main" noGrp="1"/>
+          </p:cNvSpPr>
+          <p:nvPr/>
+        </p:nvSpPr>
+        <p:spPr>
+          <a:xfrm xmlns:a="http://schemas.openxmlformats.org/drawingml/2006/main">
+            <a:off x="619125" y="2952750"/>
+            <a:ext cx="10668000" cy="1285875"/>
+          </a:xfrm>
+          <a:prstGeom xmlns:a="http://schemas.openxmlformats.org/drawingml/2006/main" prst="rect">
+            <a:avLst/>
+          </a:prstGeom>
+          <a:noFill xmlns:a="http://schemas.openxmlformats.org/drawingml/2006/main"/>
+          <a:ln xmlns:a="http://schemas.openxmlformats.org/drawingml/2006/main" w="0">
+            <a:noFill/>
+          </a:ln>
+        </p:spPr>
+        <p:txBody>
+          <a:bodyPr xmlns:a="http://schemas.openxmlformats.org/drawingml/2006/main">
+            <a:normAutofit fontScale="100000"/>
+          </a:bodyPr>
+          <a:lstStyle xmlns:a="http://schemas.openxmlformats.org/drawingml/2006/main"/>
+          <a:p xmlns:a="http://schemas.openxmlformats.org/drawingml/2006/main">
+            <a:pPr>
+              <a:defRPr sz="1950" b="0">
+                <a:solidFill>
+                  <a:srgbClr val="142F43"/>
+                </a:solidFill>
+                <a:latin typeface="Microsoft JhengHei"/>
+                <a:ea typeface="Microsoft JhengHei"/>
+                <a:cs typeface="Microsoft JhengHei"/>
+              </a:defRPr>
+            </a:pPr>
+            <a:r>
+              <a:rPr sz="1950" b="0">
+                <a:solidFill>
+                  <a:srgbClr val="142F43"/>
+                </a:solidFill>
+                <a:latin typeface="Microsoft JhengHei"/>
+                <a:ea typeface="Microsoft JhengHei"/>
+                <a:cs typeface="Microsoft JhengHei"/>
+              </a:rPr>
+              <a:t>Proteasome / mitophagy 的 transcript enrichment 可以用來形成後續假說。它尚未證明蛋白質降解活性、mitophagy flux 或 STAT5 的粒線體定位。</a:t>
+            </a:r>
+          </a:p>
+        </p:txBody>
+      </p:sp>
+      <p:sp>
+        <p:nvSpPr>
+          <p:cNvPr id="7" name="">
+            <a:extLst xmlns:a="http://schemas.openxmlformats.org/drawingml/2006/main">
+              <a:ext uri="{FF2B5EF4-FFF2-40B4-BE49-F238E27FC236}">
+                <a16:creationId xmlns:a16="http://schemas.microsoft.com/office/drawing/2014/main" id="{8A0401EC-5B75-4BCC-AC53-985909101359}"/>
+              </a:ext>
+            </a:extLst>
+          </p:cNvPr>
+          <p:cNvSpPr>
+            <a:spLocks xmlns:a="http://schemas.openxmlformats.org/drawingml/2006/main" noGrp="1"/>
+          </p:cNvSpPr>
+          <p:nvPr/>
+        </p:nvSpPr>
+        <p:spPr>
+          <a:xfrm xmlns:a="http://schemas.openxmlformats.org/drawingml/2006/main">
+            <a:off x="619125" y="4791075"/>
+            <a:ext cx="10668000" cy="1190625"/>
+          </a:xfrm>
+          <a:prstGeom xmlns:a="http://schemas.openxmlformats.org/drawingml/2006/main" prst="rect">
+            <a:avLst/>
+          </a:prstGeom>
+          <a:noFill xmlns:a="http://schemas.openxmlformats.org/drawingml/2006/main"/>
+          <a:ln xmlns:a="http://schemas.openxmlformats.org/drawingml/2006/main" w="0">
+            <a:noFill/>
+          </a:ln>
+        </p:spPr>
+        <p:txBody>
+          <a:bodyPr xmlns:a="http://schemas.openxmlformats.org/drawingml/2006/main">
+            <a:normAutofit fontScale="100000"/>
+          </a:bodyPr>
+          <a:lstStyle xmlns:a="http://schemas.openxmlformats.org/drawingml/2006/main"/>
+          <a:p xmlns:a="http://schemas.openxmlformats.org/drawingml/2006/main">
+            <a:pPr>
+              <a:defRPr sz="1875" b="0">
+                <a:solidFill>
+                  <a:srgbClr val="D55E00"/>
+                </a:solidFill>
+                <a:latin typeface="Microsoft JhengHei"/>
+                <a:ea typeface="Microsoft JhengHei"/>
+                <a:cs typeface="Microsoft JhengHei"/>
+              </a:defRPr>
+            </a:pPr>
+            <a:r>
+              <a:rPr sz="1875" b="0">
+                <a:solidFill>
+                  <a:srgbClr val="D55E00"/>
+                </a:solidFill>
+                <a:latin typeface="Microsoft JhengHei"/>
+                <a:ea typeface="Microsoft JhengHei"/>
+                <a:cs typeface="Microsoft JhengHei"/>
+              </a:rPr>
+              <a:t>這兩組資料也沒有直接比較 bortezomib responder 與 resistant samples，因此不能從交集直接推論 proteasome inhibitor resistance。</a:t>
+            </a:r>
+          </a:p>
+        </p:txBody>
+      </p:sp>
+    </p:spTree>
+    <p:extLst>
+      <p:ext uri="{BB962C8B-B14F-4D97-AF65-F5344CB8AC3E}">
+        <p14:creationId xmlns:p14="http://schemas.microsoft.com/office/powerpoint/2010/main" val="101256378"/>
+      </p:ext>
+    </p:extLst>
+  </p:cSld>
+</p:sld>
+</file>
+
+<file path=ppt/slides/slide15.xml><?xml version="1.0" encoding="utf-8"?>
+<p:sld xmlns:p="http://schemas.openxmlformats.org/presentationml/2006/main">
+  <p:cSld>
+    <p:bg>
+      <p:bgPr>
+        <a:solidFill xmlns:a="http://schemas.openxmlformats.org/drawingml/2006/main">
+          <a:srgbClr val="FFFFFF"/>
+        </a:solidFill>
+      </p:bgPr>
+    </p:bg>
+    <p:spTree>
+      <p:nvGrpSpPr>
+        <p:cNvPr id="1" name=""/>
+        <p:cNvGrpSpPr/>
+        <p:nvPr/>
+      </p:nvGrpSpPr>
+      <p:grpSpPr>
+        <a:xfrm xmlns:a="http://schemas.openxmlformats.org/drawingml/2006/main"/>
+      </p:grpSpPr>
+      <p:sp>
+        <p:nvSpPr>
+          <p:cNvPr id="8" name="">
+            <a:extLst xmlns:a="http://schemas.openxmlformats.org/drawingml/2006/main">
+              <a:ext uri="{FF2B5EF4-FFF2-40B4-BE49-F238E27FC236}">
+                <a16:creationId xmlns:a16="http://schemas.microsoft.com/office/drawing/2014/main" id="{AC42142E-187C-421B-88AA-33A1F86C41CD}"/>
+              </a:ext>
+            </a:extLst>
+          </p:cNvPr>
+          <p:cNvSpPr>
+            <a:spLocks xmlns:a="http://schemas.openxmlformats.org/drawingml/2006/main" noGrp="1"/>
+          </p:cNvSpPr>
+          <p:nvPr/>
+        </p:nvSpPr>
+        <p:spPr>
+          <a:xfrm xmlns:a="http://schemas.openxmlformats.org/drawingml/2006/main">
+            <a:off x="476250" y="190500"/>
+            <a:ext cx="10477500" cy="209550"/>
+          </a:xfrm>
+          <a:prstGeom xmlns:a="http://schemas.openxmlformats.org/drawingml/2006/main" prst="rect">
+            <a:avLst/>
+          </a:prstGeom>
+          <a:noFill xmlns:a="http://schemas.openxmlformats.org/drawingml/2006/main"/>
+          <a:ln xmlns:a="http://schemas.openxmlformats.org/drawingml/2006/main" w="0">
+            <a:noFill/>
+          </a:ln>
+        </p:spPr>
+        <p:txBody>
+          <a:bodyPr xmlns:a="http://schemas.openxmlformats.org/drawingml/2006/main">
+            <a:normAutofit fontScale="79487"/>
+          </a:bodyPr>
+          <a:lstStyle xmlns:a="http://schemas.openxmlformats.org/drawingml/2006/main"/>
+          <a:p xmlns:a="http://schemas.openxmlformats.org/drawingml/2006/main">
+            <a:pPr>
+              <a:defRPr sz="975" b="1">
+                <a:solidFill>
+                  <a:srgbClr val="D55E00"/>
+                </a:solidFill>
+                <a:latin typeface="Microsoft JhengHei"/>
+                <a:ea typeface="Microsoft JhengHei"/>
+                <a:cs typeface="Microsoft JhengHei"/>
+              </a:defRPr>
+            </a:pPr>
+            <a:r>
+              <a:rPr sz="975" b="1">
+                <a:solidFill>
+                  <a:srgbClr val="D55E00"/>
+                </a:solidFill>
+                <a:latin typeface="Microsoft JhengHei"/>
+                <a:ea typeface="Microsoft JhengHei"/>
+                <a:cs typeface="Microsoft JhengHei"/>
+              </a:rPr>
+              <a:t>HANDOFF</a:t>
+            </a:r>
+          </a:p>
+        </p:txBody>
+      </p:sp>
+      <p:sp>
+        <p:nvSpPr>
+          <p:cNvPr id="2" name="">
+            <a:extLst xmlns:a="http://schemas.openxmlformats.org/drawingml/2006/main">
+              <a:ext uri="{FF2B5EF4-FFF2-40B4-BE49-F238E27FC236}">
+                <a16:creationId xmlns:a16="http://schemas.microsoft.com/office/drawing/2014/main" id="{E09E0294-989D-4F9F-9EC6-86177B325AD3}"/>
+              </a:ext>
+            </a:extLst>
+          </p:cNvPr>
+          <p:cNvSpPr>
+            <a:spLocks xmlns:a="http://schemas.openxmlformats.org/drawingml/2006/main" noGrp="1"/>
+          </p:cNvSpPr>
+          <p:nvPr/>
+        </p:nvSpPr>
+        <p:spPr>
+          <a:xfrm xmlns:a="http://schemas.openxmlformats.org/drawingml/2006/main">
+            <a:off x="476250" y="523875"/>
+            <a:ext cx="11144250" cy="476250"/>
+          </a:xfrm>
+          <a:prstGeom xmlns:a="http://schemas.openxmlformats.org/drawingml/2006/main" prst="rect">
+            <a:avLst/>
+          </a:prstGeom>
+          <a:noFill xmlns:a="http://schemas.openxmlformats.org/drawingml/2006/main"/>
+          <a:ln xmlns:a="http://schemas.openxmlformats.org/drawingml/2006/main" w="0">
+            <a:noFill/>
+          </a:ln>
+        </p:spPr>
+        <p:txBody>
+          <a:bodyPr xmlns:a="http://schemas.openxmlformats.org/drawingml/2006/main">
+            <a:normAutofit fontScale="100000"/>
+          </a:bodyPr>
+          <a:lstStyle xmlns:a="http://schemas.openxmlformats.org/drawingml/2006/main"/>
+          <a:p xmlns:a="http://schemas.openxmlformats.org/drawingml/2006/main">
+            <a:pPr>
+              <a:defRPr sz="2400" b="1">
+                <a:solidFill>
+                  <a:srgbClr val="142F43"/>
+                </a:solidFill>
+                <a:latin typeface="Microsoft JhengHei"/>
+                <a:ea typeface="Microsoft JhengHei"/>
+                <a:cs typeface="Microsoft JhengHei"/>
+              </a:defRPr>
+            </a:pPr>
+            <a:r>
+              <a:rPr sz="2400" b="1">
+                <a:solidFill>
+                  <a:srgbClr val="142F43"/>
+                </a:solidFill>
+                <a:latin typeface="Microsoft JhengHei"/>
+                <a:ea typeface="Microsoft JhengHei"/>
+                <a:cs typeface="Microsoft JhengHei"/>
+              </a:rPr>
+              <a:t>交接檔案與可重現性</a:t>
+            </a:r>
+          </a:p>
+        </p:txBody>
+      </p:sp>
+      <p:sp>
+        <p:nvSpPr>
+          <p:cNvPr id="3" name="">
+            <a:extLst xmlns:a="http://schemas.openxmlformats.org/drawingml/2006/main">
+              <a:ext uri="{FF2B5EF4-FFF2-40B4-BE49-F238E27FC236}">
+                <a16:creationId xmlns:a16="http://schemas.microsoft.com/office/drawing/2014/main" id="{021DC6B3-B741-4867-B135-E6605236CCCC}"/>
+              </a:ext>
+            </a:extLst>
+          </p:cNvPr>
+          <p:cNvSpPr>
+            <a:spLocks xmlns:a="http://schemas.openxmlformats.org/drawingml/2006/main" noGrp="1"/>
+          </p:cNvSpPr>
+          <p:nvPr/>
+        </p:nvSpPr>
+        <p:spPr>
+          <a:xfrm xmlns:a="http://schemas.openxmlformats.org/drawingml/2006/main">
+            <a:off x="476250" y="6543675"/>
+            <a:ext cx="10287000" cy="171450"/>
+          </a:xfrm>
+          <a:prstGeom xmlns:a="http://schemas.openxmlformats.org/drawingml/2006/main" prst="rect">
+            <a:avLst/>
+          </a:prstGeom>
+          <a:noFill xmlns:a="http://schemas.openxmlformats.org/drawingml/2006/main"/>
+          <a:ln xmlns:a="http://schemas.openxmlformats.org/drawingml/2006/main" w="0">
+            <a:noFill/>
+          </a:ln>
+        </p:spPr>
+        <p:txBody>
+          <a:bodyPr xmlns:a="http://schemas.openxmlformats.org/drawingml/2006/main">
+            <a:normAutofit fontScale="63636"/>
+          </a:bodyPr>
+          <a:lstStyle xmlns:a="http://schemas.openxmlformats.org/drawingml/2006/main"/>
+          <a:p xmlns:a="http://schemas.openxmlformats.org/drawingml/2006/main">
+            <a:pPr>
+              <a:defRPr sz="825" b="0">
+                <a:solidFill>
+                  <a:srgbClr val="4D5B66"/>
+                </a:solidFill>
+                <a:latin typeface="Microsoft JhengHei"/>
+                <a:ea typeface="Microsoft JhengHei"/>
+                <a:cs typeface="Microsoft JhengHei"/>
+              </a:defRPr>
+            </a:pPr>
+            <a:r>
+              <a:rPr sz="825" b="0">
+                <a:solidFill>
+                  <a:srgbClr val="4D5B66"/>
+                </a:solidFill>
+                <a:latin typeface="Microsoft JhengHei"/>
+                <a:ea typeface="Microsoft JhengHei"/>
+                <a:cs typeface="Microsoft JhengHei"/>
+              </a:rPr>
+              <a:t>GSE262271 / GSE218858  |  Reviewed 15 September 2026</a:t>
+            </a:r>
+          </a:p>
+        </p:txBody>
+      </p:sp>
+      <p:sp>
+        <p:nvSpPr>
+          <p:cNvPr id="4" name="">
+            <a:extLst xmlns:a="http://schemas.openxmlformats.org/drawingml/2006/main">
+              <a:ext uri="{FF2B5EF4-FFF2-40B4-BE49-F238E27FC236}">
+                <a16:creationId xmlns:a16="http://schemas.microsoft.com/office/drawing/2014/main" id="{35F8E8A5-8344-485E-B399-2C70259929D4}"/>
+              </a:ext>
+            </a:extLst>
+          </p:cNvPr>
+          <p:cNvSpPr>
+            <a:spLocks xmlns:a="http://schemas.openxmlformats.org/drawingml/2006/main" noGrp="1"/>
+          </p:cNvSpPr>
+          <p:nvPr/>
+        </p:nvSpPr>
+        <p:spPr>
+          <a:xfrm xmlns:a="http://schemas.openxmlformats.org/drawingml/2006/main">
+            <a:off x="11334750" y="6543675"/>
+            <a:ext cx="381000" cy="171450"/>
+          </a:xfrm>
+          <a:prstGeom xmlns:a="http://schemas.openxmlformats.org/drawingml/2006/main" prst="rect">
+            <a:avLst/>
+          </a:prstGeom>
+          <a:noFill xmlns:a="http://schemas.openxmlformats.org/drawingml/2006/main"/>
+          <a:ln xmlns:a="http://schemas.openxmlformats.org/drawingml/2006/main" w="0">
+            <a:noFill/>
+          </a:ln>
+        </p:spPr>
+        <p:txBody>
+          <a:bodyPr xmlns:a="http://schemas.openxmlformats.org/drawingml/2006/main">
+            <a:normAutofit fontScale="63636"/>
+          </a:bodyPr>
+          <a:lstStyle xmlns:a="http://schemas.openxmlformats.org/drawingml/2006/main"/>
+          <a:p xmlns:a="http://schemas.openxmlformats.org/drawingml/2006/main">
+            <a:pPr>
+              <a:defRPr sz="825" b="0">
+                <a:solidFill>
+                  <a:srgbClr val="142F43"/>
+                </a:solidFill>
+                <a:latin typeface="Microsoft JhengHei"/>
+                <a:ea typeface="Microsoft JhengHei"/>
+                <a:cs typeface="Microsoft JhengHei"/>
+              </a:defRPr>
+            </a:pPr>
+            <a:r>
+              <a:rPr sz="825" b="0">
+                <a:solidFill>
+                  <a:srgbClr val="142F43"/>
+                </a:solidFill>
+                <a:latin typeface="Microsoft JhengHei"/>
+                <a:ea typeface="Microsoft JhengHei"/>
+                <a:cs typeface="Microsoft JhengHei"/>
+              </a:rPr>
+              <a:t>15</a:t>
             </a:r>
           </a:p>
         </p:txBody>
@@ -4804,7 +5211,7 @@
                           <a:ea typeface="Microsoft JhengHei"/>
                           <a:cs typeface="Microsoft JhengHei"/>
                         </a:rPr>
-                        <a:t>04_Code_Availability：R scripts 22–25、原始 bulk pipeline、版本與限制</a:t>
+                        <a:t>04_Code_Availability：R scripts 22–26、原始 bulk pipeline、版本與限制</a:t>
                       </a:r>
                     </a:p>
                   </a:txBody>
@@ -4862,7 +5269,7 @@
           <p:cNvPr id="6" name="">
             <a:extLst xmlns:a="http://schemas.openxmlformats.org/drawingml/2006/main">
               <a:ext uri="{FF2B5EF4-FFF2-40B4-BE49-F238E27FC236}">
-                <a16:creationId xmlns:a16="http://schemas.microsoft.com/office/drawing/2014/main" id="{D32E4F07-AFA0-46F0-857E-7048B70629C1}"/>
+                <a16:creationId xmlns:a16="http://schemas.microsoft.com/office/drawing/2014/main" id="{BD293830-BB62-458F-B326-9FC31949318B}"/>
               </a:ext>
             </a:extLst>
           </p:cNvPr>
@@ -4919,7 +5326,7 @@
           <p:cNvPr id="7" name="">
             <a:extLst xmlns:a="http://schemas.openxmlformats.org/drawingml/2006/main">
               <a:ext uri="{FF2B5EF4-FFF2-40B4-BE49-F238E27FC236}">
-                <a16:creationId xmlns:a16="http://schemas.microsoft.com/office/drawing/2014/main" id="{2CB4E885-DD31-41B2-AEB3-3AD275012F1B}"/>
+                <a16:creationId xmlns:a16="http://schemas.microsoft.com/office/drawing/2014/main" id="{8E9854AF-B743-4057-968E-30A708F95F88}"/>
               </a:ext>
             </a:extLst>
           </p:cNvPr>
@@ -4974,7 +5381,7 @@
     </p:spTree>
     <p:extLst>
       <p:ext uri="{BB962C8B-B14F-4D97-AF65-F5344CB8AC3E}">
-        <p14:creationId xmlns:p14="http://schemas.microsoft.com/office/powerpoint/2010/main" val="1037664592"/>
+        <p14:creationId xmlns:p14="http://schemas.microsoft.com/office/powerpoint/2010/main" val="381876132"/>
       </p:ext>
     </p:extLst>
   </p:cSld>
@@ -5005,7 +5412,7 @@
           <p:cNvPr id="7" name="">
             <a:extLst xmlns:a="http://schemas.openxmlformats.org/drawingml/2006/main">
               <a:ext uri="{FF2B5EF4-FFF2-40B4-BE49-F238E27FC236}">
-                <a16:creationId xmlns:a16="http://schemas.microsoft.com/office/drawing/2014/main" id="{6EF0FA12-371D-4576-AEFD-685B8497BA68}"/>
+                <a16:creationId xmlns:a16="http://schemas.microsoft.com/office/drawing/2014/main" id="{6708BA26-4E4A-4D07-A11D-DCFFADADB797}"/>
               </a:ext>
             </a:extLst>
           </p:cNvPr>
@@ -5062,7 +5469,7 @@
           <p:cNvPr id="2" name="">
             <a:extLst xmlns:a="http://schemas.openxmlformats.org/drawingml/2006/main">
               <a:ext uri="{FF2B5EF4-FFF2-40B4-BE49-F238E27FC236}">
-                <a16:creationId xmlns:a16="http://schemas.microsoft.com/office/drawing/2014/main" id="{6DF789B7-C11F-4601-912E-AE304B0A7790}"/>
+                <a16:creationId xmlns:a16="http://schemas.microsoft.com/office/drawing/2014/main" id="{D75E65B5-6012-4C13-BDF7-B64AF3061BD9}"/>
               </a:ext>
             </a:extLst>
           </p:cNvPr>
@@ -5119,7 +5526,7 @@
           <p:cNvPr id="3" name="">
             <a:extLst xmlns:a="http://schemas.openxmlformats.org/drawingml/2006/main">
               <a:ext uri="{FF2B5EF4-FFF2-40B4-BE49-F238E27FC236}">
-                <a16:creationId xmlns:a16="http://schemas.microsoft.com/office/drawing/2014/main" id="{CA60FDA1-DF61-4F9D-B939-81BDFFD9FA5D}"/>
+                <a16:creationId xmlns:a16="http://schemas.microsoft.com/office/drawing/2014/main" id="{7AF9ADB7-6EEC-4B25-BA8A-F09ADF5798E1}"/>
               </a:ext>
             </a:extLst>
           </p:cNvPr>
@@ -5176,7 +5583,7 @@
           <p:cNvPr id="4" name="">
             <a:extLst xmlns:a="http://schemas.openxmlformats.org/drawingml/2006/main">
               <a:ext uri="{FF2B5EF4-FFF2-40B4-BE49-F238E27FC236}">
-                <a16:creationId xmlns:a16="http://schemas.microsoft.com/office/drawing/2014/main" id="{498F86D3-575B-45ED-A0DA-02B7AFC3A0A3}"/>
+                <a16:creationId xmlns:a16="http://schemas.microsoft.com/office/drawing/2014/main" id="{06C93596-C79E-45B2-96B2-A96ACFA7F194}"/>
               </a:ext>
             </a:extLst>
           </p:cNvPr>
@@ -5610,7 +6017,7 @@
           <p:cNvPr id="6" name="">
             <a:extLst xmlns:a="http://schemas.openxmlformats.org/drawingml/2006/main">
               <a:ext uri="{FF2B5EF4-FFF2-40B4-BE49-F238E27FC236}">
-                <a16:creationId xmlns:a16="http://schemas.microsoft.com/office/drawing/2014/main" id="{C4F1B731-AEC3-4A3B-A671-CD49BA9248D1}"/>
+                <a16:creationId xmlns:a16="http://schemas.microsoft.com/office/drawing/2014/main" id="{827BC9FF-7C70-4EBF-8C18-F84D3079C89E}"/>
               </a:ext>
             </a:extLst>
           </p:cNvPr>
@@ -5665,7 +6072,7 @@
     </p:spTree>
     <p:extLst>
       <p:ext uri="{BB962C8B-B14F-4D97-AF65-F5344CB8AC3E}">
-        <p14:creationId xmlns:p14="http://schemas.microsoft.com/office/powerpoint/2010/main" val="2050427488"/>
+        <p14:creationId xmlns:p14="http://schemas.microsoft.com/office/powerpoint/2010/main" val="649372558"/>
       </p:ext>
     </p:extLst>
   </p:cSld>
@@ -5696,7 +6103,7 @@
           <p:cNvPr id="9" name="">
             <a:extLst xmlns:a="http://schemas.openxmlformats.org/drawingml/2006/main">
               <a:ext uri="{FF2B5EF4-FFF2-40B4-BE49-F238E27FC236}">
-                <a16:creationId xmlns:a16="http://schemas.microsoft.com/office/drawing/2014/main" id="{A3044CC2-C80B-4B43-AE4D-E8BA5ED6BF30}"/>
+                <a16:creationId xmlns:a16="http://schemas.microsoft.com/office/drawing/2014/main" id="{00FCF519-23D7-4F86-9904-0E689E7FC02A}"/>
               </a:ext>
             </a:extLst>
           </p:cNvPr>
@@ -5753,7 +6160,7 @@
           <p:cNvPr id="2" name="">
             <a:extLst xmlns:a="http://schemas.openxmlformats.org/drawingml/2006/main">
               <a:ext uri="{FF2B5EF4-FFF2-40B4-BE49-F238E27FC236}">
-                <a16:creationId xmlns:a16="http://schemas.microsoft.com/office/drawing/2014/main" id="{3E9C4ADE-4E98-4DC7-82B7-FE2F33A6761F}"/>
+                <a16:creationId xmlns:a16="http://schemas.microsoft.com/office/drawing/2014/main" id="{EA9EF959-A0BF-47AF-909F-89EADEFEBC8C}"/>
               </a:ext>
             </a:extLst>
           </p:cNvPr>
@@ -5810,7 +6217,7 @@
           <p:cNvPr id="3" name="">
             <a:extLst xmlns:a="http://schemas.openxmlformats.org/drawingml/2006/main">
               <a:ext uri="{FF2B5EF4-FFF2-40B4-BE49-F238E27FC236}">
-                <a16:creationId xmlns:a16="http://schemas.microsoft.com/office/drawing/2014/main" id="{3900DDB9-4454-4822-954D-216C2AB5EC1A}"/>
+                <a16:creationId xmlns:a16="http://schemas.microsoft.com/office/drawing/2014/main" id="{662BB04C-B9B4-4CBC-9231-38961C630C42}"/>
               </a:ext>
             </a:extLst>
           </p:cNvPr>
@@ -5867,7 +6274,7 @@
           <p:cNvPr id="4" name="">
             <a:extLst xmlns:a="http://schemas.openxmlformats.org/drawingml/2006/main">
               <a:ext uri="{FF2B5EF4-FFF2-40B4-BE49-F238E27FC236}">
-                <a16:creationId xmlns:a16="http://schemas.microsoft.com/office/drawing/2014/main" id="{475E32B0-2484-41DB-B3E7-123E064FA3B2}"/>
+                <a16:creationId xmlns:a16="http://schemas.microsoft.com/office/drawing/2014/main" id="{FF963E17-42BC-4D4A-AFF5-6E1ABBF1D6E8}"/>
               </a:ext>
             </a:extLst>
           </p:cNvPr>
@@ -5928,7 +6335,7 @@
           <p:nvPr/>
         </p:nvPicPr>
         <p:blipFill>
-          <a:blip xmlns:r="http://schemas.openxmlformats.org/officeDocument/2006/relationships" xmlns:a="http://schemas.openxmlformats.org/drawingml/2006/main" r:embed="R2e2d4a77c50848c4"/>
+          <a:blip xmlns:r="http://schemas.openxmlformats.org/officeDocument/2006/relationships" xmlns:a="http://schemas.openxmlformats.org/drawingml/2006/main" r:embed="Rb9e7fb062fd049e3"/>
           <a:stretch xmlns:a="http://schemas.openxmlformats.org/drawingml/2006/main"/>
         </p:blipFill>
         <p:spPr>
@@ -5946,7 +6353,7 @@
           <p:cNvPr id="6" name="">
             <a:extLst xmlns:a="http://schemas.openxmlformats.org/drawingml/2006/main">
               <a:ext uri="{FF2B5EF4-FFF2-40B4-BE49-F238E27FC236}">
-                <a16:creationId xmlns:a16="http://schemas.microsoft.com/office/drawing/2014/main" id="{C6959A2F-8919-4DD7-84D2-BCF6731BFF7D}"/>
+                <a16:creationId xmlns:a16="http://schemas.microsoft.com/office/drawing/2014/main" id="{6DB926BD-C574-495B-B0F8-003C3B1C5A23}"/>
               </a:ext>
             </a:extLst>
           </p:cNvPr>
@@ -6003,7 +6410,7 @@
           <p:cNvPr id="7" name="">
             <a:extLst xmlns:a="http://schemas.openxmlformats.org/drawingml/2006/main">
               <a:ext uri="{FF2B5EF4-FFF2-40B4-BE49-F238E27FC236}">
-                <a16:creationId xmlns:a16="http://schemas.microsoft.com/office/drawing/2014/main" id="{0907C1F4-889E-42F3-834A-44652244D8A7}"/>
+                <a16:creationId xmlns:a16="http://schemas.microsoft.com/office/drawing/2014/main" id="{F29B4003-DF04-439F-98C9-E4083C625ABA}"/>
               </a:ext>
             </a:extLst>
           </p:cNvPr>
@@ -6129,7 +6536,7 @@
           <p:cNvPr id="8" name="">
             <a:extLst xmlns:a="http://schemas.openxmlformats.org/drawingml/2006/main">
               <a:ext uri="{FF2B5EF4-FFF2-40B4-BE49-F238E27FC236}">
-                <a16:creationId xmlns:a16="http://schemas.microsoft.com/office/drawing/2014/main" id="{640398A2-DC75-4DF5-94A8-FBB3C75D5279}"/>
+                <a16:creationId xmlns:a16="http://schemas.microsoft.com/office/drawing/2014/main" id="{53A868D5-A782-4DEF-B9FD-3D9D88BC0FC0}"/>
               </a:ext>
             </a:extLst>
           </p:cNvPr>
@@ -6184,7 +6591,7 @@
     </p:spTree>
     <p:extLst>
       <p:ext uri="{BB962C8B-B14F-4D97-AF65-F5344CB8AC3E}">
-        <p14:creationId xmlns:p14="http://schemas.microsoft.com/office/powerpoint/2010/main" val="1736468625"/>
+        <p14:creationId xmlns:p14="http://schemas.microsoft.com/office/powerpoint/2010/main" val="1257553538"/>
       </p:ext>
     </p:extLst>
   </p:cSld>
@@ -6215,7 +6622,7 @@
           <p:cNvPr id="7" name="">
             <a:extLst xmlns:a="http://schemas.openxmlformats.org/drawingml/2006/main">
               <a:ext uri="{FF2B5EF4-FFF2-40B4-BE49-F238E27FC236}">
-                <a16:creationId xmlns:a16="http://schemas.microsoft.com/office/drawing/2014/main" id="{F5DE7D9F-5127-4DAE-A974-E8B4BF8ADFE9}"/>
+                <a16:creationId xmlns:a16="http://schemas.microsoft.com/office/drawing/2014/main" id="{4029D8D0-061B-4F9D-BC1C-CED6AB800437}"/>
               </a:ext>
             </a:extLst>
           </p:cNvPr>
@@ -6272,7 +6679,7 @@
           <p:cNvPr id="2" name="">
             <a:extLst xmlns:a="http://schemas.openxmlformats.org/drawingml/2006/main">
               <a:ext uri="{FF2B5EF4-FFF2-40B4-BE49-F238E27FC236}">
-                <a16:creationId xmlns:a16="http://schemas.microsoft.com/office/drawing/2014/main" id="{005CDB88-888D-4305-904B-4273DF561050}"/>
+                <a16:creationId xmlns:a16="http://schemas.microsoft.com/office/drawing/2014/main" id="{ED15D954-8941-4A4B-BF07-05C5F6FD86E9}"/>
               </a:ext>
             </a:extLst>
           </p:cNvPr>
@@ -6329,7 +6736,7 @@
           <p:cNvPr id="3" name="">
             <a:extLst xmlns:a="http://schemas.openxmlformats.org/drawingml/2006/main">
               <a:ext uri="{FF2B5EF4-FFF2-40B4-BE49-F238E27FC236}">
-                <a16:creationId xmlns:a16="http://schemas.microsoft.com/office/drawing/2014/main" id="{3A97FCAF-D020-443C-A79B-769ED23AC9EC}"/>
+                <a16:creationId xmlns:a16="http://schemas.microsoft.com/office/drawing/2014/main" id="{C45784C8-BCE6-41E0-9006-626C162EBD99}"/>
               </a:ext>
             </a:extLst>
           </p:cNvPr>
@@ -6386,7 +6793,7 @@
           <p:cNvPr id="4" name="">
             <a:extLst xmlns:a="http://schemas.openxmlformats.org/drawingml/2006/main">
               <a:ext uri="{FF2B5EF4-FFF2-40B4-BE49-F238E27FC236}">
-                <a16:creationId xmlns:a16="http://schemas.microsoft.com/office/drawing/2014/main" id="{66477DE0-CDE2-47A0-9D9A-1C1CE9D20B24}"/>
+                <a16:creationId xmlns:a16="http://schemas.microsoft.com/office/drawing/2014/main" id="{1FD95CB4-3453-473D-9B2E-9885BAC58C64}"/>
               </a:ext>
             </a:extLst>
           </p:cNvPr>
@@ -6447,7 +6854,7 @@
           <p:nvPr/>
         </p:nvPicPr>
         <p:blipFill>
-          <a:blip xmlns:r="http://schemas.openxmlformats.org/officeDocument/2006/relationships" xmlns:a="http://schemas.openxmlformats.org/drawingml/2006/main" r:embed="R4b0c1ab8beeb4088"/>
+          <a:blip xmlns:r="http://schemas.openxmlformats.org/officeDocument/2006/relationships" xmlns:a="http://schemas.openxmlformats.org/drawingml/2006/main" r:embed="Rc89eef3a58e54d06"/>
           <a:stretch xmlns:a="http://schemas.openxmlformats.org/drawingml/2006/main"/>
         </p:blipFill>
         <p:spPr>
@@ -6465,7 +6872,7 @@
           <p:cNvPr id="6" name="">
             <a:extLst xmlns:a="http://schemas.openxmlformats.org/drawingml/2006/main">
               <a:ext uri="{FF2B5EF4-FFF2-40B4-BE49-F238E27FC236}">
-                <a16:creationId xmlns:a16="http://schemas.microsoft.com/office/drawing/2014/main" id="{46FBBF90-A6F6-4721-A91C-5D148221DE05}"/>
+                <a16:creationId xmlns:a16="http://schemas.microsoft.com/office/drawing/2014/main" id="{C6A5FE2C-EF46-4754-9E6B-2162E599CFDB}"/>
               </a:ext>
             </a:extLst>
           </p:cNvPr>
@@ -6520,7 +6927,7 @@
     </p:spTree>
     <p:extLst>
       <p:ext uri="{BB962C8B-B14F-4D97-AF65-F5344CB8AC3E}">
-        <p14:creationId xmlns:p14="http://schemas.microsoft.com/office/powerpoint/2010/main" val="911398487"/>
+        <p14:creationId xmlns:p14="http://schemas.microsoft.com/office/powerpoint/2010/main" val="1805453070"/>
       </p:ext>
     </p:extLst>
   </p:cSld>
@@ -6551,7 +6958,7 @@
           <p:cNvPr id="10" name="">
             <a:extLst xmlns:a="http://schemas.openxmlformats.org/drawingml/2006/main">
               <a:ext uri="{FF2B5EF4-FFF2-40B4-BE49-F238E27FC236}">
-                <a16:creationId xmlns:a16="http://schemas.microsoft.com/office/drawing/2014/main" id="{A54718FC-1433-4090-AF29-DC2E87BFA205}"/>
+                <a16:creationId xmlns:a16="http://schemas.microsoft.com/office/drawing/2014/main" id="{D9A6593A-6E6D-427D-A795-5DEB521EB4D4}"/>
               </a:ext>
             </a:extLst>
           </p:cNvPr>
@@ -6608,7 +7015,7 @@
           <p:cNvPr id="2" name="">
             <a:extLst xmlns:a="http://schemas.openxmlformats.org/drawingml/2006/main">
               <a:ext uri="{FF2B5EF4-FFF2-40B4-BE49-F238E27FC236}">
-                <a16:creationId xmlns:a16="http://schemas.microsoft.com/office/drawing/2014/main" id="{BE479827-CC9C-4A8E-BDAB-9DAA948A9360}"/>
+                <a16:creationId xmlns:a16="http://schemas.microsoft.com/office/drawing/2014/main" id="{B4EAE52C-BD34-4979-AF2A-2B78EC8D32DB}"/>
               </a:ext>
             </a:extLst>
           </p:cNvPr>
@@ -6665,7 +7072,7 @@
           <p:cNvPr id="3" name="">
             <a:extLst xmlns:a="http://schemas.openxmlformats.org/drawingml/2006/main">
               <a:ext uri="{FF2B5EF4-FFF2-40B4-BE49-F238E27FC236}">
-                <a16:creationId xmlns:a16="http://schemas.microsoft.com/office/drawing/2014/main" id="{938F7DBE-09F0-4623-A30B-B89052EE4851}"/>
+                <a16:creationId xmlns:a16="http://schemas.microsoft.com/office/drawing/2014/main" id="{59010D7A-DDDD-4B09-992E-FFAF1A87D3B7}"/>
               </a:ext>
             </a:extLst>
           </p:cNvPr>
@@ -6722,7 +7129,7 @@
           <p:cNvPr id="4" name="">
             <a:extLst xmlns:a="http://schemas.openxmlformats.org/drawingml/2006/main">
               <a:ext uri="{FF2B5EF4-FFF2-40B4-BE49-F238E27FC236}">
-                <a16:creationId xmlns:a16="http://schemas.microsoft.com/office/drawing/2014/main" id="{545BC78F-BB33-4975-872D-2ED07904796D}"/>
+                <a16:creationId xmlns:a16="http://schemas.microsoft.com/office/drawing/2014/main" id="{D1A5F254-09E0-45F1-98C7-52A19B1A622B}"/>
               </a:ext>
             </a:extLst>
           </p:cNvPr>
@@ -6783,7 +7190,7 @@
           <p:nvPr/>
         </p:nvPicPr>
         <p:blipFill>
-          <a:blip xmlns:r="http://schemas.openxmlformats.org/officeDocument/2006/relationships" xmlns:a="http://schemas.openxmlformats.org/drawingml/2006/main" r:embed="R2a135bdfb7144324"/>
+          <a:blip xmlns:r="http://schemas.openxmlformats.org/officeDocument/2006/relationships" xmlns:a="http://schemas.openxmlformats.org/drawingml/2006/main" r:embed="Rd17e1403a0db42d0"/>
           <a:stretch xmlns:a="http://schemas.openxmlformats.org/drawingml/2006/main"/>
         </p:blipFill>
         <p:spPr>
@@ -6801,7 +7208,7 @@
           <p:cNvPr id="6" name="">
             <a:extLst xmlns:a="http://schemas.openxmlformats.org/drawingml/2006/main">
               <a:ext uri="{FF2B5EF4-FFF2-40B4-BE49-F238E27FC236}">
-                <a16:creationId xmlns:a16="http://schemas.microsoft.com/office/drawing/2014/main" id="{18933FD7-3E6D-47B4-9CD9-2C4D72AC6B42}"/>
+                <a16:creationId xmlns:a16="http://schemas.microsoft.com/office/drawing/2014/main" id="{7FF866AD-CA24-4E64-8437-892657ABF77C}"/>
               </a:ext>
             </a:extLst>
           </p:cNvPr>
@@ -6881,7 +7288,7 @@
           <p:cNvPr id="7" name="">
             <a:extLst xmlns:a="http://schemas.openxmlformats.org/drawingml/2006/main">
               <a:ext uri="{FF2B5EF4-FFF2-40B4-BE49-F238E27FC236}">
-                <a16:creationId xmlns:a16="http://schemas.microsoft.com/office/drawing/2014/main" id="{6718DFE0-760D-4349-966A-EF63D10C55D5}"/>
+                <a16:creationId xmlns:a16="http://schemas.microsoft.com/office/drawing/2014/main" id="{0C589080-0389-4866-BE7D-1DBB09738529}"/>
               </a:ext>
             </a:extLst>
           </p:cNvPr>
@@ -6961,7 +7368,7 @@
           <p:cNvPr id="8" name="">
             <a:extLst xmlns:a="http://schemas.openxmlformats.org/drawingml/2006/main">
               <a:ext uri="{FF2B5EF4-FFF2-40B4-BE49-F238E27FC236}">
-                <a16:creationId xmlns:a16="http://schemas.microsoft.com/office/drawing/2014/main" id="{E32BF426-9997-4D82-83A2-6067645965FF}"/>
+                <a16:creationId xmlns:a16="http://schemas.microsoft.com/office/drawing/2014/main" id="{7130A11B-59F9-4A76-8A49-64D6059EE510}"/>
               </a:ext>
             </a:extLst>
           </p:cNvPr>
@@ -7064,7 +7471,7 @@
           <p:cNvPr id="9" name="">
             <a:extLst xmlns:a="http://schemas.openxmlformats.org/drawingml/2006/main">
               <a:ext uri="{FF2B5EF4-FFF2-40B4-BE49-F238E27FC236}">
-                <a16:creationId xmlns:a16="http://schemas.microsoft.com/office/drawing/2014/main" id="{B04DC160-02C5-4068-A4F8-3781A23A1E4C}"/>
+                <a16:creationId xmlns:a16="http://schemas.microsoft.com/office/drawing/2014/main" id="{F6A24658-22A2-4FFB-9D83-FF190C863CCF}"/>
               </a:ext>
             </a:extLst>
           </p:cNvPr>
@@ -7119,7 +7526,7 @@
     </p:spTree>
     <p:extLst>
       <p:ext uri="{BB962C8B-B14F-4D97-AF65-F5344CB8AC3E}">
-        <p14:creationId xmlns:p14="http://schemas.microsoft.com/office/powerpoint/2010/main" val="842116807"/>
+        <p14:creationId xmlns:p14="http://schemas.microsoft.com/office/powerpoint/2010/main" val="1267506133"/>
       </p:ext>
     </p:extLst>
   </p:cSld>
@@ -7150,7 +7557,7 @@
           <p:cNvPr id="8" name="">
             <a:extLst xmlns:a="http://schemas.openxmlformats.org/drawingml/2006/main">
               <a:ext uri="{FF2B5EF4-FFF2-40B4-BE49-F238E27FC236}">
-                <a16:creationId xmlns:a16="http://schemas.microsoft.com/office/drawing/2014/main" id="{41CD04B5-04CD-4445-A7A2-ABF050D949A5}"/>
+                <a16:creationId xmlns:a16="http://schemas.microsoft.com/office/drawing/2014/main" id="{AA7ED736-487E-4F56-B396-BADBC5106310}"/>
               </a:ext>
             </a:extLst>
           </p:cNvPr>
@@ -7207,7 +7614,7 @@
           <p:cNvPr id="2" name="">
             <a:extLst xmlns:a="http://schemas.openxmlformats.org/drawingml/2006/main">
               <a:ext uri="{FF2B5EF4-FFF2-40B4-BE49-F238E27FC236}">
-                <a16:creationId xmlns:a16="http://schemas.microsoft.com/office/drawing/2014/main" id="{87031196-2DE0-41E9-B3E3-75A6780EFD82}"/>
+                <a16:creationId xmlns:a16="http://schemas.microsoft.com/office/drawing/2014/main" id="{40EBD3C0-AF05-4C41-8C6F-8AD824AA8B5F}"/>
               </a:ext>
             </a:extLst>
           </p:cNvPr>
@@ -7264,7 +7671,7 @@
           <p:cNvPr id="3" name="">
             <a:extLst xmlns:a="http://schemas.openxmlformats.org/drawingml/2006/main">
               <a:ext uri="{FF2B5EF4-FFF2-40B4-BE49-F238E27FC236}">
-                <a16:creationId xmlns:a16="http://schemas.microsoft.com/office/drawing/2014/main" id="{2E1E7897-68E0-4FE6-8507-3881C9A03162}"/>
+                <a16:creationId xmlns:a16="http://schemas.microsoft.com/office/drawing/2014/main" id="{41581309-B70E-443E-81D2-5328F54CBDD4}"/>
               </a:ext>
             </a:extLst>
           </p:cNvPr>
@@ -7321,7 +7728,7 @@
           <p:cNvPr id="4" name="">
             <a:extLst xmlns:a="http://schemas.openxmlformats.org/drawingml/2006/main">
               <a:ext uri="{FF2B5EF4-FFF2-40B4-BE49-F238E27FC236}">
-                <a16:creationId xmlns:a16="http://schemas.microsoft.com/office/drawing/2014/main" id="{4485641B-7CD0-4153-B8C4-B67A119BFC3D}"/>
+                <a16:creationId xmlns:a16="http://schemas.microsoft.com/office/drawing/2014/main" id="{0F44AAE9-3DE4-438D-BF75-2FFE5964E8A8}"/>
               </a:ext>
             </a:extLst>
           </p:cNvPr>
@@ -7382,7 +7789,7 @@
           <p:nvPr/>
         </p:nvPicPr>
         <p:blipFill>
-          <a:blip xmlns:r="http://schemas.openxmlformats.org/officeDocument/2006/relationships" xmlns:a="http://schemas.openxmlformats.org/drawingml/2006/main" r:embed="R36d106b8f7af4b74"/>
+          <a:blip xmlns:r="http://schemas.openxmlformats.org/officeDocument/2006/relationships" xmlns:a="http://schemas.openxmlformats.org/drawingml/2006/main" r:embed="Rc9868f3052a24924"/>
           <a:stretch xmlns:a="http://schemas.openxmlformats.org/drawingml/2006/main"/>
         </p:blipFill>
         <p:spPr>
@@ -7400,7 +7807,7 @@
           <p:cNvPr id="6" name="">
             <a:extLst xmlns:a="http://schemas.openxmlformats.org/drawingml/2006/main">
               <a:ext uri="{FF2B5EF4-FFF2-40B4-BE49-F238E27FC236}">
-                <a16:creationId xmlns:a16="http://schemas.microsoft.com/office/drawing/2014/main" id="{AB4C1A17-10B5-4CD8-ACA1-97837ACE30E8}"/>
+                <a16:creationId xmlns:a16="http://schemas.microsoft.com/office/drawing/2014/main" id="{61F1B9AA-FF64-49D1-A8BD-9C09CB15BBB3}"/>
               </a:ext>
             </a:extLst>
           </p:cNvPr>
@@ -7508,7 +7915,7 @@
           <p:cNvPr id="7" name="">
             <a:extLst xmlns:a="http://schemas.openxmlformats.org/drawingml/2006/main">
               <a:ext uri="{FF2B5EF4-FFF2-40B4-BE49-F238E27FC236}">
-                <a16:creationId xmlns:a16="http://schemas.microsoft.com/office/drawing/2014/main" id="{48FA257F-C71E-4958-B7B5-3066DBC2D33F}"/>
+                <a16:creationId xmlns:a16="http://schemas.microsoft.com/office/drawing/2014/main" id="{AF4A0256-F209-4D4E-A3EE-668600E043F9}"/>
               </a:ext>
             </a:extLst>
           </p:cNvPr>
@@ -7563,7 +7970,7 @@
     </p:spTree>
     <p:extLst>
       <p:ext uri="{BB962C8B-B14F-4D97-AF65-F5344CB8AC3E}">
-        <p14:creationId xmlns:p14="http://schemas.microsoft.com/office/powerpoint/2010/main" val="1497007802"/>
+        <p14:creationId xmlns:p14="http://schemas.microsoft.com/office/powerpoint/2010/main" val="352145769"/>
       </p:ext>
     </p:extLst>
   </p:cSld>
@@ -7594,7 +8001,7 @@
           <p:cNvPr id="8" name="">
             <a:extLst xmlns:a="http://schemas.openxmlformats.org/drawingml/2006/main">
               <a:ext uri="{FF2B5EF4-FFF2-40B4-BE49-F238E27FC236}">
-                <a16:creationId xmlns:a16="http://schemas.microsoft.com/office/drawing/2014/main" id="{5585420B-6562-4AD6-AA37-3C0841E2AC8C}"/>
+                <a16:creationId xmlns:a16="http://schemas.microsoft.com/office/drawing/2014/main" id="{4E46B0BC-6CAB-420F-86C1-3772455A74C3}"/>
               </a:ext>
             </a:extLst>
           </p:cNvPr>
@@ -7651,7 +8058,7 @@
           <p:cNvPr id="2" name="">
             <a:extLst xmlns:a="http://schemas.openxmlformats.org/drawingml/2006/main">
               <a:ext uri="{FF2B5EF4-FFF2-40B4-BE49-F238E27FC236}">
-                <a16:creationId xmlns:a16="http://schemas.microsoft.com/office/drawing/2014/main" id="{7F224BA5-4DD5-48A7-A96B-49E4D3D686EA}"/>
+                <a16:creationId xmlns:a16="http://schemas.microsoft.com/office/drawing/2014/main" id="{F945BF82-515A-4A64-85AC-D413016FBDDF}"/>
               </a:ext>
             </a:extLst>
           </p:cNvPr>
@@ -7708,7 +8115,7 @@
           <p:cNvPr id="3" name="">
             <a:extLst xmlns:a="http://schemas.openxmlformats.org/drawingml/2006/main">
               <a:ext uri="{FF2B5EF4-FFF2-40B4-BE49-F238E27FC236}">
-                <a16:creationId xmlns:a16="http://schemas.microsoft.com/office/drawing/2014/main" id="{5B1CE012-158D-45B1-AD00-EFC3171821E8}"/>
+                <a16:creationId xmlns:a16="http://schemas.microsoft.com/office/drawing/2014/main" id="{03F06B1A-3BF9-42F9-92F4-BB0AEEC944C7}"/>
               </a:ext>
             </a:extLst>
           </p:cNvPr>
@@ -7765,7 +8172,7 @@
           <p:cNvPr id="4" name="">
             <a:extLst xmlns:a="http://schemas.openxmlformats.org/drawingml/2006/main">
               <a:ext uri="{FF2B5EF4-FFF2-40B4-BE49-F238E27FC236}">
-                <a16:creationId xmlns:a16="http://schemas.microsoft.com/office/drawing/2014/main" id="{BCD2D41D-7969-47AC-87CD-BDF247E3A23D}"/>
+                <a16:creationId xmlns:a16="http://schemas.microsoft.com/office/drawing/2014/main" id="{09B646FE-95C0-492B-854A-B07CA305DB27}"/>
               </a:ext>
             </a:extLst>
           </p:cNvPr>
@@ -7826,7 +8233,7 @@
           <p:nvPr/>
         </p:nvPicPr>
         <p:blipFill>
-          <a:blip xmlns:r="http://schemas.openxmlformats.org/officeDocument/2006/relationships" xmlns:a="http://schemas.openxmlformats.org/drawingml/2006/main" r:embed="R366b61e122d04a50"/>
+          <a:blip xmlns:r="http://schemas.openxmlformats.org/officeDocument/2006/relationships" xmlns:a="http://schemas.openxmlformats.org/drawingml/2006/main" r:embed="Rec43b646ba544b0d"/>
           <a:stretch xmlns:a="http://schemas.openxmlformats.org/drawingml/2006/main"/>
         </p:blipFill>
         <p:spPr>
@@ -7844,7 +8251,7 @@
           <p:cNvPr id="6" name="">
             <a:extLst xmlns:a="http://schemas.openxmlformats.org/drawingml/2006/main">
               <a:ext uri="{FF2B5EF4-FFF2-40B4-BE49-F238E27FC236}">
-                <a16:creationId xmlns:a16="http://schemas.microsoft.com/office/drawing/2014/main" id="{0F21EEF9-5BDC-4BD1-B897-F92658ED9FC7}"/>
+                <a16:creationId xmlns:a16="http://schemas.microsoft.com/office/drawing/2014/main" id="{E2740392-4F40-42CB-820D-CE2342FE40A5}"/>
               </a:ext>
             </a:extLst>
           </p:cNvPr>
@@ -7952,7 +8359,7 @@
           <p:cNvPr id="7" name="">
             <a:extLst xmlns:a="http://schemas.openxmlformats.org/drawingml/2006/main">
               <a:ext uri="{FF2B5EF4-FFF2-40B4-BE49-F238E27FC236}">
-                <a16:creationId xmlns:a16="http://schemas.microsoft.com/office/drawing/2014/main" id="{D0EE8720-3CC8-4591-8C7E-AA5DA4FB8CCD}"/>
+                <a16:creationId xmlns:a16="http://schemas.microsoft.com/office/drawing/2014/main" id="{87E42520-5857-4ADB-BD43-ECE2B4778773}"/>
               </a:ext>
             </a:extLst>
           </p:cNvPr>
@@ -8007,7 +8414,7 @@
     </p:spTree>
     <p:extLst>
       <p:ext uri="{BB962C8B-B14F-4D97-AF65-F5344CB8AC3E}">
-        <p14:creationId xmlns:p14="http://schemas.microsoft.com/office/powerpoint/2010/main" val="1502474852"/>
+        <p14:creationId xmlns:p14="http://schemas.microsoft.com/office/powerpoint/2010/main" val="1569619973"/>
       </p:ext>
     </p:extLst>
   </p:cSld>
@@ -8038,7 +8445,7 @@
           <p:cNvPr id="8" name="">
             <a:extLst xmlns:a="http://schemas.openxmlformats.org/drawingml/2006/main">
               <a:ext uri="{FF2B5EF4-FFF2-40B4-BE49-F238E27FC236}">
-                <a16:creationId xmlns:a16="http://schemas.microsoft.com/office/drawing/2014/main" id="{11BEEBD0-94F0-45E8-A7EE-0F0352A002BF}"/>
+                <a16:creationId xmlns:a16="http://schemas.microsoft.com/office/drawing/2014/main" id="{0DFF39F0-C6BD-49C7-A445-9C07F8BFD006}"/>
               </a:ext>
             </a:extLst>
           </p:cNvPr>
@@ -8095,7 +8502,7 @@
           <p:cNvPr id="2" name="">
             <a:extLst xmlns:a="http://schemas.openxmlformats.org/drawingml/2006/main">
               <a:ext uri="{FF2B5EF4-FFF2-40B4-BE49-F238E27FC236}">
-                <a16:creationId xmlns:a16="http://schemas.microsoft.com/office/drawing/2014/main" id="{CBD6F2B0-CC4F-4435-B351-BC77803F5F04}"/>
+                <a16:creationId xmlns:a16="http://schemas.microsoft.com/office/drawing/2014/main" id="{C7E92974-362F-48F0-BC32-B49EB44C3741}"/>
               </a:ext>
             </a:extLst>
           </p:cNvPr>
@@ -8152,7 +8559,7 @@
           <p:cNvPr id="3" name="">
             <a:extLst xmlns:a="http://schemas.openxmlformats.org/drawingml/2006/main">
               <a:ext uri="{FF2B5EF4-FFF2-40B4-BE49-F238E27FC236}">
-                <a16:creationId xmlns:a16="http://schemas.microsoft.com/office/drawing/2014/main" id="{D2580DD0-8BCC-44DD-8E6B-60CB6298F1EB}"/>
+                <a16:creationId xmlns:a16="http://schemas.microsoft.com/office/drawing/2014/main" id="{99348BF3-E1F5-468B-83E5-72023E6AD786}"/>
               </a:ext>
             </a:extLst>
           </p:cNvPr>
@@ -8209,7 +8616,7 @@
           <p:cNvPr id="4" name="">
             <a:extLst xmlns:a="http://schemas.openxmlformats.org/drawingml/2006/main">
               <a:ext uri="{FF2B5EF4-FFF2-40B4-BE49-F238E27FC236}">
-                <a16:creationId xmlns:a16="http://schemas.microsoft.com/office/drawing/2014/main" id="{AB6E04EB-E947-4F2E-BEAF-49C277A31268}"/>
+                <a16:creationId xmlns:a16="http://schemas.microsoft.com/office/drawing/2014/main" id="{23F43FCB-1241-47B1-AF1F-C9708B2E2638}"/>
               </a:ext>
             </a:extLst>
           </p:cNvPr>
@@ -8270,7 +8677,7 @@
           <p:nvPr/>
         </p:nvPicPr>
         <p:blipFill>
-          <a:blip xmlns:r="http://schemas.openxmlformats.org/officeDocument/2006/relationships" xmlns:a="http://schemas.openxmlformats.org/drawingml/2006/main" r:embed="Rdbe2b0facf844927"/>
+          <a:blip xmlns:r="http://schemas.openxmlformats.org/officeDocument/2006/relationships" xmlns:a="http://schemas.openxmlformats.org/drawingml/2006/main" r:embed="R2e6fb96c30cc493b"/>
           <a:stretch xmlns:a="http://schemas.openxmlformats.org/drawingml/2006/main"/>
         </p:blipFill>
         <p:spPr>
@@ -8288,7 +8695,7 @@
           <p:cNvPr id="6" name="">
             <a:extLst xmlns:a="http://schemas.openxmlformats.org/drawingml/2006/main">
               <a:ext uri="{FF2B5EF4-FFF2-40B4-BE49-F238E27FC236}">
-                <a16:creationId xmlns:a16="http://schemas.microsoft.com/office/drawing/2014/main" id="{F3CC6C2C-3BAD-419E-8D01-FDE1EB7AC304}"/>
+                <a16:creationId xmlns:a16="http://schemas.microsoft.com/office/drawing/2014/main" id="{9F450DD2-DE39-4EBF-8760-EB2862B9C786}"/>
               </a:ext>
             </a:extLst>
           </p:cNvPr>
@@ -8396,7 +8803,7 @@
           <p:cNvPr id="7" name="">
             <a:extLst xmlns:a="http://schemas.openxmlformats.org/drawingml/2006/main">
               <a:ext uri="{FF2B5EF4-FFF2-40B4-BE49-F238E27FC236}">
-                <a16:creationId xmlns:a16="http://schemas.microsoft.com/office/drawing/2014/main" id="{97EADBA2-9B4E-4212-8C4A-68360E225BC5}"/>
+                <a16:creationId xmlns:a16="http://schemas.microsoft.com/office/drawing/2014/main" id="{A96E5768-02D6-4696-850F-EC1DAAD69C46}"/>
               </a:ext>
             </a:extLst>
           </p:cNvPr>
@@ -8502,7 +8909,7 @@
     </p:spTree>
     <p:extLst>
       <p:ext uri="{BB962C8B-B14F-4D97-AF65-F5344CB8AC3E}">
-        <p14:creationId xmlns:p14="http://schemas.microsoft.com/office/powerpoint/2010/main" val="1831706074"/>
+        <p14:creationId xmlns:p14="http://schemas.microsoft.com/office/powerpoint/2010/main" val="694357439"/>
       </p:ext>
     </p:extLst>
   </p:cSld>
@@ -8530,10 +8937,10 @@
       </p:grpSpPr>
       <p:sp>
         <p:nvSpPr>
-          <p:cNvPr id="6" name="">
+          <p:cNvPr id="7" name="">
             <a:extLst xmlns:a="http://schemas.openxmlformats.org/drawingml/2006/main">
               <a:ext uri="{FF2B5EF4-FFF2-40B4-BE49-F238E27FC236}">
-                <a16:creationId xmlns:a16="http://schemas.microsoft.com/office/drawing/2014/main" id="{8A70EF99-7DD2-468C-B6E2-8966A3306C3B}"/>
+                <a16:creationId xmlns:a16="http://schemas.microsoft.com/office/drawing/2014/main" id="{4F239687-0003-4D5C-825E-87A6DF49366B}"/>
               </a:ext>
             </a:extLst>
           </p:cNvPr>
@@ -8590,7 +8997,7 @@
           <p:cNvPr id="2" name="">
             <a:extLst xmlns:a="http://schemas.openxmlformats.org/drawingml/2006/main">
               <a:ext uri="{FF2B5EF4-FFF2-40B4-BE49-F238E27FC236}">
-                <a16:creationId xmlns:a16="http://schemas.microsoft.com/office/drawing/2014/main" id="{D9C6E819-3921-4805-81E8-14F91803176A}"/>
+                <a16:creationId xmlns:a16="http://schemas.microsoft.com/office/drawing/2014/main" id="{34B9DE9D-C764-4BC3-9819-AC0BE9651DCE}"/>
               </a:ext>
             </a:extLst>
           </p:cNvPr>
@@ -8637,7 +9044,7 @@
                 <a:ea typeface="Microsoft JhengHei"/>
                 <a:cs typeface="Microsoft JhengHei"/>
               </a:rPr>
-              <a:t>交集中的 pathway 與 NES</a:t>
+              <a:t>40 條共同上調 pathway：第 1–20 條</a:t>
             </a:r>
           </a:p>
         </p:txBody>
@@ -8647,7 +9054,7 @@
           <p:cNvPr id="3" name="">
             <a:extLst xmlns:a="http://schemas.openxmlformats.org/drawingml/2006/main">
               <a:ext uri="{FF2B5EF4-FFF2-40B4-BE49-F238E27FC236}">
-                <a16:creationId xmlns:a16="http://schemas.microsoft.com/office/drawing/2014/main" id="{A7823722-F1B2-44F5-BEA2-74CC8E95C381}"/>
+                <a16:creationId xmlns:a16="http://schemas.microsoft.com/office/drawing/2014/main" id="{7E3DD063-A897-4BB7-8385-FF21731243BF}"/>
               </a:ext>
             </a:extLst>
           </p:cNvPr>
@@ -8704,7 +9111,7 @@
           <p:cNvPr id="4" name="">
             <a:extLst xmlns:a="http://schemas.openxmlformats.org/drawingml/2006/main">
               <a:ext uri="{FF2B5EF4-FFF2-40B4-BE49-F238E27FC236}">
-                <a16:creationId xmlns:a16="http://schemas.microsoft.com/office/drawing/2014/main" id="{82BA95E4-B578-4F9A-B433-027904FB0ABB}"/>
+                <a16:creationId xmlns:a16="http://schemas.microsoft.com/office/drawing/2014/main" id="{78556452-6553-482A-A06D-46BAD8A73143}"/>
               </a:ext>
             </a:extLst>
           </p:cNvPr>
@@ -8758,30 +9165,87 @@
       </p:sp>
       <p:pic>
         <p:nvPicPr>
-          <p:cNvPr id="10" name=""/>
+          <p:cNvPr id="11" name=""/>
           <p:cNvPicPr>
             <a:picLocks xmlns:a="http://schemas.openxmlformats.org/drawingml/2006/main" noChangeAspect="1"/>
           </p:cNvPicPr>
           <p:nvPr/>
         </p:nvPicPr>
         <p:blipFill>
-          <a:blip xmlns:r="http://schemas.openxmlformats.org/officeDocument/2006/relationships" xmlns:a="http://schemas.openxmlformats.org/drawingml/2006/main" r:embed="R50fb8ae6ac74409d"/>
+          <a:blip xmlns:r="http://schemas.openxmlformats.org/officeDocument/2006/relationships" xmlns:a="http://schemas.openxmlformats.org/drawingml/2006/main" r:embed="R2de39dacb0c6440d"/>
           <a:stretch xmlns:a="http://schemas.openxmlformats.org/drawingml/2006/main"/>
         </p:blipFill>
         <p:spPr>
           <a:xfrm xmlns:a="http://schemas.openxmlformats.org/drawingml/2006/main">
-            <a:off x="1293813" y="1066800"/>
-            <a:ext cx="9604375" cy="5238750"/>
+            <a:off x="1262884" y="1028700"/>
+            <a:ext cx="9666233" cy="5143500"/>
           </a:xfrm>
           <a:prstGeom xmlns:a="http://schemas.openxmlformats.org/drawingml/2006/main" prst="rect">
             <a:avLst/>
           </a:prstGeom>
         </p:spPr>
       </p:pic>
+      <p:sp>
+        <p:nvSpPr>
+          <p:cNvPr id="6" name="">
+            <a:extLst xmlns:a="http://schemas.openxmlformats.org/drawingml/2006/main">
+              <a:ext uri="{FF2B5EF4-FFF2-40B4-BE49-F238E27FC236}">
+                <a16:creationId xmlns:a16="http://schemas.microsoft.com/office/drawing/2014/main" id="{3666FAD1-6C6B-43B6-B21B-F8D5D5257BD3}"/>
+              </a:ext>
+            </a:extLst>
+          </p:cNvPr>
+          <p:cNvSpPr>
+            <a:spLocks xmlns:a="http://schemas.openxmlformats.org/drawingml/2006/main" noGrp="1"/>
+          </p:cNvSpPr>
+          <p:nvPr/>
+        </p:nvSpPr>
+        <p:spPr>
+          <a:xfrm xmlns:a="http://schemas.openxmlformats.org/drawingml/2006/main">
+            <a:off x="619125" y="6191250"/>
+            <a:ext cx="10953750" cy="285750"/>
+          </a:xfrm>
+          <a:prstGeom xmlns:a="http://schemas.openxmlformats.org/drawingml/2006/main" prst="rect">
+            <a:avLst/>
+          </a:prstGeom>
+          <a:noFill xmlns:a="http://schemas.openxmlformats.org/drawingml/2006/main"/>
+          <a:ln xmlns:a="http://schemas.openxmlformats.org/drawingml/2006/main" w="0">
+            <a:noFill/>
+          </a:ln>
+        </p:spPr>
+        <p:txBody>
+          <a:bodyPr xmlns:a="http://schemas.openxmlformats.org/drawingml/2006/main">
+            <a:normAutofit fontScale="94444"/>
+          </a:bodyPr>
+          <a:lstStyle xmlns:a="http://schemas.openxmlformats.org/drawingml/2006/main"/>
+          <a:p xmlns:a="http://schemas.openxmlformats.org/drawingml/2006/main">
+            <a:pPr>
+              <a:defRPr sz="1350" b="0">
+                <a:solidFill>
+                  <a:srgbClr val="142F43"/>
+                </a:solidFill>
+                <a:latin typeface="Microsoft JhengHei"/>
+                <a:ea typeface="Microsoft JhengHei"/>
+                <a:cs typeface="Microsoft JhengHei"/>
+              </a:defRPr>
+            </a:pPr>
+            <a:r>
+              <a:rPr sz="1350" b="0">
+                <a:solidFill>
+                  <a:srgbClr val="142F43"/>
+                </a:solidFill>
+                <a:latin typeface="Microsoft JhengHei"/>
+                <a:ea typeface="Microsoft JhengHei"/>
+                <a:cs typeface="Microsoft JhengHei"/>
+              </a:rPr>
+              <a:t>兩組均 FDR &lt; 0.05。依兩組較大的 FDR 由小到大排列，Proteasome 位於第 14 條。</a:t>
+            </a:r>
+          </a:p>
+        </p:txBody>
+      </p:sp>
     </p:spTree>
     <p:extLst>
       <p:ext uri="{BB962C8B-B14F-4D97-AF65-F5344CB8AC3E}">
-        <p14:creationId xmlns:p14="http://schemas.microsoft.com/office/powerpoint/2010/main" val="1542495709"/>
+        <p14:creationId xmlns:p14="http://schemas.microsoft.com/office/powerpoint/2010/main" val="1553630544"/>
       </p:ext>
     </p:extLst>
   </p:cSld>

--- a/projects/GSE262271_TALL_relapse_scRNAseq/07_Student_Handoff/01_Summary/Leukemia_scRNAseq_STAT5B_reviewed.pptx
+++ b/projects/GSE262271_TALL_relapse_scRNAseq/07_Student_Handoff/01_Summary/Leukemia_scRNAseq_STAT5B_reviewed.pptx
@@ -2,27 +2,27 @@
 <file path=ppt/presentation.xml><?xml version="1.0" encoding="utf-8"?>
 <p:presentation xmlns:p="http://schemas.openxmlformats.org/presentationml/2006/main">
   <p:sldMasterIdLst>
-    <p:sldMasterId xmlns:r="http://schemas.openxmlformats.org/officeDocument/2006/relationships" id="2147483648" r:id="R7c6c7086868e4eba"/>
+    <p:sldMasterId xmlns:r="http://schemas.openxmlformats.org/officeDocument/2006/relationships" id="2147483648" r:id="R590ee19e09114a82"/>
   </p:sldMasterIdLst>
   <p:notesMasterIdLst>
-    <p:notesMasterId xmlns:r="http://schemas.openxmlformats.org/officeDocument/2006/relationships" r:id="Rdb32df5b10ae4582"/>
+    <p:notesMasterId xmlns:r="http://schemas.openxmlformats.org/officeDocument/2006/relationships" r:id="R5ca6111044fb4531"/>
   </p:notesMasterIdLst>
   <p:sldIdLst>
-    <p:sldId xmlns:r="http://schemas.openxmlformats.org/officeDocument/2006/relationships" id="256" r:id="R64e882b4751a4568"/>
-    <p:sldId xmlns:r="http://schemas.openxmlformats.org/officeDocument/2006/relationships" id="257" r:id="Re738212d4ff94b28"/>
-    <p:sldId xmlns:r="http://schemas.openxmlformats.org/officeDocument/2006/relationships" id="258" r:id="Ref3cb69697354ddf"/>
-    <p:sldId xmlns:r="http://schemas.openxmlformats.org/officeDocument/2006/relationships" id="259" r:id="R5a351d7f7c484907"/>
-    <p:sldId xmlns:r="http://schemas.openxmlformats.org/officeDocument/2006/relationships" id="260" r:id="R6856b2e685384d7f"/>
-    <p:sldId xmlns:r="http://schemas.openxmlformats.org/officeDocument/2006/relationships" id="261" r:id="R7c1c2bc854e54a00"/>
-    <p:sldId xmlns:r="http://schemas.openxmlformats.org/officeDocument/2006/relationships" id="262" r:id="R83b2088941524f63"/>
-    <p:sldId xmlns:r="http://schemas.openxmlformats.org/officeDocument/2006/relationships" id="263" r:id="R8ef5c3e5c1014c04"/>
-    <p:sldId xmlns:r="http://schemas.openxmlformats.org/officeDocument/2006/relationships" id="264" r:id="R59bac43f2caa4213"/>
-    <p:sldId xmlns:r="http://schemas.openxmlformats.org/officeDocument/2006/relationships" id="265" r:id="R22dc68c251bc4425"/>
-    <p:sldId xmlns:r="http://schemas.openxmlformats.org/officeDocument/2006/relationships" id="266" r:id="Rc364a3d5dbbe400b"/>
-    <p:sldId xmlns:r="http://schemas.openxmlformats.org/officeDocument/2006/relationships" id="267" r:id="Rc370e7c0d8974607"/>
-    <p:sldId xmlns:r="http://schemas.openxmlformats.org/officeDocument/2006/relationships" id="268" r:id="R7562d54a582045db"/>
-    <p:sldId xmlns:r="http://schemas.openxmlformats.org/officeDocument/2006/relationships" id="269" r:id="R039c8bc954f44473"/>
-    <p:sldId xmlns:r="http://schemas.openxmlformats.org/officeDocument/2006/relationships" id="270" r:id="R95706312c62f4dc7"/>
+    <p:sldId xmlns:r="http://schemas.openxmlformats.org/officeDocument/2006/relationships" id="256" r:id="R54ad0cd8ac16434f"/>
+    <p:sldId xmlns:r="http://schemas.openxmlformats.org/officeDocument/2006/relationships" id="257" r:id="R4d3c999119a74990"/>
+    <p:sldId xmlns:r="http://schemas.openxmlformats.org/officeDocument/2006/relationships" id="258" r:id="R4380cde91a8a47a2"/>
+    <p:sldId xmlns:r="http://schemas.openxmlformats.org/officeDocument/2006/relationships" id="259" r:id="R85bddb84a8c54e27"/>
+    <p:sldId xmlns:r="http://schemas.openxmlformats.org/officeDocument/2006/relationships" id="260" r:id="Rb94e9a245b9e4315"/>
+    <p:sldId xmlns:r="http://schemas.openxmlformats.org/officeDocument/2006/relationships" id="261" r:id="R6fa8f9a5200545bc"/>
+    <p:sldId xmlns:r="http://schemas.openxmlformats.org/officeDocument/2006/relationships" id="262" r:id="R31b7996278ad4189"/>
+    <p:sldId xmlns:r="http://schemas.openxmlformats.org/officeDocument/2006/relationships" id="263" r:id="Rca9f3baf37cb45eb"/>
+    <p:sldId xmlns:r="http://schemas.openxmlformats.org/officeDocument/2006/relationships" id="264" r:id="R88d27d6fdd0943de"/>
+    <p:sldId xmlns:r="http://schemas.openxmlformats.org/officeDocument/2006/relationships" id="265" r:id="Recc8fd061f5f4bdc"/>
+    <p:sldId xmlns:r="http://schemas.openxmlformats.org/officeDocument/2006/relationships" id="266" r:id="R11872d261cb74a9c"/>
+    <p:sldId xmlns:r="http://schemas.openxmlformats.org/officeDocument/2006/relationships" id="267" r:id="Rb2ad2d44505b4bfc"/>
+    <p:sldId xmlns:r="http://schemas.openxmlformats.org/officeDocument/2006/relationships" id="268" r:id="R2aa3148f059b4816"/>
+    <p:sldId xmlns:r="http://schemas.openxmlformats.org/officeDocument/2006/relationships" id="269" r:id="R69efec4be4604917"/>
+    <p:sldId xmlns:r="http://schemas.openxmlformats.org/officeDocument/2006/relationships" id="270" r:id="R88976e6beb6e4dc1"/>
   </p:sldIdLst>
   <p:sldSz cx="12192000" cy="6858000"/>
   <p:notesSz cx="6858000" cy="9144000"/>
@@ -1436,7 +1436,7 @@
           <a:lstStyle xmlns:a="http://schemas.openxmlformats.org/drawingml/2006/main"/>
           <a:p xmlns:a="http://schemas.openxmlformats.org/drawingml/2006/main">
             <a:r>
-              <a:t>Table07 and complete Figure06 use exactly the same order: increasing max(sc_FDR, bulk_FDR), with alphabetical pathway-name ties. The maximum is a display ordering key, not a combined FDR. Position indicates NES; color indicates full-catalog BH FDR on a -log10 scale capped at6. All40 satisfy FDR&lt;0.05 in both datasets. Bold labels identify hypothesis targets without changing ordering. Layout reference: Reis-de-Oliveira et al., Nature Communications (2024), Figures3B and4D, https://www.nature.com/articles/s41467-024-50875-z . Only the plot layout is adapted; the reference article uses other enrichment statistics.</a:t>
+              <a:t>Table07 and complete Figure06 use exactly the same order: increasing max(sc_FDR, bulk_FDR), with alphabetical pathway-name ties. The maximum is a display ordering key, not a combined FDR. Position and adjacent numbers indicate NES. Blue denotes relapse scRNAseq and orange denotes STAT5B N642H bulk. A separate aligned column shows full-catalog BH FDR and stars: *&lt;0.05, **&lt;0.01, ***&lt;0.001. Stars use unrounded FDR, never nominal P. All40 satisfy FDR&lt;0.05 in both datasets. Bold labels identify hypothesis targets without changing ordering. Layout reference: Reis-de-Oliveira et al., Nature Communications (2024), Figures3B and4D, https://www.nature.com/articles/s41467-024-50875-z . Only the plot layout is adapted; the reference article uses other enrichment statistics.</a:t>
             </a:r>
           </a:p>
         </p:txBody>
@@ -1504,7 +1504,7 @@
   </p:cSld>
   <p:clrMap bg1="lt1" tx1="dk1" bg2="lt2" tx2="dk2" accent1="accent1" accent2="accent2" accent3="accent3" accent4="accent4" accent5="accent5" accent6="accent6" hlink="hlink" folHlink="folHlink"/>
   <p:sldLayoutIdLst>
-    <p:sldLayoutId xmlns:r="http://schemas.openxmlformats.org/officeDocument/2006/relationships" id="2147483649" r:id="Rcdb8ce7ff1fc401f"/>
+    <p:sldLayoutId xmlns:r="http://schemas.openxmlformats.org/officeDocument/2006/relationships" id="2147483649" r:id="R7c0a2ad83e7c4b11"/>
   </p:sldLayoutIdLst>
   <p:txStyles>
     <p:titleStyle>
@@ -2055,7 +2055,7 @@
           <p:cNvPr id="9" name="">
             <a:extLst xmlns:a="http://schemas.openxmlformats.org/drawingml/2006/main">
               <a:ext uri="{FF2B5EF4-FFF2-40B4-BE49-F238E27FC236}">
-                <a16:creationId xmlns:a16="http://schemas.microsoft.com/office/drawing/2014/main" id="{6F224678-8C24-4F87-9716-A5EE6242E567}"/>
+                <a16:creationId xmlns:a16="http://schemas.microsoft.com/office/drawing/2014/main" id="{53A7EAEC-7B1B-4096-B71B-BD0F02E96265}"/>
               </a:ext>
             </a:extLst>
           </p:cNvPr>
@@ -2112,7 +2112,7 @@
           <p:cNvPr id="2" name="">
             <a:extLst xmlns:a="http://schemas.openxmlformats.org/drawingml/2006/main">
               <a:ext uri="{FF2B5EF4-FFF2-40B4-BE49-F238E27FC236}">
-                <a16:creationId xmlns:a16="http://schemas.microsoft.com/office/drawing/2014/main" id="{122D88E6-AA0E-4C5F-8A23-E23046F0663F}"/>
+                <a16:creationId xmlns:a16="http://schemas.microsoft.com/office/drawing/2014/main" id="{B87E3126-9B47-4C4B-AFDA-B48BB01A9AE1}"/>
               </a:ext>
             </a:extLst>
           </p:cNvPr>
@@ -2169,7 +2169,7 @@
           <p:cNvPr id="3" name="">
             <a:extLst xmlns:a="http://schemas.openxmlformats.org/drawingml/2006/main">
               <a:ext uri="{FF2B5EF4-FFF2-40B4-BE49-F238E27FC236}">
-                <a16:creationId xmlns:a16="http://schemas.microsoft.com/office/drawing/2014/main" id="{65A36042-BEBA-46ED-A3BF-FACFF76487EB}"/>
+                <a16:creationId xmlns:a16="http://schemas.microsoft.com/office/drawing/2014/main" id="{8E0F140B-18C4-44AD-899F-B8A1C3686520}"/>
               </a:ext>
             </a:extLst>
           </p:cNvPr>
@@ -2226,7 +2226,7 @@
           <p:cNvPr id="4" name="">
             <a:extLst xmlns:a="http://schemas.openxmlformats.org/drawingml/2006/main">
               <a:ext uri="{FF2B5EF4-FFF2-40B4-BE49-F238E27FC236}">
-                <a16:creationId xmlns:a16="http://schemas.microsoft.com/office/drawing/2014/main" id="{81F97B9C-E2A5-43CB-95DA-5D23850B34A5}"/>
+                <a16:creationId xmlns:a16="http://schemas.microsoft.com/office/drawing/2014/main" id="{1FB8E7D5-DC71-4C90-9AD3-0CB179E2CCA4}"/>
               </a:ext>
             </a:extLst>
           </p:cNvPr>
@@ -2283,7 +2283,7 @@
           <p:cNvPr id="5" name="">
             <a:extLst xmlns:a="http://schemas.openxmlformats.org/drawingml/2006/main">
               <a:ext uri="{FF2B5EF4-FFF2-40B4-BE49-F238E27FC236}">
-                <a16:creationId xmlns:a16="http://schemas.microsoft.com/office/drawing/2014/main" id="{57C1A7F6-574B-469D-8FDB-5F674B6C73AC}"/>
+                <a16:creationId xmlns:a16="http://schemas.microsoft.com/office/drawing/2014/main" id="{8F0763E3-B9E4-4F4E-B0F2-EC450444D235}"/>
               </a:ext>
             </a:extLst>
           </p:cNvPr>
@@ -2340,7 +2340,7 @@
           <p:cNvPr id="6" name="">
             <a:extLst xmlns:a="http://schemas.openxmlformats.org/drawingml/2006/main">
               <a:ext uri="{FF2B5EF4-FFF2-40B4-BE49-F238E27FC236}">
-                <a16:creationId xmlns:a16="http://schemas.microsoft.com/office/drawing/2014/main" id="{C8BC944C-3F0C-48B4-9950-1211FC761091}"/>
+                <a16:creationId xmlns:a16="http://schemas.microsoft.com/office/drawing/2014/main" id="{DE49390D-323E-40BD-A6CB-9642065C287A}"/>
               </a:ext>
             </a:extLst>
           </p:cNvPr>
@@ -2397,7 +2397,7 @@
           <p:cNvPr id="7" name="">
             <a:extLst xmlns:a="http://schemas.openxmlformats.org/drawingml/2006/main">
               <a:ext uri="{FF2B5EF4-FFF2-40B4-BE49-F238E27FC236}">
-                <a16:creationId xmlns:a16="http://schemas.microsoft.com/office/drawing/2014/main" id="{0279CE60-8AED-4E8A-8155-174922105606}"/>
+                <a16:creationId xmlns:a16="http://schemas.microsoft.com/office/drawing/2014/main" id="{7DF1ABCF-A6B5-45A1-9C6D-23B7EDC0E996}"/>
               </a:ext>
             </a:extLst>
           </p:cNvPr>
@@ -2477,7 +2477,7 @@
           <p:cNvPr id="8" name="">
             <a:extLst xmlns:a="http://schemas.openxmlformats.org/drawingml/2006/main">
               <a:ext uri="{FF2B5EF4-FFF2-40B4-BE49-F238E27FC236}">
-                <a16:creationId xmlns:a16="http://schemas.microsoft.com/office/drawing/2014/main" id="{7EB7DFBE-A3FA-42E0-A525-5991A038F32F}"/>
+                <a16:creationId xmlns:a16="http://schemas.microsoft.com/office/drawing/2014/main" id="{405317F6-06F7-4717-A154-D8D62DA66D81}"/>
               </a:ext>
             </a:extLst>
           </p:cNvPr>
@@ -2532,7 +2532,7 @@
     </p:spTree>
     <p:extLst>
       <p:ext uri="{BB962C8B-B14F-4D97-AF65-F5344CB8AC3E}">
-        <p14:creationId xmlns:p14="http://schemas.microsoft.com/office/powerpoint/2010/main" val="770387514"/>
+        <p14:creationId xmlns:p14="http://schemas.microsoft.com/office/powerpoint/2010/main" val="798683384"/>
       </p:ext>
     </p:extLst>
   </p:cSld>
@@ -2563,7 +2563,7 @@
           <p:cNvPr id="7" name="">
             <a:extLst xmlns:a="http://schemas.openxmlformats.org/drawingml/2006/main">
               <a:ext uri="{FF2B5EF4-FFF2-40B4-BE49-F238E27FC236}">
-                <a16:creationId xmlns:a16="http://schemas.microsoft.com/office/drawing/2014/main" id="{825A1070-2C9E-44C1-B90B-BEB0EA9639C1}"/>
+                <a16:creationId xmlns:a16="http://schemas.microsoft.com/office/drawing/2014/main" id="{A21B91D1-56FD-41D1-938E-06A38076D960}"/>
               </a:ext>
             </a:extLst>
           </p:cNvPr>
@@ -2620,7 +2620,7 @@
           <p:cNvPr id="2" name="">
             <a:extLst xmlns:a="http://schemas.openxmlformats.org/drawingml/2006/main">
               <a:ext uri="{FF2B5EF4-FFF2-40B4-BE49-F238E27FC236}">
-                <a16:creationId xmlns:a16="http://schemas.microsoft.com/office/drawing/2014/main" id="{8035CBBB-1CDC-421E-841C-5FC30B4FE5C8}"/>
+                <a16:creationId xmlns:a16="http://schemas.microsoft.com/office/drawing/2014/main" id="{7374DA61-A289-44E5-A320-A3AE030CEA6F}"/>
               </a:ext>
             </a:extLst>
           </p:cNvPr>
@@ -2677,7 +2677,7 @@
           <p:cNvPr id="3" name="">
             <a:extLst xmlns:a="http://schemas.openxmlformats.org/drawingml/2006/main">
               <a:ext uri="{FF2B5EF4-FFF2-40B4-BE49-F238E27FC236}">
-                <a16:creationId xmlns:a16="http://schemas.microsoft.com/office/drawing/2014/main" id="{36F1A355-FAA6-443D-9F5C-028F2B274F5E}"/>
+                <a16:creationId xmlns:a16="http://schemas.microsoft.com/office/drawing/2014/main" id="{E5E53E14-BEDB-4A06-9063-54C1436511DE}"/>
               </a:ext>
             </a:extLst>
           </p:cNvPr>
@@ -2734,7 +2734,7 @@
           <p:cNvPr id="4" name="">
             <a:extLst xmlns:a="http://schemas.openxmlformats.org/drawingml/2006/main">
               <a:ext uri="{FF2B5EF4-FFF2-40B4-BE49-F238E27FC236}">
-                <a16:creationId xmlns:a16="http://schemas.microsoft.com/office/drawing/2014/main" id="{D78F14E2-07AD-4036-AF80-246D46842A42}"/>
+                <a16:creationId xmlns:a16="http://schemas.microsoft.com/office/drawing/2014/main" id="{BBCA9C0C-5DFC-42BD-B9D0-18164D27DB87}"/>
               </a:ext>
             </a:extLst>
           </p:cNvPr>
@@ -2795,13 +2795,13 @@
           <p:nvPr/>
         </p:nvPicPr>
         <p:blipFill>
-          <a:blip xmlns:r="http://schemas.openxmlformats.org/officeDocument/2006/relationships" xmlns:a="http://schemas.openxmlformats.org/drawingml/2006/main" r:embed="R4b279703e6344050"/>
+          <a:blip xmlns:r="http://schemas.openxmlformats.org/officeDocument/2006/relationships" xmlns:a="http://schemas.openxmlformats.org/drawingml/2006/main" r:embed="Rea8d9dab8b9d401f"/>
           <a:stretch xmlns:a="http://schemas.openxmlformats.org/drawingml/2006/main"/>
         </p:blipFill>
         <p:spPr>
           <a:xfrm xmlns:a="http://schemas.openxmlformats.org/drawingml/2006/main">
-            <a:off x="1262884" y="1028700"/>
-            <a:ext cx="9666233" cy="5143500"/>
+            <a:off x="996841" y="1028700"/>
+            <a:ext cx="10198319" cy="5143500"/>
           </a:xfrm>
           <a:prstGeom xmlns:a="http://schemas.openxmlformats.org/drawingml/2006/main" prst="rect">
             <a:avLst/>
@@ -2813,7 +2813,7 @@
           <p:cNvPr id="6" name="">
             <a:extLst xmlns:a="http://schemas.openxmlformats.org/drawingml/2006/main">
               <a:ext uri="{FF2B5EF4-FFF2-40B4-BE49-F238E27FC236}">
-                <a16:creationId xmlns:a16="http://schemas.microsoft.com/office/drawing/2014/main" id="{937FEB36-2968-49ED-AA2B-596A44687713}"/>
+                <a16:creationId xmlns:a16="http://schemas.microsoft.com/office/drawing/2014/main" id="{97A5A097-1932-4509-A92B-5875242E54BA}"/>
               </a:ext>
             </a:extLst>
           </p:cNvPr>
@@ -2868,7 +2868,7 @@
     </p:spTree>
     <p:extLst>
       <p:ext uri="{BB962C8B-B14F-4D97-AF65-F5344CB8AC3E}">
-        <p14:creationId xmlns:p14="http://schemas.microsoft.com/office/powerpoint/2010/main" val="251180789"/>
+        <p14:creationId xmlns:p14="http://schemas.microsoft.com/office/powerpoint/2010/main" val="1291847265"/>
       </p:ext>
     </p:extLst>
   </p:cSld>
@@ -2899,7 +2899,7 @@
           <p:cNvPr id="7" name="">
             <a:extLst xmlns:a="http://schemas.openxmlformats.org/drawingml/2006/main">
               <a:ext uri="{FF2B5EF4-FFF2-40B4-BE49-F238E27FC236}">
-                <a16:creationId xmlns:a16="http://schemas.microsoft.com/office/drawing/2014/main" id="{5AD6739D-8028-45FD-946F-9EFFE3BE8B90}"/>
+                <a16:creationId xmlns:a16="http://schemas.microsoft.com/office/drawing/2014/main" id="{2C3E14B6-9415-48B2-BC53-B3C5518AC8AE}"/>
               </a:ext>
             </a:extLst>
           </p:cNvPr>
@@ -2956,7 +2956,7 @@
           <p:cNvPr id="2" name="">
             <a:extLst xmlns:a="http://schemas.openxmlformats.org/drawingml/2006/main">
               <a:ext uri="{FF2B5EF4-FFF2-40B4-BE49-F238E27FC236}">
-                <a16:creationId xmlns:a16="http://schemas.microsoft.com/office/drawing/2014/main" id="{9677DF46-6302-4306-9B68-3F01DFD855ED}"/>
+                <a16:creationId xmlns:a16="http://schemas.microsoft.com/office/drawing/2014/main" id="{C9CFA663-C23E-4FB4-BCA2-AC78B464C950}"/>
               </a:ext>
             </a:extLst>
           </p:cNvPr>
@@ -3013,7 +3013,7 @@
           <p:cNvPr id="3" name="">
             <a:extLst xmlns:a="http://schemas.openxmlformats.org/drawingml/2006/main">
               <a:ext uri="{FF2B5EF4-FFF2-40B4-BE49-F238E27FC236}">
-                <a16:creationId xmlns:a16="http://schemas.microsoft.com/office/drawing/2014/main" id="{2FD45CC3-0939-43EC-8E84-A04DCEE196E4}"/>
+                <a16:creationId xmlns:a16="http://schemas.microsoft.com/office/drawing/2014/main" id="{B957C28A-D86F-400C-AA4E-485B65257FFB}"/>
               </a:ext>
             </a:extLst>
           </p:cNvPr>
@@ -3070,7 +3070,7 @@
           <p:cNvPr id="4" name="">
             <a:extLst xmlns:a="http://schemas.openxmlformats.org/drawingml/2006/main">
               <a:ext uri="{FF2B5EF4-FFF2-40B4-BE49-F238E27FC236}">
-                <a16:creationId xmlns:a16="http://schemas.microsoft.com/office/drawing/2014/main" id="{01C0D05B-6291-4220-9D7A-C7532218FD16}"/>
+                <a16:creationId xmlns:a16="http://schemas.microsoft.com/office/drawing/2014/main" id="{C3D4E045-C150-4FA0-9E42-F0C78AD591FE}"/>
               </a:ext>
             </a:extLst>
           </p:cNvPr>
@@ -3131,7 +3131,7 @@
           <p:nvPr/>
         </p:nvPicPr>
         <p:blipFill>
-          <a:blip xmlns:r="http://schemas.openxmlformats.org/officeDocument/2006/relationships" xmlns:a="http://schemas.openxmlformats.org/drawingml/2006/main" r:embed="R3f44a7801bfa485f"/>
+          <a:blip xmlns:r="http://schemas.openxmlformats.org/officeDocument/2006/relationships" xmlns:a="http://schemas.openxmlformats.org/drawingml/2006/main" r:embed="R1f90ac593c794146"/>
           <a:stretch xmlns:a="http://schemas.openxmlformats.org/drawingml/2006/main"/>
         </p:blipFill>
         <p:spPr>
@@ -3149,7 +3149,7 @@
           <p:cNvPr id="6" name="">
             <a:extLst xmlns:a="http://schemas.openxmlformats.org/drawingml/2006/main">
               <a:ext uri="{FF2B5EF4-FFF2-40B4-BE49-F238E27FC236}">
-                <a16:creationId xmlns:a16="http://schemas.microsoft.com/office/drawing/2014/main" id="{91488D28-98AE-498C-B876-ECD76EC87DC9}"/>
+                <a16:creationId xmlns:a16="http://schemas.microsoft.com/office/drawing/2014/main" id="{0D820D84-E89A-4BC9-87AB-55CA89877152}"/>
               </a:ext>
             </a:extLst>
           </p:cNvPr>
@@ -3204,7 +3204,7 @@
     </p:spTree>
     <p:extLst>
       <p:ext uri="{BB962C8B-B14F-4D97-AF65-F5344CB8AC3E}">
-        <p14:creationId xmlns:p14="http://schemas.microsoft.com/office/powerpoint/2010/main" val="1317863225"/>
+        <p14:creationId xmlns:p14="http://schemas.microsoft.com/office/powerpoint/2010/main" val="1261073684"/>
       </p:ext>
     </p:extLst>
   </p:cSld>
@@ -3235,7 +3235,7 @@
           <p:cNvPr id="8" name="">
             <a:extLst xmlns:a="http://schemas.openxmlformats.org/drawingml/2006/main">
               <a:ext uri="{FF2B5EF4-FFF2-40B4-BE49-F238E27FC236}">
-                <a16:creationId xmlns:a16="http://schemas.microsoft.com/office/drawing/2014/main" id="{EAFDFD02-A2B2-4D6F-BD1C-909C6FF26F01}"/>
+                <a16:creationId xmlns:a16="http://schemas.microsoft.com/office/drawing/2014/main" id="{286F1412-0CA5-4CF5-838A-10C3347E2E6B}"/>
               </a:ext>
             </a:extLst>
           </p:cNvPr>
@@ -3292,7 +3292,7 @@
           <p:cNvPr id="2" name="">
             <a:extLst xmlns:a="http://schemas.openxmlformats.org/drawingml/2006/main">
               <a:ext uri="{FF2B5EF4-FFF2-40B4-BE49-F238E27FC236}">
-                <a16:creationId xmlns:a16="http://schemas.microsoft.com/office/drawing/2014/main" id="{5E1AC2A5-43A5-4526-82C3-664B0D45091E}"/>
+                <a16:creationId xmlns:a16="http://schemas.microsoft.com/office/drawing/2014/main" id="{7FE41ADF-0961-4FB2-8427-32E37B510EAA}"/>
               </a:ext>
             </a:extLst>
           </p:cNvPr>
@@ -3349,7 +3349,7 @@
           <p:cNvPr id="3" name="">
             <a:extLst xmlns:a="http://schemas.openxmlformats.org/drawingml/2006/main">
               <a:ext uri="{FF2B5EF4-FFF2-40B4-BE49-F238E27FC236}">
-                <a16:creationId xmlns:a16="http://schemas.microsoft.com/office/drawing/2014/main" id="{41FF9BE0-0B89-4E6C-BFA0-4F2150322561}"/>
+                <a16:creationId xmlns:a16="http://schemas.microsoft.com/office/drawing/2014/main" id="{5B84301A-AAAD-4600-9D6F-6CF3F60BDE21}"/>
               </a:ext>
             </a:extLst>
           </p:cNvPr>
@@ -3406,7 +3406,7 @@
           <p:cNvPr id="4" name="">
             <a:extLst xmlns:a="http://schemas.openxmlformats.org/drawingml/2006/main">
               <a:ext uri="{FF2B5EF4-FFF2-40B4-BE49-F238E27FC236}">
-                <a16:creationId xmlns:a16="http://schemas.microsoft.com/office/drawing/2014/main" id="{25BEAA8F-1092-4694-A7B9-4623CA62B3DC}"/>
+                <a16:creationId xmlns:a16="http://schemas.microsoft.com/office/drawing/2014/main" id="{DE810D18-3743-41DA-91FC-60224307EA37}"/>
               </a:ext>
             </a:extLst>
           </p:cNvPr>
@@ -3467,7 +3467,7 @@
           <p:nvPr/>
         </p:nvPicPr>
         <p:blipFill>
-          <a:blip xmlns:r="http://schemas.openxmlformats.org/officeDocument/2006/relationships" xmlns:a="http://schemas.openxmlformats.org/drawingml/2006/main" r:embed="Rc7155f9de3334533"/>
+          <a:blip xmlns:r="http://schemas.openxmlformats.org/officeDocument/2006/relationships" xmlns:a="http://schemas.openxmlformats.org/drawingml/2006/main" r:embed="R46f5625f4bfe428d"/>
           <a:stretch xmlns:a="http://schemas.openxmlformats.org/drawingml/2006/main"/>
         </p:blipFill>
         <p:spPr>
@@ -3485,7 +3485,7 @@
           <p:cNvPr id="6" name="">
             <a:extLst xmlns:a="http://schemas.openxmlformats.org/drawingml/2006/main">
               <a:ext uri="{FF2B5EF4-FFF2-40B4-BE49-F238E27FC236}">
-                <a16:creationId xmlns:a16="http://schemas.microsoft.com/office/drawing/2014/main" id="{FB1673DC-F9F3-4C15-B598-21BA31B6C16C}"/>
+                <a16:creationId xmlns:a16="http://schemas.microsoft.com/office/drawing/2014/main" id="{9C8B68B5-A728-4A0F-9ECB-5C5FB6F6B04B}"/>
               </a:ext>
             </a:extLst>
           </p:cNvPr>
@@ -3542,7 +3542,7 @@
           <p:cNvPr id="7" name="">
             <a:extLst xmlns:a="http://schemas.openxmlformats.org/drawingml/2006/main">
               <a:ext uri="{FF2B5EF4-FFF2-40B4-BE49-F238E27FC236}">
-                <a16:creationId xmlns:a16="http://schemas.microsoft.com/office/drawing/2014/main" id="{1552A820-E265-4E1E-AF48-07FCB494E0C3}"/>
+                <a16:creationId xmlns:a16="http://schemas.microsoft.com/office/drawing/2014/main" id="{B4092E9B-F2C1-4BFE-8BFE-B695F1727B5F}"/>
               </a:ext>
             </a:extLst>
           </p:cNvPr>
@@ -3625,7 +3625,7 @@
     </p:spTree>
     <p:extLst>
       <p:ext uri="{BB962C8B-B14F-4D97-AF65-F5344CB8AC3E}">
-        <p14:creationId xmlns:p14="http://schemas.microsoft.com/office/powerpoint/2010/main" val="429133491"/>
+        <p14:creationId xmlns:p14="http://schemas.microsoft.com/office/powerpoint/2010/main" val="634872135"/>
       </p:ext>
     </p:extLst>
   </p:cSld>
@@ -3656,7 +3656,7 @@
           <p:cNvPr id="9" name="">
             <a:extLst xmlns:a="http://schemas.openxmlformats.org/drawingml/2006/main">
               <a:ext uri="{FF2B5EF4-FFF2-40B4-BE49-F238E27FC236}">
-                <a16:creationId xmlns:a16="http://schemas.microsoft.com/office/drawing/2014/main" id="{321236D8-FB1E-4557-80CC-AB72AFBB6E21}"/>
+                <a16:creationId xmlns:a16="http://schemas.microsoft.com/office/drawing/2014/main" id="{98821ADB-8A5F-4C24-A575-8AFDE7A67208}"/>
               </a:ext>
             </a:extLst>
           </p:cNvPr>
@@ -3713,7 +3713,7 @@
           <p:cNvPr id="2" name="">
             <a:extLst xmlns:a="http://schemas.openxmlformats.org/drawingml/2006/main">
               <a:ext uri="{FF2B5EF4-FFF2-40B4-BE49-F238E27FC236}">
-                <a16:creationId xmlns:a16="http://schemas.microsoft.com/office/drawing/2014/main" id="{46A21852-B7D9-4EB2-90F7-0DCFA28D4ED5}"/>
+                <a16:creationId xmlns:a16="http://schemas.microsoft.com/office/drawing/2014/main" id="{5E3B77D5-F247-440A-828A-9E062858B9DE}"/>
               </a:ext>
             </a:extLst>
           </p:cNvPr>
@@ -3770,7 +3770,7 @@
           <p:cNvPr id="3" name="">
             <a:extLst xmlns:a="http://schemas.openxmlformats.org/drawingml/2006/main">
               <a:ext uri="{FF2B5EF4-FFF2-40B4-BE49-F238E27FC236}">
-                <a16:creationId xmlns:a16="http://schemas.microsoft.com/office/drawing/2014/main" id="{0C3FB69E-FC5D-4853-A2BA-302591086F7A}"/>
+                <a16:creationId xmlns:a16="http://schemas.microsoft.com/office/drawing/2014/main" id="{DD6D0149-4EE4-49EF-AC94-F2F52C33D789}"/>
               </a:ext>
             </a:extLst>
           </p:cNvPr>
@@ -3827,7 +3827,7 @@
           <p:cNvPr id="4" name="">
             <a:extLst xmlns:a="http://schemas.openxmlformats.org/drawingml/2006/main">
               <a:ext uri="{FF2B5EF4-FFF2-40B4-BE49-F238E27FC236}">
-                <a16:creationId xmlns:a16="http://schemas.microsoft.com/office/drawing/2014/main" id="{359327B8-83C0-4826-9705-87F39F2BFC30}"/>
+                <a16:creationId xmlns:a16="http://schemas.microsoft.com/office/drawing/2014/main" id="{0B49661F-3509-4136-B007-9211DA873CAF}"/>
               </a:ext>
             </a:extLst>
           </p:cNvPr>
@@ -3884,7 +3884,7 @@
           <p:cNvPr id="5" name="">
             <a:extLst xmlns:a="http://schemas.openxmlformats.org/drawingml/2006/main">
               <a:ext uri="{FF2B5EF4-FFF2-40B4-BE49-F238E27FC236}">
-                <a16:creationId xmlns:a16="http://schemas.microsoft.com/office/drawing/2014/main" id="{F960B70B-F035-4B04-A321-DE2F57BB4E13}"/>
+                <a16:creationId xmlns:a16="http://schemas.microsoft.com/office/drawing/2014/main" id="{43876220-88E9-411E-BCE9-83FD7812A9CB}"/>
               </a:ext>
             </a:extLst>
           </p:cNvPr>
@@ -4188,7 +4188,7 @@
           <p:cNvPr id="7" name="">
             <a:extLst xmlns:a="http://schemas.openxmlformats.org/drawingml/2006/main">
               <a:ext uri="{FF2B5EF4-FFF2-40B4-BE49-F238E27FC236}">
-                <a16:creationId xmlns:a16="http://schemas.microsoft.com/office/drawing/2014/main" id="{48618F6B-73F6-4DF0-9582-24A61344881A}"/>
+                <a16:creationId xmlns:a16="http://schemas.microsoft.com/office/drawing/2014/main" id="{1145EFE8-50F5-4878-84D8-3571DE5A0464}"/>
               </a:ext>
             </a:extLst>
           </p:cNvPr>
@@ -4245,7 +4245,7 @@
           <p:cNvPr id="8" name="">
             <a:extLst xmlns:a="http://schemas.openxmlformats.org/drawingml/2006/main">
               <a:ext uri="{FF2B5EF4-FFF2-40B4-BE49-F238E27FC236}">
-                <a16:creationId xmlns:a16="http://schemas.microsoft.com/office/drawing/2014/main" id="{D091CFC0-FBA9-4B3E-AD70-A1C8E3B44D33}"/>
+                <a16:creationId xmlns:a16="http://schemas.microsoft.com/office/drawing/2014/main" id="{44969CD6-3E99-4FA0-A638-BAA34AEDAA0A}"/>
               </a:ext>
             </a:extLst>
           </p:cNvPr>
@@ -4300,7 +4300,7 @@
     </p:spTree>
     <p:extLst>
       <p:ext uri="{BB962C8B-B14F-4D97-AF65-F5344CB8AC3E}">
-        <p14:creationId xmlns:p14="http://schemas.microsoft.com/office/powerpoint/2010/main" val="1116444970"/>
+        <p14:creationId xmlns:p14="http://schemas.microsoft.com/office/powerpoint/2010/main" val="1772708109"/>
       </p:ext>
     </p:extLst>
   </p:cSld>
@@ -4331,7 +4331,7 @@
           <p:cNvPr id="8" name="">
             <a:extLst xmlns:a="http://schemas.openxmlformats.org/drawingml/2006/main">
               <a:ext uri="{FF2B5EF4-FFF2-40B4-BE49-F238E27FC236}">
-                <a16:creationId xmlns:a16="http://schemas.microsoft.com/office/drawing/2014/main" id="{1F97F416-7675-4BBF-9CBB-B2C9C1DAB26D}"/>
+                <a16:creationId xmlns:a16="http://schemas.microsoft.com/office/drawing/2014/main" id="{F1AB7F69-B7EF-4E64-9866-40A18028ABB0}"/>
               </a:ext>
             </a:extLst>
           </p:cNvPr>
@@ -4388,7 +4388,7 @@
           <p:cNvPr id="2" name="">
             <a:extLst xmlns:a="http://schemas.openxmlformats.org/drawingml/2006/main">
               <a:ext uri="{FF2B5EF4-FFF2-40B4-BE49-F238E27FC236}">
-                <a16:creationId xmlns:a16="http://schemas.microsoft.com/office/drawing/2014/main" id="{26DADC63-782C-4170-AC67-09EFD30EE3D8}"/>
+                <a16:creationId xmlns:a16="http://schemas.microsoft.com/office/drawing/2014/main" id="{80C7FDDA-4B02-4578-9697-FBFD58187C1C}"/>
               </a:ext>
             </a:extLst>
           </p:cNvPr>
@@ -4445,7 +4445,7 @@
           <p:cNvPr id="3" name="">
             <a:extLst xmlns:a="http://schemas.openxmlformats.org/drawingml/2006/main">
               <a:ext uri="{FF2B5EF4-FFF2-40B4-BE49-F238E27FC236}">
-                <a16:creationId xmlns:a16="http://schemas.microsoft.com/office/drawing/2014/main" id="{25D14D91-BF95-40EF-AA52-BDB2ED23ECE6}"/>
+                <a16:creationId xmlns:a16="http://schemas.microsoft.com/office/drawing/2014/main" id="{A81B7B4D-F284-412A-8DB7-30612B35E349}"/>
               </a:ext>
             </a:extLst>
           </p:cNvPr>
@@ -4502,7 +4502,7 @@
           <p:cNvPr id="4" name="">
             <a:extLst xmlns:a="http://schemas.openxmlformats.org/drawingml/2006/main">
               <a:ext uri="{FF2B5EF4-FFF2-40B4-BE49-F238E27FC236}">
-                <a16:creationId xmlns:a16="http://schemas.microsoft.com/office/drawing/2014/main" id="{526BDCE2-2A62-483A-81C4-0F6F332561DD}"/>
+                <a16:creationId xmlns:a16="http://schemas.microsoft.com/office/drawing/2014/main" id="{AC69B0A6-2BC0-4C05-B915-E0266A73653F}"/>
               </a:ext>
             </a:extLst>
           </p:cNvPr>
@@ -4559,7 +4559,7 @@
           <p:cNvPr id="5" name="">
             <a:extLst xmlns:a="http://schemas.openxmlformats.org/drawingml/2006/main">
               <a:ext uri="{FF2B5EF4-FFF2-40B4-BE49-F238E27FC236}">
-                <a16:creationId xmlns:a16="http://schemas.microsoft.com/office/drawing/2014/main" id="{811B6381-9765-4E66-B3AF-6C2AAC391449}"/>
+                <a16:creationId xmlns:a16="http://schemas.microsoft.com/office/drawing/2014/main" id="{031AE53B-7C16-404B-8E31-44D2B7AF0198}"/>
               </a:ext>
             </a:extLst>
           </p:cNvPr>
@@ -4616,7 +4616,7 @@
           <p:cNvPr id="6" name="">
             <a:extLst xmlns:a="http://schemas.openxmlformats.org/drawingml/2006/main">
               <a:ext uri="{FF2B5EF4-FFF2-40B4-BE49-F238E27FC236}">
-                <a16:creationId xmlns:a16="http://schemas.microsoft.com/office/drawing/2014/main" id="{D3B13E93-F698-4527-9C07-2BE3F971BFE1}"/>
+                <a16:creationId xmlns:a16="http://schemas.microsoft.com/office/drawing/2014/main" id="{73B74BC3-38E9-4C5B-B922-815D72892969}"/>
               </a:ext>
             </a:extLst>
           </p:cNvPr>
@@ -4673,7 +4673,7 @@
           <p:cNvPr id="7" name="">
             <a:extLst xmlns:a="http://schemas.openxmlformats.org/drawingml/2006/main">
               <a:ext uri="{FF2B5EF4-FFF2-40B4-BE49-F238E27FC236}">
-                <a16:creationId xmlns:a16="http://schemas.microsoft.com/office/drawing/2014/main" id="{8A0401EC-5B75-4BCC-AC53-985909101359}"/>
+                <a16:creationId xmlns:a16="http://schemas.microsoft.com/office/drawing/2014/main" id="{4950219B-B492-428D-AD83-A521FC83CDC5}"/>
               </a:ext>
             </a:extLst>
           </p:cNvPr>
@@ -4728,7 +4728,7 @@
     </p:spTree>
     <p:extLst>
       <p:ext uri="{BB962C8B-B14F-4D97-AF65-F5344CB8AC3E}">
-        <p14:creationId xmlns:p14="http://schemas.microsoft.com/office/powerpoint/2010/main" val="101256378"/>
+        <p14:creationId xmlns:p14="http://schemas.microsoft.com/office/powerpoint/2010/main" val="1636770395"/>
       </p:ext>
     </p:extLst>
   </p:cSld>
@@ -4759,7 +4759,7 @@
           <p:cNvPr id="8" name="">
             <a:extLst xmlns:a="http://schemas.openxmlformats.org/drawingml/2006/main">
               <a:ext uri="{FF2B5EF4-FFF2-40B4-BE49-F238E27FC236}">
-                <a16:creationId xmlns:a16="http://schemas.microsoft.com/office/drawing/2014/main" id="{AC42142E-187C-421B-88AA-33A1F86C41CD}"/>
+                <a16:creationId xmlns:a16="http://schemas.microsoft.com/office/drawing/2014/main" id="{E9A168C8-7337-4F2F-9BED-023C88E47FF6}"/>
               </a:ext>
             </a:extLst>
           </p:cNvPr>
@@ -4816,7 +4816,7 @@
           <p:cNvPr id="2" name="">
             <a:extLst xmlns:a="http://schemas.openxmlformats.org/drawingml/2006/main">
               <a:ext uri="{FF2B5EF4-FFF2-40B4-BE49-F238E27FC236}">
-                <a16:creationId xmlns:a16="http://schemas.microsoft.com/office/drawing/2014/main" id="{E09E0294-989D-4F9F-9EC6-86177B325AD3}"/>
+                <a16:creationId xmlns:a16="http://schemas.microsoft.com/office/drawing/2014/main" id="{E7A5807B-FEED-4ECF-9A51-4272D065795F}"/>
               </a:ext>
             </a:extLst>
           </p:cNvPr>
@@ -4873,7 +4873,7 @@
           <p:cNvPr id="3" name="">
             <a:extLst xmlns:a="http://schemas.openxmlformats.org/drawingml/2006/main">
               <a:ext uri="{FF2B5EF4-FFF2-40B4-BE49-F238E27FC236}">
-                <a16:creationId xmlns:a16="http://schemas.microsoft.com/office/drawing/2014/main" id="{021DC6B3-B741-4867-B135-E6605236CCCC}"/>
+                <a16:creationId xmlns:a16="http://schemas.microsoft.com/office/drawing/2014/main" id="{E2D916AE-0A39-48FE-B379-36958612183F}"/>
               </a:ext>
             </a:extLst>
           </p:cNvPr>
@@ -4930,7 +4930,7 @@
           <p:cNvPr id="4" name="">
             <a:extLst xmlns:a="http://schemas.openxmlformats.org/drawingml/2006/main">
               <a:ext uri="{FF2B5EF4-FFF2-40B4-BE49-F238E27FC236}">
-                <a16:creationId xmlns:a16="http://schemas.microsoft.com/office/drawing/2014/main" id="{35F8E8A5-8344-485E-B399-2C70259929D4}"/>
+                <a16:creationId xmlns:a16="http://schemas.microsoft.com/office/drawing/2014/main" id="{C5B07D9A-BFA7-4833-9927-04BE98AE37B8}"/>
               </a:ext>
             </a:extLst>
           </p:cNvPr>
@@ -5269,7 +5269,7 @@
           <p:cNvPr id="6" name="">
             <a:extLst xmlns:a="http://schemas.openxmlformats.org/drawingml/2006/main">
               <a:ext uri="{FF2B5EF4-FFF2-40B4-BE49-F238E27FC236}">
-                <a16:creationId xmlns:a16="http://schemas.microsoft.com/office/drawing/2014/main" id="{BD293830-BB62-458F-B326-9FC31949318B}"/>
+                <a16:creationId xmlns:a16="http://schemas.microsoft.com/office/drawing/2014/main" id="{AC1AACD3-73E8-4E73-8A7D-80B0D0B35BFC}"/>
               </a:ext>
             </a:extLst>
           </p:cNvPr>
@@ -5326,7 +5326,7 @@
           <p:cNvPr id="7" name="">
             <a:extLst xmlns:a="http://schemas.openxmlformats.org/drawingml/2006/main">
               <a:ext uri="{FF2B5EF4-FFF2-40B4-BE49-F238E27FC236}">
-                <a16:creationId xmlns:a16="http://schemas.microsoft.com/office/drawing/2014/main" id="{8E9854AF-B743-4057-968E-30A708F95F88}"/>
+                <a16:creationId xmlns:a16="http://schemas.microsoft.com/office/drawing/2014/main" id="{47A72EFF-37E6-46B4-A687-EDE19EFA1680}"/>
               </a:ext>
             </a:extLst>
           </p:cNvPr>
@@ -5381,7 +5381,7 @@
     </p:spTree>
     <p:extLst>
       <p:ext uri="{BB962C8B-B14F-4D97-AF65-F5344CB8AC3E}">
-        <p14:creationId xmlns:p14="http://schemas.microsoft.com/office/powerpoint/2010/main" val="381876132"/>
+        <p14:creationId xmlns:p14="http://schemas.microsoft.com/office/powerpoint/2010/main" val="1292841609"/>
       </p:ext>
     </p:extLst>
   </p:cSld>
@@ -5412,7 +5412,7 @@
           <p:cNvPr id="7" name="">
             <a:extLst xmlns:a="http://schemas.openxmlformats.org/drawingml/2006/main">
               <a:ext uri="{FF2B5EF4-FFF2-40B4-BE49-F238E27FC236}">
-                <a16:creationId xmlns:a16="http://schemas.microsoft.com/office/drawing/2014/main" id="{6708BA26-4E4A-4D07-A11D-DCFFADADB797}"/>
+                <a16:creationId xmlns:a16="http://schemas.microsoft.com/office/drawing/2014/main" id="{361BABC0-37BB-42A7-91D8-BECD1FA26554}"/>
               </a:ext>
             </a:extLst>
           </p:cNvPr>
@@ -5469,7 +5469,7 @@
           <p:cNvPr id="2" name="">
             <a:extLst xmlns:a="http://schemas.openxmlformats.org/drawingml/2006/main">
               <a:ext uri="{FF2B5EF4-FFF2-40B4-BE49-F238E27FC236}">
-                <a16:creationId xmlns:a16="http://schemas.microsoft.com/office/drawing/2014/main" id="{D75E65B5-6012-4C13-BDF7-B64AF3061BD9}"/>
+                <a16:creationId xmlns:a16="http://schemas.microsoft.com/office/drawing/2014/main" id="{37C00A5A-A647-4536-94C2-9F3F8DB9F13B}"/>
               </a:ext>
             </a:extLst>
           </p:cNvPr>
@@ -5526,7 +5526,7 @@
           <p:cNvPr id="3" name="">
             <a:extLst xmlns:a="http://schemas.openxmlformats.org/drawingml/2006/main">
               <a:ext uri="{FF2B5EF4-FFF2-40B4-BE49-F238E27FC236}">
-                <a16:creationId xmlns:a16="http://schemas.microsoft.com/office/drawing/2014/main" id="{7AF9ADB7-6EEC-4B25-BA8A-F09ADF5798E1}"/>
+                <a16:creationId xmlns:a16="http://schemas.microsoft.com/office/drawing/2014/main" id="{167114A4-A069-4D8D-B0EE-50C3E18F3CE6}"/>
               </a:ext>
             </a:extLst>
           </p:cNvPr>
@@ -5583,7 +5583,7 @@
           <p:cNvPr id="4" name="">
             <a:extLst xmlns:a="http://schemas.openxmlformats.org/drawingml/2006/main">
               <a:ext uri="{FF2B5EF4-FFF2-40B4-BE49-F238E27FC236}">
-                <a16:creationId xmlns:a16="http://schemas.microsoft.com/office/drawing/2014/main" id="{06C93596-C79E-45B2-96B2-A96ACFA7F194}"/>
+                <a16:creationId xmlns:a16="http://schemas.microsoft.com/office/drawing/2014/main" id="{D2E639B1-A5FB-4EC5-9CE6-FC0E581B607C}"/>
               </a:ext>
             </a:extLst>
           </p:cNvPr>
@@ -6017,7 +6017,7 @@
           <p:cNvPr id="6" name="">
             <a:extLst xmlns:a="http://schemas.openxmlformats.org/drawingml/2006/main">
               <a:ext uri="{FF2B5EF4-FFF2-40B4-BE49-F238E27FC236}">
-                <a16:creationId xmlns:a16="http://schemas.microsoft.com/office/drawing/2014/main" id="{827BC9FF-7C70-4EBF-8C18-F84D3079C89E}"/>
+                <a16:creationId xmlns:a16="http://schemas.microsoft.com/office/drawing/2014/main" id="{691AC983-8BDA-4C0A-A260-F2CB137F2459}"/>
               </a:ext>
             </a:extLst>
           </p:cNvPr>
@@ -6072,7 +6072,7 @@
     </p:spTree>
     <p:extLst>
       <p:ext uri="{BB962C8B-B14F-4D97-AF65-F5344CB8AC3E}">
-        <p14:creationId xmlns:p14="http://schemas.microsoft.com/office/powerpoint/2010/main" val="649372558"/>
+        <p14:creationId xmlns:p14="http://schemas.microsoft.com/office/powerpoint/2010/main" val="544368125"/>
       </p:ext>
     </p:extLst>
   </p:cSld>
@@ -6103,7 +6103,7 @@
           <p:cNvPr id="9" name="">
             <a:extLst xmlns:a="http://schemas.openxmlformats.org/drawingml/2006/main">
               <a:ext uri="{FF2B5EF4-FFF2-40B4-BE49-F238E27FC236}">
-                <a16:creationId xmlns:a16="http://schemas.microsoft.com/office/drawing/2014/main" id="{00FCF519-23D7-4F86-9904-0E689E7FC02A}"/>
+                <a16:creationId xmlns:a16="http://schemas.microsoft.com/office/drawing/2014/main" id="{B2832ADB-45C5-4BD3-859F-A60B620A89EA}"/>
               </a:ext>
             </a:extLst>
           </p:cNvPr>
@@ -6160,7 +6160,7 @@
           <p:cNvPr id="2" name="">
             <a:extLst xmlns:a="http://schemas.openxmlformats.org/drawingml/2006/main">
               <a:ext uri="{FF2B5EF4-FFF2-40B4-BE49-F238E27FC236}">
-                <a16:creationId xmlns:a16="http://schemas.microsoft.com/office/drawing/2014/main" id="{EA9EF959-A0BF-47AF-909F-89EADEFEBC8C}"/>
+                <a16:creationId xmlns:a16="http://schemas.microsoft.com/office/drawing/2014/main" id="{F015D9E8-BF6C-4D70-90A6-62125654ED87}"/>
               </a:ext>
             </a:extLst>
           </p:cNvPr>
@@ -6217,7 +6217,7 @@
           <p:cNvPr id="3" name="">
             <a:extLst xmlns:a="http://schemas.openxmlformats.org/drawingml/2006/main">
               <a:ext uri="{FF2B5EF4-FFF2-40B4-BE49-F238E27FC236}">
-                <a16:creationId xmlns:a16="http://schemas.microsoft.com/office/drawing/2014/main" id="{662BB04C-B9B4-4CBC-9231-38961C630C42}"/>
+                <a16:creationId xmlns:a16="http://schemas.microsoft.com/office/drawing/2014/main" id="{55D71DC4-875A-4589-8ED9-77BA215A0F9A}"/>
               </a:ext>
             </a:extLst>
           </p:cNvPr>
@@ -6274,7 +6274,7 @@
           <p:cNvPr id="4" name="">
             <a:extLst xmlns:a="http://schemas.openxmlformats.org/drawingml/2006/main">
               <a:ext uri="{FF2B5EF4-FFF2-40B4-BE49-F238E27FC236}">
-                <a16:creationId xmlns:a16="http://schemas.microsoft.com/office/drawing/2014/main" id="{FF963E17-42BC-4D4A-AFF5-6E1ABBF1D6E8}"/>
+                <a16:creationId xmlns:a16="http://schemas.microsoft.com/office/drawing/2014/main" id="{5B4E39C9-D891-4E8C-A812-5D6CDA948BA2}"/>
               </a:ext>
             </a:extLst>
           </p:cNvPr>
@@ -6335,7 +6335,7 @@
           <p:nvPr/>
         </p:nvPicPr>
         <p:blipFill>
-          <a:blip xmlns:r="http://schemas.openxmlformats.org/officeDocument/2006/relationships" xmlns:a="http://schemas.openxmlformats.org/drawingml/2006/main" r:embed="Rb9e7fb062fd049e3"/>
+          <a:blip xmlns:r="http://schemas.openxmlformats.org/officeDocument/2006/relationships" xmlns:a="http://schemas.openxmlformats.org/drawingml/2006/main" r:embed="R39b4668ca227435c"/>
           <a:stretch xmlns:a="http://schemas.openxmlformats.org/drawingml/2006/main"/>
         </p:blipFill>
         <p:spPr>
@@ -6353,7 +6353,7 @@
           <p:cNvPr id="6" name="">
             <a:extLst xmlns:a="http://schemas.openxmlformats.org/drawingml/2006/main">
               <a:ext uri="{FF2B5EF4-FFF2-40B4-BE49-F238E27FC236}">
-                <a16:creationId xmlns:a16="http://schemas.microsoft.com/office/drawing/2014/main" id="{6DB926BD-C574-495B-B0F8-003C3B1C5A23}"/>
+                <a16:creationId xmlns:a16="http://schemas.microsoft.com/office/drawing/2014/main" id="{3A507953-3A72-4D64-A03C-7A16E4C6AAE0}"/>
               </a:ext>
             </a:extLst>
           </p:cNvPr>
@@ -6410,7 +6410,7 @@
           <p:cNvPr id="7" name="">
             <a:extLst xmlns:a="http://schemas.openxmlformats.org/drawingml/2006/main">
               <a:ext uri="{FF2B5EF4-FFF2-40B4-BE49-F238E27FC236}">
-                <a16:creationId xmlns:a16="http://schemas.microsoft.com/office/drawing/2014/main" id="{F29B4003-DF04-439F-98C9-E4083C625ABA}"/>
+                <a16:creationId xmlns:a16="http://schemas.microsoft.com/office/drawing/2014/main" id="{6D64FC58-D21F-4948-A22D-028CE385ABD2}"/>
               </a:ext>
             </a:extLst>
           </p:cNvPr>
@@ -6536,7 +6536,7 @@
           <p:cNvPr id="8" name="">
             <a:extLst xmlns:a="http://schemas.openxmlformats.org/drawingml/2006/main">
               <a:ext uri="{FF2B5EF4-FFF2-40B4-BE49-F238E27FC236}">
-                <a16:creationId xmlns:a16="http://schemas.microsoft.com/office/drawing/2014/main" id="{53A868D5-A782-4DEF-B9FD-3D9D88BC0FC0}"/>
+                <a16:creationId xmlns:a16="http://schemas.microsoft.com/office/drawing/2014/main" id="{5FA24884-393B-42A8-9C67-5E2AA3CBDCF7}"/>
               </a:ext>
             </a:extLst>
           </p:cNvPr>
@@ -6591,7 +6591,7 @@
     </p:spTree>
     <p:extLst>
       <p:ext uri="{BB962C8B-B14F-4D97-AF65-F5344CB8AC3E}">
-        <p14:creationId xmlns:p14="http://schemas.microsoft.com/office/powerpoint/2010/main" val="1257553538"/>
+        <p14:creationId xmlns:p14="http://schemas.microsoft.com/office/powerpoint/2010/main" val="1760624333"/>
       </p:ext>
     </p:extLst>
   </p:cSld>
@@ -6622,7 +6622,7 @@
           <p:cNvPr id="7" name="">
             <a:extLst xmlns:a="http://schemas.openxmlformats.org/drawingml/2006/main">
               <a:ext uri="{FF2B5EF4-FFF2-40B4-BE49-F238E27FC236}">
-                <a16:creationId xmlns:a16="http://schemas.microsoft.com/office/drawing/2014/main" id="{4029D8D0-061B-4F9D-BC1C-CED6AB800437}"/>
+                <a16:creationId xmlns:a16="http://schemas.microsoft.com/office/drawing/2014/main" id="{0D0E726A-EDDE-4E9F-8B40-1EDA87561DF7}"/>
               </a:ext>
             </a:extLst>
           </p:cNvPr>
@@ -6679,7 +6679,7 @@
           <p:cNvPr id="2" name="">
             <a:extLst xmlns:a="http://schemas.openxmlformats.org/drawingml/2006/main">
               <a:ext uri="{FF2B5EF4-FFF2-40B4-BE49-F238E27FC236}">
-                <a16:creationId xmlns:a16="http://schemas.microsoft.com/office/drawing/2014/main" id="{ED15D954-8941-4A4B-BF07-05C5F6FD86E9}"/>
+                <a16:creationId xmlns:a16="http://schemas.microsoft.com/office/drawing/2014/main" id="{F8E730DD-5DA7-43F9-8A4D-9CBA2DF1A335}"/>
               </a:ext>
             </a:extLst>
           </p:cNvPr>
@@ -6736,7 +6736,7 @@
           <p:cNvPr id="3" name="">
             <a:extLst xmlns:a="http://schemas.openxmlformats.org/drawingml/2006/main">
               <a:ext uri="{FF2B5EF4-FFF2-40B4-BE49-F238E27FC236}">
-                <a16:creationId xmlns:a16="http://schemas.microsoft.com/office/drawing/2014/main" id="{C45784C8-BCE6-41E0-9006-626C162EBD99}"/>
+                <a16:creationId xmlns:a16="http://schemas.microsoft.com/office/drawing/2014/main" id="{160C7708-8416-4106-AD12-4256336FEB0D}"/>
               </a:ext>
             </a:extLst>
           </p:cNvPr>
@@ -6793,7 +6793,7 @@
           <p:cNvPr id="4" name="">
             <a:extLst xmlns:a="http://schemas.openxmlformats.org/drawingml/2006/main">
               <a:ext uri="{FF2B5EF4-FFF2-40B4-BE49-F238E27FC236}">
-                <a16:creationId xmlns:a16="http://schemas.microsoft.com/office/drawing/2014/main" id="{1FD95CB4-3453-473D-9B2E-9885BAC58C64}"/>
+                <a16:creationId xmlns:a16="http://schemas.microsoft.com/office/drawing/2014/main" id="{A53A59A5-BF34-461E-BE61-2D7BFD220FAA}"/>
               </a:ext>
             </a:extLst>
           </p:cNvPr>
@@ -6854,7 +6854,7 @@
           <p:nvPr/>
         </p:nvPicPr>
         <p:blipFill>
-          <a:blip xmlns:r="http://schemas.openxmlformats.org/officeDocument/2006/relationships" xmlns:a="http://schemas.openxmlformats.org/drawingml/2006/main" r:embed="Rc89eef3a58e54d06"/>
+          <a:blip xmlns:r="http://schemas.openxmlformats.org/officeDocument/2006/relationships" xmlns:a="http://schemas.openxmlformats.org/drawingml/2006/main" r:embed="R7550870ac80c4276"/>
           <a:stretch xmlns:a="http://schemas.openxmlformats.org/drawingml/2006/main"/>
         </p:blipFill>
         <p:spPr>
@@ -6872,7 +6872,7 @@
           <p:cNvPr id="6" name="">
             <a:extLst xmlns:a="http://schemas.openxmlformats.org/drawingml/2006/main">
               <a:ext uri="{FF2B5EF4-FFF2-40B4-BE49-F238E27FC236}">
-                <a16:creationId xmlns:a16="http://schemas.microsoft.com/office/drawing/2014/main" id="{C6A5FE2C-EF46-4754-9E6B-2162E599CFDB}"/>
+                <a16:creationId xmlns:a16="http://schemas.microsoft.com/office/drawing/2014/main" id="{2A1198A1-91E7-43E1-B7D2-7E283FF9C78F}"/>
               </a:ext>
             </a:extLst>
           </p:cNvPr>
@@ -6927,7 +6927,7 @@
     </p:spTree>
     <p:extLst>
       <p:ext uri="{BB962C8B-B14F-4D97-AF65-F5344CB8AC3E}">
-        <p14:creationId xmlns:p14="http://schemas.microsoft.com/office/powerpoint/2010/main" val="1805453070"/>
+        <p14:creationId xmlns:p14="http://schemas.microsoft.com/office/powerpoint/2010/main" val="1848207180"/>
       </p:ext>
     </p:extLst>
   </p:cSld>
@@ -6958,7 +6958,7 @@
           <p:cNvPr id="10" name="">
             <a:extLst xmlns:a="http://schemas.openxmlformats.org/drawingml/2006/main">
               <a:ext uri="{FF2B5EF4-FFF2-40B4-BE49-F238E27FC236}">
-                <a16:creationId xmlns:a16="http://schemas.microsoft.com/office/drawing/2014/main" id="{D9A6593A-6E6D-427D-A795-5DEB521EB4D4}"/>
+                <a16:creationId xmlns:a16="http://schemas.microsoft.com/office/drawing/2014/main" id="{32AC49F4-BC57-4C5B-B27E-7D82A94E38AC}"/>
               </a:ext>
             </a:extLst>
           </p:cNvPr>
@@ -7015,7 +7015,7 @@
           <p:cNvPr id="2" name="">
             <a:extLst xmlns:a="http://schemas.openxmlformats.org/drawingml/2006/main">
               <a:ext uri="{FF2B5EF4-FFF2-40B4-BE49-F238E27FC236}">
-                <a16:creationId xmlns:a16="http://schemas.microsoft.com/office/drawing/2014/main" id="{B4EAE52C-BD34-4979-AF2A-2B78EC8D32DB}"/>
+                <a16:creationId xmlns:a16="http://schemas.microsoft.com/office/drawing/2014/main" id="{43C8F17F-DD80-4641-81D1-8A0490F11F86}"/>
               </a:ext>
             </a:extLst>
           </p:cNvPr>
@@ -7072,7 +7072,7 @@
           <p:cNvPr id="3" name="">
             <a:extLst xmlns:a="http://schemas.openxmlformats.org/drawingml/2006/main">
               <a:ext uri="{FF2B5EF4-FFF2-40B4-BE49-F238E27FC236}">
-                <a16:creationId xmlns:a16="http://schemas.microsoft.com/office/drawing/2014/main" id="{59010D7A-DDDD-4B09-992E-FFAF1A87D3B7}"/>
+                <a16:creationId xmlns:a16="http://schemas.microsoft.com/office/drawing/2014/main" id="{451DEFC2-9949-4FB1-84C9-E553899B6056}"/>
               </a:ext>
             </a:extLst>
           </p:cNvPr>
@@ -7129,7 +7129,7 @@
           <p:cNvPr id="4" name="">
             <a:extLst xmlns:a="http://schemas.openxmlformats.org/drawingml/2006/main">
               <a:ext uri="{FF2B5EF4-FFF2-40B4-BE49-F238E27FC236}">
-                <a16:creationId xmlns:a16="http://schemas.microsoft.com/office/drawing/2014/main" id="{D1A5F254-09E0-45F1-98C7-52A19B1A622B}"/>
+                <a16:creationId xmlns:a16="http://schemas.microsoft.com/office/drawing/2014/main" id="{5A3DAC44-C5C7-471D-B874-83483D146A59}"/>
               </a:ext>
             </a:extLst>
           </p:cNvPr>
@@ -7190,7 +7190,7 @@
           <p:nvPr/>
         </p:nvPicPr>
         <p:blipFill>
-          <a:blip xmlns:r="http://schemas.openxmlformats.org/officeDocument/2006/relationships" xmlns:a="http://schemas.openxmlformats.org/drawingml/2006/main" r:embed="Rd17e1403a0db42d0"/>
+          <a:blip xmlns:r="http://schemas.openxmlformats.org/officeDocument/2006/relationships" xmlns:a="http://schemas.openxmlformats.org/drawingml/2006/main" r:embed="Ra80fcb6945184530"/>
           <a:stretch xmlns:a="http://schemas.openxmlformats.org/drawingml/2006/main"/>
         </p:blipFill>
         <p:spPr>
@@ -7208,7 +7208,7 @@
           <p:cNvPr id="6" name="">
             <a:extLst xmlns:a="http://schemas.openxmlformats.org/drawingml/2006/main">
               <a:ext uri="{FF2B5EF4-FFF2-40B4-BE49-F238E27FC236}">
-                <a16:creationId xmlns:a16="http://schemas.microsoft.com/office/drawing/2014/main" id="{7FF866AD-CA24-4E64-8437-892657ABF77C}"/>
+                <a16:creationId xmlns:a16="http://schemas.microsoft.com/office/drawing/2014/main" id="{CEBBF787-B51D-4B87-9CD3-F60608837D9C}"/>
               </a:ext>
             </a:extLst>
           </p:cNvPr>
@@ -7288,7 +7288,7 @@
           <p:cNvPr id="7" name="">
             <a:extLst xmlns:a="http://schemas.openxmlformats.org/drawingml/2006/main">
               <a:ext uri="{FF2B5EF4-FFF2-40B4-BE49-F238E27FC236}">
-                <a16:creationId xmlns:a16="http://schemas.microsoft.com/office/drawing/2014/main" id="{0C589080-0389-4866-BE7D-1DBB09738529}"/>
+                <a16:creationId xmlns:a16="http://schemas.microsoft.com/office/drawing/2014/main" id="{1A4BFEC0-BB63-42F9-A8D7-5CAF2A409BBB}"/>
               </a:ext>
             </a:extLst>
           </p:cNvPr>
@@ -7368,7 +7368,7 @@
           <p:cNvPr id="8" name="">
             <a:extLst xmlns:a="http://schemas.openxmlformats.org/drawingml/2006/main">
               <a:ext uri="{FF2B5EF4-FFF2-40B4-BE49-F238E27FC236}">
-                <a16:creationId xmlns:a16="http://schemas.microsoft.com/office/drawing/2014/main" id="{7130A11B-59F9-4A76-8A49-64D6059EE510}"/>
+                <a16:creationId xmlns:a16="http://schemas.microsoft.com/office/drawing/2014/main" id="{781A4672-C110-4C02-BF58-C7797675858D}"/>
               </a:ext>
             </a:extLst>
           </p:cNvPr>
@@ -7471,7 +7471,7 @@
           <p:cNvPr id="9" name="">
             <a:extLst xmlns:a="http://schemas.openxmlformats.org/drawingml/2006/main">
               <a:ext uri="{FF2B5EF4-FFF2-40B4-BE49-F238E27FC236}">
-                <a16:creationId xmlns:a16="http://schemas.microsoft.com/office/drawing/2014/main" id="{F6A24658-22A2-4FFB-9D83-FF190C863CCF}"/>
+                <a16:creationId xmlns:a16="http://schemas.microsoft.com/office/drawing/2014/main" id="{ECF00A6E-A3C2-4D9C-9CF6-6A4EC6DE2904}"/>
               </a:ext>
             </a:extLst>
           </p:cNvPr>
@@ -7526,7 +7526,7 @@
     </p:spTree>
     <p:extLst>
       <p:ext uri="{BB962C8B-B14F-4D97-AF65-F5344CB8AC3E}">
-        <p14:creationId xmlns:p14="http://schemas.microsoft.com/office/powerpoint/2010/main" val="1267506133"/>
+        <p14:creationId xmlns:p14="http://schemas.microsoft.com/office/powerpoint/2010/main" val="85655303"/>
       </p:ext>
     </p:extLst>
   </p:cSld>
@@ -7557,7 +7557,7 @@
           <p:cNvPr id="8" name="">
             <a:extLst xmlns:a="http://schemas.openxmlformats.org/drawingml/2006/main">
               <a:ext uri="{FF2B5EF4-FFF2-40B4-BE49-F238E27FC236}">
-                <a16:creationId xmlns:a16="http://schemas.microsoft.com/office/drawing/2014/main" id="{AA7ED736-487E-4F56-B396-BADBC5106310}"/>
+                <a16:creationId xmlns:a16="http://schemas.microsoft.com/office/drawing/2014/main" id="{CFB5D491-7145-498C-8CEC-6DF4EA47F5FB}"/>
               </a:ext>
             </a:extLst>
           </p:cNvPr>
@@ -7614,7 +7614,7 @@
           <p:cNvPr id="2" name="">
             <a:extLst xmlns:a="http://schemas.openxmlformats.org/drawingml/2006/main">
               <a:ext uri="{FF2B5EF4-FFF2-40B4-BE49-F238E27FC236}">
-                <a16:creationId xmlns:a16="http://schemas.microsoft.com/office/drawing/2014/main" id="{40EBD3C0-AF05-4C41-8C6F-8AD824AA8B5F}"/>
+                <a16:creationId xmlns:a16="http://schemas.microsoft.com/office/drawing/2014/main" id="{232D97BA-9409-4A0B-B01A-4688491AC021}"/>
               </a:ext>
             </a:extLst>
           </p:cNvPr>
@@ -7671,7 +7671,7 @@
           <p:cNvPr id="3" name="">
             <a:extLst xmlns:a="http://schemas.openxmlformats.org/drawingml/2006/main">
               <a:ext uri="{FF2B5EF4-FFF2-40B4-BE49-F238E27FC236}">
-                <a16:creationId xmlns:a16="http://schemas.microsoft.com/office/drawing/2014/main" id="{41581309-B70E-443E-81D2-5328F54CBDD4}"/>
+                <a16:creationId xmlns:a16="http://schemas.microsoft.com/office/drawing/2014/main" id="{3BDCF144-095A-4FE3-B16D-DF45EB9ED785}"/>
               </a:ext>
             </a:extLst>
           </p:cNvPr>
@@ -7728,7 +7728,7 @@
           <p:cNvPr id="4" name="">
             <a:extLst xmlns:a="http://schemas.openxmlformats.org/drawingml/2006/main">
               <a:ext uri="{FF2B5EF4-FFF2-40B4-BE49-F238E27FC236}">
-                <a16:creationId xmlns:a16="http://schemas.microsoft.com/office/drawing/2014/main" id="{0F44AAE9-3DE4-438D-BF75-2FFE5964E8A8}"/>
+                <a16:creationId xmlns:a16="http://schemas.microsoft.com/office/drawing/2014/main" id="{5DFFF6D6-58D5-495E-BDC0-122388A1E378}"/>
               </a:ext>
             </a:extLst>
           </p:cNvPr>
@@ -7789,7 +7789,7 @@
           <p:nvPr/>
         </p:nvPicPr>
         <p:blipFill>
-          <a:blip xmlns:r="http://schemas.openxmlformats.org/officeDocument/2006/relationships" xmlns:a="http://schemas.openxmlformats.org/drawingml/2006/main" r:embed="Rc9868f3052a24924"/>
+          <a:blip xmlns:r="http://schemas.openxmlformats.org/officeDocument/2006/relationships" xmlns:a="http://schemas.openxmlformats.org/drawingml/2006/main" r:embed="R6b669168669b4c0b"/>
           <a:stretch xmlns:a="http://schemas.openxmlformats.org/drawingml/2006/main"/>
         </p:blipFill>
         <p:spPr>
@@ -7807,7 +7807,7 @@
           <p:cNvPr id="6" name="">
             <a:extLst xmlns:a="http://schemas.openxmlformats.org/drawingml/2006/main">
               <a:ext uri="{FF2B5EF4-FFF2-40B4-BE49-F238E27FC236}">
-                <a16:creationId xmlns:a16="http://schemas.microsoft.com/office/drawing/2014/main" id="{61F1B9AA-FF64-49D1-A8BD-9C09CB15BBB3}"/>
+                <a16:creationId xmlns:a16="http://schemas.microsoft.com/office/drawing/2014/main" id="{B5D8DB00-3D43-4335-9FA0-3A3737F8C2EA}"/>
               </a:ext>
             </a:extLst>
           </p:cNvPr>
@@ -7915,7 +7915,7 @@
           <p:cNvPr id="7" name="">
             <a:extLst xmlns:a="http://schemas.openxmlformats.org/drawingml/2006/main">
               <a:ext uri="{FF2B5EF4-FFF2-40B4-BE49-F238E27FC236}">
-                <a16:creationId xmlns:a16="http://schemas.microsoft.com/office/drawing/2014/main" id="{AF4A0256-F209-4D4E-A3EE-668600E043F9}"/>
+                <a16:creationId xmlns:a16="http://schemas.microsoft.com/office/drawing/2014/main" id="{1FAA9764-8593-47B7-98FA-7497757CF405}"/>
               </a:ext>
             </a:extLst>
           </p:cNvPr>
@@ -7970,7 +7970,7 @@
     </p:spTree>
     <p:extLst>
       <p:ext uri="{BB962C8B-B14F-4D97-AF65-F5344CB8AC3E}">
-        <p14:creationId xmlns:p14="http://schemas.microsoft.com/office/powerpoint/2010/main" val="352145769"/>
+        <p14:creationId xmlns:p14="http://schemas.microsoft.com/office/powerpoint/2010/main" val="1367063411"/>
       </p:ext>
     </p:extLst>
   </p:cSld>
@@ -8001,7 +8001,7 @@
           <p:cNvPr id="8" name="">
             <a:extLst xmlns:a="http://schemas.openxmlformats.org/drawingml/2006/main">
               <a:ext uri="{FF2B5EF4-FFF2-40B4-BE49-F238E27FC236}">
-                <a16:creationId xmlns:a16="http://schemas.microsoft.com/office/drawing/2014/main" id="{4E46B0BC-6CAB-420F-86C1-3772455A74C3}"/>
+                <a16:creationId xmlns:a16="http://schemas.microsoft.com/office/drawing/2014/main" id="{EF1604F7-4817-4AE7-8E4A-79616223AD38}"/>
               </a:ext>
             </a:extLst>
           </p:cNvPr>
@@ -8058,7 +8058,7 @@
           <p:cNvPr id="2" name="">
             <a:extLst xmlns:a="http://schemas.openxmlformats.org/drawingml/2006/main">
               <a:ext uri="{FF2B5EF4-FFF2-40B4-BE49-F238E27FC236}">
-                <a16:creationId xmlns:a16="http://schemas.microsoft.com/office/drawing/2014/main" id="{F945BF82-515A-4A64-85AC-D413016FBDDF}"/>
+                <a16:creationId xmlns:a16="http://schemas.microsoft.com/office/drawing/2014/main" id="{160D3618-CB3C-43CA-9649-891AA044A264}"/>
               </a:ext>
             </a:extLst>
           </p:cNvPr>
@@ -8115,7 +8115,7 @@
           <p:cNvPr id="3" name="">
             <a:extLst xmlns:a="http://schemas.openxmlformats.org/drawingml/2006/main">
               <a:ext uri="{FF2B5EF4-FFF2-40B4-BE49-F238E27FC236}">
-                <a16:creationId xmlns:a16="http://schemas.microsoft.com/office/drawing/2014/main" id="{03F06B1A-3BF9-42F9-92F4-BB0AEEC944C7}"/>
+                <a16:creationId xmlns:a16="http://schemas.microsoft.com/office/drawing/2014/main" id="{8B6C0CE2-2014-4844-8D28-8B8F4F5400E7}"/>
               </a:ext>
             </a:extLst>
           </p:cNvPr>
@@ -8172,7 +8172,7 @@
           <p:cNvPr id="4" name="">
             <a:extLst xmlns:a="http://schemas.openxmlformats.org/drawingml/2006/main">
               <a:ext uri="{FF2B5EF4-FFF2-40B4-BE49-F238E27FC236}">
-                <a16:creationId xmlns:a16="http://schemas.microsoft.com/office/drawing/2014/main" id="{09B646FE-95C0-492B-854A-B07CA305DB27}"/>
+                <a16:creationId xmlns:a16="http://schemas.microsoft.com/office/drawing/2014/main" id="{AA6C8586-CA46-4167-A402-B663AB847AC6}"/>
               </a:ext>
             </a:extLst>
           </p:cNvPr>
@@ -8233,7 +8233,7 @@
           <p:nvPr/>
         </p:nvPicPr>
         <p:blipFill>
-          <a:blip xmlns:r="http://schemas.openxmlformats.org/officeDocument/2006/relationships" xmlns:a="http://schemas.openxmlformats.org/drawingml/2006/main" r:embed="Rec43b646ba544b0d"/>
+          <a:blip xmlns:r="http://schemas.openxmlformats.org/officeDocument/2006/relationships" xmlns:a="http://schemas.openxmlformats.org/drawingml/2006/main" r:embed="R5c25c52ce8d842fe"/>
           <a:stretch xmlns:a="http://schemas.openxmlformats.org/drawingml/2006/main"/>
         </p:blipFill>
         <p:spPr>
@@ -8251,7 +8251,7 @@
           <p:cNvPr id="6" name="">
             <a:extLst xmlns:a="http://schemas.openxmlformats.org/drawingml/2006/main">
               <a:ext uri="{FF2B5EF4-FFF2-40B4-BE49-F238E27FC236}">
-                <a16:creationId xmlns:a16="http://schemas.microsoft.com/office/drawing/2014/main" id="{E2740392-4F40-42CB-820D-CE2342FE40A5}"/>
+                <a16:creationId xmlns:a16="http://schemas.microsoft.com/office/drawing/2014/main" id="{EF0CFB57-1A19-4D90-B85A-063059E1D2AD}"/>
               </a:ext>
             </a:extLst>
           </p:cNvPr>
@@ -8359,7 +8359,7 @@
           <p:cNvPr id="7" name="">
             <a:extLst xmlns:a="http://schemas.openxmlformats.org/drawingml/2006/main">
               <a:ext uri="{FF2B5EF4-FFF2-40B4-BE49-F238E27FC236}">
-                <a16:creationId xmlns:a16="http://schemas.microsoft.com/office/drawing/2014/main" id="{87E42520-5857-4ADB-BD43-ECE2B4778773}"/>
+                <a16:creationId xmlns:a16="http://schemas.microsoft.com/office/drawing/2014/main" id="{FA7BB84A-AF7C-4EB2-BDFD-C6D2D569DFE9}"/>
               </a:ext>
             </a:extLst>
           </p:cNvPr>
@@ -8414,7 +8414,7 @@
     </p:spTree>
     <p:extLst>
       <p:ext uri="{BB962C8B-B14F-4D97-AF65-F5344CB8AC3E}">
-        <p14:creationId xmlns:p14="http://schemas.microsoft.com/office/powerpoint/2010/main" val="1569619973"/>
+        <p14:creationId xmlns:p14="http://schemas.microsoft.com/office/powerpoint/2010/main" val="495476627"/>
       </p:ext>
     </p:extLst>
   </p:cSld>
@@ -8445,7 +8445,7 @@
           <p:cNvPr id="8" name="">
             <a:extLst xmlns:a="http://schemas.openxmlformats.org/drawingml/2006/main">
               <a:ext uri="{FF2B5EF4-FFF2-40B4-BE49-F238E27FC236}">
-                <a16:creationId xmlns:a16="http://schemas.microsoft.com/office/drawing/2014/main" id="{0DFF39F0-C6BD-49C7-A445-9C07F8BFD006}"/>
+                <a16:creationId xmlns:a16="http://schemas.microsoft.com/office/drawing/2014/main" id="{5353D773-9CCC-43AD-A1A2-09994086B077}"/>
               </a:ext>
             </a:extLst>
           </p:cNvPr>
@@ -8502,7 +8502,7 @@
           <p:cNvPr id="2" name="">
             <a:extLst xmlns:a="http://schemas.openxmlformats.org/drawingml/2006/main">
               <a:ext uri="{FF2B5EF4-FFF2-40B4-BE49-F238E27FC236}">
-                <a16:creationId xmlns:a16="http://schemas.microsoft.com/office/drawing/2014/main" id="{C7E92974-362F-48F0-BC32-B49EB44C3741}"/>
+                <a16:creationId xmlns:a16="http://schemas.microsoft.com/office/drawing/2014/main" id="{74B00C4E-5939-4CF4-BD06-17DE1688D868}"/>
               </a:ext>
             </a:extLst>
           </p:cNvPr>
@@ -8559,7 +8559,7 @@
           <p:cNvPr id="3" name="">
             <a:extLst xmlns:a="http://schemas.openxmlformats.org/drawingml/2006/main">
               <a:ext uri="{FF2B5EF4-FFF2-40B4-BE49-F238E27FC236}">
-                <a16:creationId xmlns:a16="http://schemas.microsoft.com/office/drawing/2014/main" id="{99348BF3-E1F5-468B-83E5-72023E6AD786}"/>
+                <a16:creationId xmlns:a16="http://schemas.microsoft.com/office/drawing/2014/main" id="{2C734433-CADA-4E28-B371-9D94A6C0A797}"/>
               </a:ext>
             </a:extLst>
           </p:cNvPr>
@@ -8616,7 +8616,7 @@
           <p:cNvPr id="4" name="">
             <a:extLst xmlns:a="http://schemas.openxmlformats.org/drawingml/2006/main">
               <a:ext uri="{FF2B5EF4-FFF2-40B4-BE49-F238E27FC236}">
-                <a16:creationId xmlns:a16="http://schemas.microsoft.com/office/drawing/2014/main" id="{23F43FCB-1241-47B1-AF1F-C9708B2E2638}"/>
+                <a16:creationId xmlns:a16="http://schemas.microsoft.com/office/drawing/2014/main" id="{8409E08A-827A-4F99-8CDB-8C3E8A35B803}"/>
               </a:ext>
             </a:extLst>
           </p:cNvPr>
@@ -8677,7 +8677,7 @@
           <p:nvPr/>
         </p:nvPicPr>
         <p:blipFill>
-          <a:blip xmlns:r="http://schemas.openxmlformats.org/officeDocument/2006/relationships" xmlns:a="http://schemas.openxmlformats.org/drawingml/2006/main" r:embed="R2e6fb96c30cc493b"/>
+          <a:blip xmlns:r="http://schemas.openxmlformats.org/officeDocument/2006/relationships" xmlns:a="http://schemas.openxmlformats.org/drawingml/2006/main" r:embed="Rd6bfbfacdbef4782"/>
           <a:stretch xmlns:a="http://schemas.openxmlformats.org/drawingml/2006/main"/>
         </p:blipFill>
         <p:spPr>
@@ -8695,7 +8695,7 @@
           <p:cNvPr id="6" name="">
             <a:extLst xmlns:a="http://schemas.openxmlformats.org/drawingml/2006/main">
               <a:ext uri="{FF2B5EF4-FFF2-40B4-BE49-F238E27FC236}">
-                <a16:creationId xmlns:a16="http://schemas.microsoft.com/office/drawing/2014/main" id="{9F450DD2-DE39-4EBF-8760-EB2862B9C786}"/>
+                <a16:creationId xmlns:a16="http://schemas.microsoft.com/office/drawing/2014/main" id="{C89BA735-8A5D-4BAC-B0F9-9E9460859CF5}"/>
               </a:ext>
             </a:extLst>
           </p:cNvPr>
@@ -8803,7 +8803,7 @@
           <p:cNvPr id="7" name="">
             <a:extLst xmlns:a="http://schemas.openxmlformats.org/drawingml/2006/main">
               <a:ext uri="{FF2B5EF4-FFF2-40B4-BE49-F238E27FC236}">
-                <a16:creationId xmlns:a16="http://schemas.microsoft.com/office/drawing/2014/main" id="{A96E5768-02D6-4696-850F-EC1DAAD69C46}"/>
+                <a16:creationId xmlns:a16="http://schemas.microsoft.com/office/drawing/2014/main" id="{9094A807-B276-4EDF-AD65-E3562B2A5841}"/>
               </a:ext>
             </a:extLst>
           </p:cNvPr>
@@ -8909,7 +8909,7 @@
     </p:spTree>
     <p:extLst>
       <p:ext uri="{BB962C8B-B14F-4D97-AF65-F5344CB8AC3E}">
-        <p14:creationId xmlns:p14="http://schemas.microsoft.com/office/powerpoint/2010/main" val="694357439"/>
+        <p14:creationId xmlns:p14="http://schemas.microsoft.com/office/powerpoint/2010/main" val="1886578808"/>
       </p:ext>
     </p:extLst>
   </p:cSld>
@@ -8940,7 +8940,7 @@
           <p:cNvPr id="7" name="">
             <a:extLst xmlns:a="http://schemas.openxmlformats.org/drawingml/2006/main">
               <a:ext uri="{FF2B5EF4-FFF2-40B4-BE49-F238E27FC236}">
-                <a16:creationId xmlns:a16="http://schemas.microsoft.com/office/drawing/2014/main" id="{4F239687-0003-4D5C-825E-87A6DF49366B}"/>
+                <a16:creationId xmlns:a16="http://schemas.microsoft.com/office/drawing/2014/main" id="{01D39199-C7F1-4B31-812F-86A6F027E399}"/>
               </a:ext>
             </a:extLst>
           </p:cNvPr>
@@ -8997,7 +8997,7 @@
           <p:cNvPr id="2" name="">
             <a:extLst xmlns:a="http://schemas.openxmlformats.org/drawingml/2006/main">
               <a:ext uri="{FF2B5EF4-FFF2-40B4-BE49-F238E27FC236}">
-                <a16:creationId xmlns:a16="http://schemas.microsoft.com/office/drawing/2014/main" id="{34B9DE9D-C764-4BC3-9819-AC0BE9651DCE}"/>
+                <a16:creationId xmlns:a16="http://schemas.microsoft.com/office/drawing/2014/main" id="{7AEC776E-DFF6-4C0E-8172-79A3B20DFDEC}"/>
               </a:ext>
             </a:extLst>
           </p:cNvPr>
@@ -9054,7 +9054,7 @@
           <p:cNvPr id="3" name="">
             <a:extLst xmlns:a="http://schemas.openxmlformats.org/drawingml/2006/main">
               <a:ext uri="{FF2B5EF4-FFF2-40B4-BE49-F238E27FC236}">
-                <a16:creationId xmlns:a16="http://schemas.microsoft.com/office/drawing/2014/main" id="{7E3DD063-A897-4BB7-8385-FF21731243BF}"/>
+                <a16:creationId xmlns:a16="http://schemas.microsoft.com/office/drawing/2014/main" id="{A51E7564-8F8B-4E55-A0CC-5B30363A7B0C}"/>
               </a:ext>
             </a:extLst>
           </p:cNvPr>
@@ -9111,7 +9111,7 @@
           <p:cNvPr id="4" name="">
             <a:extLst xmlns:a="http://schemas.openxmlformats.org/drawingml/2006/main">
               <a:ext uri="{FF2B5EF4-FFF2-40B4-BE49-F238E27FC236}">
-                <a16:creationId xmlns:a16="http://schemas.microsoft.com/office/drawing/2014/main" id="{78556452-6553-482A-A06D-46BAD8A73143}"/>
+                <a16:creationId xmlns:a16="http://schemas.microsoft.com/office/drawing/2014/main" id="{EB9C0752-FAED-4DD2-BD99-C8978170BC7B}"/>
               </a:ext>
             </a:extLst>
           </p:cNvPr>
@@ -9172,13 +9172,13 @@
           <p:nvPr/>
         </p:nvPicPr>
         <p:blipFill>
-          <a:blip xmlns:r="http://schemas.openxmlformats.org/officeDocument/2006/relationships" xmlns:a="http://schemas.openxmlformats.org/drawingml/2006/main" r:embed="R2de39dacb0c6440d"/>
+          <a:blip xmlns:r="http://schemas.openxmlformats.org/officeDocument/2006/relationships" xmlns:a="http://schemas.openxmlformats.org/drawingml/2006/main" r:embed="Ra31ed202a4784935"/>
           <a:stretch xmlns:a="http://schemas.openxmlformats.org/drawingml/2006/main"/>
         </p:blipFill>
         <p:spPr>
           <a:xfrm xmlns:a="http://schemas.openxmlformats.org/drawingml/2006/main">
-            <a:off x="1262884" y="1028700"/>
-            <a:ext cx="9666233" cy="5143500"/>
+            <a:off x="996841" y="1028700"/>
+            <a:ext cx="10198319" cy="5143500"/>
           </a:xfrm>
           <a:prstGeom xmlns:a="http://schemas.openxmlformats.org/drawingml/2006/main" prst="rect">
             <a:avLst/>
@@ -9190,7 +9190,7 @@
           <p:cNvPr id="6" name="">
             <a:extLst xmlns:a="http://schemas.openxmlformats.org/drawingml/2006/main">
               <a:ext uri="{FF2B5EF4-FFF2-40B4-BE49-F238E27FC236}">
-                <a16:creationId xmlns:a16="http://schemas.microsoft.com/office/drawing/2014/main" id="{3666FAD1-6C6B-43B6-B21B-F8D5D5257BD3}"/>
+                <a16:creationId xmlns:a16="http://schemas.microsoft.com/office/drawing/2014/main" id="{0F05698D-E13F-4DFB-9B80-CE535B6E006E}"/>
               </a:ext>
             </a:extLst>
           </p:cNvPr>
@@ -9245,7 +9245,7 @@
     </p:spTree>
     <p:extLst>
       <p:ext uri="{BB962C8B-B14F-4D97-AF65-F5344CB8AC3E}">
-        <p14:creationId xmlns:p14="http://schemas.microsoft.com/office/powerpoint/2010/main" val="1553630544"/>
+        <p14:creationId xmlns:p14="http://schemas.microsoft.com/office/powerpoint/2010/main" val="207259075"/>
       </p:ext>
     </p:extLst>
   </p:cSld>

--- a/projects/GSE262271_TALL_relapse_scRNAseq/07_Student_Handoff/01_Summary/Leukemia_scRNAseq_STAT5B_reviewed.pptx
+++ b/projects/GSE262271_TALL_relapse_scRNAseq/07_Student_Handoff/01_Summary/Leukemia_scRNAseq_STAT5B_reviewed.pptx
@@ -2,27 +2,27 @@
 <file path=ppt/presentation.xml><?xml version="1.0" encoding="utf-8"?>
 <p:presentation xmlns:p="http://schemas.openxmlformats.org/presentationml/2006/main">
   <p:sldMasterIdLst>
-    <p:sldMasterId xmlns:r="http://schemas.openxmlformats.org/officeDocument/2006/relationships" id="2147483648" r:id="R015e711df6fe4f3b"/>
+    <p:sldMasterId xmlns:r="http://schemas.openxmlformats.org/officeDocument/2006/relationships" id="2147483648" r:id="R7b918ffb7c044455"/>
   </p:sldMasterIdLst>
   <p:notesMasterIdLst>
-    <p:notesMasterId xmlns:r="http://schemas.openxmlformats.org/officeDocument/2006/relationships" r:id="R9c20c9f156954d11"/>
+    <p:notesMasterId xmlns:r="http://schemas.openxmlformats.org/officeDocument/2006/relationships" r:id="R2e6f41408ebd4501"/>
   </p:notesMasterIdLst>
   <p:sldIdLst>
-    <p:sldId xmlns:r="http://schemas.openxmlformats.org/officeDocument/2006/relationships" id="256" r:id="R98ae5fc5158d4ed8"/>
-    <p:sldId xmlns:r="http://schemas.openxmlformats.org/officeDocument/2006/relationships" id="257" r:id="R371ccc2969594b0f"/>
-    <p:sldId xmlns:r="http://schemas.openxmlformats.org/officeDocument/2006/relationships" id="258" r:id="R1915b54b823a4019"/>
-    <p:sldId xmlns:r="http://schemas.openxmlformats.org/officeDocument/2006/relationships" id="259" r:id="R1388ec38459740b3"/>
-    <p:sldId xmlns:r="http://schemas.openxmlformats.org/officeDocument/2006/relationships" id="260" r:id="R10b8b1fa9aa94741"/>
-    <p:sldId xmlns:r="http://schemas.openxmlformats.org/officeDocument/2006/relationships" id="261" r:id="R709a975c09fc4e66"/>
-    <p:sldId xmlns:r="http://schemas.openxmlformats.org/officeDocument/2006/relationships" id="262" r:id="R71240dea63f84795"/>
-    <p:sldId xmlns:r="http://schemas.openxmlformats.org/officeDocument/2006/relationships" id="263" r:id="R9bdbae432a4949af"/>
-    <p:sldId xmlns:r="http://schemas.openxmlformats.org/officeDocument/2006/relationships" id="264" r:id="Ra9752803f2a14467"/>
-    <p:sldId xmlns:r="http://schemas.openxmlformats.org/officeDocument/2006/relationships" id="265" r:id="Rb4add53360174f60"/>
-    <p:sldId xmlns:r="http://schemas.openxmlformats.org/officeDocument/2006/relationships" id="266" r:id="R3f5fb255aa7440f1"/>
-    <p:sldId xmlns:r="http://schemas.openxmlformats.org/officeDocument/2006/relationships" id="267" r:id="Rb2a628af23f74d0c"/>
-    <p:sldId xmlns:r="http://schemas.openxmlformats.org/officeDocument/2006/relationships" id="268" r:id="R202ec12476a64611"/>
-    <p:sldId xmlns:r="http://schemas.openxmlformats.org/officeDocument/2006/relationships" id="269" r:id="R221eaef169354976"/>
-    <p:sldId xmlns:r="http://schemas.openxmlformats.org/officeDocument/2006/relationships" id="270" r:id="R78ea99ac67b640c2"/>
+    <p:sldId xmlns:r="http://schemas.openxmlformats.org/officeDocument/2006/relationships" id="256" r:id="R52b15820f29a4d67"/>
+    <p:sldId xmlns:r="http://schemas.openxmlformats.org/officeDocument/2006/relationships" id="257" r:id="Rb3ab7ed6139847cc"/>
+    <p:sldId xmlns:r="http://schemas.openxmlformats.org/officeDocument/2006/relationships" id="258" r:id="R5ce29effc42648e1"/>
+    <p:sldId xmlns:r="http://schemas.openxmlformats.org/officeDocument/2006/relationships" id="259" r:id="R4647373685d34efc"/>
+    <p:sldId xmlns:r="http://schemas.openxmlformats.org/officeDocument/2006/relationships" id="260" r:id="Rcea1973c12e74016"/>
+    <p:sldId xmlns:r="http://schemas.openxmlformats.org/officeDocument/2006/relationships" id="261" r:id="Rda162ea381db426b"/>
+    <p:sldId xmlns:r="http://schemas.openxmlformats.org/officeDocument/2006/relationships" id="262" r:id="R454e1a1a19fb4068"/>
+    <p:sldId xmlns:r="http://schemas.openxmlformats.org/officeDocument/2006/relationships" id="263" r:id="Rd21d31e1b4c54e5f"/>
+    <p:sldId xmlns:r="http://schemas.openxmlformats.org/officeDocument/2006/relationships" id="264" r:id="R0a87428dcbcb4d4f"/>
+    <p:sldId xmlns:r="http://schemas.openxmlformats.org/officeDocument/2006/relationships" id="265" r:id="R10bee107c47c476e"/>
+    <p:sldId xmlns:r="http://schemas.openxmlformats.org/officeDocument/2006/relationships" id="266" r:id="R9ff4f55709ef4d7a"/>
+    <p:sldId xmlns:r="http://schemas.openxmlformats.org/officeDocument/2006/relationships" id="267" r:id="R3c22bf6af18c4e77"/>
+    <p:sldId xmlns:r="http://schemas.openxmlformats.org/officeDocument/2006/relationships" id="268" r:id="R15612f0ba7a443a4"/>
+    <p:sldId xmlns:r="http://schemas.openxmlformats.org/officeDocument/2006/relationships" id="269" r:id="R2d68cbe2f9b2449e"/>
+    <p:sldId xmlns:r="http://schemas.openxmlformats.org/officeDocument/2006/relationships" id="270" r:id="R1d606f9bae6e48cb"/>
   </p:sldIdLst>
   <p:sldSz cx="12192000" cy="6858000"/>
   <p:notesSz cx="6858000" cy="9144000"/>
@@ -456,7 +456,7 @@
           <a:lstStyle xmlns:a="http://schemas.openxmlformats.org/drawingml/2006/main"/>
           <a:p xmlns:a="http://schemas.openxmlformats.org/drawingml/2006/main">
             <a:r>
-              <a:t>研究目的由先前 STAT5 粒線體、mitophagy、proteasome 假說延伸。跨物種、不同實驗情境的 pathway 同方向只屬支持性關聯。不可稱為 bortezomib sensitivity、直接因果或獨立人類臨床驗證。</a:t>
+              <a:t>This handoff addresses pathway concordance between relapse-associated T-ALL transcription and constitutively active STAT5B. The biological hypothesis concerns mitochondrial and protein quality control. The comparison first examines complete KEGG enrichment and its direction-matched overlap. Top15 was selected after exploratory sensitivity analysis. Within-catalog BH FDR does not adjust for selection across analysis settings. Pooled reference q95 is a different absolute threshold, not an outcome-independent derivation of within-sample15%. RNA-based CNV and broad marker annotations do not independently validate malignancy. GSEA measures transcriptional enrichment, not mitophagy flux, proteasome activity or drug response.</a:t>
             </a:r>
           </a:p>
         </p:txBody>
@@ -526,7 +526,7 @@
           <a:lstStyle xmlns:a="http://schemas.openxmlformats.org/drawingml/2006/main"/>
           <a:p xmlns:a="http://schemas.openxmlformats.org/drawingml/2006/main">
             <a:r>
-              <a:t>Continuation of the complete40-pathway intersection. Both datasets use full-collection BH FDR&lt;0.05. Positive NES means higher in relapse (left) or N642H (right). scRNAseq Proteasome FDR=0.00837925505996343, Mitophagy=0.0131970176091592; bulk Proteasome=0.00107780111297412, Mitophagy=0.028233910102446. Disease/infection-labeled gene sets do not establish those diagnoses. Abbreviated display labels retain exact original names in Table07.</a:t>
+              <a:t>Figure06C. Remaining20 pathways, no omitted intersection members. Mitophagy is row28. Exact names and values are in Table07. Abbreviated labels retain the full names in the source table.</a:t>
             </a:r>
           </a:p>
         </p:txBody>
@@ -596,7 +596,7 @@
           <a:lstStyle xmlns:a="http://schemas.openxmlformats.org/drawingml/2006/main"/>
           <a:p xmlns:a="http://schemas.openxmlformats.org/drawingml/2006/main">
             <a:r>
-              <a:t>Numeric results are read from regenerated tables, not hard-coded historical values. q means whole KEGG BH, not nominal P or two-target correction. Within15 is exploratory because cutoff was selected after multiverse results.</a:t>
+              <a:t>Figure07. Proteasome: sc NES1.88056919729581/FDR0.00837925505996343, bulk NES1.88731918419017/FDR0.00107780111297412. Mitophagy: sc NES1.6703493502465/FDR0.0131970176091592, bulk NES1.55764616223599/FDR0.028233910102446. General autophagy does not pass FDR0.05. Filled/open circles distinguish significant/non-significant results; dash means absent from the tested catalog. Table08 contains source values. Top15 was selected after exploratory sensitivity analysis. Within-catalog BH FDR does not adjust for selection across analysis settings. Pooled reference q95 is a different absolute threshold, not an outcome-independent derivation of within-sample15%. RNA-based CNV and broad marker annotations do not independently validate malignancy. GSEA measures transcriptional enrichment, not mitophagy flux, proteasome activity or drug response.</a:t>
             </a:r>
           </a:p>
         </p:txBody>
@@ -666,7 +666,7 @@
           <a:lstStyle xmlns:a="http://schemas.openxmlformats.org/drawingml/2006/main"/>
           <a:p xmlns:a="http://schemas.openxmlformats.org/drawingml/2006/main">
             <a:r>
-              <a:t>Three patients limit inference. A gene need not rise in all three pairs for fitting a paired model. Gene-level DEG FDR and gene-set GSEA FDR answer different hypotheses.</a:t>
+              <a:t>Figure08. Mean pseudobulk log2CPM across pathway leading-edge genes from the same GSEA. Lines connect diagnosis and relapse for each of3 patients. Both pathway means increase in all3 pairs. The common y-axis allows comparable visual slopes. This descriptive display reuses selected genes and is not an independent test. Values in Table09.</a:t>
             </a:r>
           </a:p>
         </p:txBody>
@@ -736,7 +736,7 @@
           <a:lstStyle xmlns:a="http://schemas.openxmlformats.org/drawingml/2006/main"/>
           <a:p xmlns:a="http://schemas.openxmlformats.org/drawingml/2006/main">
             <a:r>
-              <a:t>inferCNV score is RNA-based deviation from reference, not measured DNA copy number, a probability of cancer, or a patient-independent validated specificity threshold. Reference sample/cell-type composition is unbalanced. Official workflow: https://github.com/broadinstitute/inferCNV/wiki/Running-InferCNV</a:t>
+              <a:t>Reference includes867 non-T cells. q95=0.026945532400026. Candidates12828, above q951978 (15.419%), top151926, overlap1407 (73.053% of top15). Minimum retained sample107 for top15,66 for reference-q95 selection. q95 is an empirical percentile of RNA-CNV scores, not a P value or probability of cancer. Top15 was selected after exploratory sensitivity analysis. Within-catalog BH FDR does not adjust for selection across analysis settings. Pooled reference q95 is a different absolute threshold, not an outcome-independent derivation of within-sample15%. RNA-based CNV and broad marker annotations do not independently validate malignancy. GSEA measures transcriptional enrichment, not mitophagy flux, proteasome activity or drug response. See TablesS02,S03,S06 and FigureS06 for sensitivity.</a:t>
             </a:r>
           </a:p>
         </p:txBody>
@@ -806,7 +806,7 @@
           <a:lstStyle xmlns:a="http://schemas.openxmlformats.org/drawingml/2006/main"/>
           <a:p xmlns:a="http://schemas.openxmlformats.org/drawingml/2006/main">
             <a:r>
-              <a:t>These are limits of the actual contrasts. General autophagy is not interchangeable with mitophagy. Inspect shared leading-edge genes and full FDR tables before choosing individual targets.</a:t>
+              <a:t>The shared pathways support transcriptional concordance across two different contexts and species. The mitochondrial-STAT5 mechanism is a research hypothesis. Neither dataset directly measures STAT5 mitochondrial localisation, autophagic flux, proteasome activity, bortezomib response or resistance. These functional links require new evidence. Top15 was selected after exploratory sensitivity analysis. Within-catalog BH FDR does not adjust for selection across analysis settings. Pooled reference q95 is a different absolute threshold, not an outcome-independent derivation of within-sample15%. RNA-based CNV and broad marker annotations do not independently validate malignancy. GSEA measures transcriptional enrichment, not mitophagy flux, proteasome activity or drug response.</a:t>
             </a:r>
           </a:p>
         </p:txBody>
@@ -876,7 +876,7 @@
           <a:lstStyle xmlns:a="http://schemas.openxmlformats.org/drawingml/2006/main"/>
           <a:p xmlns:a="http://schemas.openxmlformats.org/drawingml/2006/main">
             <a:r>
-              <a:t>Code22 recomputes count-based models and high-precision GSEA. Code23 renders reader figures/tables. The audit reports historical discrepancies rather than silently replacing provenance. No raw data, patient identifiers or large R objects are uploaded.</a:t>
+              <a:t>Code22 refits count models and performs GSEA,23 generates tables,24 independently checks reproduction,25 generates supplementary evidence,26 draws the complete shared-pathway dots and27 applies the current figure style. run_reviewed_analysis.ps1 accepts project and bulk data roots. The original raw data and large R objects remain local. Figure design reference: https://research-figure-guide.nature.com/figures/preparing-figures-our-specifications/ . Scientific graphics are R-generated; PNG is embedded for presentation and vector PDF is supplied for figure editing.</a:t>
             </a:r>
           </a:p>
         </p:txBody>
@@ -946,7 +946,7 @@
           <a:lstStyle xmlns:a="http://schemas.openxmlformats.org/drawingml/2006/main"/>
           <a:p xmlns:a="http://schemas.openxmlformats.org/drawingml/2006/main">
             <a:r>
-              <a:t>Sources: https://www.ncbi.nlm.nih.gov/geo/query/acc.cgi?acc=GSE262271 ; https://www.ncbi.nlm.nih.gov/geo/query/acc.cgi?acc=GSE218858 . Bulk genotype uses GEO characteristics rather than inconsistent sample-title shorthand. Full selected sample IDs in bulk_sample_design.csv.</a:t>
+              <a:t>Human GSE262271: 3 paired T-ALL patients. Potential malignant T cells are candidate T-lineage cells selected by within-sample CNV top15 under the stored original QC. Patient-sample pseudobulk raw counts are analysed with edgeR ~patient_pair + condition_simple. Rank = sign(logFC)*sqrt(F). Mouse GSE218858: STAT5B N642H vs control, independent n3 vs3, DESeq2 ~condition, ranked by Wald statistic. fgseaMultilevel uses fixed seed20260915, sampleSize501, nPermSimple50000, eps0. BH FDR is calculated separately over the full tested human KEGG353 and mouse KEGG300 collections. Cross-dataset overlap uses275 common tested canonical pathway names. Sample pairs: P1 M104/M127, P2 M143/M148, P3 M187/M187r. GEO: https://www.ncbi.nlm.nih.gov/geo/query/acc.cgi?acc=GSE262271 ; https://www.ncbi.nlm.nih.gov/geo/query/acc.cgi?acc=GSE218858 .</a:t>
             </a:r>
           </a:p>
         </p:txBody>
@@ -1016,7 +1016,7 @@
           <a:lstStyle xmlns:a="http://schemas.openxmlformats.org/drawingml/2006/main"/>
           <a:p xmlns:a="http://schemas.openxmlformats.org/drawingml/2006/main">
             <a:r>
-              <a:t>Reviewed labels are stored separately. Original Seurat annotations retained for traceability. Broad lineage assignments are supported by cluster markers but not independent reference mapping, flow cytometry or mutation/clonotype validation.</a:t>
+              <a:t>Figure01A. UMAP of13953 cells. The six colours map to reviewed broad lineages, with the same palette used in the marker plot. T-lineage candidate12828, B459, myeloid284, pDC27, erythroid97, cytotoxic T/NK258. Coordinates and cell identities are unchanged. Broad annotation is supported by cluster markers. Candidate T lineage and CNV-high selection are separate steps. Top15 was selected after exploratory sensitivity analysis. Within-catalog BH FDR does not adjust for selection across analysis settings. Pooled reference q95 is a different absolute threshold, not an outcome-independent derivation of within-sample15%. RNA-based CNV and broad marker annotations do not independently validate malignancy. GSEA measures transcriptional enrichment, not mitophagy flux, proteasome activity or drug response.</a:t>
             </a:r>
           </a:p>
         </p:txBody>
@@ -1086,7 +1086,7 @@
           <a:lstStyle xmlns:a="http://schemas.openxmlformats.org/drawingml/2006/main"/>
           <a:p xmlns:a="http://schemas.openxmlformats.org/drawingml/2006/main">
             <a:r>
-              <a:t>Figure 01B contains all 20 clusters and canonical marker panels. These descriptive scores are not donor-level significance tests. HTO singlet filtering does not rule out all same-sample doublets. Erythroid and cytotoxic T/NK labels remain coarse.</a:t>
+              <a:t>Figure01B. Six reviewed broad lineages and the original canonical marker panel. Mean log-expression and percent expressing cells are pooled using cluster cell counts as weights, then mean expression is z-scored within gene across the six lineages. Each row label and its colour strip use the same cell type mapping as Figure01A. All20 individual cluster profiles remain in FigureS07. Exact pooled summaries are stored in annotation_lineage_marker_summary.csv; original cluster data are in annotation_marker_evidence.csv. This descriptive summary does not reassign any cells.</a:t>
             </a:r>
           </a:p>
         </p:txBody>
@@ -1156,7 +1156,7 @@
           <a:lstStyle xmlns:a="http://schemas.openxmlformats.org/drawingml/2006/main"/>
           <a:p xmlns:a="http://schemas.openxmlformats.org/drawingml/2006/main">
             <a:r>
-              <a:t>867 non-T reference cells yield empirical q95=0.0269455, and 1978/12828=15.419% candidates exceed it. The absolute cutoff is not equivalent to selecting 15% within every sample. The exploratory 15% was considered after outcome inspection, so it is not outcome-independent or unbiased.</a:t>
+              <a:t>Figure02. Selected cell counts: P1 diagnosis434, relapse449; P2 diagnosis342, relapse295; P3 diagnosis107, relapse299. Each bar is one patient-sample pseudobulk. Fixed within-sample selection fractions do not estimate the prevalence of malignant cells. Human GSE262271: 3 paired T-ALL patients. Potential malignant T cells are candidate T-lineage cells selected by within-sample CNV top15 under the stored original QC. Patient-sample pseudobulk raw counts are analysed with edgeR ~patient_pair + condition_simple. Rank = sign(logFC)*sqrt(F). Mouse GSE218858: STAT5B N642H vs control, independent n3 vs3, DESeq2 ~condition, ranked by Wald statistic. fgseaMultilevel uses fixed seed20260915, sampleSize501, nPermSimple50000, eps0. BH FDR is calculated separately over the full tested human KEGG353 and mouse KEGG300 collections. Cross-dataset overlap uses275 common tested canonical pathway names. Top15 was selected after exploratory sensitivity analysis. Within-catalog BH FDR does not adjust for selection across analysis settings. Pooled reference q95 is a different absolute threshold, not an outcome-independent derivation of within-sample15%. RNA-based CNV and broad marker annotations do not independently validate malignancy. GSEA measures transcriptional enrichment, not mitophagy flux, proteasome activity or drug response.</a:t>
             </a:r>
           </a:p>
         </p:txBody>
@@ -1226,7 +1226,7 @@
           <a:lstStyle xmlns:a="http://schemas.openxmlformats.org/drawingml/2006/main"/>
           <a:p xmlns:a="http://schemas.openxmlformats.org/drawingml/2006/main">
             <a:r>
-              <a:t>Figure03B uses exploratory within-sample top15, original stored QC, paired edgeR ranking, fixed seed 20260915 and full KEGG BH. Up to eight pathways per direction are displayed on this slide. Figure03 displays up to fifteen per direction and Table04 contains the complete catalog. Disease-labeled gene sets often share metabolic/proteostasis genes and do not diagnose those diseases.</a:t>
+              <a:t>Figure03B. Top8 significant pathways per direction, ordered within direction by full-catalog FDR. Only2 downregulated pathways pass FDR&lt;0.05, so both are shown. Complete353-pathway results are in Table04. Stars use unrounded full-KEGG FDR. Disease-related pathway names refer to gene sets, not diagnoses. Human GSE262271: 3 paired T-ALL patients. Potential malignant T cells are candidate T-lineage cells selected by within-sample CNV top15 under the stored original QC. Patient-sample pseudobulk raw counts are analysed with edgeR ~patient_pair + condition_simple. Rank = sign(logFC)*sqrt(F). Mouse GSE218858: STAT5B N642H vs control, independent n3 vs3, DESeq2 ~condition, ranked by Wald statistic. fgseaMultilevel uses fixed seed20260915, sampleSize501, nPermSimple50000, eps0. BH FDR is calculated separately over the full tested human KEGG353 and mouse KEGG300 collections. Cross-dataset overlap uses275 common tested canonical pathway names.</a:t>
             </a:r>
           </a:p>
         </p:txBody>
@@ -1296,7 +1296,7 @@
           <a:lstStyle xmlns:a="http://schemas.openxmlformats.org/drawingml/2006/main"/>
           <a:p xmlns:a="http://schemas.openxmlformats.org/drawingml/2006/main">
             <a:r>
-              <a:t>R2S5b_DN vs R2b_DN, independent n3 vs3. Enrichr KEGG2019 Mouse catalog differs from the frozen human KEGG catalog. Each complete catalog has its own BH denominator. Refit from deposited raw count matrix.</a:t>
+              <a:t>Figure04B. Top8 significant pathways per direction, ordered within direction by full-catalog FDR. All6 downregulated pathways are shown. Complete300-pathway results are in Table05. Human and mouse KEGG collections differ. Human GSE262271: 3 paired T-ALL patients. Potential malignant T cells are candidate T-lineage cells selected by within-sample CNV top15 under the stored original QC. Patient-sample pseudobulk raw counts are analysed with edgeR ~patient_pair + condition_simple. Rank = sign(logFC)*sqrt(F). Mouse GSE218858: STAT5B N642H vs control, independent n3 vs3, DESeq2 ~condition, ranked by Wald statistic. fgseaMultilevel uses fixed seed20260915, sampleSize501, nPermSimple50000, eps0. BH FDR is calculated separately over the full tested human KEGG353 and mouse KEGG300 collections. Cross-dataset overlap uses275 common tested canonical pathway names.</a:t>
             </a:r>
           </a:p>
         </p:txBody>
@@ -1366,7 +1366,7 @@
           <a:lstStyle xmlns:a="http://schemas.openxmlformats.org/drawingml/2006/main"/>
           <a:p xmlns:a="http://schemas.openxmlformats.org/drawingml/2006/main">
             <a:r>
-              <a:t>Figure05 restricts the universe to common tested canonical pathway names. It does not call pathways missing from one catalog non-significant. Circle area is schematic. Table06 has all membership; Table07 lists all40 primary shared pathways. TableS05 retains global25 sensitivity. Primary display uses within15 as requested, while cutoff selection remains exploratory.</a:t>
+              <a:t>Figure05. The overlap universe is275 common tested canonical KEGG pathway names. Up: sc-only8, shared40, bulk-only55. Down: sc-only2, shared0, bulk-only6. Circle areas are schematic, not proportional to counts. Pathways absent from one catalog are excluded from the overlap universe. Complete membership Table06;40 shared pathways Table07.</a:t>
             </a:r>
           </a:p>
         </p:txBody>
@@ -1436,7 +1436,7 @@
           <a:lstStyle xmlns:a="http://schemas.openxmlformats.org/drawingml/2006/main"/>
           <a:p xmlns:a="http://schemas.openxmlformats.org/drawingml/2006/main">
             <a:r>
-              <a:t>Table07 and complete Figure06 use exactly the same order: increasing max(sc_FDR, bulk_FDR), with alphabetical pathway-name ties. The maximum is a display ordering key, not a combined FDR. Point position indicates NES. Blue denotes relapse scRNAseq and orange denotes STAT5B N642H bulk. Stars beside each point indicate full-catalog BH FDR: *&lt;0.05, **&lt;0.01, ***&lt;0.001. Stars use unrounded FDR, never nominal P. All40 satisfy FDR&lt;0.05 in both datasets. All pathway labels use the same plain typeface. Layout reference: Reis-de-Oliveira et al., Nature Communications (2024), Figures3B and4D, https://www.nature.com/articles/s41467-024-50875-z . Only the plot layout is adapted; the reference article uses other enrichment statistics.</a:t>
+              <a:t>Figure06B. First20 of the complete40 shared pathways. Order is increasing max(sc_FDR,bulk_FDR), alphabetical pathway ties. This is a display sort, not a combined FDR. Proteasome is row14. X=NES, stars use unrounded full-KEGG BH FDR, all labels plain. Exact source Table07. Positive NES means higher in relapse or N642H respectively.</a:t>
             </a:r>
           </a:p>
         </p:txBody>
@@ -1504,7 +1504,7 @@
   </p:cSld>
   <p:clrMap bg1="lt1" tx1="dk1" bg2="lt2" tx2="dk2" accent1="accent1" accent2="accent2" accent3="accent3" accent4="accent4" accent5="accent5" accent6="accent6" hlink="hlink" folHlink="folHlink"/>
   <p:sldLayoutIdLst>
-    <p:sldLayoutId xmlns:r="http://schemas.openxmlformats.org/officeDocument/2006/relationships" id="2147483649" r:id="R01163eda32a14c2e"/>
+    <p:sldLayoutId xmlns:r="http://schemas.openxmlformats.org/officeDocument/2006/relationships" id="2147483649" r:id="R05861ae03a084dbe"/>
   </p:sldLayoutIdLst>
   <p:txStyles>
     <p:titleStyle>
@@ -2052,10 +2052,10 @@
       </p:grpSpPr>
       <p:sp>
         <p:nvSpPr>
-          <p:cNvPr id="9" name="">
+          <p:cNvPr id="6" name="">
             <a:extLst xmlns:a="http://schemas.openxmlformats.org/drawingml/2006/main">
               <a:ext uri="{FF2B5EF4-FFF2-40B4-BE49-F238E27FC236}">
-                <a16:creationId xmlns:a16="http://schemas.microsoft.com/office/drawing/2014/main" id="{C0A9AC6A-2047-4E19-96CE-3983FD392025}"/>
+                <a16:creationId xmlns:a16="http://schemas.microsoft.com/office/drawing/2014/main" id="{4D3FCCA0-86D6-4D94-9E55-5F9BD10EB95A}"/>
               </a:ext>
             </a:extLst>
           </p:cNvPr>
@@ -2066,8 +2066,8 @@
         </p:nvSpPr>
         <p:spPr>
           <a:xfrm xmlns:a="http://schemas.openxmlformats.org/drawingml/2006/main">
-            <a:off x="476250" y="190500"/>
-            <a:ext cx="10477500" cy="209550"/>
+            <a:off x="523875" y="333375"/>
+            <a:ext cx="11144250" cy="590550"/>
           </a:xfrm>
           <a:prstGeom xmlns:a="http://schemas.openxmlformats.org/drawingml/2006/main" prst="rect">
             <a:avLst/>
@@ -2079,14 +2079,14 @@
         </p:spPr>
         <p:txBody>
           <a:bodyPr xmlns:a="http://schemas.openxmlformats.org/drawingml/2006/main">
-            <a:normAutofit fontScale="79487"/>
+            <a:noAutofit/>
           </a:bodyPr>
           <a:lstStyle xmlns:a="http://schemas.openxmlformats.org/drawingml/2006/main"/>
           <a:p xmlns:a="http://schemas.openxmlformats.org/drawingml/2006/main">
             <a:pPr>
-              <a:defRPr sz="975" b="1">
-                <a:solidFill>
-                  <a:srgbClr val="D55E00"/>
+              <a:defRPr sz="2550" b="1">
+                <a:solidFill>
+                  <a:srgbClr val="202020"/>
                 </a:solidFill>
                 <a:latin typeface="Microsoft JhengHei"/>
                 <a:ea typeface="Microsoft JhengHei"/>
@@ -2094,15 +2094,15 @@
               </a:defRPr>
             </a:pPr>
             <a:r>
-              <a:rPr sz="975" b="1">
-                <a:solidFill>
-                  <a:srgbClr val="D55E00"/>
+              <a:rPr sz="2550" b="1">
+                <a:solidFill>
+                  <a:srgbClr val="202020"/>
                 </a:solidFill>
                 <a:latin typeface="Microsoft JhengHei"/>
                 <a:ea typeface="Microsoft JhengHei"/>
                 <a:cs typeface="Microsoft JhengHei"/>
               </a:rPr>
-              <a:t>RESEARCH QUESTION</a:t>
+              <a:t>T-ALL relapse 與 STAT5B 活化</a:t>
             </a:r>
           </a:p>
         </p:txBody>
@@ -2112,7 +2112,7 @@
           <p:cNvPr id="2" name="">
             <a:extLst xmlns:a="http://schemas.openxmlformats.org/drawingml/2006/main">
               <a:ext uri="{FF2B5EF4-FFF2-40B4-BE49-F238E27FC236}">
-                <a16:creationId xmlns:a16="http://schemas.microsoft.com/office/drawing/2014/main" id="{C7545131-3BED-45EA-92F2-E557401601A8}"/>
+                <a16:creationId xmlns:a16="http://schemas.microsoft.com/office/drawing/2014/main" id="{AD6465C1-DDEF-4576-B7FA-0F594647AA17}"/>
               </a:ext>
             </a:extLst>
           </p:cNvPr>
@@ -2123,8 +2123,8 @@
         </p:nvSpPr>
         <p:spPr>
           <a:xfrm xmlns:a="http://schemas.openxmlformats.org/drawingml/2006/main">
-            <a:off x="476250" y="523875"/>
-            <a:ext cx="11144250" cy="476250"/>
+            <a:off x="619125" y="1857375"/>
+            <a:ext cx="10668000" cy="904875"/>
           </a:xfrm>
           <a:prstGeom xmlns:a="http://schemas.openxmlformats.org/drawingml/2006/main" prst="rect">
             <a:avLst/>
@@ -2136,14 +2136,14 @@
         </p:spPr>
         <p:txBody>
           <a:bodyPr xmlns:a="http://schemas.openxmlformats.org/drawingml/2006/main">
-            <a:normAutofit fontScale="100000"/>
+            <a:noAutofit/>
           </a:bodyPr>
           <a:lstStyle xmlns:a="http://schemas.openxmlformats.org/drawingml/2006/main"/>
           <a:p xmlns:a="http://schemas.openxmlformats.org/drawingml/2006/main">
             <a:pPr>
-              <a:defRPr sz="2400" b="1">
-                <a:solidFill>
-                  <a:srgbClr val="142F43"/>
+              <a:defRPr sz="3450" b="1">
+                <a:solidFill>
+                  <a:srgbClr val="202020"/>
                 </a:solidFill>
                 <a:latin typeface="Microsoft JhengHei"/>
                 <a:ea typeface="Microsoft JhengHei"/>
@@ -2151,15 +2151,15 @@
               </a:defRPr>
             </a:pPr>
             <a:r>
-              <a:rPr sz="2400" b="1">
-                <a:solidFill>
-                  <a:srgbClr val="142F43"/>
+              <a:rPr sz="3450" b="1">
+                <a:solidFill>
+                  <a:srgbClr val="202020"/>
                 </a:solidFill>
                 <a:latin typeface="Microsoft JhengHei"/>
                 <a:ea typeface="Microsoft JhengHei"/>
                 <a:cs typeface="Microsoft JhengHei"/>
               </a:rPr>
-              <a:t>T-ALL relapse 與 STAT5B 活化</a:t>
+              <a:t>共同的轉錄路徑</a:t>
             </a:r>
           </a:p>
         </p:txBody>
@@ -2169,7 +2169,7 @@
           <p:cNvPr id="3" name="">
             <a:extLst xmlns:a="http://schemas.openxmlformats.org/drawingml/2006/main">
               <a:ext uri="{FF2B5EF4-FFF2-40B4-BE49-F238E27FC236}">
-                <a16:creationId xmlns:a16="http://schemas.microsoft.com/office/drawing/2014/main" id="{8D899F37-A61D-4A72-BF2D-006A8860C660}"/>
+                <a16:creationId xmlns:a16="http://schemas.microsoft.com/office/drawing/2014/main" id="{389F6018-37D1-48BF-BF58-7042A1CEDA4F}"/>
               </a:ext>
             </a:extLst>
           </p:cNvPr>
@@ -2180,8 +2180,8 @@
         </p:nvSpPr>
         <p:spPr>
           <a:xfrm xmlns:a="http://schemas.openxmlformats.org/drawingml/2006/main">
-            <a:off x="476250" y="6543675"/>
-            <a:ext cx="10287000" cy="171450"/>
+            <a:off x="638175" y="3048000"/>
+            <a:ext cx="10572750" cy="714375"/>
           </a:xfrm>
           <a:prstGeom xmlns:a="http://schemas.openxmlformats.org/drawingml/2006/main" prst="rect">
             <a:avLst/>
@@ -2193,14 +2193,14 @@
         </p:spPr>
         <p:txBody>
           <a:bodyPr xmlns:a="http://schemas.openxmlformats.org/drawingml/2006/main">
-            <a:normAutofit fontScale="63636"/>
+            <a:noAutofit/>
           </a:bodyPr>
           <a:lstStyle xmlns:a="http://schemas.openxmlformats.org/drawingml/2006/main"/>
           <a:p xmlns:a="http://schemas.openxmlformats.org/drawingml/2006/main">
             <a:pPr>
-              <a:defRPr sz="825" b="0">
-                <a:solidFill>
-                  <a:srgbClr val="4D5B66"/>
+              <a:defRPr sz="2025" b="0">
+                <a:solidFill>
+                  <a:srgbClr val="202020"/>
                 </a:solidFill>
                 <a:latin typeface="Microsoft JhengHei"/>
                 <a:ea typeface="Microsoft JhengHei"/>
@@ -2208,15 +2208,15 @@
               </a:defRPr>
             </a:pPr>
             <a:r>
-              <a:rPr sz="825" b="0">
-                <a:solidFill>
-                  <a:srgbClr val="4D5B66"/>
+              <a:rPr sz="2025" b="0">
+                <a:solidFill>
+                  <a:srgbClr val="202020"/>
                 </a:solidFill>
                 <a:latin typeface="Microsoft JhengHei"/>
                 <a:ea typeface="Microsoft JhengHei"/>
                 <a:cs typeface="Microsoft JhengHei"/>
               </a:rPr>
-              <a:t>GSE262271 / GSE218858  |  Reviewed 15 September 2026</a:t>
+              <a:t>配對 single-cell RNA-seq 與 STAT5B N642H bulk RNA-seq</a:t>
             </a:r>
           </a:p>
         </p:txBody>
@@ -2226,7 +2226,7 @@
           <p:cNvPr id="4" name="">
             <a:extLst xmlns:a="http://schemas.openxmlformats.org/drawingml/2006/main">
               <a:ext uri="{FF2B5EF4-FFF2-40B4-BE49-F238E27FC236}">
-                <a16:creationId xmlns:a16="http://schemas.microsoft.com/office/drawing/2014/main" id="{B2255C29-B9DC-4A1D-B717-10EE22547455}"/>
+                <a16:creationId xmlns:a16="http://schemas.microsoft.com/office/drawing/2014/main" id="{141FA3D8-A1F7-4D37-A318-2D9196D1F4F8}"/>
               </a:ext>
             </a:extLst>
           </p:cNvPr>
@@ -2237,8 +2237,8 @@
         </p:nvSpPr>
         <p:spPr>
           <a:xfrm xmlns:a="http://schemas.openxmlformats.org/drawingml/2006/main">
-            <a:off x="11334750" y="6543675"/>
-            <a:ext cx="381000" cy="171450"/>
+            <a:off x="638175" y="4476750"/>
+            <a:ext cx="10572750" cy="476250"/>
           </a:xfrm>
           <a:prstGeom xmlns:a="http://schemas.openxmlformats.org/drawingml/2006/main" prst="rect">
             <a:avLst/>
@@ -2250,14 +2250,14 @@
         </p:spPr>
         <p:txBody>
           <a:bodyPr xmlns:a="http://schemas.openxmlformats.org/drawingml/2006/main">
-            <a:normAutofit fontScale="63636"/>
+            <a:noAutofit/>
           </a:bodyPr>
           <a:lstStyle xmlns:a="http://schemas.openxmlformats.org/drawingml/2006/main"/>
           <a:p xmlns:a="http://schemas.openxmlformats.org/drawingml/2006/main">
             <a:pPr>
-              <a:defRPr sz="825" b="0">
-                <a:solidFill>
-                  <a:srgbClr val="142F43"/>
+              <a:defRPr sz="1950" b="0">
+                <a:solidFill>
+                  <a:srgbClr val="202020"/>
                 </a:solidFill>
                 <a:latin typeface="Microsoft JhengHei"/>
                 <a:ea typeface="Microsoft JhengHei"/>
@@ -2265,15 +2265,15 @@
               </a:defRPr>
             </a:pPr>
             <a:r>
-              <a:rPr sz="825" b="0">
-                <a:solidFill>
-                  <a:srgbClr val="142F43"/>
+              <a:rPr sz="1950" b="0">
+                <a:solidFill>
+                  <a:srgbClr val="202020"/>
                 </a:solidFill>
                 <a:latin typeface="Microsoft JhengHei"/>
                 <a:ea typeface="Microsoft JhengHei"/>
                 <a:cs typeface="Microsoft JhengHei"/>
               </a:rPr>
-              <a:t>01</a:t>
+              <a:t>GSE262271  /  GSE218858</a:t>
             </a:r>
           </a:p>
         </p:txBody>
@@ -2283,7 +2283,7 @@
           <p:cNvPr id="5" name="">
             <a:extLst xmlns:a="http://schemas.openxmlformats.org/drawingml/2006/main">
               <a:ext uri="{FF2B5EF4-FFF2-40B4-BE49-F238E27FC236}">
-                <a16:creationId xmlns:a16="http://schemas.microsoft.com/office/drawing/2014/main" id="{91997C50-51E0-4996-AA35-8629E4FF49D7}"/>
+                <a16:creationId xmlns:a16="http://schemas.microsoft.com/office/drawing/2014/main" id="{7F5F7C86-2748-4F93-8DE1-C28B8170E933}"/>
               </a:ext>
             </a:extLst>
           </p:cNvPr>
@@ -2294,8 +2294,8 @@
         </p:nvSpPr>
         <p:spPr>
           <a:xfrm xmlns:a="http://schemas.openxmlformats.org/drawingml/2006/main">
-            <a:off x="571500" y="1666875"/>
-            <a:ext cx="10668000" cy="857250"/>
+            <a:off x="638175" y="5448300"/>
+            <a:ext cx="10572750" cy="619125"/>
           </a:xfrm>
           <a:prstGeom xmlns:a="http://schemas.openxmlformats.org/drawingml/2006/main" prst="rect">
             <a:avLst/>
@@ -2307,14 +2307,14 @@
         </p:spPr>
         <p:txBody>
           <a:bodyPr xmlns:a="http://schemas.openxmlformats.org/drawingml/2006/main">
-            <a:normAutofit fontScale="100000"/>
+            <a:noAutofit/>
           </a:bodyPr>
           <a:lstStyle xmlns:a="http://schemas.openxmlformats.org/drawingml/2006/main"/>
           <a:p xmlns:a="http://schemas.openxmlformats.org/drawingml/2006/main">
             <a:pPr>
-              <a:defRPr sz="2850" b="1">
-                <a:solidFill>
-                  <a:srgbClr val="142F43"/>
+              <a:defRPr sz="1875" b="0">
+                <a:solidFill>
+                  <a:srgbClr val="202020"/>
                 </a:solidFill>
                 <a:latin typeface="Microsoft JhengHei"/>
                 <a:ea typeface="Microsoft JhengHei"/>
@@ -2322,209 +2322,15 @@
               </a:defRPr>
             </a:pPr>
             <a:r>
-              <a:rPr sz="2850" b="1">
-                <a:solidFill>
-                  <a:srgbClr val="142F43"/>
+              <a:rPr sz="1875" b="0">
+                <a:solidFill>
+                  <a:srgbClr val="202020"/>
                 </a:solidFill>
                 <a:latin typeface="Microsoft JhengHei"/>
                 <a:ea typeface="Microsoft JhengHei"/>
                 <a:cs typeface="Microsoft JhengHei"/>
               </a:rPr>
-              <a:t>兩組 transcriptome 有哪些共同的 pathway 變化？</a:t>
-            </a:r>
-          </a:p>
-        </p:txBody>
-      </p:sp>
-      <p:sp>
-        <p:nvSpPr>
-          <p:cNvPr id="6" name="">
-            <a:extLst xmlns:a="http://schemas.openxmlformats.org/drawingml/2006/main">
-              <a:ext uri="{FF2B5EF4-FFF2-40B4-BE49-F238E27FC236}">
-                <a16:creationId xmlns:a16="http://schemas.microsoft.com/office/drawing/2014/main" id="{B47E1B56-205C-4B98-96B2-913321EA9C1B}"/>
-              </a:ext>
-            </a:extLst>
-          </p:cNvPr>
-          <p:cNvSpPr>
-            <a:spLocks xmlns:a="http://schemas.openxmlformats.org/drawingml/2006/main" noGrp="1"/>
-          </p:cNvSpPr>
-          <p:nvPr/>
-        </p:nvSpPr>
-        <p:spPr>
-          <a:xfrm xmlns:a="http://schemas.openxmlformats.org/drawingml/2006/main">
-            <a:off x="590550" y="2857500"/>
-            <a:ext cx="10572750" cy="1000125"/>
-          </a:xfrm>
-          <a:prstGeom xmlns:a="http://schemas.openxmlformats.org/drawingml/2006/main" prst="rect">
-            <a:avLst/>
-          </a:prstGeom>
-          <a:noFill xmlns:a="http://schemas.openxmlformats.org/drawingml/2006/main"/>
-          <a:ln xmlns:a="http://schemas.openxmlformats.org/drawingml/2006/main" w="0">
-            <a:noFill/>
-          </a:ln>
-        </p:spPr>
-        <p:txBody>
-          <a:bodyPr xmlns:a="http://schemas.openxmlformats.org/drawingml/2006/main">
-            <a:normAutofit fontScale="100000"/>
-          </a:bodyPr>
-          <a:lstStyle xmlns:a="http://schemas.openxmlformats.org/drawingml/2006/main"/>
-          <a:p xmlns:a="http://schemas.openxmlformats.org/drawingml/2006/main">
-            <a:pPr>
-              <a:defRPr sz="2100" b="0">
-                <a:solidFill>
-                  <a:srgbClr val="142F43"/>
-                </a:solidFill>
-                <a:latin typeface="Microsoft JhengHei"/>
-                <a:ea typeface="Microsoft JhengHei"/>
-                <a:cs typeface="Microsoft JhengHei"/>
-              </a:defRPr>
-            </a:pPr>
-            <a:r>
-              <a:rPr sz="2100" b="0">
-                <a:solidFill>
-                  <a:srgbClr val="142F43"/>
-                </a:solidFill>
-                <a:latin typeface="Microsoft JhengHei"/>
-                <a:ea typeface="Microsoft JhengHei"/>
-                <a:cs typeface="Microsoft JhengHei"/>
-              </a:rPr>
-              <a:t>先比較完整 KEGG enrichment 與同方向交集，再檢視 proteasome、mitophagy 和相關生物機制。</a:t>
-            </a:r>
-          </a:p>
-        </p:txBody>
-      </p:sp>
-      <p:sp>
-        <p:nvSpPr>
-          <p:cNvPr id="7" name="">
-            <a:extLst xmlns:a="http://schemas.openxmlformats.org/drawingml/2006/main">
-              <a:ext uri="{FF2B5EF4-FFF2-40B4-BE49-F238E27FC236}">
-                <a16:creationId xmlns:a16="http://schemas.microsoft.com/office/drawing/2014/main" id="{A4D93AB5-9D8F-48F0-B412-1B0D2A0E0B06}"/>
-              </a:ext>
-            </a:extLst>
-          </p:cNvPr>
-          <p:cNvSpPr>
-            <a:spLocks xmlns:a="http://schemas.openxmlformats.org/drawingml/2006/main" noGrp="1"/>
-          </p:cNvSpPr>
-          <p:nvPr/>
-        </p:nvSpPr>
-        <p:spPr>
-          <a:xfrm xmlns:a="http://schemas.openxmlformats.org/drawingml/2006/main">
-            <a:off x="590550" y="4429125"/>
-            <a:ext cx="10477500" cy="952500"/>
-          </a:xfrm>
-          <a:prstGeom xmlns:a="http://schemas.openxmlformats.org/drawingml/2006/main" prst="rect">
-            <a:avLst/>
-          </a:prstGeom>
-          <a:noFill xmlns:a="http://schemas.openxmlformats.org/drawingml/2006/main"/>
-          <a:ln xmlns:a="http://schemas.openxmlformats.org/drawingml/2006/main" w="0">
-            <a:noFill/>
-          </a:ln>
-        </p:spPr>
-        <p:txBody>
-          <a:bodyPr xmlns:a="http://schemas.openxmlformats.org/drawingml/2006/main">
-            <a:normAutofit fontScale="100000"/>
-          </a:bodyPr>
-          <a:lstStyle xmlns:a="http://schemas.openxmlformats.org/drawingml/2006/main"/>
-          <a:p xmlns:a="http://schemas.openxmlformats.org/drawingml/2006/main">
-            <a:pPr>
-              <a:defRPr sz="1800" b="0">
-                <a:solidFill>
-                  <a:srgbClr val="142F43"/>
-                </a:solidFill>
-                <a:latin typeface="Microsoft JhengHei"/>
-                <a:ea typeface="Microsoft JhengHei"/>
-                <a:cs typeface="Microsoft JhengHei"/>
-              </a:defRPr>
-            </a:pPr>
-            <a:r>
-              <a:rPr sz="1800" b="0">
-                <a:solidFill>
-                  <a:srgbClr val="142F43"/>
-                </a:solidFill>
-                <a:latin typeface="Microsoft JhengHei"/>
-                <a:ea typeface="Microsoft JhengHei"/>
-                <a:cs typeface="Microsoft JhengHei"/>
-              </a:rPr>
-              <a:t>GSE262271：3 位病人 diagnosis / relapse 配對</a:t>
-            </a:r>
-          </a:p>
-          <a:p xmlns:a="http://schemas.openxmlformats.org/drawingml/2006/main">
-            <a:pPr>
-              <a:defRPr sz="1800" b="0">
-                <a:solidFill>
-                  <a:srgbClr val="142F43"/>
-                </a:solidFill>
-                <a:latin typeface="Microsoft JhengHei"/>
-                <a:ea typeface="Microsoft JhengHei"/>
-                <a:cs typeface="Microsoft JhengHei"/>
-              </a:defRPr>
-            </a:pPr>
-            <a:r>
-              <a:rPr sz="1800" b="0">
-                <a:solidFill>
-                  <a:srgbClr val="142F43"/>
-                </a:solidFill>
-                <a:latin typeface="Microsoft JhengHei"/>
-                <a:ea typeface="Microsoft JhengHei"/>
-                <a:cs typeface="Microsoft JhengHei"/>
-              </a:rPr>
-              <a:t>GSE218858：STAT5B N642H 與對照各 3 個 bulk samples</a:t>
-            </a:r>
-          </a:p>
-        </p:txBody>
-      </p:sp>
-      <p:sp>
-        <p:nvSpPr>
-          <p:cNvPr id="8" name="">
-            <a:extLst xmlns:a="http://schemas.openxmlformats.org/drawingml/2006/main">
-              <a:ext uri="{FF2B5EF4-FFF2-40B4-BE49-F238E27FC236}">
-                <a16:creationId xmlns:a16="http://schemas.microsoft.com/office/drawing/2014/main" id="{BBD193C2-5D8C-4581-8699-BC2E4B32DC7F}"/>
-              </a:ext>
-            </a:extLst>
-          </p:cNvPr>
-          <p:cNvSpPr>
-            <a:spLocks xmlns:a="http://schemas.openxmlformats.org/drawingml/2006/main" noGrp="1"/>
-          </p:cNvSpPr>
-          <p:nvPr/>
-        </p:nvSpPr>
-        <p:spPr>
-          <a:xfrm xmlns:a="http://schemas.openxmlformats.org/drawingml/2006/main">
-            <a:off x="590550" y="5800725"/>
-            <a:ext cx="10572750" cy="419100"/>
-          </a:xfrm>
-          <a:prstGeom xmlns:a="http://schemas.openxmlformats.org/drawingml/2006/main" prst="rect">
-            <a:avLst/>
-          </a:prstGeom>
-          <a:noFill xmlns:a="http://schemas.openxmlformats.org/drawingml/2006/main"/>
-          <a:ln xmlns:a="http://schemas.openxmlformats.org/drawingml/2006/main" w="0">
-            <a:noFill/>
-          </a:ln>
-        </p:spPr>
-        <p:txBody>
-          <a:bodyPr xmlns:a="http://schemas.openxmlformats.org/drawingml/2006/main">
-            <a:normAutofit fontScale="100000"/>
-          </a:bodyPr>
-          <a:lstStyle xmlns:a="http://schemas.openxmlformats.org/drawingml/2006/main"/>
-          <a:p xmlns:a="http://schemas.openxmlformats.org/drawingml/2006/main">
-            <a:pPr>
-              <a:defRPr sz="1500" b="0">
-                <a:solidFill>
-                  <a:srgbClr val="4D5B66"/>
-                </a:solidFill>
-                <a:latin typeface="Microsoft JhengHei"/>
-                <a:ea typeface="Microsoft JhengHei"/>
-                <a:cs typeface="Microsoft JhengHei"/>
-              </a:defRPr>
-            </a:pPr>
-            <a:r>
-              <a:rPr sz="1500" b="0">
-                <a:solidFill>
-                  <a:srgbClr val="4D5B66"/>
-                </a:solidFill>
-                <a:latin typeface="Microsoft JhengHei"/>
-                <a:ea typeface="Microsoft JhengHei"/>
-                <a:cs typeface="Microsoft JhengHei"/>
-              </a:rPr>
-              <a:t>主分析固定 within-sample CNV top 15%，pathway 與交集皆採完整 KEGG FDR &lt; 0.05。</a:t>
+              <a:t>研究問題：復發與 STAT5B 活化是否伴隨相同的細胞程式？</a:t>
             </a:r>
           </a:p>
         </p:txBody>
@@ -2532,7 +2338,7 @@
     </p:spTree>
     <p:extLst>
       <p:ext uri="{BB962C8B-B14F-4D97-AF65-F5344CB8AC3E}">
-        <p14:creationId xmlns:p14="http://schemas.microsoft.com/office/powerpoint/2010/main" val="60217684"/>
+        <p14:creationId xmlns:p14="http://schemas.microsoft.com/office/powerpoint/2010/main" val="718852398"/>
       </p:ext>
     </p:extLst>
   </p:cSld>
@@ -2560,10 +2366,10 @@
       </p:grpSpPr>
       <p:sp>
         <p:nvSpPr>
-          <p:cNvPr id="7" name="">
+          <p:cNvPr id="3" name="">
             <a:extLst xmlns:a="http://schemas.openxmlformats.org/drawingml/2006/main">
               <a:ext uri="{FF2B5EF4-FFF2-40B4-BE49-F238E27FC236}">
-                <a16:creationId xmlns:a16="http://schemas.microsoft.com/office/drawing/2014/main" id="{D0B68C6F-39DA-4C5D-84E9-236BC4B10207}"/>
+                <a16:creationId xmlns:a16="http://schemas.microsoft.com/office/drawing/2014/main" id="{F58EE914-6BB1-49BA-B4B2-EA6B4EE8846F}"/>
               </a:ext>
             </a:extLst>
           </p:cNvPr>
@@ -2574,8 +2380,8 @@
         </p:nvSpPr>
         <p:spPr>
           <a:xfrm xmlns:a="http://schemas.openxmlformats.org/drawingml/2006/main">
-            <a:off x="476250" y="190500"/>
-            <a:ext cx="10477500" cy="209550"/>
+            <a:off x="523875" y="333375"/>
+            <a:ext cx="11144250" cy="590550"/>
           </a:xfrm>
           <a:prstGeom xmlns:a="http://schemas.openxmlformats.org/drawingml/2006/main" prst="rect">
             <a:avLst/>
@@ -2587,14 +2393,14 @@
         </p:spPr>
         <p:txBody>
           <a:bodyPr xmlns:a="http://schemas.openxmlformats.org/drawingml/2006/main">
-            <a:normAutofit fontScale="79487"/>
+            <a:noAutofit/>
           </a:bodyPr>
           <a:lstStyle xmlns:a="http://schemas.openxmlformats.org/drawingml/2006/main"/>
           <a:p xmlns:a="http://schemas.openxmlformats.org/drawingml/2006/main">
             <a:pPr>
-              <a:defRPr sz="975" b="1">
-                <a:solidFill>
-                  <a:srgbClr val="D55E00"/>
+              <a:defRPr sz="2550" b="1">
+                <a:solidFill>
+                  <a:srgbClr val="202020"/>
                 </a:solidFill>
                 <a:latin typeface="Microsoft JhengHei"/>
                 <a:ea typeface="Microsoft JhengHei"/>
@@ -2602,273 +2408,45 @@
               </a:defRPr>
             </a:pPr>
             <a:r>
-              <a:rPr sz="975" b="1">
-                <a:solidFill>
-                  <a:srgbClr val="D55E00"/>
+              <a:rPr sz="2550" b="1">
+                <a:solidFill>
+                  <a:srgbClr val="202020"/>
                 </a:solidFill>
                 <a:latin typeface="Microsoft JhengHei"/>
                 <a:ea typeface="Microsoft JhengHei"/>
                 <a:cs typeface="Microsoft JhengHei"/>
               </a:rPr>
-              <a:t>SHARED PROGRAMS</a:t>
+              <a:t>共同上調 pathways：21–40</a:t>
             </a:r>
           </a:p>
         </p:txBody>
       </p:sp>
-      <p:sp>
-        <p:nvSpPr>
-          <p:cNvPr id="2" name="">
-            <a:extLst xmlns:a="http://schemas.openxmlformats.org/drawingml/2006/main">
-              <a:ext uri="{FF2B5EF4-FFF2-40B4-BE49-F238E27FC236}">
-                <a16:creationId xmlns:a16="http://schemas.microsoft.com/office/drawing/2014/main" id="{D6324B40-36A9-4BE6-AFD8-666BA6DB6A14}"/>
-              </a:ext>
-            </a:extLst>
-          </p:cNvPr>
-          <p:cNvSpPr>
-            <a:spLocks xmlns:a="http://schemas.openxmlformats.org/drawingml/2006/main" noGrp="1"/>
-          </p:cNvSpPr>
-          <p:nvPr/>
-        </p:nvSpPr>
-        <p:spPr>
-          <a:xfrm xmlns:a="http://schemas.openxmlformats.org/drawingml/2006/main">
-            <a:off x="476250" y="523875"/>
-            <a:ext cx="11144250" cy="476250"/>
-          </a:xfrm>
-          <a:prstGeom xmlns:a="http://schemas.openxmlformats.org/drawingml/2006/main" prst="rect">
-            <a:avLst/>
-          </a:prstGeom>
-          <a:noFill xmlns:a="http://schemas.openxmlformats.org/drawingml/2006/main"/>
-          <a:ln xmlns:a="http://schemas.openxmlformats.org/drawingml/2006/main" w="0">
-            <a:noFill/>
-          </a:ln>
-        </p:spPr>
-        <p:txBody>
-          <a:bodyPr xmlns:a="http://schemas.openxmlformats.org/drawingml/2006/main">
-            <a:normAutofit fontScale="100000"/>
-          </a:bodyPr>
-          <a:lstStyle xmlns:a="http://schemas.openxmlformats.org/drawingml/2006/main"/>
-          <a:p xmlns:a="http://schemas.openxmlformats.org/drawingml/2006/main">
-            <a:pPr>
-              <a:defRPr sz="2400" b="1">
-                <a:solidFill>
-                  <a:srgbClr val="142F43"/>
-                </a:solidFill>
-                <a:latin typeface="Microsoft JhengHei"/>
-                <a:ea typeface="Microsoft JhengHei"/>
-                <a:cs typeface="Microsoft JhengHei"/>
-              </a:defRPr>
-            </a:pPr>
-            <a:r>
-              <a:rPr sz="2400" b="1">
-                <a:solidFill>
-                  <a:srgbClr val="142F43"/>
-                </a:solidFill>
-                <a:latin typeface="Microsoft JhengHei"/>
-                <a:ea typeface="Microsoft JhengHei"/>
-                <a:cs typeface="Microsoft JhengHei"/>
-              </a:rPr>
-              <a:t>40 條共同上調 pathway：第 21–40 條</a:t>
-            </a:r>
-          </a:p>
-        </p:txBody>
-      </p:sp>
-      <p:sp>
-        <p:nvSpPr>
-          <p:cNvPr id="3" name="">
-            <a:extLst xmlns:a="http://schemas.openxmlformats.org/drawingml/2006/main">
-              <a:ext uri="{FF2B5EF4-FFF2-40B4-BE49-F238E27FC236}">
-                <a16:creationId xmlns:a16="http://schemas.microsoft.com/office/drawing/2014/main" id="{BB3E03C9-6ACA-4188-821B-B122D9784C71}"/>
-              </a:ext>
-            </a:extLst>
-          </p:cNvPr>
-          <p:cNvSpPr>
-            <a:spLocks xmlns:a="http://schemas.openxmlformats.org/drawingml/2006/main" noGrp="1"/>
-          </p:cNvSpPr>
-          <p:nvPr/>
-        </p:nvSpPr>
-        <p:spPr>
-          <a:xfrm xmlns:a="http://schemas.openxmlformats.org/drawingml/2006/main">
-            <a:off x="476250" y="6543675"/>
-            <a:ext cx="10287000" cy="171450"/>
-          </a:xfrm>
-          <a:prstGeom xmlns:a="http://schemas.openxmlformats.org/drawingml/2006/main" prst="rect">
-            <a:avLst/>
-          </a:prstGeom>
-          <a:noFill xmlns:a="http://schemas.openxmlformats.org/drawingml/2006/main"/>
-          <a:ln xmlns:a="http://schemas.openxmlformats.org/drawingml/2006/main" w="0">
-            <a:noFill/>
-          </a:ln>
-        </p:spPr>
-        <p:txBody>
-          <a:bodyPr xmlns:a="http://schemas.openxmlformats.org/drawingml/2006/main">
-            <a:normAutofit fontScale="63636"/>
-          </a:bodyPr>
-          <a:lstStyle xmlns:a="http://schemas.openxmlformats.org/drawingml/2006/main"/>
-          <a:p xmlns:a="http://schemas.openxmlformats.org/drawingml/2006/main">
-            <a:pPr>
-              <a:defRPr sz="825" b="0">
-                <a:solidFill>
-                  <a:srgbClr val="4D5B66"/>
-                </a:solidFill>
-                <a:latin typeface="Microsoft JhengHei"/>
-                <a:ea typeface="Microsoft JhengHei"/>
-                <a:cs typeface="Microsoft JhengHei"/>
-              </a:defRPr>
-            </a:pPr>
-            <a:r>
-              <a:rPr sz="825" b="0">
-                <a:solidFill>
-                  <a:srgbClr val="4D5B66"/>
-                </a:solidFill>
-                <a:latin typeface="Microsoft JhengHei"/>
-                <a:ea typeface="Microsoft JhengHei"/>
-                <a:cs typeface="Microsoft JhengHei"/>
-              </a:rPr>
-              <a:t>GSE262271 / GSE218858  |  Reviewed 15 September 2026</a:t>
-            </a:r>
-          </a:p>
-        </p:txBody>
-      </p:sp>
-      <p:sp>
-        <p:nvSpPr>
-          <p:cNvPr id="4" name="">
-            <a:extLst xmlns:a="http://schemas.openxmlformats.org/drawingml/2006/main">
-              <a:ext uri="{FF2B5EF4-FFF2-40B4-BE49-F238E27FC236}">
-                <a16:creationId xmlns:a16="http://schemas.microsoft.com/office/drawing/2014/main" id="{3B9FD18D-C0EE-453D-AAF3-41115C614FB4}"/>
-              </a:ext>
-            </a:extLst>
-          </p:cNvPr>
-          <p:cNvSpPr>
-            <a:spLocks xmlns:a="http://schemas.openxmlformats.org/drawingml/2006/main" noGrp="1"/>
-          </p:cNvSpPr>
-          <p:nvPr/>
-        </p:nvSpPr>
-        <p:spPr>
-          <a:xfrm xmlns:a="http://schemas.openxmlformats.org/drawingml/2006/main">
-            <a:off x="11334750" y="6543675"/>
-            <a:ext cx="381000" cy="171450"/>
-          </a:xfrm>
-          <a:prstGeom xmlns:a="http://schemas.openxmlformats.org/drawingml/2006/main" prst="rect">
-            <a:avLst/>
-          </a:prstGeom>
-          <a:noFill xmlns:a="http://schemas.openxmlformats.org/drawingml/2006/main"/>
-          <a:ln xmlns:a="http://schemas.openxmlformats.org/drawingml/2006/main" w="0">
-            <a:noFill/>
-          </a:ln>
-        </p:spPr>
-        <p:txBody>
-          <a:bodyPr xmlns:a="http://schemas.openxmlformats.org/drawingml/2006/main">
-            <a:normAutofit fontScale="63636"/>
-          </a:bodyPr>
-          <a:lstStyle xmlns:a="http://schemas.openxmlformats.org/drawingml/2006/main"/>
-          <a:p xmlns:a="http://schemas.openxmlformats.org/drawingml/2006/main">
-            <a:pPr>
-              <a:defRPr sz="825" b="0">
-                <a:solidFill>
-                  <a:srgbClr val="142F43"/>
-                </a:solidFill>
-                <a:latin typeface="Microsoft JhengHei"/>
-                <a:ea typeface="Microsoft JhengHei"/>
-                <a:cs typeface="Microsoft JhengHei"/>
-              </a:defRPr>
-            </a:pPr>
-            <a:r>
-              <a:rPr sz="825" b="0">
-                <a:solidFill>
-                  <a:srgbClr val="142F43"/>
-                </a:solidFill>
-                <a:latin typeface="Microsoft JhengHei"/>
-                <a:ea typeface="Microsoft JhengHei"/>
-                <a:cs typeface="Microsoft JhengHei"/>
-              </a:rPr>
-              <a:t>10</a:t>
-            </a:r>
-          </a:p>
-        </p:txBody>
-      </p:sp>
       <p:pic>
         <p:nvPicPr>
-          <p:cNvPr id="11" name=""/>
+          <p:cNvPr id="4" name=""/>
           <p:cNvPicPr>
             <a:picLocks xmlns:a="http://schemas.openxmlformats.org/drawingml/2006/main" noChangeAspect="1"/>
           </p:cNvPicPr>
           <p:nvPr/>
         </p:nvPicPr>
         <p:blipFill>
-          <a:blip xmlns:r="http://schemas.openxmlformats.org/officeDocument/2006/relationships" xmlns:a="http://schemas.openxmlformats.org/drawingml/2006/main" r:embed="R9f13a2488b134ddb"/>
+          <a:blip xmlns:r="http://schemas.openxmlformats.org/officeDocument/2006/relationships" xmlns:a="http://schemas.openxmlformats.org/drawingml/2006/main" r:embed="R9cd83e46993441c3"/>
           <a:stretch xmlns:a="http://schemas.openxmlformats.org/drawingml/2006/main"/>
         </p:blipFill>
         <p:spPr>
           <a:xfrm xmlns:a="http://schemas.openxmlformats.org/drawingml/2006/main">
-            <a:off x="996841" y="1028700"/>
-            <a:ext cx="10198319" cy="5143500"/>
+            <a:off x="902412" y="1057275"/>
+            <a:ext cx="10387177" cy="5238750"/>
           </a:xfrm>
           <a:prstGeom xmlns:a="http://schemas.openxmlformats.org/drawingml/2006/main" prst="rect">
             <a:avLst/>
           </a:prstGeom>
         </p:spPr>
       </p:pic>
-      <p:sp>
-        <p:nvSpPr>
-          <p:cNvPr id="6" name="">
-            <a:extLst xmlns:a="http://schemas.openxmlformats.org/drawingml/2006/main">
-              <a:ext uri="{FF2B5EF4-FFF2-40B4-BE49-F238E27FC236}">
-                <a16:creationId xmlns:a16="http://schemas.microsoft.com/office/drawing/2014/main" id="{A0C0D155-0303-48E9-BF4A-596ADE902A47}"/>
-              </a:ext>
-            </a:extLst>
-          </p:cNvPr>
-          <p:cNvSpPr>
-            <a:spLocks xmlns:a="http://schemas.openxmlformats.org/drawingml/2006/main" noGrp="1"/>
-          </p:cNvSpPr>
-          <p:nvPr/>
-        </p:nvSpPr>
-        <p:spPr>
-          <a:xfrm xmlns:a="http://schemas.openxmlformats.org/drawingml/2006/main">
-            <a:off x="619125" y="6191250"/>
-            <a:ext cx="10953750" cy="285750"/>
-          </a:xfrm>
-          <a:prstGeom xmlns:a="http://schemas.openxmlformats.org/drawingml/2006/main" prst="rect">
-            <a:avLst/>
-          </a:prstGeom>
-          <a:noFill xmlns:a="http://schemas.openxmlformats.org/drawingml/2006/main"/>
-          <a:ln xmlns:a="http://schemas.openxmlformats.org/drawingml/2006/main" w="0">
-            <a:noFill/>
-          </a:ln>
-        </p:spPr>
-        <p:txBody>
-          <a:bodyPr xmlns:a="http://schemas.openxmlformats.org/drawingml/2006/main">
-            <a:normAutofit fontScale="94444"/>
-          </a:bodyPr>
-          <a:lstStyle xmlns:a="http://schemas.openxmlformats.org/drawingml/2006/main"/>
-          <a:p xmlns:a="http://schemas.openxmlformats.org/drawingml/2006/main">
-            <a:pPr>
-              <a:defRPr sz="1350" b="0">
-                <a:solidFill>
-                  <a:srgbClr val="142F43"/>
-                </a:solidFill>
-                <a:latin typeface="Microsoft JhengHei"/>
-                <a:ea typeface="Microsoft JhengHei"/>
-                <a:cs typeface="Microsoft JhengHei"/>
-              </a:defRPr>
-            </a:pPr>
-            <a:r>
-              <a:rPr sz="1350" b="0">
-                <a:solidFill>
-                  <a:srgbClr val="142F43"/>
-                </a:solidFill>
-                <a:latin typeface="Microsoft JhengHei"/>
-                <a:ea typeface="Microsoft JhengHei"/>
-                <a:cs typeface="Microsoft JhengHei"/>
-              </a:rPr>
-              <a:t>Mitophagy 位於第 28 條。Single-cell FDR = 0.0132，bulk FDR = 0.0282。</a:t>
-            </a:r>
-          </a:p>
-        </p:txBody>
-      </p:sp>
     </p:spTree>
     <p:extLst>
       <p:ext uri="{BB962C8B-B14F-4D97-AF65-F5344CB8AC3E}">
-        <p14:creationId xmlns:p14="http://schemas.microsoft.com/office/powerpoint/2010/main" val="277403561"/>
+        <p14:creationId xmlns:p14="http://schemas.microsoft.com/office/powerpoint/2010/main" val="1383138168"/>
       </p:ext>
     </p:extLst>
   </p:cSld>
@@ -2896,10 +2474,10 @@
       </p:grpSpPr>
       <p:sp>
         <p:nvSpPr>
-          <p:cNvPr id="7" name="">
+          <p:cNvPr id="3" name="">
             <a:extLst xmlns:a="http://schemas.openxmlformats.org/drawingml/2006/main">
               <a:ext uri="{FF2B5EF4-FFF2-40B4-BE49-F238E27FC236}">
-                <a16:creationId xmlns:a16="http://schemas.microsoft.com/office/drawing/2014/main" id="{AA6B30FF-2729-4C69-9396-106324BDF235}"/>
+                <a16:creationId xmlns:a16="http://schemas.microsoft.com/office/drawing/2014/main" id="{34199D9E-6897-45D2-A9DC-C2850187B5AD}"/>
               </a:ext>
             </a:extLst>
           </p:cNvPr>
@@ -2910,8 +2488,8 @@
         </p:nvSpPr>
         <p:spPr>
           <a:xfrm xmlns:a="http://schemas.openxmlformats.org/drawingml/2006/main">
-            <a:off x="476250" y="190500"/>
-            <a:ext cx="10477500" cy="209550"/>
+            <a:off x="523875" y="333375"/>
+            <a:ext cx="11144250" cy="590550"/>
           </a:xfrm>
           <a:prstGeom xmlns:a="http://schemas.openxmlformats.org/drawingml/2006/main" prst="rect">
             <a:avLst/>
@@ -2923,14 +2501,14 @@
         </p:spPr>
         <p:txBody>
           <a:bodyPr xmlns:a="http://schemas.openxmlformats.org/drawingml/2006/main">
-            <a:normAutofit fontScale="79487"/>
+            <a:noAutofit/>
           </a:bodyPr>
           <a:lstStyle xmlns:a="http://schemas.openxmlformats.org/drawingml/2006/main"/>
           <a:p xmlns:a="http://schemas.openxmlformats.org/drawingml/2006/main">
             <a:pPr>
-              <a:defRPr sz="975" b="1">
-                <a:solidFill>
-                  <a:srgbClr val="D55E00"/>
+              <a:defRPr sz="2550" b="1">
+                <a:solidFill>
+                  <a:srgbClr val="202020"/>
                 </a:solidFill>
                 <a:latin typeface="Microsoft JhengHei"/>
                 <a:ea typeface="Microsoft JhengHei"/>
@@ -2938,273 +2516,45 @@
               </a:defRPr>
             </a:pPr>
             <a:r>
-              <a:rPr sz="975" b="1">
-                <a:solidFill>
-                  <a:srgbClr val="D55E00"/>
+              <a:rPr sz="2550" b="1">
+                <a:solidFill>
+                  <a:srgbClr val="202020"/>
                 </a:solidFill>
                 <a:latin typeface="Microsoft JhengHei"/>
                 <a:ea typeface="Microsoft JhengHei"/>
                 <a:cs typeface="Microsoft JhengHei"/>
               </a:rPr>
-              <a:t>TARGET PATHWAYS</a:t>
+              <a:t>Proteostasis 與 mitochondrial pathways</a:t>
             </a:r>
           </a:p>
         </p:txBody>
       </p:sp>
-      <p:sp>
-        <p:nvSpPr>
-          <p:cNvPr id="2" name="">
-            <a:extLst xmlns:a="http://schemas.openxmlformats.org/drawingml/2006/main">
-              <a:ext uri="{FF2B5EF4-FFF2-40B4-BE49-F238E27FC236}">
-                <a16:creationId xmlns:a16="http://schemas.microsoft.com/office/drawing/2014/main" id="{00C084F3-BB6C-4451-B0AC-27558795469E}"/>
-              </a:ext>
-            </a:extLst>
-          </p:cNvPr>
-          <p:cNvSpPr>
-            <a:spLocks xmlns:a="http://schemas.openxmlformats.org/drawingml/2006/main" noGrp="1"/>
-          </p:cNvSpPr>
-          <p:nvPr/>
-        </p:nvSpPr>
-        <p:spPr>
-          <a:xfrm xmlns:a="http://schemas.openxmlformats.org/drawingml/2006/main">
-            <a:off x="476250" y="523875"/>
-            <a:ext cx="11144250" cy="476250"/>
-          </a:xfrm>
-          <a:prstGeom xmlns:a="http://schemas.openxmlformats.org/drawingml/2006/main" prst="rect">
-            <a:avLst/>
-          </a:prstGeom>
-          <a:noFill xmlns:a="http://schemas.openxmlformats.org/drawingml/2006/main"/>
-          <a:ln xmlns:a="http://schemas.openxmlformats.org/drawingml/2006/main" w="0">
-            <a:noFill/>
-          </a:ln>
-        </p:spPr>
-        <p:txBody>
-          <a:bodyPr xmlns:a="http://schemas.openxmlformats.org/drawingml/2006/main">
-            <a:normAutofit fontScale="100000"/>
-          </a:bodyPr>
-          <a:lstStyle xmlns:a="http://schemas.openxmlformats.org/drawingml/2006/main"/>
-          <a:p xmlns:a="http://schemas.openxmlformats.org/drawingml/2006/main">
-            <a:pPr>
-              <a:defRPr sz="2400" b="1">
-                <a:solidFill>
-                  <a:srgbClr val="142F43"/>
-                </a:solidFill>
-                <a:latin typeface="Microsoft JhengHei"/>
-                <a:ea typeface="Microsoft JhengHei"/>
-                <a:cs typeface="Microsoft JhengHei"/>
-              </a:defRPr>
-            </a:pPr>
-            <a:r>
-              <a:rPr sz="2400" b="1">
-                <a:solidFill>
-                  <a:srgbClr val="142F43"/>
-                </a:solidFill>
-                <a:latin typeface="Microsoft JhengHei"/>
-                <a:ea typeface="Microsoft JhengHei"/>
-                <a:cs typeface="Microsoft JhengHei"/>
-              </a:rPr>
-              <a:t>Proteasome 與 mitophagy 的結果核對</a:t>
-            </a:r>
-          </a:p>
-        </p:txBody>
-      </p:sp>
-      <p:sp>
-        <p:nvSpPr>
-          <p:cNvPr id="3" name="">
-            <a:extLst xmlns:a="http://schemas.openxmlformats.org/drawingml/2006/main">
-              <a:ext uri="{FF2B5EF4-FFF2-40B4-BE49-F238E27FC236}">
-                <a16:creationId xmlns:a16="http://schemas.microsoft.com/office/drawing/2014/main" id="{3748A753-5A19-477E-AF18-BA98C03AA474}"/>
-              </a:ext>
-            </a:extLst>
-          </p:cNvPr>
-          <p:cNvSpPr>
-            <a:spLocks xmlns:a="http://schemas.openxmlformats.org/drawingml/2006/main" noGrp="1"/>
-          </p:cNvSpPr>
-          <p:nvPr/>
-        </p:nvSpPr>
-        <p:spPr>
-          <a:xfrm xmlns:a="http://schemas.openxmlformats.org/drawingml/2006/main">
-            <a:off x="476250" y="6543675"/>
-            <a:ext cx="10287000" cy="171450"/>
-          </a:xfrm>
-          <a:prstGeom xmlns:a="http://schemas.openxmlformats.org/drawingml/2006/main" prst="rect">
-            <a:avLst/>
-          </a:prstGeom>
-          <a:noFill xmlns:a="http://schemas.openxmlformats.org/drawingml/2006/main"/>
-          <a:ln xmlns:a="http://schemas.openxmlformats.org/drawingml/2006/main" w="0">
-            <a:noFill/>
-          </a:ln>
-        </p:spPr>
-        <p:txBody>
-          <a:bodyPr xmlns:a="http://schemas.openxmlformats.org/drawingml/2006/main">
-            <a:normAutofit fontScale="63636"/>
-          </a:bodyPr>
-          <a:lstStyle xmlns:a="http://schemas.openxmlformats.org/drawingml/2006/main"/>
-          <a:p xmlns:a="http://schemas.openxmlformats.org/drawingml/2006/main">
-            <a:pPr>
-              <a:defRPr sz="825" b="0">
-                <a:solidFill>
-                  <a:srgbClr val="4D5B66"/>
-                </a:solidFill>
-                <a:latin typeface="Microsoft JhengHei"/>
-                <a:ea typeface="Microsoft JhengHei"/>
-                <a:cs typeface="Microsoft JhengHei"/>
-              </a:defRPr>
-            </a:pPr>
-            <a:r>
-              <a:rPr sz="825" b="0">
-                <a:solidFill>
-                  <a:srgbClr val="4D5B66"/>
-                </a:solidFill>
-                <a:latin typeface="Microsoft JhengHei"/>
-                <a:ea typeface="Microsoft JhengHei"/>
-                <a:cs typeface="Microsoft JhengHei"/>
-              </a:rPr>
-              <a:t>GSE262271 / GSE218858  |  Reviewed 15 September 2026</a:t>
-            </a:r>
-          </a:p>
-        </p:txBody>
-      </p:sp>
-      <p:sp>
-        <p:nvSpPr>
-          <p:cNvPr id="4" name="">
-            <a:extLst xmlns:a="http://schemas.openxmlformats.org/drawingml/2006/main">
-              <a:ext uri="{FF2B5EF4-FFF2-40B4-BE49-F238E27FC236}">
-                <a16:creationId xmlns:a16="http://schemas.microsoft.com/office/drawing/2014/main" id="{66933B1F-3AB0-432D-9DA8-DB0618AB7A01}"/>
-              </a:ext>
-            </a:extLst>
-          </p:cNvPr>
-          <p:cNvSpPr>
-            <a:spLocks xmlns:a="http://schemas.openxmlformats.org/drawingml/2006/main" noGrp="1"/>
-          </p:cNvSpPr>
-          <p:nvPr/>
-        </p:nvSpPr>
-        <p:spPr>
-          <a:xfrm xmlns:a="http://schemas.openxmlformats.org/drawingml/2006/main">
-            <a:off x="11334750" y="6543675"/>
-            <a:ext cx="381000" cy="171450"/>
-          </a:xfrm>
-          <a:prstGeom xmlns:a="http://schemas.openxmlformats.org/drawingml/2006/main" prst="rect">
-            <a:avLst/>
-          </a:prstGeom>
-          <a:noFill xmlns:a="http://schemas.openxmlformats.org/drawingml/2006/main"/>
-          <a:ln xmlns:a="http://schemas.openxmlformats.org/drawingml/2006/main" w="0">
-            <a:noFill/>
-          </a:ln>
-        </p:spPr>
-        <p:txBody>
-          <a:bodyPr xmlns:a="http://schemas.openxmlformats.org/drawingml/2006/main">
-            <a:normAutofit fontScale="63636"/>
-          </a:bodyPr>
-          <a:lstStyle xmlns:a="http://schemas.openxmlformats.org/drawingml/2006/main"/>
-          <a:p xmlns:a="http://schemas.openxmlformats.org/drawingml/2006/main">
-            <a:pPr>
-              <a:defRPr sz="825" b="0">
-                <a:solidFill>
-                  <a:srgbClr val="142F43"/>
-                </a:solidFill>
-                <a:latin typeface="Microsoft JhengHei"/>
-                <a:ea typeface="Microsoft JhengHei"/>
-                <a:cs typeface="Microsoft JhengHei"/>
-              </a:defRPr>
-            </a:pPr>
-            <a:r>
-              <a:rPr sz="825" b="0">
-                <a:solidFill>
-                  <a:srgbClr val="142F43"/>
-                </a:solidFill>
-                <a:latin typeface="Microsoft JhengHei"/>
-                <a:ea typeface="Microsoft JhengHei"/>
-                <a:cs typeface="Microsoft JhengHei"/>
-              </a:rPr>
-              <a:t>11</a:t>
-            </a:r>
-          </a:p>
-        </p:txBody>
-      </p:sp>
       <p:pic>
         <p:nvPicPr>
-          <p:cNvPr id="11" name=""/>
+          <p:cNvPr id="4" name=""/>
           <p:cNvPicPr>
             <a:picLocks xmlns:a="http://schemas.openxmlformats.org/drawingml/2006/main" noChangeAspect="1"/>
           </p:cNvPicPr>
           <p:nvPr/>
         </p:nvPicPr>
         <p:blipFill>
-          <a:blip xmlns:r="http://schemas.openxmlformats.org/officeDocument/2006/relationships" xmlns:a="http://schemas.openxmlformats.org/drawingml/2006/main" r:embed="R10940254e7024511"/>
+          <a:blip xmlns:r="http://schemas.openxmlformats.org/officeDocument/2006/relationships" xmlns:a="http://schemas.openxmlformats.org/drawingml/2006/main" r:embed="Ra5d96ac2d3354c0e"/>
           <a:stretch xmlns:a="http://schemas.openxmlformats.org/drawingml/2006/main"/>
         </p:blipFill>
         <p:spPr>
           <a:xfrm xmlns:a="http://schemas.openxmlformats.org/drawingml/2006/main">
-            <a:off x="2122289" y="1362075"/>
-            <a:ext cx="7947422" cy="4238625"/>
+            <a:off x="1266392" y="1409700"/>
+            <a:ext cx="9659216" cy="4619625"/>
           </a:xfrm>
           <a:prstGeom xmlns:a="http://schemas.openxmlformats.org/drawingml/2006/main" prst="rect">
             <a:avLst/>
           </a:prstGeom>
         </p:spPr>
       </p:pic>
-      <p:sp>
-        <p:nvSpPr>
-          <p:cNvPr id="6" name="">
-            <a:extLst xmlns:a="http://schemas.openxmlformats.org/drawingml/2006/main">
-              <a:ext uri="{FF2B5EF4-FFF2-40B4-BE49-F238E27FC236}">
-                <a16:creationId xmlns:a16="http://schemas.microsoft.com/office/drawing/2014/main" id="{FC862D8A-B234-4F2C-B33B-8DD322E154BD}"/>
-              </a:ext>
-            </a:extLst>
-          </p:cNvPr>
-          <p:cNvSpPr>
-            <a:spLocks xmlns:a="http://schemas.openxmlformats.org/drawingml/2006/main" noGrp="1"/>
-          </p:cNvSpPr>
-          <p:nvPr/>
-        </p:nvSpPr>
-        <p:spPr>
-          <a:xfrm xmlns:a="http://schemas.openxmlformats.org/drawingml/2006/main">
-            <a:off x="619125" y="5791200"/>
-            <a:ext cx="10953750" cy="561975"/>
-          </a:xfrm>
-          <a:prstGeom xmlns:a="http://schemas.openxmlformats.org/drawingml/2006/main" prst="rect">
-            <a:avLst/>
-          </a:prstGeom>
-          <a:noFill xmlns:a="http://schemas.openxmlformats.org/drawingml/2006/main"/>
-          <a:ln xmlns:a="http://schemas.openxmlformats.org/drawingml/2006/main" w="0">
-            <a:noFill/>
-          </a:ln>
-        </p:spPr>
-        <p:txBody>
-          <a:bodyPr xmlns:a="http://schemas.openxmlformats.org/drawingml/2006/main">
-            <a:normAutofit fontScale="100000"/>
-          </a:bodyPr>
-          <a:lstStyle xmlns:a="http://schemas.openxmlformats.org/drawingml/2006/main"/>
-          <a:p xmlns:a="http://schemas.openxmlformats.org/drawingml/2006/main">
-            <a:pPr>
-              <a:defRPr sz="1650" b="1">
-                <a:solidFill>
-                  <a:srgbClr val="D55E00"/>
-                </a:solidFill>
-                <a:latin typeface="Microsoft JhengHei"/>
-                <a:ea typeface="Microsoft JhengHei"/>
-                <a:cs typeface="Microsoft JhengHei"/>
-              </a:defRPr>
-            </a:pPr>
-            <a:r>
-              <a:rPr sz="1650" b="1">
-                <a:solidFill>
-                  <a:srgbClr val="D55E00"/>
-                </a:solidFill>
-                <a:latin typeface="Microsoft JhengHei"/>
-                <a:ea typeface="Microsoft JhengHei"/>
-                <a:cs typeface="Microsoft JhengHei"/>
-              </a:rPr>
-              <a:t>Proteasome、mitophagy 均上調，兩組資料的完整 KEGG FDR 都小於 0.05。</a:t>
-            </a:r>
-          </a:p>
-        </p:txBody>
-      </p:sp>
     </p:spTree>
     <p:extLst>
       <p:ext uri="{BB962C8B-B14F-4D97-AF65-F5344CB8AC3E}">
-        <p14:creationId xmlns:p14="http://schemas.microsoft.com/office/powerpoint/2010/main" val="2015732300"/>
+        <p14:creationId xmlns:p14="http://schemas.microsoft.com/office/powerpoint/2010/main" val="2065936626"/>
       </p:ext>
     </p:extLst>
   </p:cSld>
@@ -3232,10 +2582,10 @@
       </p:grpSpPr>
       <p:sp>
         <p:nvSpPr>
-          <p:cNvPr id="8" name="">
+          <p:cNvPr id="4" name="">
             <a:extLst xmlns:a="http://schemas.openxmlformats.org/drawingml/2006/main">
               <a:ext uri="{FF2B5EF4-FFF2-40B4-BE49-F238E27FC236}">
-                <a16:creationId xmlns:a16="http://schemas.microsoft.com/office/drawing/2014/main" id="{46D405C7-58F0-4828-A481-378B6FB6375E}"/>
+                <a16:creationId xmlns:a16="http://schemas.microsoft.com/office/drawing/2014/main" id="{5BD0057C-F54B-46F8-BF34-619885808879}"/>
               </a:ext>
             </a:extLst>
           </p:cNvPr>
@@ -3246,8 +2596,8 @@
         </p:nvSpPr>
         <p:spPr>
           <a:xfrm xmlns:a="http://schemas.openxmlformats.org/drawingml/2006/main">
-            <a:off x="476250" y="190500"/>
-            <a:ext cx="10477500" cy="209550"/>
+            <a:off x="523875" y="333375"/>
+            <a:ext cx="11144250" cy="590550"/>
           </a:xfrm>
           <a:prstGeom xmlns:a="http://schemas.openxmlformats.org/drawingml/2006/main" prst="rect">
             <a:avLst/>
@@ -3259,14 +2609,14 @@
         </p:spPr>
         <p:txBody>
           <a:bodyPr xmlns:a="http://schemas.openxmlformats.org/drawingml/2006/main">
-            <a:normAutofit fontScale="79487"/>
+            <a:noAutofit/>
           </a:bodyPr>
           <a:lstStyle xmlns:a="http://schemas.openxmlformats.org/drawingml/2006/main"/>
           <a:p xmlns:a="http://schemas.openxmlformats.org/drawingml/2006/main">
             <a:pPr>
-              <a:defRPr sz="975" b="1">
-                <a:solidFill>
-                  <a:srgbClr val="D55E00"/>
+              <a:defRPr sz="2550" b="1">
+                <a:solidFill>
+                  <a:srgbClr val="202020"/>
                 </a:solidFill>
                 <a:latin typeface="Microsoft JhengHei"/>
                 <a:ea typeface="Microsoft JhengHei"/>
@@ -3274,15 +2624,15 @@
               </a:defRPr>
             </a:pPr>
             <a:r>
-              <a:rPr sz="975" b="1">
-                <a:solidFill>
-                  <a:srgbClr val="D55E00"/>
+              <a:rPr sz="2550" b="1">
+                <a:solidFill>
+                  <a:srgbClr val="202020"/>
                 </a:solidFill>
                 <a:latin typeface="Microsoft JhengHei"/>
                 <a:ea typeface="Microsoft JhengHei"/>
                 <a:cs typeface="Microsoft JhengHei"/>
               </a:rPr>
-              <a:t>PAIRED DIRECTION</a:t>
+              <a:t>三位病人的配對變化</a:t>
             </a:r>
           </a:p>
         </p:txBody>
@@ -3292,7 +2642,7 @@
           <p:cNvPr id="2" name="">
             <a:extLst xmlns:a="http://schemas.openxmlformats.org/drawingml/2006/main">
               <a:ext uri="{FF2B5EF4-FFF2-40B4-BE49-F238E27FC236}">
-                <a16:creationId xmlns:a16="http://schemas.microsoft.com/office/drawing/2014/main" id="{21B07C0C-0727-4A41-A218-E8BA804A4E9D}"/>
+                <a16:creationId xmlns:a16="http://schemas.microsoft.com/office/drawing/2014/main" id="{EEEF9E7C-0C8B-4940-B4F2-F71A50714551}"/>
               </a:ext>
             </a:extLst>
           </p:cNvPr>
@@ -3303,8 +2653,8 @@
         </p:nvSpPr>
         <p:spPr>
           <a:xfrm xmlns:a="http://schemas.openxmlformats.org/drawingml/2006/main">
-            <a:off x="476250" y="523875"/>
-            <a:ext cx="11144250" cy="476250"/>
+            <a:off x="619125" y="1009650"/>
+            <a:ext cx="10763250" cy="428625"/>
           </a:xfrm>
           <a:prstGeom xmlns:a="http://schemas.openxmlformats.org/drawingml/2006/main" prst="rect">
             <a:avLst/>
@@ -3316,14 +2666,14 @@
         </p:spPr>
         <p:txBody>
           <a:bodyPr xmlns:a="http://schemas.openxmlformats.org/drawingml/2006/main">
-            <a:normAutofit fontScale="100000"/>
+            <a:noAutofit/>
           </a:bodyPr>
           <a:lstStyle xmlns:a="http://schemas.openxmlformats.org/drawingml/2006/main"/>
           <a:p xmlns:a="http://schemas.openxmlformats.org/drawingml/2006/main">
             <a:pPr>
-              <a:defRPr sz="2400" b="1">
-                <a:solidFill>
-                  <a:srgbClr val="142F43"/>
+              <a:defRPr sz="1875" b="0">
+                <a:solidFill>
+                  <a:srgbClr val="202020"/>
                 </a:solidFill>
                 <a:latin typeface="Microsoft JhengHei"/>
                 <a:ea typeface="Microsoft JhengHei"/>
@@ -3331,301 +2681,45 @@
               </a:defRPr>
             </a:pPr>
             <a:r>
-              <a:rPr sz="2400" b="1">
-                <a:solidFill>
-                  <a:srgbClr val="142F43"/>
+              <a:rPr sz="1875" b="0">
+                <a:solidFill>
+                  <a:srgbClr val="202020"/>
                 </a:solidFill>
                 <a:latin typeface="Microsoft JhengHei"/>
                 <a:ea typeface="Microsoft JhengHei"/>
                 <a:cs typeface="Microsoft JhengHei"/>
               </a:rPr>
-              <a:t>三位病人的變化方向</a:t>
+              <a:t>GSEA leading-edge genes 的平均表達</a:t>
             </a:r>
           </a:p>
         </p:txBody>
       </p:sp>
-      <p:sp>
-        <p:nvSpPr>
-          <p:cNvPr id="3" name="">
-            <a:extLst xmlns:a="http://schemas.openxmlformats.org/drawingml/2006/main">
-              <a:ext uri="{FF2B5EF4-FFF2-40B4-BE49-F238E27FC236}">
-                <a16:creationId xmlns:a16="http://schemas.microsoft.com/office/drawing/2014/main" id="{3EF74DD2-9ECB-4CBD-8697-2045CE1B1361}"/>
-              </a:ext>
-            </a:extLst>
-          </p:cNvPr>
-          <p:cNvSpPr>
-            <a:spLocks xmlns:a="http://schemas.openxmlformats.org/drawingml/2006/main" noGrp="1"/>
-          </p:cNvSpPr>
-          <p:nvPr/>
-        </p:nvSpPr>
-        <p:spPr>
-          <a:xfrm xmlns:a="http://schemas.openxmlformats.org/drawingml/2006/main">
-            <a:off x="476250" y="6543675"/>
-            <a:ext cx="10287000" cy="171450"/>
-          </a:xfrm>
-          <a:prstGeom xmlns:a="http://schemas.openxmlformats.org/drawingml/2006/main" prst="rect">
-            <a:avLst/>
-          </a:prstGeom>
-          <a:noFill xmlns:a="http://schemas.openxmlformats.org/drawingml/2006/main"/>
-          <a:ln xmlns:a="http://schemas.openxmlformats.org/drawingml/2006/main" w="0">
-            <a:noFill/>
-          </a:ln>
-        </p:spPr>
-        <p:txBody>
-          <a:bodyPr xmlns:a="http://schemas.openxmlformats.org/drawingml/2006/main">
-            <a:normAutofit fontScale="63636"/>
-          </a:bodyPr>
-          <a:lstStyle xmlns:a="http://schemas.openxmlformats.org/drawingml/2006/main"/>
-          <a:p xmlns:a="http://schemas.openxmlformats.org/drawingml/2006/main">
-            <a:pPr>
-              <a:defRPr sz="825" b="0">
-                <a:solidFill>
-                  <a:srgbClr val="4D5B66"/>
-                </a:solidFill>
-                <a:latin typeface="Microsoft JhengHei"/>
-                <a:ea typeface="Microsoft JhengHei"/>
-                <a:cs typeface="Microsoft JhengHei"/>
-              </a:defRPr>
-            </a:pPr>
-            <a:r>
-              <a:rPr sz="825" b="0">
-                <a:solidFill>
-                  <a:srgbClr val="4D5B66"/>
-                </a:solidFill>
-                <a:latin typeface="Microsoft JhengHei"/>
-                <a:ea typeface="Microsoft JhengHei"/>
-                <a:cs typeface="Microsoft JhengHei"/>
-              </a:rPr>
-              <a:t>GSE262271 / GSE218858  |  Reviewed 15 September 2026</a:t>
-            </a:r>
-          </a:p>
-        </p:txBody>
-      </p:sp>
-      <p:sp>
-        <p:nvSpPr>
-          <p:cNvPr id="4" name="">
-            <a:extLst xmlns:a="http://schemas.openxmlformats.org/drawingml/2006/main">
-              <a:ext uri="{FF2B5EF4-FFF2-40B4-BE49-F238E27FC236}">
-                <a16:creationId xmlns:a16="http://schemas.microsoft.com/office/drawing/2014/main" id="{42CF20D4-6111-4C8A-A3E9-F5BC2BC3C413}"/>
-              </a:ext>
-            </a:extLst>
-          </p:cNvPr>
-          <p:cNvSpPr>
-            <a:spLocks xmlns:a="http://schemas.openxmlformats.org/drawingml/2006/main" noGrp="1"/>
-          </p:cNvSpPr>
-          <p:nvPr/>
-        </p:nvSpPr>
-        <p:spPr>
-          <a:xfrm xmlns:a="http://schemas.openxmlformats.org/drawingml/2006/main">
-            <a:off x="11334750" y="6543675"/>
-            <a:ext cx="381000" cy="171450"/>
-          </a:xfrm>
-          <a:prstGeom xmlns:a="http://schemas.openxmlformats.org/drawingml/2006/main" prst="rect">
-            <a:avLst/>
-          </a:prstGeom>
-          <a:noFill xmlns:a="http://schemas.openxmlformats.org/drawingml/2006/main"/>
-          <a:ln xmlns:a="http://schemas.openxmlformats.org/drawingml/2006/main" w="0">
-            <a:noFill/>
-          </a:ln>
-        </p:spPr>
-        <p:txBody>
-          <a:bodyPr xmlns:a="http://schemas.openxmlformats.org/drawingml/2006/main">
-            <a:normAutofit fontScale="63636"/>
-          </a:bodyPr>
-          <a:lstStyle xmlns:a="http://schemas.openxmlformats.org/drawingml/2006/main"/>
-          <a:p xmlns:a="http://schemas.openxmlformats.org/drawingml/2006/main">
-            <a:pPr>
-              <a:defRPr sz="825" b="0">
-                <a:solidFill>
-                  <a:srgbClr val="142F43"/>
-                </a:solidFill>
-                <a:latin typeface="Microsoft JhengHei"/>
-                <a:ea typeface="Microsoft JhengHei"/>
-                <a:cs typeface="Microsoft JhengHei"/>
-              </a:defRPr>
-            </a:pPr>
-            <a:r>
-              <a:rPr sz="825" b="0">
-                <a:solidFill>
-                  <a:srgbClr val="142F43"/>
-                </a:solidFill>
-                <a:latin typeface="Microsoft JhengHei"/>
-                <a:ea typeface="Microsoft JhengHei"/>
-                <a:cs typeface="Microsoft JhengHei"/>
-              </a:rPr>
-              <a:t>12</a:t>
-            </a:r>
-          </a:p>
-        </p:txBody>
-      </p:sp>
       <p:pic>
         <p:nvPicPr>
-          <p:cNvPr id="12" name=""/>
+          <p:cNvPr id="6" name=""/>
           <p:cNvPicPr>
             <a:picLocks xmlns:a="http://schemas.openxmlformats.org/drawingml/2006/main" noChangeAspect="1"/>
           </p:cNvPicPr>
           <p:nvPr/>
         </p:nvPicPr>
         <p:blipFill>
-          <a:blip xmlns:r="http://schemas.openxmlformats.org/officeDocument/2006/relationships" xmlns:a="http://schemas.openxmlformats.org/drawingml/2006/main" r:embed="R78ac20b349324cdc"/>
+          <a:blip xmlns:r="http://schemas.openxmlformats.org/officeDocument/2006/relationships" xmlns:a="http://schemas.openxmlformats.org/drawingml/2006/main" r:embed="R0d71b062d35c4cee"/>
           <a:stretch xmlns:a="http://schemas.openxmlformats.org/drawingml/2006/main"/>
         </p:blipFill>
         <p:spPr>
           <a:xfrm xmlns:a="http://schemas.openxmlformats.org/drawingml/2006/main">
-            <a:off x="445943" y="1190625"/>
-            <a:ext cx="8442614" cy="4953000"/>
+            <a:off x="2399489" y="1657350"/>
+            <a:ext cx="7393021" cy="4572000"/>
           </a:xfrm>
           <a:prstGeom xmlns:a="http://schemas.openxmlformats.org/drawingml/2006/main" prst="rect">
             <a:avLst/>
           </a:prstGeom>
         </p:spPr>
       </p:pic>
-      <p:sp>
-        <p:nvSpPr>
-          <p:cNvPr id="6" name="">
-            <a:extLst xmlns:a="http://schemas.openxmlformats.org/drawingml/2006/main">
-              <a:ext uri="{FF2B5EF4-FFF2-40B4-BE49-F238E27FC236}">
-                <a16:creationId xmlns:a16="http://schemas.microsoft.com/office/drawing/2014/main" id="{3E713D2D-A748-4BE5-904D-7AB1EBBF2FE0}"/>
-              </a:ext>
-            </a:extLst>
-          </p:cNvPr>
-          <p:cNvSpPr>
-            <a:spLocks xmlns:a="http://schemas.openxmlformats.org/drawingml/2006/main" noGrp="1"/>
-          </p:cNvSpPr>
-          <p:nvPr/>
-        </p:nvSpPr>
-        <p:spPr>
-          <a:xfrm xmlns:a="http://schemas.openxmlformats.org/drawingml/2006/main">
-            <a:off x="9239250" y="1905000"/>
-            <a:ext cx="2476500" cy="619125"/>
-          </a:xfrm>
-          <a:prstGeom xmlns:a="http://schemas.openxmlformats.org/drawingml/2006/main" prst="rect">
-            <a:avLst/>
-          </a:prstGeom>
-          <a:noFill xmlns:a="http://schemas.openxmlformats.org/drawingml/2006/main"/>
-          <a:ln xmlns:a="http://schemas.openxmlformats.org/drawingml/2006/main" w="0">
-            <a:noFill/>
-          </a:ln>
-        </p:spPr>
-        <p:txBody>
-          <a:bodyPr xmlns:a="http://schemas.openxmlformats.org/drawingml/2006/main">
-            <a:normAutofit fontScale="100000"/>
-          </a:bodyPr>
-          <a:lstStyle xmlns:a="http://schemas.openxmlformats.org/drawingml/2006/main"/>
-          <a:p xmlns:a="http://schemas.openxmlformats.org/drawingml/2006/main">
-            <a:pPr>
-              <a:defRPr sz="1875" b="1">
-                <a:solidFill>
-                  <a:srgbClr val="142F43"/>
-                </a:solidFill>
-                <a:latin typeface="Microsoft JhengHei"/>
-                <a:ea typeface="Microsoft JhengHei"/>
-                <a:cs typeface="Microsoft JhengHei"/>
-              </a:defRPr>
-            </a:pPr>
-            <a:r>
-              <a:rPr sz="1875" b="1">
-                <a:solidFill>
-                  <a:srgbClr val="142F43"/>
-                </a:solidFill>
-                <a:latin typeface="Microsoft JhengHei"/>
-                <a:ea typeface="Microsoft JhengHei"/>
-                <a:cs typeface="Microsoft JhengHei"/>
-              </a:rPr>
-              <a:t>每條線是一位病人</a:t>
-            </a:r>
-          </a:p>
-        </p:txBody>
-      </p:sp>
-      <p:sp>
-        <p:nvSpPr>
-          <p:cNvPr id="7" name="">
-            <a:extLst xmlns:a="http://schemas.openxmlformats.org/drawingml/2006/main">
-              <a:ext uri="{FF2B5EF4-FFF2-40B4-BE49-F238E27FC236}">
-                <a16:creationId xmlns:a16="http://schemas.microsoft.com/office/drawing/2014/main" id="{CDE05C9B-D62B-464F-B762-AA63394F8EBA}"/>
-              </a:ext>
-            </a:extLst>
-          </p:cNvPr>
-          <p:cNvSpPr>
-            <a:spLocks xmlns:a="http://schemas.openxmlformats.org/drawingml/2006/main" noGrp="1"/>
-          </p:cNvSpPr>
-          <p:nvPr/>
-        </p:nvSpPr>
-        <p:spPr>
-          <a:xfrm xmlns:a="http://schemas.openxmlformats.org/drawingml/2006/main">
-            <a:off x="9239250" y="2857500"/>
-            <a:ext cx="2476500" cy="2190750"/>
-          </a:xfrm>
-          <a:prstGeom xmlns:a="http://schemas.openxmlformats.org/drawingml/2006/main" prst="rect">
-            <a:avLst/>
-          </a:prstGeom>
-          <a:noFill xmlns:a="http://schemas.openxmlformats.org/drawingml/2006/main"/>
-          <a:ln xmlns:a="http://schemas.openxmlformats.org/drawingml/2006/main" w="0">
-            <a:noFill/>
-          </a:ln>
-        </p:spPr>
-        <p:txBody>
-          <a:bodyPr xmlns:a="http://schemas.openxmlformats.org/drawingml/2006/main">
-            <a:normAutofit fontScale="100000"/>
-          </a:bodyPr>
-          <a:lstStyle xmlns:a="http://schemas.openxmlformats.org/drawingml/2006/main"/>
-          <a:p xmlns:a="http://schemas.openxmlformats.org/drawingml/2006/main">
-            <a:pPr>
-              <a:defRPr sz="1650" b="0">
-                <a:solidFill>
-                  <a:srgbClr val="142F43"/>
-                </a:solidFill>
-                <a:latin typeface="Microsoft JhengHei"/>
-                <a:ea typeface="Microsoft JhengHei"/>
-                <a:cs typeface="Microsoft JhengHei"/>
-              </a:defRPr>
-            </a:pPr>
-            <a:r>
-              <a:rPr sz="1650" b="0">
-                <a:solidFill>
-                  <a:srgbClr val="142F43"/>
-                </a:solidFill>
-                <a:latin typeface="Microsoft JhengHei"/>
-                <a:ea typeface="Microsoft JhengHei"/>
-                <a:cs typeface="Microsoft JhengHei"/>
-              </a:rPr>
-              <a:t>Leading-edge genes 由同一份 GSEA 選出。</a:t>
-            </a:r>
-          </a:p>
-          <a:p xmlns:a="http://schemas.openxmlformats.org/drawingml/2006/main">
-            <a:r>
-              <a:t/>
-            </a:r>
-          </a:p>
-          <a:p xmlns:a="http://schemas.openxmlformats.org/drawingml/2006/main">
-            <a:pPr>
-              <a:defRPr sz="1650" b="0">
-                <a:solidFill>
-                  <a:srgbClr val="142F43"/>
-                </a:solidFill>
-                <a:latin typeface="Microsoft JhengHei"/>
-                <a:ea typeface="Microsoft JhengHei"/>
-                <a:cs typeface="Microsoft JhengHei"/>
-              </a:defRPr>
-            </a:pPr>
-            <a:r>
-              <a:rPr sz="1650" b="0">
-                <a:solidFill>
-                  <a:srgbClr val="142F43"/>
-                </a:solidFill>
-                <a:latin typeface="Microsoft JhengHei"/>
-                <a:ea typeface="Microsoft JhengHei"/>
-                <a:cs typeface="Microsoft JhengHei"/>
-              </a:rPr>
-              <a:t>這裡只描述三位病人的方向，不作額外的獨立驗證。</a:t>
-            </a:r>
-          </a:p>
-        </p:txBody>
-      </p:sp>
     </p:spTree>
     <p:extLst>
       <p:ext uri="{BB962C8B-B14F-4D97-AF65-F5344CB8AC3E}">
-        <p14:creationId xmlns:p14="http://schemas.microsoft.com/office/powerpoint/2010/main" val="2118805548"/>
+        <p14:creationId xmlns:p14="http://schemas.microsoft.com/office/powerpoint/2010/main" val="1600612843"/>
       </p:ext>
     </p:extLst>
   </p:cSld>
@@ -3653,10 +2747,10 @@
       </p:grpSpPr>
       <p:sp>
         <p:nvSpPr>
-          <p:cNvPr id="9" name="">
+          <p:cNvPr id="5" name="">
             <a:extLst xmlns:a="http://schemas.openxmlformats.org/drawingml/2006/main">
               <a:ext uri="{FF2B5EF4-FFF2-40B4-BE49-F238E27FC236}">
-                <a16:creationId xmlns:a16="http://schemas.microsoft.com/office/drawing/2014/main" id="{75251D19-D969-4558-BDD7-79BE996D0F0F}"/>
+                <a16:creationId xmlns:a16="http://schemas.microsoft.com/office/drawing/2014/main" id="{D1374B46-FD46-4DE3-8564-598279174216}"/>
               </a:ext>
             </a:extLst>
           </p:cNvPr>
@@ -3667,8 +2761,8 @@
         </p:nvSpPr>
         <p:spPr>
           <a:xfrm xmlns:a="http://schemas.openxmlformats.org/drawingml/2006/main">
-            <a:off x="476250" y="190500"/>
-            <a:ext cx="10477500" cy="209550"/>
+            <a:off x="523875" y="333375"/>
+            <a:ext cx="11144250" cy="590550"/>
           </a:xfrm>
           <a:prstGeom xmlns:a="http://schemas.openxmlformats.org/drawingml/2006/main" prst="rect">
             <a:avLst/>
@@ -3680,14 +2774,14 @@
         </p:spPr>
         <p:txBody>
           <a:bodyPr xmlns:a="http://schemas.openxmlformats.org/drawingml/2006/main">
-            <a:normAutofit fontScale="79487"/>
+            <a:noAutofit/>
           </a:bodyPr>
           <a:lstStyle xmlns:a="http://schemas.openxmlformats.org/drawingml/2006/main"/>
           <a:p xmlns:a="http://schemas.openxmlformats.org/drawingml/2006/main">
             <a:pPr>
-              <a:defRPr sz="975" b="1">
-                <a:solidFill>
-                  <a:srgbClr val="D55E00"/>
+              <a:defRPr sz="2550" b="1">
+                <a:solidFill>
+                  <a:srgbClr val="202020"/>
                 </a:solidFill>
                 <a:latin typeface="Microsoft JhengHei"/>
                 <a:ea typeface="Microsoft JhengHei"/>
@@ -3695,288 +2789,60 @@
               </a:defRPr>
             </a:pPr>
             <a:r>
-              <a:rPr sz="975" b="1">
-                <a:solidFill>
-                  <a:srgbClr val="D55E00"/>
+              <a:rPr sz="2550" b="1">
+                <a:solidFill>
+                  <a:srgbClr val="202020"/>
                 </a:solidFill>
                 <a:latin typeface="Microsoft JhengHei"/>
                 <a:ea typeface="Microsoft JhengHei"/>
                 <a:cs typeface="Microsoft JhengHei"/>
               </a:rPr>
-              <a:t>CUTOFF INTERPRETATION</a:t>
+              <a:t>CNV cell selection</a:t>
             </a:r>
           </a:p>
         </p:txBody>
       </p:sp>
-      <p:sp>
-        <p:nvSpPr>
-          <p:cNvPr id="2" name="">
-            <a:extLst xmlns:a="http://schemas.openxmlformats.org/drawingml/2006/main">
-              <a:ext uri="{FF2B5EF4-FFF2-40B4-BE49-F238E27FC236}">
-                <a16:creationId xmlns:a16="http://schemas.microsoft.com/office/drawing/2014/main" id="{A8AD4FB9-A640-4E10-A444-A0C055EC7AD8}"/>
-              </a:ext>
-            </a:extLst>
-          </p:cNvPr>
-          <p:cNvSpPr>
-            <a:spLocks xmlns:a="http://schemas.openxmlformats.org/drawingml/2006/main" noGrp="1"/>
-          </p:cNvSpPr>
-          <p:nvPr/>
-        </p:nvSpPr>
-        <p:spPr>
-          <a:xfrm xmlns:a="http://schemas.openxmlformats.org/drawingml/2006/main">
-            <a:off x="476250" y="523875"/>
-            <a:ext cx="11144250" cy="476250"/>
-          </a:xfrm>
-          <a:prstGeom xmlns:a="http://schemas.openxmlformats.org/drawingml/2006/main" prst="rect">
-            <a:avLst/>
-          </a:prstGeom>
-          <a:noFill xmlns:a="http://schemas.openxmlformats.org/drawingml/2006/main"/>
-          <a:ln xmlns:a="http://schemas.openxmlformats.org/drawingml/2006/main" w="0">
-            <a:noFill/>
-          </a:ln>
-        </p:spPr>
-        <p:txBody>
-          <a:bodyPr xmlns:a="http://schemas.openxmlformats.org/drawingml/2006/main">
-            <a:normAutofit fontScale="100000"/>
-          </a:bodyPr>
-          <a:lstStyle xmlns:a="http://schemas.openxmlformats.org/drawingml/2006/main"/>
-          <a:p xmlns:a="http://schemas.openxmlformats.org/drawingml/2006/main">
-            <a:pPr>
-              <a:defRPr sz="2400" b="1">
-                <a:solidFill>
-                  <a:srgbClr val="142F43"/>
-                </a:solidFill>
-                <a:latin typeface="Microsoft JhengHei"/>
-                <a:ea typeface="Microsoft JhengHei"/>
-                <a:cs typeface="Microsoft JhengHei"/>
-              </a:defRPr>
-            </a:pPr>
-            <a:r>
-              <a:rPr sz="2400" b="1">
-                <a:solidFill>
-                  <a:srgbClr val="142F43"/>
-                </a:solidFill>
-                <a:latin typeface="Microsoft JhengHei"/>
-                <a:ea typeface="Microsoft JhengHei"/>
-                <a:cs typeface="Microsoft JhengHei"/>
-              </a:rPr>
-              <a:t>CNV top 15% 設定與 reference 對照</a:t>
-            </a:r>
-          </a:p>
-        </p:txBody>
-      </p:sp>
-      <p:sp>
-        <p:nvSpPr>
-          <p:cNvPr id="3" name="">
-            <a:extLst xmlns:a="http://schemas.openxmlformats.org/drawingml/2006/main">
-              <a:ext uri="{FF2B5EF4-FFF2-40B4-BE49-F238E27FC236}">
-                <a16:creationId xmlns:a16="http://schemas.microsoft.com/office/drawing/2014/main" id="{0E8CD8CB-F197-4DDB-BBB2-8824DB12312D}"/>
-              </a:ext>
-            </a:extLst>
-          </p:cNvPr>
-          <p:cNvSpPr>
-            <a:spLocks xmlns:a="http://schemas.openxmlformats.org/drawingml/2006/main" noGrp="1"/>
-          </p:cNvSpPr>
-          <p:nvPr/>
-        </p:nvSpPr>
-        <p:spPr>
-          <a:xfrm xmlns:a="http://schemas.openxmlformats.org/drawingml/2006/main">
-            <a:off x="476250" y="6543675"/>
-            <a:ext cx="10287000" cy="171450"/>
-          </a:xfrm>
-          <a:prstGeom xmlns:a="http://schemas.openxmlformats.org/drawingml/2006/main" prst="rect">
-            <a:avLst/>
-          </a:prstGeom>
-          <a:noFill xmlns:a="http://schemas.openxmlformats.org/drawingml/2006/main"/>
-          <a:ln xmlns:a="http://schemas.openxmlformats.org/drawingml/2006/main" w="0">
-            <a:noFill/>
-          </a:ln>
-        </p:spPr>
-        <p:txBody>
-          <a:bodyPr xmlns:a="http://schemas.openxmlformats.org/drawingml/2006/main">
-            <a:normAutofit fontScale="63636"/>
-          </a:bodyPr>
-          <a:lstStyle xmlns:a="http://schemas.openxmlformats.org/drawingml/2006/main"/>
-          <a:p xmlns:a="http://schemas.openxmlformats.org/drawingml/2006/main">
-            <a:pPr>
-              <a:defRPr sz="825" b="0">
-                <a:solidFill>
-                  <a:srgbClr val="4D5B66"/>
-                </a:solidFill>
-                <a:latin typeface="Microsoft JhengHei"/>
-                <a:ea typeface="Microsoft JhengHei"/>
-                <a:cs typeface="Microsoft JhengHei"/>
-              </a:defRPr>
-            </a:pPr>
-            <a:r>
-              <a:rPr sz="825" b="0">
-                <a:solidFill>
-                  <a:srgbClr val="4D5B66"/>
-                </a:solidFill>
-                <a:latin typeface="Microsoft JhengHei"/>
-                <a:ea typeface="Microsoft JhengHei"/>
-                <a:cs typeface="Microsoft JhengHei"/>
-              </a:rPr>
-              <a:t>GSE262271 / GSE218858  |  Reviewed 15 September 2026</a:t>
-            </a:r>
-          </a:p>
-        </p:txBody>
-      </p:sp>
-      <p:sp>
-        <p:nvSpPr>
-          <p:cNvPr id="4" name="">
-            <a:extLst xmlns:a="http://schemas.openxmlformats.org/drawingml/2006/main">
-              <a:ext uri="{FF2B5EF4-FFF2-40B4-BE49-F238E27FC236}">
-                <a16:creationId xmlns:a16="http://schemas.microsoft.com/office/drawing/2014/main" id="{44C965A6-62B5-4D1D-9536-169417633032}"/>
-              </a:ext>
-            </a:extLst>
-          </p:cNvPr>
-          <p:cNvSpPr>
-            <a:spLocks xmlns:a="http://schemas.openxmlformats.org/drawingml/2006/main" noGrp="1"/>
-          </p:cNvSpPr>
-          <p:nvPr/>
-        </p:nvSpPr>
-        <p:spPr>
-          <a:xfrm xmlns:a="http://schemas.openxmlformats.org/drawingml/2006/main">
-            <a:off x="11334750" y="6543675"/>
-            <a:ext cx="381000" cy="171450"/>
-          </a:xfrm>
-          <a:prstGeom xmlns:a="http://schemas.openxmlformats.org/drawingml/2006/main" prst="rect">
-            <a:avLst/>
-          </a:prstGeom>
-          <a:noFill xmlns:a="http://schemas.openxmlformats.org/drawingml/2006/main"/>
-          <a:ln xmlns:a="http://schemas.openxmlformats.org/drawingml/2006/main" w="0">
-            <a:noFill/>
-          </a:ln>
-        </p:spPr>
-        <p:txBody>
-          <a:bodyPr xmlns:a="http://schemas.openxmlformats.org/drawingml/2006/main">
-            <a:normAutofit fontScale="63636"/>
-          </a:bodyPr>
-          <a:lstStyle xmlns:a="http://schemas.openxmlformats.org/drawingml/2006/main"/>
-          <a:p xmlns:a="http://schemas.openxmlformats.org/drawingml/2006/main">
-            <a:pPr>
-              <a:defRPr sz="825" b="0">
-                <a:solidFill>
-                  <a:srgbClr val="142F43"/>
-                </a:solidFill>
-                <a:latin typeface="Microsoft JhengHei"/>
-                <a:ea typeface="Microsoft JhengHei"/>
-                <a:cs typeface="Microsoft JhengHei"/>
-              </a:defRPr>
-            </a:pPr>
-            <a:r>
-              <a:rPr sz="825" b="0">
-                <a:solidFill>
-                  <a:srgbClr val="142F43"/>
-                </a:solidFill>
-                <a:latin typeface="Microsoft JhengHei"/>
-                <a:ea typeface="Microsoft JhengHei"/>
-                <a:cs typeface="Microsoft JhengHei"/>
-              </a:rPr>
-              <a:t>13</a:t>
-            </a:r>
-          </a:p>
-        </p:txBody>
-      </p:sp>
-      <p:sp>
-        <p:nvSpPr>
-          <p:cNvPr id="5" name="">
-            <a:extLst xmlns:a="http://schemas.openxmlformats.org/drawingml/2006/main">
-              <a:ext uri="{FF2B5EF4-FFF2-40B4-BE49-F238E27FC236}">
-                <a16:creationId xmlns:a16="http://schemas.microsoft.com/office/drawing/2014/main" id="{074173AB-E594-4A1A-AF3C-8E102CC6B6CA}"/>
-              </a:ext>
-            </a:extLst>
-          </p:cNvPr>
-          <p:cNvSpPr>
-            <a:spLocks xmlns:a="http://schemas.openxmlformats.org/drawingml/2006/main" noGrp="1"/>
-          </p:cNvSpPr>
-          <p:nvPr/>
-        </p:nvSpPr>
-        <p:spPr>
-          <a:xfrm xmlns:a="http://schemas.openxmlformats.org/drawingml/2006/main">
-            <a:off x="590550" y="1381125"/>
-            <a:ext cx="10953750" cy="685800"/>
-          </a:xfrm>
-          <a:prstGeom xmlns:a="http://schemas.openxmlformats.org/drawingml/2006/main" prst="rect">
-            <a:avLst/>
-          </a:prstGeom>
-          <a:noFill xmlns:a="http://schemas.openxmlformats.org/drawingml/2006/main"/>
-          <a:ln xmlns:a="http://schemas.openxmlformats.org/drawingml/2006/main" w="0">
-            <a:noFill/>
-          </a:ln>
-        </p:spPr>
-        <p:txBody>
-          <a:bodyPr xmlns:a="http://schemas.openxmlformats.org/drawingml/2006/main">
-            <a:normAutofit fontScale="100000"/>
-          </a:bodyPr>
-          <a:lstStyle xmlns:a="http://schemas.openxmlformats.org/drawingml/2006/main"/>
-          <a:p xmlns:a="http://schemas.openxmlformats.org/drawingml/2006/main">
-            <a:pPr>
-              <a:defRPr sz="2100" b="1">
-                <a:solidFill>
-                  <a:srgbClr val="142F43"/>
-                </a:solidFill>
-                <a:latin typeface="Microsoft JhengHei"/>
-                <a:ea typeface="Microsoft JhengHei"/>
-                <a:cs typeface="Microsoft JhengHei"/>
-              </a:defRPr>
-            </a:pPr>
-            <a:r>
-              <a:rPr sz="2100" b="1">
-                <a:solidFill>
-                  <a:srgbClr val="142F43"/>
-                </a:solidFill>
-                <a:latin typeface="Microsoft JhengHei"/>
-                <a:ea typeface="Microsoft JhengHei"/>
-                <a:cs typeface="Microsoft JhengHei"/>
-              </a:rPr>
-              <a:t>每個 sample 保留 CNV score 最高的 15%，作為相對高 CNV 的 T-lineage core</a:t>
-            </a:r>
-          </a:p>
-        </p:txBody>
-      </p:sp>
       <p:graphicFrame>
         <p:nvGraphicFramePr>
-          <p:cNvPr id="14" name=""/>
+          <p:cNvPr id="6" name=""/>
           <p:cNvGraphicFramePr/>
           <p:nvPr/>
         </p:nvGraphicFramePr>
         <p:xfrm>
-          <a:off xmlns:a="http://schemas.openxmlformats.org/drawingml/2006/main" x="523875" y="2333625"/>
-          <a:ext xmlns:a="http://schemas.openxmlformats.org/drawingml/2006/main" cx="11144250" cy="2000250"/>
+          <a:off xmlns:a="http://schemas.openxmlformats.org/drawingml/2006/main" x="571500" y="1543050"/>
+          <a:ext xmlns:a="http://schemas.openxmlformats.org/drawingml/2006/main" cx="11049000" cy="2362200"/>
         </p:xfrm>
         <a:graphic xmlns:a="http://schemas.openxmlformats.org/drawingml/2006/main">
           <a:graphicData uri="http://schemas.openxmlformats.org/drawingml/2006/table">
             <a:tbl>
               <a:tblPr firstRow="1" bandRow="0"/>
               <a:tblGrid>
-                <a:gridCol w="2571750"/>
-                <a:gridCol w="5476875"/>
-                <a:gridCol w="3095625"/>
+                <a:gridCol w="4286250"/>
+                <a:gridCol w="4524375"/>
+                <a:gridCol w="2238375"/>
               </a:tblGrid>
-              <a:tr h="419100">
+              <a:tr h="495300">
                 <a:tc>
                   <a:txBody>
                     <a:bodyPr/>
                     <a:lstStyle/>
                     <a:p>
                       <a:r>
-                        <a:rPr sz="1575" b="1">
+                        <a:rPr sz="1800" b="1">
                           <a:solidFill>
-                            <a:srgbClr val="FFFFFF"/>
+                            <a:srgbClr val="202020"/>
                           </a:solidFill>
                           <a:latin typeface="Microsoft JhengHei"/>
                           <a:ea typeface="Microsoft JhengHei"/>
                           <a:cs typeface="Microsoft JhengHei"/>
                         </a:rPr>
-                        <a:t>規則</a:t>
+                        <a:t>選擇方式</a:t>
                       </a:r>
                     </a:p>
                   </a:txBody>
                   <a:tcPr marL="91440" marR="91440" marT="45720" marB="45720">
                     <a:solidFill>
-                      <a:srgbClr val="142F43"/>
+                      <a:srgbClr val="F0F0F0"/>
                     </a:solidFill>
                   </a:tcPr>
                 </a:tc>
@@ -3986,21 +2852,21 @@
                     <a:lstStyle/>
                     <a:p>
                       <a:r>
-                        <a:rPr sz="1575" b="1">
+                        <a:rPr sz="1800" b="1">
                           <a:solidFill>
-                            <a:srgbClr val="FFFFFF"/>
+                            <a:srgbClr val="202020"/>
                           </a:solidFill>
                           <a:latin typeface="Microsoft JhengHei"/>
                           <a:ea typeface="Microsoft JhengHei"/>
                           <a:cs typeface="Microsoft JhengHei"/>
                         </a:rPr>
-                        <a:t>怎麼選</a:t>
+                        <a:t>門檻</a:t>
                       </a:r>
                     </a:p>
                   </a:txBody>
                   <a:tcPr marL="91440" marR="91440" marT="45720" marB="45720">
                     <a:solidFill>
-                      <a:srgbClr val="142F43"/>
+                      <a:srgbClr val="F0F0F0"/>
                     </a:solidFill>
                   </a:tcPr>
                 </a:tc>
@@ -4010,41 +2876,41 @@
                     <a:lstStyle/>
                     <a:p>
                       <a:r>
-                        <a:rPr sz="1575" b="1">
+                        <a:rPr sz="1800" b="1">
                           <a:solidFill>
-                            <a:srgbClr val="FFFFFF"/>
+                            <a:srgbClr val="202020"/>
                           </a:solidFill>
                           <a:latin typeface="Microsoft JhengHei"/>
                           <a:ea typeface="Microsoft JhengHei"/>
                           <a:cs typeface="Microsoft JhengHei"/>
                         </a:rPr>
-                        <a:t>本次保留</a:t>
+                        <a:t>保留細胞</a:t>
                       </a:r>
                     </a:p>
                   </a:txBody>
                   <a:tcPr marL="91440" marR="91440" marT="45720" marB="45720">
                     <a:solidFill>
-                      <a:srgbClr val="142F43"/>
+                      <a:srgbClr val="F0F0F0"/>
                     </a:solidFill>
                   </a:tcPr>
                 </a:tc>
               </a:tr>
-              <a:tr h="790575">
+              <a:tr h="933450">
                 <a:tc>
                   <a:txBody>
                     <a:bodyPr/>
                     <a:lstStyle/>
                     <a:p>
                       <a:r>
-                        <a:rPr sz="1575">
+                        <a:rPr sz="1800">
                           <a:solidFill>
-                            <a:srgbClr val="142F43"/>
+                            <a:srgbClr val="202020"/>
                           </a:solidFill>
                           <a:latin typeface="Microsoft JhengHei"/>
                           <a:ea typeface="Microsoft JhengHei"/>
                           <a:cs typeface="Microsoft JhengHei"/>
                         </a:rPr>
-                        <a:t>主分析：sample top 15%</a:t>
+                        <a:t>主分析：within-sample top 15%</a:t>
                       </a:r>
                     </a:p>
                   </a:txBody>
@@ -4056,15 +2922,15 @@
                     <a:lstStyle/>
                     <a:p>
                       <a:r>
-                        <a:rPr sz="1575">
+                        <a:rPr sz="1800">
                           <a:solidFill>
-                            <a:srgbClr val="142F43"/>
+                            <a:srgbClr val="202020"/>
                           </a:solidFill>
                           <a:latin typeface="Microsoft JhengHei"/>
                           <a:ea typeface="Microsoft JhengHei"/>
                           <a:cs typeface="Microsoft JhengHei"/>
                         </a:rPr>
-                        <a:t>每個 sample 各自選 CNV score 最高 15%</a:t>
+                        <a:t>各 sample 的 CNV 第 85 百分位</a:t>
                       </a:r>
                     </a:p>
                   </a:txBody>
@@ -4076,44 +2942,31 @@
                     <a:lstStyle/>
                     <a:p>
                       <a:r>
-                        <a:rPr sz="1575">
+                        <a:rPr sz="1800">
                           <a:solidFill>
-                            <a:srgbClr val="142F43"/>
+                            <a:srgbClr val="202020"/>
                           </a:solidFill>
                           <a:latin typeface="Microsoft JhengHei"/>
                           <a:ea typeface="Microsoft JhengHei"/>
                           <a:cs typeface="Microsoft JhengHei"/>
                         </a:rPr>
-                        <a:t>1,926 cells</a:t>
-                      </a:r>
-                    </a:p>
-                    <a:p>
-                      <a:r>
-                        <a:rPr sz="1575">
-                          <a:solidFill>
-                            <a:srgbClr val="142F43"/>
-                          </a:solidFill>
-                          <a:latin typeface="Microsoft JhengHei"/>
-                          <a:ea typeface="Microsoft JhengHei"/>
-                          <a:cs typeface="Microsoft JhengHei"/>
-                        </a:rPr>
-                        <a:t>最小 sample 107</a:t>
+                        <a:t>1,926</a:t>
                       </a:r>
                     </a:p>
                   </a:txBody>
                   <a:tcPr marL="91440" marR="91440" marT="45720" marB="45720"/>
                 </a:tc>
               </a:tr>
-              <a:tr h="790575">
+              <a:tr h="933450">
                 <a:tc>
                   <a:txBody>
                     <a:bodyPr/>
                     <a:lstStyle/>
                     <a:p>
                       <a:r>
-                        <a:rPr sz="1575">
+                        <a:rPr sz="1800">
                           <a:solidFill>
-                            <a:srgbClr val="142F43"/>
+                            <a:srgbClr val="202020"/>
                           </a:solidFill>
                           <a:latin typeface="Microsoft JhengHei"/>
                           <a:ea typeface="Microsoft JhengHei"/>
@@ -4131,15 +2984,15 @@
                     <a:lstStyle/>
                     <a:p>
                       <a:r>
-                        <a:rPr sz="1575">
+                        <a:rPr sz="1800">
                           <a:solidFill>
-                            <a:srgbClr val="142F43"/>
+                            <a:srgbClr val="202020"/>
                           </a:solidFill>
                           <a:latin typeface="Microsoft JhengHei"/>
                           <a:ea typeface="Microsoft JhengHei"/>
                           <a:cs typeface="Microsoft JhengHei"/>
                         </a:rPr>
-                        <a:t>每顆 cell 都與同一數值 0.0269 比較</a:t>
+                        <a:t>共同 CNV score &gt; 0.0269</a:t>
                       </a:r>
                     </a:p>
                   </a:txBody>
@@ -4151,28 +3004,15 @@
                     <a:lstStyle/>
                     <a:p>
                       <a:r>
-                        <a:rPr sz="1575">
+                        <a:rPr sz="1800">
                           <a:solidFill>
-                            <a:srgbClr val="142F43"/>
+                            <a:srgbClr val="202020"/>
                           </a:solidFill>
                           <a:latin typeface="Microsoft JhengHei"/>
                           <a:ea typeface="Microsoft JhengHei"/>
                           <a:cs typeface="Microsoft JhengHei"/>
                         </a:rPr>
-                        <a:t>1,978 cells</a:t>
-                      </a:r>
-                    </a:p>
-                    <a:p>
-                      <a:r>
-                        <a:rPr sz="1575">
-                          <a:solidFill>
-                            <a:srgbClr val="142F43"/>
-                          </a:solidFill>
-                          <a:latin typeface="Microsoft JhengHei"/>
-                          <a:ea typeface="Microsoft JhengHei"/>
-                          <a:cs typeface="Microsoft JhengHei"/>
-                        </a:rPr>
-                        <a:t>最小 sample 66</a:t>
+                        <a:t>1,978</a:t>
                       </a:r>
                     </a:p>
                   </a:txBody>
@@ -4185,10 +3025,10 @@
       </p:graphicFrame>
       <p:sp>
         <p:nvSpPr>
-          <p:cNvPr id="7" name="">
+          <p:cNvPr id="3" name="">
             <a:extLst xmlns:a="http://schemas.openxmlformats.org/drawingml/2006/main">
               <a:ext uri="{FF2B5EF4-FFF2-40B4-BE49-F238E27FC236}">
-                <a16:creationId xmlns:a16="http://schemas.microsoft.com/office/drawing/2014/main" id="{484A98C5-D346-4DEC-995B-46AF538B9CBD}"/>
+                <a16:creationId xmlns:a16="http://schemas.microsoft.com/office/drawing/2014/main" id="{7F3290F8-4BE6-4298-96FE-BD2BE0082C0E}"/>
               </a:ext>
             </a:extLst>
           </p:cNvPr>
@@ -4199,8 +3039,8 @@
         </p:nvSpPr>
         <p:spPr>
           <a:xfrm xmlns:a="http://schemas.openxmlformats.org/drawingml/2006/main">
-            <a:off x="619125" y="4667250"/>
-            <a:ext cx="10668000" cy="828675"/>
+            <a:off x="619125" y="4343400"/>
+            <a:ext cx="10668000" cy="523875"/>
           </a:xfrm>
           <a:prstGeom xmlns:a="http://schemas.openxmlformats.org/drawingml/2006/main" prst="rect">
             <a:avLst/>
@@ -4212,14 +3052,14 @@
         </p:spPr>
         <p:txBody>
           <a:bodyPr xmlns:a="http://schemas.openxmlformats.org/drawingml/2006/main">
-            <a:normAutofit fontScale="100000"/>
+            <a:noAutofit/>
           </a:bodyPr>
           <a:lstStyle xmlns:a="http://schemas.openxmlformats.org/drawingml/2006/main"/>
           <a:p xmlns:a="http://schemas.openxmlformats.org/drawingml/2006/main">
             <a:pPr>
-              <a:defRPr sz="1725" b="0">
-                <a:solidFill>
-                  <a:srgbClr val="142F43"/>
+              <a:defRPr sz="2100" b="0">
+                <a:solidFill>
+                  <a:srgbClr val="202020"/>
                 </a:solidFill>
                 <a:latin typeface="Microsoft JhengHei"/>
                 <a:ea typeface="Microsoft JhengHei"/>
@@ -4227,25 +3067,25 @@
               </a:defRPr>
             </a:pPr>
             <a:r>
-              <a:rPr sz="1725" b="0">
-                <a:solidFill>
-                  <a:srgbClr val="142F43"/>
+              <a:rPr sz="2100" b="0">
+                <a:solidFill>
+                  <a:srgbClr val="202020"/>
                 </a:solidFill>
                 <a:latin typeface="Microsoft JhengHei"/>
                 <a:ea typeface="Microsoft JhengHei"/>
                 <a:cs typeface="Microsoft JhengHei"/>
               </a:rPr>
-              <a:t>Reference q95 提供比例尺度對照。Top 15% 中有 1,407 / 1,926 cells（73.1%）高於 q95，兩種規則選到的細胞並不相同。</a:t>
+              <a:t>兩種選法重疊 1,407 顆細胞</a:t>
             </a:r>
           </a:p>
         </p:txBody>
       </p:sp>
       <p:sp>
         <p:nvSpPr>
-          <p:cNvPr id="8" name="">
+          <p:cNvPr id="4" name="">
             <a:extLst xmlns:a="http://schemas.openxmlformats.org/drawingml/2006/main">
               <a:ext uri="{FF2B5EF4-FFF2-40B4-BE49-F238E27FC236}">
-                <a16:creationId xmlns:a16="http://schemas.microsoft.com/office/drawing/2014/main" id="{879FB4B3-FF87-426C-8557-A879DB63C771}"/>
+                <a16:creationId xmlns:a16="http://schemas.microsoft.com/office/drawing/2014/main" id="{54C1AC56-8F06-435B-97B7-4E347CD0A6D9}"/>
               </a:ext>
             </a:extLst>
           </p:cNvPr>
@@ -4256,8 +3096,8 @@
         </p:nvSpPr>
         <p:spPr>
           <a:xfrm xmlns:a="http://schemas.openxmlformats.org/drawingml/2006/main">
-            <a:off x="619125" y="5648325"/>
-            <a:ext cx="10668000" cy="628650"/>
+            <a:off x="619125" y="5276850"/>
+            <a:ext cx="10668000" cy="571500"/>
           </a:xfrm>
           <a:prstGeom xmlns:a="http://schemas.openxmlformats.org/drawingml/2006/main" prst="rect">
             <a:avLst/>
@@ -4269,14 +3109,14 @@
         </p:spPr>
         <p:txBody>
           <a:bodyPr xmlns:a="http://schemas.openxmlformats.org/drawingml/2006/main">
-            <a:normAutofit fontScale="100000"/>
+            <a:noAutofit/>
           </a:bodyPr>
           <a:lstStyle xmlns:a="http://schemas.openxmlformats.org/drawingml/2006/main"/>
           <a:p xmlns:a="http://schemas.openxmlformats.org/drawingml/2006/main">
             <a:pPr>
-              <a:defRPr sz="1575" b="0">
-                <a:solidFill>
-                  <a:srgbClr val="D55E00"/>
+              <a:defRPr sz="1800" b="0">
+                <a:solidFill>
+                  <a:srgbClr val="202020"/>
                 </a:solidFill>
                 <a:latin typeface="Microsoft JhengHei"/>
                 <a:ea typeface="Microsoft JhengHei"/>
@@ -4284,15 +3124,15 @@
               </a:defRPr>
             </a:pPr>
             <a:r>
-              <a:rPr sz="1575" b="0">
-                <a:solidFill>
-                  <a:srgbClr val="D55E00"/>
+              <a:rPr sz="1800" b="0">
+                <a:solidFill>
+                  <a:srgbClr val="202020"/>
                 </a:solidFill>
                 <a:latin typeface="Microsoft JhengHei"/>
                 <a:ea typeface="Microsoft JhengHei"/>
                 <a:cs typeface="Microsoft JhengHei"/>
               </a:rPr>
-              <a:t>Top 15% 在 sensitivity 檢查後固定為主分析。FDR &lt; 0.05 是 pathway 門檻，沒有額外校正選擇分析條件的影響。</a:t>
+              <a:t>Top 15% 為敏感度分析後選定的探索型主分析</a:t>
             </a:r>
           </a:p>
         </p:txBody>
@@ -4300,7 +3140,7 @@
     </p:spTree>
     <p:extLst>
       <p:ext uri="{BB962C8B-B14F-4D97-AF65-F5344CB8AC3E}">
-        <p14:creationId xmlns:p14="http://schemas.microsoft.com/office/powerpoint/2010/main" val="2135186161"/>
+        <p14:creationId xmlns:p14="http://schemas.microsoft.com/office/powerpoint/2010/main" val="803467286"/>
       </p:ext>
     </p:extLst>
   </p:cSld>
@@ -4328,10 +3168,10 @@
       </p:grpSpPr>
       <p:sp>
         <p:nvSpPr>
-          <p:cNvPr id="8" name="">
+          <p:cNvPr id="7" name="">
             <a:extLst xmlns:a="http://schemas.openxmlformats.org/drawingml/2006/main">
               <a:ext uri="{FF2B5EF4-FFF2-40B4-BE49-F238E27FC236}">
-                <a16:creationId xmlns:a16="http://schemas.microsoft.com/office/drawing/2014/main" id="{C9B47BE2-090C-47B8-9F23-EB97332352B4}"/>
+                <a16:creationId xmlns:a16="http://schemas.microsoft.com/office/drawing/2014/main" id="{2800FFC1-C280-4522-ADC1-F9DA4C2C91D0}"/>
               </a:ext>
             </a:extLst>
           </p:cNvPr>
@@ -4342,8 +3182,8 @@
         </p:nvSpPr>
         <p:spPr>
           <a:xfrm xmlns:a="http://schemas.openxmlformats.org/drawingml/2006/main">
-            <a:off x="476250" y="190500"/>
-            <a:ext cx="10477500" cy="209550"/>
+            <a:off x="523875" y="333375"/>
+            <a:ext cx="11144250" cy="590550"/>
           </a:xfrm>
           <a:prstGeom xmlns:a="http://schemas.openxmlformats.org/drawingml/2006/main" prst="rect">
             <a:avLst/>
@@ -4355,14 +3195,14 @@
         </p:spPr>
         <p:txBody>
           <a:bodyPr xmlns:a="http://schemas.openxmlformats.org/drawingml/2006/main">
-            <a:normAutofit fontScale="79487"/>
+            <a:noAutofit/>
           </a:bodyPr>
           <a:lstStyle xmlns:a="http://schemas.openxmlformats.org/drawingml/2006/main"/>
           <a:p xmlns:a="http://schemas.openxmlformats.org/drawingml/2006/main">
             <a:pPr>
-              <a:defRPr sz="975" b="1">
-                <a:solidFill>
-                  <a:srgbClr val="D55E00"/>
+              <a:defRPr sz="2550" b="1">
+                <a:solidFill>
+                  <a:srgbClr val="202020"/>
                 </a:solidFill>
                 <a:latin typeface="Microsoft JhengHei"/>
                 <a:ea typeface="Microsoft JhengHei"/>
@@ -4370,15 +3210,15 @@
               </a:defRPr>
             </a:pPr>
             <a:r>
-              <a:rPr sz="975" b="1">
-                <a:solidFill>
-                  <a:srgbClr val="D55E00"/>
+              <a:rPr sz="2550" b="1">
+                <a:solidFill>
+                  <a:srgbClr val="202020"/>
                 </a:solidFill>
                 <a:latin typeface="Microsoft JhengHei"/>
                 <a:ea typeface="Microsoft JhengHei"/>
                 <a:cs typeface="Microsoft JhengHei"/>
               </a:rPr>
-              <a:t>INTERPRETATION</a:t>
+              <a:t>主要發現與後續問題</a:t>
             </a:r>
           </a:p>
         </p:txBody>
@@ -4388,7 +3228,7 @@
           <p:cNvPr id="2" name="">
             <a:extLst xmlns:a="http://schemas.openxmlformats.org/drawingml/2006/main">
               <a:ext uri="{FF2B5EF4-FFF2-40B4-BE49-F238E27FC236}">
-                <a16:creationId xmlns:a16="http://schemas.microsoft.com/office/drawing/2014/main" id="{80067964-D1BD-4FF5-9859-D12AA8EB80B0}"/>
+                <a16:creationId xmlns:a16="http://schemas.microsoft.com/office/drawing/2014/main" id="{27225D2C-9018-4A78-9139-57060CE38263}"/>
               </a:ext>
             </a:extLst>
           </p:cNvPr>
@@ -4399,8 +3239,8 @@
         </p:nvSpPr>
         <p:spPr>
           <a:xfrm xmlns:a="http://schemas.openxmlformats.org/drawingml/2006/main">
-            <a:off x="476250" y="523875"/>
-            <a:ext cx="11144250" cy="476250"/>
+            <a:off x="619125" y="1409700"/>
+            <a:ext cx="10572750" cy="523875"/>
           </a:xfrm>
           <a:prstGeom xmlns:a="http://schemas.openxmlformats.org/drawingml/2006/main" prst="rect">
             <a:avLst/>
@@ -4412,14 +3252,14 @@
         </p:spPr>
         <p:txBody>
           <a:bodyPr xmlns:a="http://schemas.openxmlformats.org/drawingml/2006/main">
-            <a:normAutofit fontScale="100000"/>
+            <a:noAutofit/>
           </a:bodyPr>
           <a:lstStyle xmlns:a="http://schemas.openxmlformats.org/drawingml/2006/main"/>
           <a:p xmlns:a="http://schemas.openxmlformats.org/drawingml/2006/main">
             <a:pPr>
-              <a:defRPr sz="2400" b="1">
-                <a:solidFill>
-                  <a:srgbClr val="142F43"/>
+              <a:defRPr sz="2100" b="1">
+                <a:solidFill>
+                  <a:srgbClr val="202020"/>
                 </a:solidFill>
                 <a:latin typeface="Microsoft JhengHei"/>
                 <a:ea typeface="Microsoft JhengHei"/>
@@ -4427,15 +3267,15 @@
               </a:defRPr>
             </a:pPr>
             <a:r>
-              <a:rPr sz="2400" b="1">
-                <a:solidFill>
-                  <a:srgbClr val="142F43"/>
+              <a:rPr sz="2100" b="1">
+                <a:solidFill>
+                  <a:srgbClr val="202020"/>
                 </a:solidFill>
                 <a:latin typeface="Microsoft JhengHei"/>
                 <a:ea typeface="Microsoft JhengHei"/>
                 <a:cs typeface="Microsoft JhengHei"/>
               </a:rPr>
-              <a:t>生物意義與待驗證問題</a:t>
+              <a:t>共同上調</a:t>
             </a:r>
           </a:p>
         </p:txBody>
@@ -4445,7 +3285,7 @@
           <p:cNvPr id="3" name="">
             <a:extLst xmlns:a="http://schemas.openxmlformats.org/drawingml/2006/main">
               <a:ext uri="{FF2B5EF4-FFF2-40B4-BE49-F238E27FC236}">
-                <a16:creationId xmlns:a16="http://schemas.microsoft.com/office/drawing/2014/main" id="{190F0122-1443-4790-B102-E36EC519D502}"/>
+                <a16:creationId xmlns:a16="http://schemas.microsoft.com/office/drawing/2014/main" id="{34C47398-F45C-402C-B6E5-F51F6A918EB3}"/>
               </a:ext>
             </a:extLst>
           </p:cNvPr>
@@ -4456,8 +3296,8 @@
         </p:nvSpPr>
         <p:spPr>
           <a:xfrm xmlns:a="http://schemas.openxmlformats.org/drawingml/2006/main">
-            <a:off x="476250" y="6543675"/>
-            <a:ext cx="10287000" cy="171450"/>
+            <a:off x="619125" y="2114550"/>
+            <a:ext cx="10572750" cy="809625"/>
           </a:xfrm>
           <a:prstGeom xmlns:a="http://schemas.openxmlformats.org/drawingml/2006/main" prst="rect">
             <a:avLst/>
@@ -4469,14 +3309,14 @@
         </p:spPr>
         <p:txBody>
           <a:bodyPr xmlns:a="http://schemas.openxmlformats.org/drawingml/2006/main">
-            <a:normAutofit fontScale="63636"/>
+            <a:noAutofit/>
           </a:bodyPr>
           <a:lstStyle xmlns:a="http://schemas.openxmlformats.org/drawingml/2006/main"/>
           <a:p xmlns:a="http://schemas.openxmlformats.org/drawingml/2006/main">
             <a:pPr>
-              <a:defRPr sz="825" b="0">
-                <a:solidFill>
-                  <a:srgbClr val="4D5B66"/>
+              <a:defRPr sz="2100" b="0">
+                <a:solidFill>
+                  <a:srgbClr val="202020"/>
                 </a:solidFill>
                 <a:latin typeface="Microsoft JhengHei"/>
                 <a:ea typeface="Microsoft JhengHei"/>
@@ -4484,15 +3324,15 @@
               </a:defRPr>
             </a:pPr>
             <a:r>
-              <a:rPr sz="825" b="0">
-                <a:solidFill>
-                  <a:srgbClr val="4D5B66"/>
+              <a:rPr sz="2100" b="0">
+                <a:solidFill>
+                  <a:srgbClr val="202020"/>
                 </a:solidFill>
                 <a:latin typeface="Microsoft JhengHei"/>
                 <a:ea typeface="Microsoft JhengHei"/>
                 <a:cs typeface="Microsoft JhengHei"/>
               </a:rPr>
-              <a:t>GSE262271 / GSE218858  |  Reviewed 15 September 2026</a:t>
+              <a:t>Oxidative phosphorylation、ribosome、proteasome、mitophagy</a:t>
             </a:r>
           </a:p>
         </p:txBody>
@@ -4502,7 +3342,7 @@
           <p:cNvPr id="4" name="">
             <a:extLst xmlns:a="http://schemas.openxmlformats.org/drawingml/2006/main">
               <a:ext uri="{FF2B5EF4-FFF2-40B4-BE49-F238E27FC236}">
-                <a16:creationId xmlns:a16="http://schemas.microsoft.com/office/drawing/2014/main" id="{FFC72D84-16C3-48BE-B22D-1083D9A63366}"/>
+                <a16:creationId xmlns:a16="http://schemas.microsoft.com/office/drawing/2014/main" id="{A4DFB382-2126-4880-B5FE-E352E04C8185}"/>
               </a:ext>
             </a:extLst>
           </p:cNvPr>
@@ -4513,8 +3353,8 @@
         </p:nvSpPr>
         <p:spPr>
           <a:xfrm xmlns:a="http://schemas.openxmlformats.org/drawingml/2006/main">
-            <a:off x="11334750" y="6543675"/>
-            <a:ext cx="381000" cy="171450"/>
+            <a:off x="619125" y="3295650"/>
+            <a:ext cx="10572750" cy="523875"/>
           </a:xfrm>
           <a:prstGeom xmlns:a="http://schemas.openxmlformats.org/drawingml/2006/main" prst="rect">
             <a:avLst/>
@@ -4526,14 +3366,14 @@
         </p:spPr>
         <p:txBody>
           <a:bodyPr xmlns:a="http://schemas.openxmlformats.org/drawingml/2006/main">
-            <a:normAutofit fontScale="63636"/>
+            <a:noAutofit/>
           </a:bodyPr>
           <a:lstStyle xmlns:a="http://schemas.openxmlformats.org/drawingml/2006/main"/>
           <a:p xmlns:a="http://schemas.openxmlformats.org/drawingml/2006/main">
             <a:pPr>
-              <a:defRPr sz="825" b="0">
-                <a:solidFill>
-                  <a:srgbClr val="142F43"/>
+              <a:defRPr sz="2100" b="1">
+                <a:solidFill>
+                  <a:srgbClr val="202020"/>
                 </a:solidFill>
                 <a:latin typeface="Microsoft JhengHei"/>
                 <a:ea typeface="Microsoft JhengHei"/>
@@ -4541,15 +3381,15 @@
               </a:defRPr>
             </a:pPr>
             <a:r>
-              <a:rPr sz="825" b="0">
-                <a:solidFill>
-                  <a:srgbClr val="142F43"/>
+              <a:rPr sz="2100" b="1">
+                <a:solidFill>
+                  <a:srgbClr val="202020"/>
                 </a:solidFill>
                 <a:latin typeface="Microsoft JhengHei"/>
                 <a:ea typeface="Microsoft JhengHei"/>
                 <a:cs typeface="Microsoft JhengHei"/>
               </a:rPr>
-              <a:t>14</a:t>
+              <a:t>研究假說</a:t>
             </a:r>
           </a:p>
         </p:txBody>
@@ -4559,7 +3399,7 @@
           <p:cNvPr id="5" name="">
             <a:extLst xmlns:a="http://schemas.openxmlformats.org/drawingml/2006/main">
               <a:ext uri="{FF2B5EF4-FFF2-40B4-BE49-F238E27FC236}">
-                <a16:creationId xmlns:a16="http://schemas.microsoft.com/office/drawing/2014/main" id="{46B4B65D-470D-4E33-ADB8-3CE2F279A3CB}"/>
+                <a16:creationId xmlns:a16="http://schemas.microsoft.com/office/drawing/2014/main" id="{D61025A2-3471-46BB-85DC-DD8492DEC45A}"/>
               </a:ext>
             </a:extLst>
           </p:cNvPr>
@@ -4570,8 +3410,8 @@
         </p:nvSpPr>
         <p:spPr>
           <a:xfrm xmlns:a="http://schemas.openxmlformats.org/drawingml/2006/main">
-            <a:off x="619125" y="1428750"/>
-            <a:ext cx="10668000" cy="1000125"/>
+            <a:off x="619125" y="4000500"/>
+            <a:ext cx="10572750" cy="714375"/>
           </a:xfrm>
           <a:prstGeom xmlns:a="http://schemas.openxmlformats.org/drawingml/2006/main" prst="rect">
             <a:avLst/>
@@ -4583,14 +3423,14 @@
         </p:spPr>
         <p:txBody>
           <a:bodyPr xmlns:a="http://schemas.openxmlformats.org/drawingml/2006/main">
-            <a:normAutofit fontScale="100000"/>
+            <a:noAutofit/>
           </a:bodyPr>
           <a:lstStyle xmlns:a="http://schemas.openxmlformats.org/drawingml/2006/main"/>
           <a:p xmlns:a="http://schemas.openxmlformats.org/drawingml/2006/main">
             <a:pPr>
-              <a:defRPr sz="2175" b="1">
-                <a:solidFill>
-                  <a:srgbClr val="142F43"/>
+              <a:defRPr sz="2100" b="0">
+                <a:solidFill>
+                  <a:srgbClr val="202020"/>
                 </a:solidFill>
                 <a:latin typeface="Microsoft JhengHei"/>
                 <a:ea typeface="Microsoft JhengHei"/>
@@ -4598,15 +3438,15 @@
               </a:defRPr>
             </a:pPr>
             <a:r>
-              <a:rPr sz="2175" b="1">
-                <a:solidFill>
-                  <a:srgbClr val="142F43"/>
+              <a:rPr sz="2100" b="0">
+                <a:solidFill>
+                  <a:srgbClr val="202020"/>
                 </a:solidFill>
                 <a:latin typeface="Microsoft JhengHei"/>
                 <a:ea typeface="Microsoft JhengHei"/>
                 <a:cs typeface="Microsoft JhengHei"/>
               </a:rPr>
-              <a:t>共同富集支持：復發與 STAT5B 活化可能伴隨相似的蛋白質穩態與代謝程式。</a:t>
+              <a:t>STAT5B 活化與粒線體及蛋白質品質控制相關</a:t>
             </a:r>
           </a:p>
         </p:txBody>
@@ -4616,7 +3456,7 @@
           <p:cNvPr id="6" name="">
             <a:extLst xmlns:a="http://schemas.openxmlformats.org/drawingml/2006/main">
               <a:ext uri="{FF2B5EF4-FFF2-40B4-BE49-F238E27FC236}">
-                <a16:creationId xmlns:a16="http://schemas.microsoft.com/office/drawing/2014/main" id="{7DC01D41-48FD-44E0-B4F3-B80A9BE15981}"/>
+                <a16:creationId xmlns:a16="http://schemas.microsoft.com/office/drawing/2014/main" id="{A1EF12A0-ED72-4843-A223-9BDD29FE04AD}"/>
               </a:ext>
             </a:extLst>
           </p:cNvPr>
@@ -4627,8 +3467,8 @@
         </p:nvSpPr>
         <p:spPr>
           <a:xfrm xmlns:a="http://schemas.openxmlformats.org/drawingml/2006/main">
-            <a:off x="619125" y="2952750"/>
-            <a:ext cx="10668000" cy="1285875"/>
+            <a:off x="619125" y="5438775"/>
+            <a:ext cx="10572750" cy="619125"/>
           </a:xfrm>
           <a:prstGeom xmlns:a="http://schemas.openxmlformats.org/drawingml/2006/main" prst="rect">
             <a:avLst/>
@@ -4640,71 +3480,14 @@
         </p:spPr>
         <p:txBody>
           <a:bodyPr xmlns:a="http://schemas.openxmlformats.org/drawingml/2006/main">
-            <a:normAutofit fontScale="100000"/>
-          </a:bodyPr>
-          <a:lstStyle xmlns:a="http://schemas.openxmlformats.org/drawingml/2006/main"/>
-          <a:p xmlns:a="http://schemas.openxmlformats.org/drawingml/2006/main">
-            <a:pPr>
-              <a:defRPr sz="1950" b="0">
-                <a:solidFill>
-                  <a:srgbClr val="142F43"/>
-                </a:solidFill>
-                <a:latin typeface="Microsoft JhengHei"/>
-                <a:ea typeface="Microsoft JhengHei"/>
-                <a:cs typeface="Microsoft JhengHei"/>
-              </a:defRPr>
-            </a:pPr>
-            <a:r>
-              <a:rPr sz="1950" b="0">
-                <a:solidFill>
-                  <a:srgbClr val="142F43"/>
-                </a:solidFill>
-                <a:latin typeface="Microsoft JhengHei"/>
-                <a:ea typeface="Microsoft JhengHei"/>
-                <a:cs typeface="Microsoft JhengHei"/>
-              </a:rPr>
-              <a:t>Proteasome / mitophagy 的 transcript enrichment 可以用來形成後續假說。它尚未證明蛋白質降解活性、mitophagy flux 或 STAT5 的粒線體定位。</a:t>
-            </a:r>
-          </a:p>
-        </p:txBody>
-      </p:sp>
-      <p:sp>
-        <p:nvSpPr>
-          <p:cNvPr id="7" name="">
-            <a:extLst xmlns:a="http://schemas.openxmlformats.org/drawingml/2006/main">
-              <a:ext uri="{FF2B5EF4-FFF2-40B4-BE49-F238E27FC236}">
-                <a16:creationId xmlns:a16="http://schemas.microsoft.com/office/drawing/2014/main" id="{023FAFF6-A626-47F1-AABE-10BAFC1897AD}"/>
-              </a:ext>
-            </a:extLst>
-          </p:cNvPr>
-          <p:cNvSpPr>
-            <a:spLocks xmlns:a="http://schemas.openxmlformats.org/drawingml/2006/main" noGrp="1"/>
-          </p:cNvSpPr>
-          <p:nvPr/>
-        </p:nvSpPr>
-        <p:spPr>
-          <a:xfrm xmlns:a="http://schemas.openxmlformats.org/drawingml/2006/main">
-            <a:off x="619125" y="4791075"/>
-            <a:ext cx="10668000" cy="1190625"/>
-          </a:xfrm>
-          <a:prstGeom xmlns:a="http://schemas.openxmlformats.org/drawingml/2006/main" prst="rect">
-            <a:avLst/>
-          </a:prstGeom>
-          <a:noFill xmlns:a="http://schemas.openxmlformats.org/drawingml/2006/main"/>
-          <a:ln xmlns:a="http://schemas.openxmlformats.org/drawingml/2006/main" w="0">
-            <a:noFill/>
-          </a:ln>
-        </p:spPr>
-        <p:txBody>
-          <a:bodyPr xmlns:a="http://schemas.openxmlformats.org/drawingml/2006/main">
-            <a:normAutofit fontScale="100000"/>
+            <a:noAutofit/>
           </a:bodyPr>
           <a:lstStyle xmlns:a="http://schemas.openxmlformats.org/drawingml/2006/main"/>
           <a:p xmlns:a="http://schemas.openxmlformats.org/drawingml/2006/main">
             <a:pPr>
               <a:defRPr sz="1875" b="0">
                 <a:solidFill>
-                  <a:srgbClr val="D55E00"/>
+                  <a:srgbClr val="202020"/>
                 </a:solidFill>
                 <a:latin typeface="Microsoft JhengHei"/>
                 <a:ea typeface="Microsoft JhengHei"/>
@@ -4714,13 +3497,13 @@
             <a:r>
               <a:rPr sz="1875" b="0">
                 <a:solidFill>
-                  <a:srgbClr val="D55E00"/>
+                  <a:srgbClr val="202020"/>
                 </a:solidFill>
                 <a:latin typeface="Microsoft JhengHei"/>
                 <a:ea typeface="Microsoft JhengHei"/>
                 <a:cs typeface="Microsoft JhengHei"/>
               </a:rPr>
-              <a:t>這兩組資料也沒有直接比較 bortezomib responder 與 resistant samples，因此不能從交集直接推論 proteasome inhibitor resistance。</a:t>
+              <a:t>後續驗證：mitophagy flux、proteasome 活性與 BTZ 反應</a:t>
             </a:r>
           </a:p>
         </p:txBody>
@@ -4728,7 +3511,7 @@
     </p:spTree>
     <p:extLst>
       <p:ext uri="{BB962C8B-B14F-4D97-AF65-F5344CB8AC3E}">
-        <p14:creationId xmlns:p14="http://schemas.microsoft.com/office/powerpoint/2010/main" val="2052616949"/>
+        <p14:creationId xmlns:p14="http://schemas.microsoft.com/office/powerpoint/2010/main" val="264283902"/>
       </p:ext>
     </p:extLst>
   </p:cSld>
@@ -4756,10 +3539,10 @@
       </p:grpSpPr>
       <p:sp>
         <p:nvSpPr>
-          <p:cNvPr id="8" name="">
+          <p:cNvPr id="4" name="">
             <a:extLst xmlns:a="http://schemas.openxmlformats.org/drawingml/2006/main">
               <a:ext uri="{FF2B5EF4-FFF2-40B4-BE49-F238E27FC236}">
-                <a16:creationId xmlns:a16="http://schemas.microsoft.com/office/drawing/2014/main" id="{168BCF68-D44B-4794-8CF3-045EC6CC4AFB}"/>
+                <a16:creationId xmlns:a16="http://schemas.microsoft.com/office/drawing/2014/main" id="{F23C5558-DFB0-40C5-BB04-C12827027083}"/>
               </a:ext>
             </a:extLst>
           </p:cNvPr>
@@ -4770,8 +3553,8 @@
         </p:nvSpPr>
         <p:spPr>
           <a:xfrm xmlns:a="http://schemas.openxmlformats.org/drawingml/2006/main">
-            <a:off x="476250" y="190500"/>
-            <a:ext cx="10477500" cy="209550"/>
+            <a:off x="523875" y="333375"/>
+            <a:ext cx="11144250" cy="590550"/>
           </a:xfrm>
           <a:prstGeom xmlns:a="http://schemas.openxmlformats.org/drawingml/2006/main" prst="rect">
             <a:avLst/>
@@ -4783,14 +3566,14 @@
         </p:spPr>
         <p:txBody>
           <a:bodyPr xmlns:a="http://schemas.openxmlformats.org/drawingml/2006/main">
-            <a:normAutofit fontScale="79487"/>
+            <a:noAutofit/>
           </a:bodyPr>
           <a:lstStyle xmlns:a="http://schemas.openxmlformats.org/drawingml/2006/main"/>
           <a:p xmlns:a="http://schemas.openxmlformats.org/drawingml/2006/main">
             <a:pPr>
-              <a:defRPr sz="975" b="1">
-                <a:solidFill>
-                  <a:srgbClr val="D55E00"/>
+              <a:defRPr sz="2550" b="1">
+                <a:solidFill>
+                  <a:srgbClr val="202020"/>
                 </a:solidFill>
                 <a:latin typeface="Microsoft JhengHei"/>
                 <a:ea typeface="Microsoft JhengHei"/>
@@ -4798,230 +3581,59 @@
               </a:defRPr>
             </a:pPr>
             <a:r>
-              <a:rPr sz="975" b="1">
-                <a:solidFill>
-                  <a:srgbClr val="D55E00"/>
+              <a:rPr sz="2550" b="1">
+                <a:solidFill>
+                  <a:srgbClr val="202020"/>
                 </a:solidFill>
                 <a:latin typeface="Microsoft JhengHei"/>
                 <a:ea typeface="Microsoft JhengHei"/>
                 <a:cs typeface="Microsoft JhengHei"/>
               </a:rPr>
-              <a:t>HANDOFF</a:t>
+              <a:t>交接與 code availability</a:t>
             </a:r>
           </a:p>
         </p:txBody>
       </p:sp>
-      <p:sp>
-        <p:nvSpPr>
-          <p:cNvPr id="2" name="">
-            <a:extLst xmlns:a="http://schemas.openxmlformats.org/drawingml/2006/main">
-              <a:ext uri="{FF2B5EF4-FFF2-40B4-BE49-F238E27FC236}">
-                <a16:creationId xmlns:a16="http://schemas.microsoft.com/office/drawing/2014/main" id="{07CCE743-ACF6-41B4-9F41-45C5A6E1C72E}"/>
-              </a:ext>
-            </a:extLst>
-          </p:cNvPr>
-          <p:cNvSpPr>
-            <a:spLocks xmlns:a="http://schemas.openxmlformats.org/drawingml/2006/main" noGrp="1"/>
-          </p:cNvSpPr>
-          <p:nvPr/>
-        </p:nvSpPr>
-        <p:spPr>
-          <a:xfrm xmlns:a="http://schemas.openxmlformats.org/drawingml/2006/main">
-            <a:off x="476250" y="523875"/>
-            <a:ext cx="11144250" cy="476250"/>
-          </a:xfrm>
-          <a:prstGeom xmlns:a="http://schemas.openxmlformats.org/drawingml/2006/main" prst="rect">
-            <a:avLst/>
-          </a:prstGeom>
-          <a:noFill xmlns:a="http://schemas.openxmlformats.org/drawingml/2006/main"/>
-          <a:ln xmlns:a="http://schemas.openxmlformats.org/drawingml/2006/main" w="0">
-            <a:noFill/>
-          </a:ln>
-        </p:spPr>
-        <p:txBody>
-          <a:bodyPr xmlns:a="http://schemas.openxmlformats.org/drawingml/2006/main">
-            <a:normAutofit fontScale="100000"/>
-          </a:bodyPr>
-          <a:lstStyle xmlns:a="http://schemas.openxmlformats.org/drawingml/2006/main"/>
-          <a:p xmlns:a="http://schemas.openxmlformats.org/drawingml/2006/main">
-            <a:pPr>
-              <a:defRPr sz="2400" b="1">
-                <a:solidFill>
-                  <a:srgbClr val="142F43"/>
-                </a:solidFill>
-                <a:latin typeface="Microsoft JhengHei"/>
-                <a:ea typeface="Microsoft JhengHei"/>
-                <a:cs typeface="Microsoft JhengHei"/>
-              </a:defRPr>
-            </a:pPr>
-            <a:r>
-              <a:rPr sz="2400" b="1">
-                <a:solidFill>
-                  <a:srgbClr val="142F43"/>
-                </a:solidFill>
-                <a:latin typeface="Microsoft JhengHei"/>
-                <a:ea typeface="Microsoft JhengHei"/>
-                <a:cs typeface="Microsoft JhengHei"/>
-              </a:rPr>
-              <a:t>交接檔案與可重現性</a:t>
-            </a:r>
-          </a:p>
-        </p:txBody>
-      </p:sp>
-      <p:sp>
-        <p:nvSpPr>
-          <p:cNvPr id="3" name="">
-            <a:extLst xmlns:a="http://schemas.openxmlformats.org/drawingml/2006/main">
-              <a:ext uri="{FF2B5EF4-FFF2-40B4-BE49-F238E27FC236}">
-                <a16:creationId xmlns:a16="http://schemas.microsoft.com/office/drawing/2014/main" id="{E1793592-8538-4B45-B8A2-C025D79A4EB3}"/>
-              </a:ext>
-            </a:extLst>
-          </p:cNvPr>
-          <p:cNvSpPr>
-            <a:spLocks xmlns:a="http://schemas.openxmlformats.org/drawingml/2006/main" noGrp="1"/>
-          </p:cNvSpPr>
-          <p:nvPr/>
-        </p:nvSpPr>
-        <p:spPr>
-          <a:xfrm xmlns:a="http://schemas.openxmlformats.org/drawingml/2006/main">
-            <a:off x="476250" y="6543675"/>
-            <a:ext cx="10287000" cy="171450"/>
-          </a:xfrm>
-          <a:prstGeom xmlns:a="http://schemas.openxmlformats.org/drawingml/2006/main" prst="rect">
-            <a:avLst/>
-          </a:prstGeom>
-          <a:noFill xmlns:a="http://schemas.openxmlformats.org/drawingml/2006/main"/>
-          <a:ln xmlns:a="http://schemas.openxmlformats.org/drawingml/2006/main" w="0">
-            <a:noFill/>
-          </a:ln>
-        </p:spPr>
-        <p:txBody>
-          <a:bodyPr xmlns:a="http://schemas.openxmlformats.org/drawingml/2006/main">
-            <a:normAutofit fontScale="63636"/>
-          </a:bodyPr>
-          <a:lstStyle xmlns:a="http://schemas.openxmlformats.org/drawingml/2006/main"/>
-          <a:p xmlns:a="http://schemas.openxmlformats.org/drawingml/2006/main">
-            <a:pPr>
-              <a:defRPr sz="825" b="0">
-                <a:solidFill>
-                  <a:srgbClr val="4D5B66"/>
-                </a:solidFill>
-                <a:latin typeface="Microsoft JhengHei"/>
-                <a:ea typeface="Microsoft JhengHei"/>
-                <a:cs typeface="Microsoft JhengHei"/>
-              </a:defRPr>
-            </a:pPr>
-            <a:r>
-              <a:rPr sz="825" b="0">
-                <a:solidFill>
-                  <a:srgbClr val="4D5B66"/>
-                </a:solidFill>
-                <a:latin typeface="Microsoft JhengHei"/>
-                <a:ea typeface="Microsoft JhengHei"/>
-                <a:cs typeface="Microsoft JhengHei"/>
-              </a:rPr>
-              <a:t>GSE262271 / GSE218858  |  Reviewed 15 September 2026</a:t>
-            </a:r>
-          </a:p>
-        </p:txBody>
-      </p:sp>
-      <p:sp>
-        <p:nvSpPr>
-          <p:cNvPr id="4" name="">
-            <a:extLst xmlns:a="http://schemas.openxmlformats.org/drawingml/2006/main">
-              <a:ext uri="{FF2B5EF4-FFF2-40B4-BE49-F238E27FC236}">
-                <a16:creationId xmlns:a16="http://schemas.microsoft.com/office/drawing/2014/main" id="{E646B4A2-98E8-4392-A4FF-81389E5C8A7A}"/>
-              </a:ext>
-            </a:extLst>
-          </p:cNvPr>
-          <p:cNvSpPr>
-            <a:spLocks xmlns:a="http://schemas.openxmlformats.org/drawingml/2006/main" noGrp="1"/>
-          </p:cNvSpPr>
-          <p:nvPr/>
-        </p:nvSpPr>
-        <p:spPr>
-          <a:xfrm xmlns:a="http://schemas.openxmlformats.org/drawingml/2006/main">
-            <a:off x="11334750" y="6543675"/>
-            <a:ext cx="381000" cy="171450"/>
-          </a:xfrm>
-          <a:prstGeom xmlns:a="http://schemas.openxmlformats.org/drawingml/2006/main" prst="rect">
-            <a:avLst/>
-          </a:prstGeom>
-          <a:noFill xmlns:a="http://schemas.openxmlformats.org/drawingml/2006/main"/>
-          <a:ln xmlns:a="http://schemas.openxmlformats.org/drawingml/2006/main" w="0">
-            <a:noFill/>
-          </a:ln>
-        </p:spPr>
-        <p:txBody>
-          <a:bodyPr xmlns:a="http://schemas.openxmlformats.org/drawingml/2006/main">
-            <a:normAutofit fontScale="63636"/>
-          </a:bodyPr>
-          <a:lstStyle xmlns:a="http://schemas.openxmlformats.org/drawingml/2006/main"/>
-          <a:p xmlns:a="http://schemas.openxmlformats.org/drawingml/2006/main">
-            <a:pPr>
-              <a:defRPr sz="825" b="0">
-                <a:solidFill>
-                  <a:srgbClr val="142F43"/>
-                </a:solidFill>
-                <a:latin typeface="Microsoft JhengHei"/>
-                <a:ea typeface="Microsoft JhengHei"/>
-                <a:cs typeface="Microsoft JhengHei"/>
-              </a:defRPr>
-            </a:pPr>
-            <a:r>
-              <a:rPr sz="825" b="0">
-                <a:solidFill>
-                  <a:srgbClr val="142F43"/>
-                </a:solidFill>
-                <a:latin typeface="Microsoft JhengHei"/>
-                <a:ea typeface="Microsoft JhengHei"/>
-                <a:cs typeface="Microsoft JhengHei"/>
-              </a:rPr>
-              <a:t>15</a:t>
-            </a:r>
-          </a:p>
-        </p:txBody>
-      </p:sp>
       <p:graphicFrame>
         <p:nvGraphicFramePr>
-          <p:cNvPr id="12" name=""/>
+          <p:cNvPr id="5" name=""/>
           <p:cNvGraphicFramePr/>
           <p:nvPr/>
         </p:nvGraphicFramePr>
         <p:xfrm>
-          <a:off xmlns:a="http://schemas.openxmlformats.org/drawingml/2006/main" x="523875" y="1200150"/>
-          <a:ext xmlns:a="http://schemas.openxmlformats.org/drawingml/2006/main" cx="11144250" cy="3619500"/>
+          <a:off xmlns:a="http://schemas.openxmlformats.org/drawingml/2006/main" x="571500" y="1400175"/>
+          <a:ext xmlns:a="http://schemas.openxmlformats.org/drawingml/2006/main" cx="11049000" cy="3238500"/>
         </p:xfrm>
         <a:graphic xmlns:a="http://schemas.openxmlformats.org/drawingml/2006/main">
           <a:graphicData uri="http://schemas.openxmlformats.org/drawingml/2006/table">
             <a:tbl>
               <a:tblPr firstRow="1" bandRow="0"/>
               <a:tblGrid>
-                <a:gridCol w="2571750"/>
-                <a:gridCol w="8572500"/>
+                <a:gridCol w="3286125"/>
+                <a:gridCol w="7762875"/>
               </a:tblGrid>
-              <a:tr h="419100">
+              <a:tr h="495300">
                 <a:tc>
                   <a:txBody>
                     <a:bodyPr/>
                     <a:lstStyle/>
                     <a:p>
                       <a:r>
-                        <a:rPr sz="1575" b="1">
+                        <a:rPr sz="1800" b="1">
                           <a:solidFill>
-                            <a:srgbClr val="FFFFFF"/>
+                            <a:srgbClr val="202020"/>
                           </a:solidFill>
                           <a:latin typeface="Microsoft JhengHei"/>
                           <a:ea typeface="Microsoft JhengHei"/>
                           <a:cs typeface="Microsoft JhengHei"/>
                         </a:rPr>
-                        <a:t>資料</a:t>
+                        <a:t>內容</a:t>
                       </a:r>
                     </a:p>
                   </a:txBody>
                   <a:tcPr marL="91440" marR="91440" marT="45720" marB="45720">
                     <a:solidFill>
-                      <a:srgbClr val="142F43"/>
+                      <a:srgbClr val="F0F0F0"/>
                     </a:solidFill>
                   </a:tcPr>
                 </a:tc>
@@ -5031,41 +3643,41 @@
                     <a:lstStyle/>
                     <a:p>
                       <a:r>
-                        <a:rPr sz="1575" b="1">
+                        <a:rPr sz="1800" b="1">
                           <a:solidFill>
-                            <a:srgbClr val="FFFFFF"/>
+                            <a:srgbClr val="202020"/>
                           </a:solidFill>
                           <a:latin typeface="Microsoft JhengHei"/>
                           <a:ea typeface="Microsoft JhengHei"/>
                           <a:cs typeface="Microsoft JhengHei"/>
                         </a:rPr>
-                        <a:t>從哪裡看</a:t>
+                        <a:t>位置</a:t>
                       </a:r>
                     </a:p>
                   </a:txBody>
                   <a:tcPr marL="91440" marR="91440" marT="45720" marB="45720">
                     <a:solidFill>
-                      <a:srgbClr val="142F43"/>
+                      <a:srgbClr val="F0F0F0"/>
                     </a:solidFill>
                   </a:tcPr>
                 </a:tc>
               </a:tr>
-              <a:tr h="640080">
+              <a:tr h="685800">
                 <a:tc>
                   <a:txBody>
                     <a:bodyPr/>
                     <a:lstStyle/>
                     <a:p>
                       <a:r>
-                        <a:rPr sz="1575">
+                        <a:rPr sz="1800">
                           <a:solidFill>
-                            <a:srgbClr val="142F43"/>
+                            <a:srgbClr val="202020"/>
                           </a:solidFill>
                           <a:latin typeface="Microsoft JhengHei"/>
                           <a:ea typeface="Microsoft JhengHei"/>
                           <a:cs typeface="Microsoft JhengHei"/>
                         </a:rPr>
-                        <a:t>PPT / 說明</a:t>
+                        <a:t>精簡交接包</a:t>
                       </a:r>
                     </a:p>
                   </a:txBody>
@@ -5077,37 +3689,37 @@
                     <a:lstStyle/>
                     <a:p>
                       <a:r>
-                        <a:rPr sz="1575">
+                        <a:rPr sz="1800">
                           <a:solidFill>
-                            <a:srgbClr val="142F43"/>
+                            <a:srgbClr val="202020"/>
                           </a:solidFill>
                           <a:latin typeface="Microsoft JhengHei"/>
                           <a:ea typeface="Microsoft JhengHei"/>
                           <a:cs typeface="Microsoft JhengHei"/>
                         </a:rPr>
-                        <a:t>01_Summary；根目錄 00_READ_ME.txt</a:t>
+                        <a:t>00_Quick_Start：PPT、5 張圖、3 個 CSV</a:t>
                       </a:r>
                     </a:p>
                   </a:txBody>
                   <a:tcPr marL="91440" marR="91440" marT="45720" marB="45720"/>
                 </a:tc>
               </a:tr>
-              <a:tr h="640080">
+              <a:tr h="685800">
                 <a:tc>
                   <a:txBody>
                     <a:bodyPr/>
                     <a:lstStyle/>
                     <a:p>
                       <a:r>
-                        <a:rPr sz="1575">
+                        <a:rPr sz="1800">
                           <a:solidFill>
-                            <a:srgbClr val="142F43"/>
+                            <a:srgbClr val="202020"/>
                           </a:solidFill>
                           <a:latin typeface="Microsoft JhengHei"/>
                           <a:ea typeface="Microsoft JhengHei"/>
                           <a:cs typeface="Microsoft JhengHei"/>
                         </a:rPr>
-                        <a:t>Figures</a:t>
+                        <a:t>完整圖表與方法</a:t>
                       </a:r>
                     </a:p>
                   </a:txBody>
@@ -5119,37 +3731,37 @@
                     <a:lstStyle/>
                     <a:p>
                       <a:r>
-                        <a:rPr sz="1575">
+                        <a:rPr sz="1800">
                           <a:solidFill>
-                            <a:srgbClr val="142F43"/>
+                            <a:srgbClr val="202020"/>
                           </a:solidFill>
                           <a:latin typeface="Microsoft JhengHei"/>
                           <a:ea typeface="Microsoft JhengHei"/>
                           <a:cs typeface="Microsoft JhengHei"/>
                         </a:rPr>
-                        <a:t>02_Figures：PNG 閱讀、PDF 排版</a:t>
+                        <a:t>07_Student_Handoff</a:t>
                       </a:r>
                     </a:p>
                   </a:txBody>
                   <a:tcPr marL="91440" marR="91440" marT="45720" marB="45720"/>
                 </a:tc>
               </a:tr>
-              <a:tr h="640080">
+              <a:tr h="685800">
                 <a:tc>
                   <a:txBody>
                     <a:bodyPr/>
                     <a:lstStyle/>
                     <a:p>
                       <a:r>
-                        <a:rPr sz="1575">
+                        <a:rPr sz="1800">
                           <a:solidFill>
-                            <a:srgbClr val="142F43"/>
+                            <a:srgbClr val="202020"/>
                           </a:solidFill>
                           <a:latin typeface="Microsoft JhengHei"/>
                           <a:ea typeface="Microsoft JhengHei"/>
                           <a:cs typeface="Microsoft JhengHei"/>
                         </a:rPr>
-                        <a:t>Tables</a:t>
+                        <a:t>分析程式</a:t>
                       </a:r>
                     </a:p>
                   </a:txBody>
@@ -5161,73 +3773,31 @@
                     <a:lstStyle/>
                     <a:p>
                       <a:r>
-                        <a:rPr sz="1575">
+                        <a:rPr sz="1800">
                           <a:solidFill>
-                            <a:srgbClr val="142F43"/>
+                            <a:srgbClr val="202020"/>
                           </a:solidFill>
                           <a:latin typeface="Microsoft JhengHei"/>
                           <a:ea typeface="Microsoft JhengHei"/>
                           <a:cs typeface="Microsoft JhengHei"/>
                         </a:rPr>
-                        <a:t>03_Tables：完整 KEGG、同方向交集、target FDR、cell counts</a:t>
+                        <a:t>05_Code_Availability：R scripts 22–27</a:t>
                       </a:r>
                     </a:p>
                   </a:txBody>
                   <a:tcPr marL="91440" marR="91440" marT="45720" marB="45720"/>
                 </a:tc>
               </a:tr>
-              <a:tr h="640080">
+              <a:tr h="685800">
                 <a:tc>
                   <a:txBody>
                     <a:bodyPr/>
                     <a:lstStyle/>
                     <a:p>
                       <a:r>
-                        <a:rPr sz="1575">
+                        <a:rPr sz="1800">
                           <a:solidFill>
-                            <a:srgbClr val="142F43"/>
-                          </a:solidFill>
-                          <a:latin typeface="Microsoft JhengHei"/>
-                          <a:ea typeface="Microsoft JhengHei"/>
-                          <a:cs typeface="Microsoft JhengHei"/>
-                        </a:rPr>
-                        <a:t>Code / 稽核記錄</a:t>
-                      </a:r>
-                    </a:p>
-                  </a:txBody>
-                  <a:tcPr marL="91440" marR="91440" marT="45720" marB="45720"/>
-                </a:tc>
-                <a:tc>
-                  <a:txBody>
-                    <a:bodyPr/>
-                    <a:lstStyle/>
-                    <a:p>
-                      <a:r>
-                        <a:rPr sz="1575">
-                          <a:solidFill>
-                            <a:srgbClr val="142F43"/>
-                          </a:solidFill>
-                          <a:latin typeface="Microsoft JhengHei"/>
-                          <a:ea typeface="Microsoft JhengHei"/>
-                          <a:cs typeface="Microsoft JhengHei"/>
-                        </a:rPr>
-                        <a:t>04_Code_Availability：R scripts 22–26、原始 bulk pipeline、版本與限制</a:t>
-                      </a:r>
-                    </a:p>
-                  </a:txBody>
-                  <a:tcPr marL="91440" marR="91440" marT="45720" marB="45720"/>
-                </a:tc>
-              </a:tr>
-              <a:tr h="640080">
-                <a:tc>
-                  <a:txBody>
-                    <a:bodyPr/>
-                    <a:lstStyle/>
-                    <a:p>
-                      <a:r>
-                        <a:rPr sz="1575">
-                          <a:solidFill>
-                            <a:srgbClr val="142F43"/>
+                            <a:srgbClr val="202020"/>
                           </a:solidFill>
                           <a:latin typeface="Microsoft JhengHei"/>
                           <a:ea typeface="Microsoft JhengHei"/>
@@ -5245,15 +3815,15 @@
                     <a:lstStyle/>
                     <a:p>
                       <a:r>
-                        <a:rPr sz="1575">
+                        <a:rPr sz="1800">
                           <a:solidFill>
-                            <a:srgbClr val="142F43"/>
+                            <a:srgbClr val="202020"/>
                           </a:solidFill>
                           <a:latin typeface="Microsoft JhengHei"/>
                           <a:ea typeface="Microsoft JhengHei"/>
                           <a:cs typeface="Microsoft JhengHei"/>
                         </a:rPr>
-                        <a:t>05_Data_Locations：原始 accession 與本機路徑，不重複搬大型檔案</a:t>
+                        <a:t>DATA_AND_OBJECT_LOCATIONS.txt</a:t>
                       </a:r>
                     </a:p>
                   </a:txBody>
@@ -5266,10 +3836,10 @@
       </p:graphicFrame>
       <p:sp>
         <p:nvSpPr>
-          <p:cNvPr id="6" name="">
+          <p:cNvPr id="3" name="">
             <a:extLst xmlns:a="http://schemas.openxmlformats.org/drawingml/2006/main">
               <a:ext uri="{FF2B5EF4-FFF2-40B4-BE49-F238E27FC236}">
-                <a16:creationId xmlns:a16="http://schemas.microsoft.com/office/drawing/2014/main" id="{A995248D-2EC4-4709-9D30-8A08D16180BC}"/>
+                <a16:creationId xmlns:a16="http://schemas.microsoft.com/office/drawing/2014/main" id="{AB359E03-049E-4682-9526-C1E3CE8433AA}"/>
               </a:ext>
             </a:extLst>
           </p:cNvPr>
@@ -5280,8 +3850,8 @@
         </p:nvSpPr>
         <p:spPr>
           <a:xfrm xmlns:a="http://schemas.openxmlformats.org/drawingml/2006/main">
-            <a:off x="619125" y="5219700"/>
-            <a:ext cx="10763250" cy="428625"/>
+            <a:off x="619125" y="5381625"/>
+            <a:ext cx="10763250" cy="571500"/>
           </a:xfrm>
           <a:prstGeom xmlns:a="http://schemas.openxmlformats.org/drawingml/2006/main" prst="rect">
             <a:avLst/>
@@ -5293,14 +3863,14 @@
         </p:spPr>
         <p:txBody>
           <a:bodyPr xmlns:a="http://schemas.openxmlformats.org/drawingml/2006/main">
-            <a:normAutofit fontScale="100000"/>
+            <a:noAutofit/>
           </a:bodyPr>
           <a:lstStyle xmlns:a="http://schemas.openxmlformats.org/drawingml/2006/main"/>
           <a:p xmlns:a="http://schemas.openxmlformats.org/drawingml/2006/main">
             <a:pPr>
-              <a:defRPr sz="1725" b="1">
-                <a:solidFill>
-                  <a:srgbClr val="0072B2"/>
+              <a:defRPr sz="1725" b="0">
+                <a:solidFill>
+                  <a:srgbClr val="202020"/>
                 </a:solidFill>
                 <a:latin typeface="Microsoft JhengHei"/>
                 <a:ea typeface="Microsoft JhengHei"/>
@@ -5308,9 +3878,9 @@
               </a:defRPr>
             </a:pPr>
             <a:r>
-              <a:rPr sz="1725" b="1">
-                <a:solidFill>
-                  <a:srgbClr val="0072B2"/>
+              <a:rPr sz="1725" b="0">
+                <a:solidFill>
+                  <a:srgbClr val="202020"/>
                 </a:solidFill>
                 <a:latin typeface="Microsoft JhengHei"/>
                 <a:ea typeface="Microsoft JhengHei"/>
@@ -5321,67 +3891,10 @@
           </a:p>
         </p:txBody>
       </p:sp>
-      <p:sp>
-        <p:nvSpPr>
-          <p:cNvPr id="7" name="">
-            <a:extLst xmlns:a="http://schemas.openxmlformats.org/drawingml/2006/main">
-              <a:ext uri="{FF2B5EF4-FFF2-40B4-BE49-F238E27FC236}">
-                <a16:creationId xmlns:a16="http://schemas.microsoft.com/office/drawing/2014/main" id="{031B62C0-E0E7-419E-91A8-24D74841062B}"/>
-              </a:ext>
-            </a:extLst>
-          </p:cNvPr>
-          <p:cNvSpPr>
-            <a:spLocks xmlns:a="http://schemas.openxmlformats.org/drawingml/2006/main" noGrp="1"/>
-          </p:cNvSpPr>
-          <p:nvPr/>
-        </p:nvSpPr>
-        <p:spPr>
-          <a:xfrm xmlns:a="http://schemas.openxmlformats.org/drawingml/2006/main">
-            <a:off x="619125" y="5819775"/>
-            <a:ext cx="10668000" cy="561975"/>
-          </a:xfrm>
-          <a:prstGeom xmlns:a="http://schemas.openxmlformats.org/drawingml/2006/main" prst="rect">
-            <a:avLst/>
-          </a:prstGeom>
-          <a:noFill xmlns:a="http://schemas.openxmlformats.org/drawingml/2006/main"/>
-          <a:ln xmlns:a="http://schemas.openxmlformats.org/drawingml/2006/main" w="0">
-            <a:noFill/>
-          </a:ln>
-        </p:spPr>
-        <p:txBody>
-          <a:bodyPr xmlns:a="http://schemas.openxmlformats.org/drawingml/2006/main">
-            <a:normAutofit fontScale="100000"/>
-          </a:bodyPr>
-          <a:lstStyle xmlns:a="http://schemas.openxmlformats.org/drawingml/2006/main"/>
-          <a:p xmlns:a="http://schemas.openxmlformats.org/drawingml/2006/main">
-            <a:pPr>
-              <a:defRPr sz="1650" b="0">
-                <a:solidFill>
-                  <a:srgbClr val="D55E00"/>
-                </a:solidFill>
-                <a:latin typeface="Microsoft JhengHei"/>
-                <a:ea typeface="Microsoft JhengHei"/>
-                <a:cs typeface="Microsoft JhengHei"/>
-              </a:defRPr>
-            </a:pPr>
-            <a:r>
-              <a:rPr sz="1650" b="0">
-                <a:solidFill>
-                  <a:srgbClr val="D55E00"/>
-                </a:solidFill>
-                <a:latin typeface="Microsoft JhengHei"/>
-                <a:ea typeface="Microsoft JhengHei"/>
-                <a:cs typeface="Microsoft JhengHei"/>
-              </a:rPr>
-              <a:t>投稿前仍需補強 malignant-cell 的獨立驗證。此包提供可追溯的探索型分析，不標榜已完成審稿驗證。</a:t>
-            </a:r>
-          </a:p>
-        </p:txBody>
-      </p:sp>
     </p:spTree>
     <p:extLst>
       <p:ext uri="{BB962C8B-B14F-4D97-AF65-F5344CB8AC3E}">
-        <p14:creationId xmlns:p14="http://schemas.microsoft.com/office/powerpoint/2010/main" val="1790759646"/>
+        <p14:creationId xmlns:p14="http://schemas.microsoft.com/office/powerpoint/2010/main" val="2020233391"/>
       </p:ext>
     </p:extLst>
   </p:cSld>
@@ -5409,10 +3922,10 @@
       </p:grpSpPr>
       <p:sp>
         <p:nvSpPr>
-          <p:cNvPr id="7" name="">
+          <p:cNvPr id="4" name="">
             <a:extLst xmlns:a="http://schemas.openxmlformats.org/drawingml/2006/main">
               <a:ext uri="{FF2B5EF4-FFF2-40B4-BE49-F238E27FC236}">
-                <a16:creationId xmlns:a16="http://schemas.microsoft.com/office/drawing/2014/main" id="{9A8A1706-01A7-45C5-ACC7-41D3F652C45B}"/>
+                <a16:creationId xmlns:a16="http://schemas.microsoft.com/office/drawing/2014/main" id="{EDBF2512-1706-42D7-ABEE-AFA7D66846D8}"/>
               </a:ext>
             </a:extLst>
           </p:cNvPr>
@@ -5423,8 +3936,8 @@
         </p:nvSpPr>
         <p:spPr>
           <a:xfrm xmlns:a="http://schemas.openxmlformats.org/drawingml/2006/main">
-            <a:off x="476250" y="190500"/>
-            <a:ext cx="10477500" cy="209550"/>
+            <a:off x="523875" y="333375"/>
+            <a:ext cx="11144250" cy="590550"/>
           </a:xfrm>
           <a:prstGeom xmlns:a="http://schemas.openxmlformats.org/drawingml/2006/main" prst="rect">
             <a:avLst/>
@@ -5436,14 +3949,14 @@
         </p:spPr>
         <p:txBody>
           <a:bodyPr xmlns:a="http://schemas.openxmlformats.org/drawingml/2006/main">
-            <a:normAutofit fontScale="79487"/>
+            <a:noAutofit/>
           </a:bodyPr>
           <a:lstStyle xmlns:a="http://schemas.openxmlformats.org/drawingml/2006/main"/>
           <a:p xmlns:a="http://schemas.openxmlformats.org/drawingml/2006/main">
             <a:pPr>
-              <a:defRPr sz="975" b="1">
-                <a:solidFill>
-                  <a:srgbClr val="D55E00"/>
+              <a:defRPr sz="2550" b="1">
+                <a:solidFill>
+                  <a:srgbClr val="202020"/>
                 </a:solidFill>
                 <a:latin typeface="Microsoft JhengHei"/>
                 <a:ea typeface="Microsoft JhengHei"/>
@@ -5451,231 +3964,60 @@
               </a:defRPr>
             </a:pPr>
             <a:r>
-              <a:rPr sz="975" b="1">
-                <a:solidFill>
-                  <a:srgbClr val="D55E00"/>
+              <a:rPr sz="2550" b="1">
+                <a:solidFill>
+                  <a:srgbClr val="202020"/>
                 </a:solidFill>
                 <a:latin typeface="Microsoft JhengHei"/>
                 <a:ea typeface="Microsoft JhengHei"/>
                 <a:cs typeface="Microsoft JhengHei"/>
               </a:rPr>
-              <a:t>DATASETS</a:t>
+              <a:t>資料集與分析設計</a:t>
             </a:r>
           </a:p>
         </p:txBody>
       </p:sp>
-      <p:sp>
-        <p:nvSpPr>
-          <p:cNvPr id="2" name="">
-            <a:extLst xmlns:a="http://schemas.openxmlformats.org/drawingml/2006/main">
-              <a:ext uri="{FF2B5EF4-FFF2-40B4-BE49-F238E27FC236}">
-                <a16:creationId xmlns:a16="http://schemas.microsoft.com/office/drawing/2014/main" id="{96C564E8-2AFF-4649-A93E-4AA6EB0EDADA}"/>
-              </a:ext>
-            </a:extLst>
-          </p:cNvPr>
-          <p:cNvSpPr>
-            <a:spLocks xmlns:a="http://schemas.openxmlformats.org/drawingml/2006/main" noGrp="1"/>
-          </p:cNvSpPr>
-          <p:nvPr/>
-        </p:nvSpPr>
-        <p:spPr>
-          <a:xfrm xmlns:a="http://schemas.openxmlformats.org/drawingml/2006/main">
-            <a:off x="476250" y="523875"/>
-            <a:ext cx="11144250" cy="476250"/>
-          </a:xfrm>
-          <a:prstGeom xmlns:a="http://schemas.openxmlformats.org/drawingml/2006/main" prst="rect">
-            <a:avLst/>
-          </a:prstGeom>
-          <a:noFill xmlns:a="http://schemas.openxmlformats.org/drawingml/2006/main"/>
-          <a:ln xmlns:a="http://schemas.openxmlformats.org/drawingml/2006/main" w="0">
-            <a:noFill/>
-          </a:ln>
-        </p:spPr>
-        <p:txBody>
-          <a:bodyPr xmlns:a="http://schemas.openxmlformats.org/drawingml/2006/main">
-            <a:normAutofit fontScale="100000"/>
-          </a:bodyPr>
-          <a:lstStyle xmlns:a="http://schemas.openxmlformats.org/drawingml/2006/main"/>
-          <a:p xmlns:a="http://schemas.openxmlformats.org/drawingml/2006/main">
-            <a:pPr>
-              <a:defRPr sz="2400" b="1">
-                <a:solidFill>
-                  <a:srgbClr val="142F43"/>
-                </a:solidFill>
-                <a:latin typeface="Microsoft JhengHei"/>
-                <a:ea typeface="Microsoft JhengHei"/>
-                <a:cs typeface="Microsoft JhengHei"/>
-              </a:defRPr>
-            </a:pPr>
-            <a:r>
-              <a:rPr sz="2400" b="1">
-                <a:solidFill>
-                  <a:srgbClr val="142F43"/>
-                </a:solidFill>
-                <a:latin typeface="Microsoft JhengHei"/>
-                <a:ea typeface="Microsoft JhengHei"/>
-                <a:cs typeface="Microsoft JhengHei"/>
-              </a:rPr>
-              <a:t>資料集與比較方向</a:t>
-            </a:r>
-          </a:p>
-        </p:txBody>
-      </p:sp>
-      <p:sp>
-        <p:nvSpPr>
-          <p:cNvPr id="3" name="">
-            <a:extLst xmlns:a="http://schemas.openxmlformats.org/drawingml/2006/main">
-              <a:ext uri="{FF2B5EF4-FFF2-40B4-BE49-F238E27FC236}">
-                <a16:creationId xmlns:a16="http://schemas.microsoft.com/office/drawing/2014/main" id="{D072FCBF-C34B-46E6-9C4B-229639DB172E}"/>
-              </a:ext>
-            </a:extLst>
-          </p:cNvPr>
-          <p:cNvSpPr>
-            <a:spLocks xmlns:a="http://schemas.openxmlformats.org/drawingml/2006/main" noGrp="1"/>
-          </p:cNvSpPr>
-          <p:nvPr/>
-        </p:nvSpPr>
-        <p:spPr>
-          <a:xfrm xmlns:a="http://schemas.openxmlformats.org/drawingml/2006/main">
-            <a:off x="476250" y="6543675"/>
-            <a:ext cx="10287000" cy="171450"/>
-          </a:xfrm>
-          <a:prstGeom xmlns:a="http://schemas.openxmlformats.org/drawingml/2006/main" prst="rect">
-            <a:avLst/>
-          </a:prstGeom>
-          <a:noFill xmlns:a="http://schemas.openxmlformats.org/drawingml/2006/main"/>
-          <a:ln xmlns:a="http://schemas.openxmlformats.org/drawingml/2006/main" w="0">
-            <a:noFill/>
-          </a:ln>
-        </p:spPr>
-        <p:txBody>
-          <a:bodyPr xmlns:a="http://schemas.openxmlformats.org/drawingml/2006/main">
-            <a:normAutofit fontScale="63636"/>
-          </a:bodyPr>
-          <a:lstStyle xmlns:a="http://schemas.openxmlformats.org/drawingml/2006/main"/>
-          <a:p xmlns:a="http://schemas.openxmlformats.org/drawingml/2006/main">
-            <a:pPr>
-              <a:defRPr sz="825" b="0">
-                <a:solidFill>
-                  <a:srgbClr val="4D5B66"/>
-                </a:solidFill>
-                <a:latin typeface="Microsoft JhengHei"/>
-                <a:ea typeface="Microsoft JhengHei"/>
-                <a:cs typeface="Microsoft JhengHei"/>
-              </a:defRPr>
-            </a:pPr>
-            <a:r>
-              <a:rPr sz="825" b="0">
-                <a:solidFill>
-                  <a:srgbClr val="4D5B66"/>
-                </a:solidFill>
-                <a:latin typeface="Microsoft JhengHei"/>
-                <a:ea typeface="Microsoft JhengHei"/>
-                <a:cs typeface="Microsoft JhengHei"/>
-              </a:rPr>
-              <a:t>GSE262271 / GSE218858  |  Reviewed 15 September 2026</a:t>
-            </a:r>
-          </a:p>
-        </p:txBody>
-      </p:sp>
-      <p:sp>
-        <p:nvSpPr>
-          <p:cNvPr id="4" name="">
-            <a:extLst xmlns:a="http://schemas.openxmlformats.org/drawingml/2006/main">
-              <a:ext uri="{FF2B5EF4-FFF2-40B4-BE49-F238E27FC236}">
-                <a16:creationId xmlns:a16="http://schemas.microsoft.com/office/drawing/2014/main" id="{0F97A5FA-6D7C-4D36-8FB1-F99C230EF894}"/>
-              </a:ext>
-            </a:extLst>
-          </p:cNvPr>
-          <p:cNvSpPr>
-            <a:spLocks xmlns:a="http://schemas.openxmlformats.org/drawingml/2006/main" noGrp="1"/>
-          </p:cNvSpPr>
-          <p:nvPr/>
-        </p:nvSpPr>
-        <p:spPr>
-          <a:xfrm xmlns:a="http://schemas.openxmlformats.org/drawingml/2006/main">
-            <a:off x="11334750" y="6543675"/>
-            <a:ext cx="381000" cy="171450"/>
-          </a:xfrm>
-          <a:prstGeom xmlns:a="http://schemas.openxmlformats.org/drawingml/2006/main" prst="rect">
-            <a:avLst/>
-          </a:prstGeom>
-          <a:noFill xmlns:a="http://schemas.openxmlformats.org/drawingml/2006/main"/>
-          <a:ln xmlns:a="http://schemas.openxmlformats.org/drawingml/2006/main" w="0">
-            <a:noFill/>
-          </a:ln>
-        </p:spPr>
-        <p:txBody>
-          <a:bodyPr xmlns:a="http://schemas.openxmlformats.org/drawingml/2006/main">
-            <a:normAutofit fontScale="63636"/>
-          </a:bodyPr>
-          <a:lstStyle xmlns:a="http://schemas.openxmlformats.org/drawingml/2006/main"/>
-          <a:p xmlns:a="http://schemas.openxmlformats.org/drawingml/2006/main">
-            <a:pPr>
-              <a:defRPr sz="825" b="0">
-                <a:solidFill>
-                  <a:srgbClr val="142F43"/>
-                </a:solidFill>
-                <a:latin typeface="Microsoft JhengHei"/>
-                <a:ea typeface="Microsoft JhengHei"/>
-                <a:cs typeface="Microsoft JhengHei"/>
-              </a:defRPr>
-            </a:pPr>
-            <a:r>
-              <a:rPr sz="825" b="0">
-                <a:solidFill>
-                  <a:srgbClr val="142F43"/>
-                </a:solidFill>
-                <a:latin typeface="Microsoft JhengHei"/>
-                <a:ea typeface="Microsoft JhengHei"/>
-                <a:cs typeface="Microsoft JhengHei"/>
-              </a:rPr>
-              <a:t>02</a:t>
-            </a:r>
-          </a:p>
-        </p:txBody>
-      </p:sp>
       <p:graphicFrame>
         <p:nvGraphicFramePr>
-          <p:cNvPr id="11" name=""/>
+          <p:cNvPr id="5" name=""/>
           <p:cNvGraphicFramePr/>
           <p:nvPr/>
         </p:nvGraphicFramePr>
         <p:xfrm>
-          <a:off xmlns:a="http://schemas.openxmlformats.org/drawingml/2006/main" x="523875" y="1238250"/>
-          <a:ext xmlns:a="http://schemas.openxmlformats.org/drawingml/2006/main" cx="11144250" cy="3762375"/>
+          <a:off xmlns:a="http://schemas.openxmlformats.org/drawingml/2006/main" x="571500" y="1476375"/>
+          <a:ext xmlns:a="http://schemas.openxmlformats.org/drawingml/2006/main" cx="11049000" cy="3143250"/>
         </p:xfrm>
         <a:graphic xmlns:a="http://schemas.openxmlformats.org/drawingml/2006/main">
           <a:graphicData uri="http://schemas.openxmlformats.org/drawingml/2006/table">
             <a:tbl>
               <a:tblPr firstRow="1" bandRow="0"/>
               <a:tblGrid>
-                <a:gridCol w="2286000"/>
-                <a:gridCol w="4191000"/>
-                <a:gridCol w="4667250"/>
+                <a:gridCol w="3238500"/>
+                <a:gridCol w="3714750"/>
+                <a:gridCol w="4095750"/>
               </a:tblGrid>
-              <a:tr h="419100">
+              <a:tr h="495300">
                 <a:tc>
                   <a:txBody>
                     <a:bodyPr/>
                     <a:lstStyle/>
                     <a:p>
                       <a:r>
-                        <a:rPr sz="1500" b="1">
+                        <a:rPr sz="1800" b="1">
                           <a:solidFill>
-                            <a:srgbClr val="FFFFFF"/>
+                            <a:srgbClr val="202020"/>
                           </a:solidFill>
                           <a:latin typeface="Microsoft JhengHei"/>
                           <a:ea typeface="Microsoft JhengHei"/>
                           <a:cs typeface="Microsoft JhengHei"/>
                         </a:rPr>
-                        <a:t>Dataset</a:t>
+                        <a:t>資料集</a:t>
                       </a:r>
                     </a:p>
                   </a:txBody>
                   <a:tcPr marL="91440" marR="91440" marT="45720" marB="45720">
                     <a:solidFill>
-                      <a:srgbClr val="142F43"/>
+                      <a:srgbClr val="F0F0F0"/>
                     </a:solidFill>
                   </a:tcPr>
                 </a:tc>
@@ -5685,21 +4027,21 @@
                     <a:lstStyle/>
                     <a:p>
                       <a:r>
-                        <a:rPr sz="1500" b="1">
+                        <a:rPr sz="1800" b="1">
                           <a:solidFill>
-                            <a:srgbClr val="FFFFFF"/>
+                            <a:srgbClr val="202020"/>
                           </a:solidFill>
                           <a:latin typeface="Microsoft JhengHei"/>
                           <a:ea typeface="Microsoft JhengHei"/>
                           <a:cs typeface="Microsoft JhengHei"/>
                         </a:rPr>
-                        <a:t>設計</a:t>
+                        <a:t>生物樣本</a:t>
                       </a:r>
                     </a:p>
                   </a:txBody>
                   <a:tcPr marL="91440" marR="91440" marT="45720" marB="45720">
                     <a:solidFill>
-                      <a:srgbClr val="142F43"/>
+                      <a:srgbClr val="F0F0F0"/>
                     </a:solidFill>
                   </a:tcPr>
                 </a:tc>
@@ -5709,35 +4051,35 @@
                     <a:lstStyle/>
                     <a:p>
                       <a:r>
-                        <a:rPr sz="1500" b="1">
+                        <a:rPr sz="1800" b="1">
                           <a:solidFill>
-                            <a:srgbClr val="FFFFFF"/>
+                            <a:srgbClr val="202020"/>
                           </a:solidFill>
                           <a:latin typeface="Microsoft JhengHei"/>
                           <a:ea typeface="Microsoft JhengHei"/>
                           <a:cs typeface="Microsoft JhengHei"/>
                         </a:rPr>
-                        <a:t>模型與正方向</a:t>
+                        <a:t>GSEA 排名來源</a:t>
                       </a:r>
                     </a:p>
                   </a:txBody>
                   <a:tcPr marL="91440" marR="91440" marT="45720" marB="45720">
                     <a:solidFill>
-                      <a:srgbClr val="142F43"/>
+                      <a:srgbClr val="F0F0F0"/>
                     </a:solidFill>
                   </a:tcPr>
                 </a:tc>
               </a:tr>
-              <a:tr h="1671638">
+              <a:tr h="1323975">
                 <a:tc>
                   <a:txBody>
                     <a:bodyPr/>
                     <a:lstStyle/>
                     <a:p>
                       <a:r>
-                        <a:rPr sz="1500">
+                        <a:rPr sz="1800">
                           <a:solidFill>
-                            <a:srgbClr val="142F43"/>
+                            <a:srgbClr val="202020"/>
                           </a:solidFill>
                           <a:latin typeface="Microsoft JhengHei"/>
                           <a:ea typeface="Microsoft JhengHei"/>
@@ -5748,15 +4090,15 @@
                     </a:p>
                     <a:p>
                       <a:r>
-                        <a:rPr sz="1500">
+                        <a:rPr sz="1800">
                           <a:solidFill>
-                            <a:srgbClr val="142F43"/>
+                            <a:srgbClr val="202020"/>
                           </a:solidFill>
                           <a:latin typeface="Microsoft JhengHei"/>
                           <a:ea typeface="Microsoft JhengHei"/>
                           <a:cs typeface="Microsoft JhengHei"/>
                         </a:rPr>
-                        <a:t>Human scRNA-seq</a:t>
+                        <a:t>Human T-ALL scRNA-seq</a:t>
                       </a:r>
                     </a:p>
                   </a:txBody>
@@ -5768,54 +4110,28 @@
                     <a:lstStyle/>
                     <a:p>
                       <a:r>
-                        <a:rPr sz="1500">
+                        <a:rPr sz="1800">
                           <a:solidFill>
-                            <a:srgbClr val="142F43"/>
+                            <a:srgbClr val="202020"/>
                           </a:solidFill>
                           <a:latin typeface="Microsoft JhengHei"/>
                           <a:ea typeface="Microsoft JhengHei"/>
                           <a:cs typeface="Microsoft JhengHei"/>
                         </a:rPr>
-                        <a:t>3 paired patients</a:t>
+                        <a:t>3 位病人</a:t>
                       </a:r>
                     </a:p>
                     <a:p>
                       <a:r>
-                        <a:rPr sz="1500">
+                        <a:rPr sz="1800">
                           <a:solidFill>
-                            <a:srgbClr val="142F43"/>
+                            <a:srgbClr val="202020"/>
                           </a:solidFill>
                           <a:latin typeface="Microsoft JhengHei"/>
                           <a:ea typeface="Microsoft JhengHei"/>
                           <a:cs typeface="Microsoft JhengHei"/>
                         </a:rPr>
-                        <a:t>P1: M104 / M127</a:t>
-                      </a:r>
-                    </a:p>
-                    <a:p>
-                      <a:r>
-                        <a:rPr sz="1500">
-                          <a:solidFill>
-                            <a:srgbClr val="142F43"/>
-                          </a:solidFill>
-                          <a:latin typeface="Microsoft JhengHei"/>
-                          <a:ea typeface="Microsoft JhengHei"/>
-                          <a:cs typeface="Microsoft JhengHei"/>
-                        </a:rPr>
-                        <a:t>P2: M143 / M148</a:t>
-                      </a:r>
-                    </a:p>
-                    <a:p>
-                      <a:r>
-                        <a:rPr sz="1500">
-                          <a:solidFill>
-                            <a:srgbClr val="142F43"/>
-                          </a:solidFill>
-                          <a:latin typeface="Microsoft JhengHei"/>
-                          <a:ea typeface="Microsoft JhengHei"/>
-                          <a:cs typeface="Microsoft JhengHei"/>
-                        </a:rPr>
-                        <a:t>P3: M187 / M187r</a:t>
+                        <a:t>Diagnosis / relapse 配對</a:t>
                       </a:r>
                     </a:p>
                   </a:txBody>
@@ -5827,22 +4143,22 @@
                     <a:lstStyle/>
                     <a:p>
                       <a:r>
-                        <a:rPr sz="1500">
+                        <a:rPr sz="1800">
                           <a:solidFill>
-                            <a:srgbClr val="142F43"/>
+                            <a:srgbClr val="202020"/>
                           </a:solidFill>
                           <a:latin typeface="Microsoft JhengHei"/>
                           <a:ea typeface="Microsoft JhengHei"/>
                           <a:cs typeface="Microsoft JhengHei"/>
                         </a:rPr>
-                        <a:t>Patient-sample pseudobulk</a:t>
+                        <a:t>Paired pseudobulk</a:t>
                       </a:r>
                     </a:p>
                     <a:p>
                       <a:r>
-                        <a:rPr sz="1500">
+                        <a:rPr sz="1800">
                           <a:solidFill>
-                            <a:srgbClr val="142F43"/>
+                            <a:srgbClr val="202020"/>
                           </a:solidFill>
                           <a:latin typeface="Microsoft JhengHei"/>
                           <a:ea typeface="Microsoft JhengHei"/>
@@ -5851,33 +4167,20 @@
                         <a:t>edgeR: patient + condition</a:t>
                       </a:r>
                     </a:p>
-                    <a:p>
-                      <a:r>
-                        <a:rPr sz="1500">
-                          <a:solidFill>
-                            <a:srgbClr val="142F43"/>
-                          </a:solidFill>
-                          <a:latin typeface="Microsoft JhengHei"/>
-                          <a:ea typeface="Microsoft JhengHei"/>
-                          <a:cs typeface="Microsoft JhengHei"/>
-                        </a:rPr>
-                        <a:t>Positive = relapse higher</a:t>
-                      </a:r>
-                    </a:p>
                   </a:txBody>
                   <a:tcPr marL="91440" marR="91440" marT="45720" marB="45720"/>
                 </a:tc>
               </a:tr>
-              <a:tr h="1671638">
+              <a:tr h="1323975">
                 <a:tc>
                   <a:txBody>
                     <a:bodyPr/>
                     <a:lstStyle/>
                     <a:p>
                       <a:r>
-                        <a:rPr sz="1500">
+                        <a:rPr sz="1800">
                           <a:solidFill>
-                            <a:srgbClr val="142F43"/>
+                            <a:srgbClr val="202020"/>
                           </a:solidFill>
                           <a:latin typeface="Microsoft JhengHei"/>
                           <a:ea typeface="Microsoft JhengHei"/>
@@ -5888,9 +4191,9 @@
                     </a:p>
                     <a:p>
                       <a:r>
-                        <a:rPr sz="1500">
+                        <a:rPr sz="1800">
                           <a:solidFill>
-                            <a:srgbClr val="142F43"/>
+                            <a:srgbClr val="202020"/>
                           </a:solidFill>
                           <a:latin typeface="Microsoft JhengHei"/>
                           <a:ea typeface="Microsoft JhengHei"/>
@@ -5908,54 +4211,28 @@
                     <a:lstStyle/>
                     <a:p>
                       <a:r>
-                        <a:rPr sz="1500">
+                        <a:rPr sz="1800">
                           <a:solidFill>
-                            <a:srgbClr val="142F43"/>
+                            <a:srgbClr val="202020"/>
                           </a:solidFill>
                           <a:latin typeface="Microsoft JhengHei"/>
                           <a:ea typeface="Microsoft JhengHei"/>
                           <a:cs typeface="Microsoft JhengHei"/>
                         </a:rPr>
-                        <a:t>Rag2-/- DN stage</a:t>
+                        <a:t>STAT5B N642H：n = 3</a:t>
                       </a:r>
                     </a:p>
                     <a:p>
                       <a:r>
-                        <a:rPr sz="1500">
+                        <a:rPr sz="1800">
                           <a:solidFill>
-                            <a:srgbClr val="142F43"/>
+                            <a:srgbClr val="202020"/>
                           </a:solidFill>
                           <a:latin typeface="Microsoft JhengHei"/>
                           <a:ea typeface="Microsoft JhengHei"/>
                           <a:cs typeface="Microsoft JhengHei"/>
                         </a:rPr>
-                        <a:t>STAT5B N642H: n = 3</a:t>
-                      </a:r>
-                    </a:p>
-                    <a:p>
-                      <a:r>
-                        <a:rPr sz="1500">
-                          <a:solidFill>
-                            <a:srgbClr val="142F43"/>
-                          </a:solidFill>
-                          <a:latin typeface="Microsoft JhengHei"/>
-                          <a:ea typeface="Microsoft JhengHei"/>
-                          <a:cs typeface="Microsoft JhengHei"/>
-                        </a:rPr>
-                        <a:t>Control: n = 3</a:t>
-                      </a:r>
-                    </a:p>
-                    <a:p>
-                      <a:r>
-                        <a:rPr sz="1500">
-                          <a:solidFill>
-                            <a:srgbClr val="142F43"/>
-                          </a:solidFill>
-                          <a:latin typeface="Microsoft JhengHei"/>
-                          <a:ea typeface="Microsoft JhengHei"/>
-                          <a:cs typeface="Microsoft JhengHei"/>
-                        </a:rPr>
-                        <a:t>Independent biological samples</a:t>
+                        <a:t>Control：n = 3</a:t>
                       </a:r>
                     </a:p>
                   </a:txBody>
@@ -5967,9 +4244,9 @@
                     <a:lstStyle/>
                     <a:p>
                       <a:r>
-                        <a:rPr sz="1500">
+                        <a:rPr sz="1800">
                           <a:solidFill>
-                            <a:srgbClr val="142F43"/>
+                            <a:srgbClr val="202020"/>
                           </a:solidFill>
                           <a:latin typeface="Microsoft JhengHei"/>
                           <a:ea typeface="Microsoft JhengHei"/>
@@ -5980,28 +4257,15 @@
                     </a:p>
                     <a:p>
                       <a:r>
-                        <a:rPr sz="1500">
+                        <a:rPr sz="1800">
                           <a:solidFill>
-                            <a:srgbClr val="142F43"/>
+                            <a:srgbClr val="202020"/>
                           </a:solidFill>
                           <a:latin typeface="Microsoft JhengHei"/>
                           <a:ea typeface="Microsoft JhengHei"/>
                           <a:cs typeface="Microsoft JhengHei"/>
                         </a:rPr>
-                        <a:t>R2S5b_DN vs R2b_DN</a:t>
-                      </a:r>
-                    </a:p>
-                    <a:p>
-                      <a:r>
-                        <a:rPr sz="1500">
-                          <a:solidFill>
-                            <a:srgbClr val="142F43"/>
-                          </a:solidFill>
-                          <a:latin typeface="Microsoft JhengHei"/>
-                          <a:ea typeface="Microsoft JhengHei"/>
-                          <a:cs typeface="Microsoft JhengHei"/>
-                        </a:rPr>
-                        <a:t>Positive = N642H higher</a:t>
+                        <a:t>Wald statistic</a:t>
                       </a:r>
                     </a:p>
                   </a:txBody>
@@ -6014,10 +4278,10 @@
       </p:graphicFrame>
       <p:sp>
         <p:nvSpPr>
-          <p:cNvPr id="6" name="">
+          <p:cNvPr id="3" name="">
             <a:extLst xmlns:a="http://schemas.openxmlformats.org/drawingml/2006/main">
               <a:ext uri="{FF2B5EF4-FFF2-40B4-BE49-F238E27FC236}">
-                <a16:creationId xmlns:a16="http://schemas.microsoft.com/office/drawing/2014/main" id="{FE3F7C41-9030-4A5E-BC00-4EB725F4DE5B}"/>
+                <a16:creationId xmlns:a16="http://schemas.microsoft.com/office/drawing/2014/main" id="{0CB5B7A0-CBF8-45DE-9D26-7E151964EAA4}"/>
               </a:ext>
             </a:extLst>
           </p:cNvPr>
@@ -6028,8 +4292,8 @@
         </p:nvSpPr>
         <p:spPr>
           <a:xfrm xmlns:a="http://schemas.openxmlformats.org/drawingml/2006/main">
-            <a:off x="619125" y="5381625"/>
-            <a:ext cx="10668000" cy="666750"/>
+            <a:off x="619125" y="5286375"/>
+            <a:ext cx="10858500" cy="666750"/>
           </a:xfrm>
           <a:prstGeom xmlns:a="http://schemas.openxmlformats.org/drawingml/2006/main" prst="rect">
             <a:avLst/>
@@ -6041,14 +4305,14 @@
         </p:spPr>
         <p:txBody>
           <a:bodyPr xmlns:a="http://schemas.openxmlformats.org/drawingml/2006/main">
-            <a:normAutofit fontScale="100000"/>
+            <a:noAutofit/>
           </a:bodyPr>
           <a:lstStyle xmlns:a="http://schemas.openxmlformats.org/drawingml/2006/main"/>
           <a:p xmlns:a="http://schemas.openxmlformats.org/drawingml/2006/main">
             <a:pPr>
-              <a:defRPr sz="1800" b="1">
-                <a:solidFill>
-                  <a:srgbClr val="142F43"/>
+              <a:defRPr sz="1800" b="0">
+                <a:solidFill>
+                  <a:srgbClr val="202020"/>
                 </a:solidFill>
                 <a:latin typeface="Microsoft JhengHei"/>
                 <a:ea typeface="Microsoft JhengHei"/>
@@ -6056,15 +4320,15 @@
               </a:defRPr>
             </a:pPr>
             <a:r>
-              <a:rPr sz="1800" b="1">
-                <a:solidFill>
-                  <a:srgbClr val="142F43"/>
+              <a:rPr sz="1800" b="0">
+                <a:solidFill>
+                  <a:srgbClr val="202020"/>
                 </a:solidFill>
                 <a:latin typeface="Microsoft JhengHei"/>
                 <a:ea typeface="Microsoft JhengHei"/>
                 <a:cs typeface="Microsoft JhengHei"/>
               </a:rPr>
-              <a:t>Single-cell 的 replicate 是病人 sample，不是每一顆 cell。兩组資料不可直接合併成同一模型。</a:t>
+              <a:t>正 NES：relapse 較高（single-cell）或 N642H 較高（bulk）</a:t>
             </a:r>
           </a:p>
         </p:txBody>
@@ -6072,7 +4336,7 @@
     </p:spTree>
     <p:extLst>
       <p:ext uri="{BB962C8B-B14F-4D97-AF65-F5344CB8AC3E}">
-        <p14:creationId xmlns:p14="http://schemas.microsoft.com/office/powerpoint/2010/main" val="174660695"/>
+        <p14:creationId xmlns:p14="http://schemas.microsoft.com/office/powerpoint/2010/main" val="863844452"/>
       </p:ext>
     </p:extLst>
   </p:cSld>
@@ -6100,10 +4364,10 @@
       </p:grpSpPr>
       <p:sp>
         <p:nvSpPr>
-          <p:cNvPr id="9" name="">
+          <p:cNvPr id="3" name="">
             <a:extLst xmlns:a="http://schemas.openxmlformats.org/drawingml/2006/main">
               <a:ext uri="{FF2B5EF4-FFF2-40B4-BE49-F238E27FC236}">
-                <a16:creationId xmlns:a16="http://schemas.microsoft.com/office/drawing/2014/main" id="{F82EFFD0-3ED3-4C20-9308-CAD50DCE249D}"/>
+                <a16:creationId xmlns:a16="http://schemas.microsoft.com/office/drawing/2014/main" id="{B1D3BC2D-C5F3-4FF4-9F88-22439BD06DF2}"/>
               </a:ext>
             </a:extLst>
           </p:cNvPr>
@@ -6114,8 +4378,8 @@
         </p:nvSpPr>
         <p:spPr>
           <a:xfrm xmlns:a="http://schemas.openxmlformats.org/drawingml/2006/main">
-            <a:off x="476250" y="190500"/>
-            <a:ext cx="10477500" cy="209550"/>
+            <a:off x="523875" y="333375"/>
+            <a:ext cx="11144250" cy="590550"/>
           </a:xfrm>
           <a:prstGeom xmlns:a="http://schemas.openxmlformats.org/drawingml/2006/main" prst="rect">
             <a:avLst/>
@@ -6127,14 +4391,14 @@
         </p:spPr>
         <p:txBody>
           <a:bodyPr xmlns:a="http://schemas.openxmlformats.org/drawingml/2006/main">
-            <a:normAutofit fontScale="79487"/>
+            <a:noAutofit/>
           </a:bodyPr>
           <a:lstStyle xmlns:a="http://schemas.openxmlformats.org/drawingml/2006/main"/>
           <a:p xmlns:a="http://schemas.openxmlformats.org/drawingml/2006/main">
             <a:pPr>
-              <a:defRPr sz="975" b="1">
-                <a:solidFill>
-                  <a:srgbClr val="D55E00"/>
+              <a:defRPr sz="2550" b="1">
+                <a:solidFill>
+                  <a:srgbClr val="202020"/>
                 </a:solidFill>
                 <a:latin typeface="Microsoft JhengHei"/>
                 <a:ea typeface="Microsoft JhengHei"/>
@@ -6142,456 +4406,45 @@
               </a:defRPr>
             </a:pPr>
             <a:r>
-              <a:rPr sz="975" b="1">
-                <a:solidFill>
-                  <a:srgbClr val="D55E00"/>
+              <a:rPr sz="2550" b="1">
+                <a:solidFill>
+                  <a:srgbClr val="202020"/>
                 </a:solidFill>
                 <a:latin typeface="Microsoft JhengHei"/>
                 <a:ea typeface="Microsoft JhengHei"/>
                 <a:cs typeface="Microsoft JhengHei"/>
               </a:rPr>
-              <a:t>CELL IDENTITY</a:t>
+              <a:t>Cell type annotation</a:t>
             </a:r>
           </a:p>
         </p:txBody>
       </p:sp>
-      <p:sp>
-        <p:nvSpPr>
-          <p:cNvPr id="2" name="">
-            <a:extLst xmlns:a="http://schemas.openxmlformats.org/drawingml/2006/main">
-              <a:ext uri="{FF2B5EF4-FFF2-40B4-BE49-F238E27FC236}">
-                <a16:creationId xmlns:a16="http://schemas.microsoft.com/office/drawing/2014/main" id="{35742A46-CDDD-4C71-BEB1-D9C33191E6AB}"/>
-              </a:ext>
-            </a:extLst>
-          </p:cNvPr>
-          <p:cNvSpPr>
-            <a:spLocks xmlns:a="http://schemas.openxmlformats.org/drawingml/2006/main" noGrp="1"/>
-          </p:cNvSpPr>
-          <p:nvPr/>
-        </p:nvSpPr>
-        <p:spPr>
-          <a:xfrm xmlns:a="http://schemas.openxmlformats.org/drawingml/2006/main">
-            <a:off x="476250" y="523875"/>
-            <a:ext cx="11144250" cy="476250"/>
-          </a:xfrm>
-          <a:prstGeom xmlns:a="http://schemas.openxmlformats.org/drawingml/2006/main" prst="rect">
-            <a:avLst/>
-          </a:prstGeom>
-          <a:noFill xmlns:a="http://schemas.openxmlformats.org/drawingml/2006/main"/>
-          <a:ln xmlns:a="http://schemas.openxmlformats.org/drawingml/2006/main" w="0">
-            <a:noFill/>
-          </a:ln>
-        </p:spPr>
-        <p:txBody>
-          <a:bodyPr xmlns:a="http://schemas.openxmlformats.org/drawingml/2006/main">
-            <a:normAutofit fontScale="100000"/>
-          </a:bodyPr>
-          <a:lstStyle xmlns:a="http://schemas.openxmlformats.org/drawingml/2006/main"/>
-          <a:p xmlns:a="http://schemas.openxmlformats.org/drawingml/2006/main">
-            <a:pPr>
-              <a:defRPr sz="2400" b="1">
-                <a:solidFill>
-                  <a:srgbClr val="142F43"/>
-                </a:solidFill>
-                <a:latin typeface="Microsoft JhengHei"/>
-                <a:ea typeface="Microsoft JhengHei"/>
-                <a:cs typeface="Microsoft JhengHei"/>
-              </a:defRPr>
-            </a:pPr>
-            <a:r>
-              <a:rPr sz="2400" b="1">
-                <a:solidFill>
-                  <a:srgbClr val="142F43"/>
-                </a:solidFill>
-                <a:latin typeface="Microsoft JhengHei"/>
-                <a:ea typeface="Microsoft JhengHei"/>
-                <a:cs typeface="Microsoft JhengHei"/>
-              </a:rPr>
-              <a:t>Cell lineage annotation</a:t>
-            </a:r>
-          </a:p>
-        </p:txBody>
-      </p:sp>
-      <p:sp>
-        <p:nvSpPr>
-          <p:cNvPr id="3" name="">
-            <a:extLst xmlns:a="http://schemas.openxmlformats.org/drawingml/2006/main">
-              <a:ext uri="{FF2B5EF4-FFF2-40B4-BE49-F238E27FC236}">
-                <a16:creationId xmlns:a16="http://schemas.microsoft.com/office/drawing/2014/main" id="{8D1E1451-3766-4C8B-962B-F5D8625679A0}"/>
-              </a:ext>
-            </a:extLst>
-          </p:cNvPr>
-          <p:cNvSpPr>
-            <a:spLocks xmlns:a="http://schemas.openxmlformats.org/drawingml/2006/main" noGrp="1"/>
-          </p:cNvSpPr>
-          <p:nvPr/>
-        </p:nvSpPr>
-        <p:spPr>
-          <a:xfrm xmlns:a="http://schemas.openxmlformats.org/drawingml/2006/main">
-            <a:off x="476250" y="6543675"/>
-            <a:ext cx="10287000" cy="171450"/>
-          </a:xfrm>
-          <a:prstGeom xmlns:a="http://schemas.openxmlformats.org/drawingml/2006/main" prst="rect">
-            <a:avLst/>
-          </a:prstGeom>
-          <a:noFill xmlns:a="http://schemas.openxmlformats.org/drawingml/2006/main"/>
-          <a:ln xmlns:a="http://schemas.openxmlformats.org/drawingml/2006/main" w="0">
-            <a:noFill/>
-          </a:ln>
-        </p:spPr>
-        <p:txBody>
-          <a:bodyPr xmlns:a="http://schemas.openxmlformats.org/drawingml/2006/main">
-            <a:normAutofit fontScale="63636"/>
-          </a:bodyPr>
-          <a:lstStyle xmlns:a="http://schemas.openxmlformats.org/drawingml/2006/main"/>
-          <a:p xmlns:a="http://schemas.openxmlformats.org/drawingml/2006/main">
-            <a:pPr>
-              <a:defRPr sz="825" b="0">
-                <a:solidFill>
-                  <a:srgbClr val="4D5B66"/>
-                </a:solidFill>
-                <a:latin typeface="Microsoft JhengHei"/>
-                <a:ea typeface="Microsoft JhengHei"/>
-                <a:cs typeface="Microsoft JhengHei"/>
-              </a:defRPr>
-            </a:pPr>
-            <a:r>
-              <a:rPr sz="825" b="0">
-                <a:solidFill>
-                  <a:srgbClr val="4D5B66"/>
-                </a:solidFill>
-                <a:latin typeface="Microsoft JhengHei"/>
-                <a:ea typeface="Microsoft JhengHei"/>
-                <a:cs typeface="Microsoft JhengHei"/>
-              </a:rPr>
-              <a:t>GSE262271 / GSE218858  |  Reviewed 15 September 2026</a:t>
-            </a:r>
-          </a:p>
-        </p:txBody>
-      </p:sp>
-      <p:sp>
-        <p:nvSpPr>
-          <p:cNvPr id="4" name="">
-            <a:extLst xmlns:a="http://schemas.openxmlformats.org/drawingml/2006/main">
-              <a:ext uri="{FF2B5EF4-FFF2-40B4-BE49-F238E27FC236}">
-                <a16:creationId xmlns:a16="http://schemas.microsoft.com/office/drawing/2014/main" id="{3D90C2EC-5A2C-477D-A288-1C86FE43532C}"/>
-              </a:ext>
-            </a:extLst>
-          </p:cNvPr>
-          <p:cNvSpPr>
-            <a:spLocks xmlns:a="http://schemas.openxmlformats.org/drawingml/2006/main" noGrp="1"/>
-          </p:cNvSpPr>
-          <p:nvPr/>
-        </p:nvSpPr>
-        <p:spPr>
-          <a:xfrm xmlns:a="http://schemas.openxmlformats.org/drawingml/2006/main">
-            <a:off x="11334750" y="6543675"/>
-            <a:ext cx="381000" cy="171450"/>
-          </a:xfrm>
-          <a:prstGeom xmlns:a="http://schemas.openxmlformats.org/drawingml/2006/main" prst="rect">
-            <a:avLst/>
-          </a:prstGeom>
-          <a:noFill xmlns:a="http://schemas.openxmlformats.org/drawingml/2006/main"/>
-          <a:ln xmlns:a="http://schemas.openxmlformats.org/drawingml/2006/main" w="0">
-            <a:noFill/>
-          </a:ln>
-        </p:spPr>
-        <p:txBody>
-          <a:bodyPr xmlns:a="http://schemas.openxmlformats.org/drawingml/2006/main">
-            <a:normAutofit fontScale="63636"/>
-          </a:bodyPr>
-          <a:lstStyle xmlns:a="http://schemas.openxmlformats.org/drawingml/2006/main"/>
-          <a:p xmlns:a="http://schemas.openxmlformats.org/drawingml/2006/main">
-            <a:pPr>
-              <a:defRPr sz="825" b="0">
-                <a:solidFill>
-                  <a:srgbClr val="142F43"/>
-                </a:solidFill>
-                <a:latin typeface="Microsoft JhengHei"/>
-                <a:ea typeface="Microsoft JhengHei"/>
-                <a:cs typeface="Microsoft JhengHei"/>
-              </a:defRPr>
-            </a:pPr>
-            <a:r>
-              <a:rPr sz="825" b="0">
-                <a:solidFill>
-                  <a:srgbClr val="142F43"/>
-                </a:solidFill>
-                <a:latin typeface="Microsoft JhengHei"/>
-                <a:ea typeface="Microsoft JhengHei"/>
-                <a:cs typeface="Microsoft JhengHei"/>
-              </a:rPr>
-              <a:t>03</a:t>
-            </a:r>
-          </a:p>
-        </p:txBody>
-      </p:sp>
       <p:pic>
         <p:nvPicPr>
-          <p:cNvPr id="13" name=""/>
+          <p:cNvPr id="4" name=""/>
           <p:cNvPicPr>
             <a:picLocks xmlns:a="http://schemas.openxmlformats.org/drawingml/2006/main" noChangeAspect="1"/>
           </p:cNvPicPr>
           <p:nvPr/>
         </p:nvPicPr>
         <p:blipFill>
-          <a:blip xmlns:r="http://schemas.openxmlformats.org/officeDocument/2006/relationships" xmlns:a="http://schemas.openxmlformats.org/drawingml/2006/main" r:embed="R5f887bf8510b4df9"/>
+          <a:blip xmlns:r="http://schemas.openxmlformats.org/officeDocument/2006/relationships" xmlns:a="http://schemas.openxmlformats.org/drawingml/2006/main" r:embed="Rdda5bea5c35647c2"/>
           <a:stretch xmlns:a="http://schemas.openxmlformats.org/drawingml/2006/main"/>
         </p:blipFill>
         <p:spPr>
           <a:xfrm xmlns:a="http://schemas.openxmlformats.org/drawingml/2006/main">
-            <a:off x="998811" y="1076325"/>
-            <a:ext cx="6479628" cy="5219700"/>
+            <a:off x="2000584" y="990600"/>
+            <a:ext cx="8190832" cy="5305425"/>
           </a:xfrm>
           <a:prstGeom xmlns:a="http://schemas.openxmlformats.org/drawingml/2006/main" prst="rect">
             <a:avLst/>
           </a:prstGeom>
         </p:spPr>
       </p:pic>
-      <p:sp>
-        <p:nvSpPr>
-          <p:cNvPr id="6" name="">
-            <a:extLst xmlns:a="http://schemas.openxmlformats.org/drawingml/2006/main">
-              <a:ext uri="{FF2B5EF4-FFF2-40B4-BE49-F238E27FC236}">
-                <a16:creationId xmlns:a16="http://schemas.microsoft.com/office/drawing/2014/main" id="{6F97CBD0-56D7-4ECB-8F05-213E35C6428E}"/>
-              </a:ext>
-            </a:extLst>
-          </p:cNvPr>
-          <p:cNvSpPr>
-            <a:spLocks xmlns:a="http://schemas.openxmlformats.org/drawingml/2006/main" noGrp="1"/>
-          </p:cNvSpPr>
-          <p:nvPr/>
-        </p:nvSpPr>
-        <p:spPr>
-          <a:xfrm xmlns:a="http://schemas.openxmlformats.org/drawingml/2006/main">
-            <a:off x="8286750" y="1381125"/>
-            <a:ext cx="3333750" cy="666750"/>
-          </a:xfrm>
-          <a:prstGeom xmlns:a="http://schemas.openxmlformats.org/drawingml/2006/main" prst="rect">
-            <a:avLst/>
-          </a:prstGeom>
-          <a:noFill xmlns:a="http://schemas.openxmlformats.org/drawingml/2006/main"/>
-          <a:ln xmlns:a="http://schemas.openxmlformats.org/drawingml/2006/main" w="0">
-            <a:noFill/>
-          </a:ln>
-        </p:spPr>
-        <p:txBody>
-          <a:bodyPr xmlns:a="http://schemas.openxmlformats.org/drawingml/2006/main">
-            <a:normAutofit fontScale="100000"/>
-          </a:bodyPr>
-          <a:lstStyle xmlns:a="http://schemas.openxmlformats.org/drawingml/2006/main"/>
-          <a:p xmlns:a="http://schemas.openxmlformats.org/drawingml/2006/main">
-            <a:pPr>
-              <a:defRPr sz="1875" b="1">
-                <a:solidFill>
-                  <a:srgbClr val="142F43"/>
-                </a:solidFill>
-                <a:latin typeface="Microsoft JhengHei"/>
-                <a:ea typeface="Microsoft JhengHei"/>
-                <a:cs typeface="Microsoft JhengHei"/>
-              </a:defRPr>
-            </a:pPr>
-            <a:r>
-              <a:rPr sz="1875" b="1">
-                <a:solidFill>
-                  <a:srgbClr val="142F43"/>
-                </a:solidFill>
-                <a:latin typeface="Microsoft JhengHei"/>
-                <a:ea typeface="Microsoft JhengHei"/>
-                <a:cs typeface="Microsoft JhengHei"/>
-              </a:rPr>
-              <a:t>先保留 marker 支持的廣義分類</a:t>
-            </a:r>
-          </a:p>
-        </p:txBody>
-      </p:sp>
-      <p:sp>
-        <p:nvSpPr>
-          <p:cNvPr id="7" name="">
-            <a:extLst xmlns:a="http://schemas.openxmlformats.org/drawingml/2006/main">
-              <a:ext uri="{FF2B5EF4-FFF2-40B4-BE49-F238E27FC236}">
-                <a16:creationId xmlns:a16="http://schemas.microsoft.com/office/drawing/2014/main" id="{F2403FA0-6497-4977-AEB8-959EB9B56E7D}"/>
-              </a:ext>
-            </a:extLst>
-          </p:cNvPr>
-          <p:cNvSpPr>
-            <a:spLocks xmlns:a="http://schemas.openxmlformats.org/drawingml/2006/main" noGrp="1"/>
-          </p:cNvSpPr>
-          <p:nvPr/>
-        </p:nvSpPr>
-        <p:spPr>
-          <a:xfrm xmlns:a="http://schemas.openxmlformats.org/drawingml/2006/main">
-            <a:off x="8334375" y="2381250"/>
-            <a:ext cx="3143250" cy="1476375"/>
-          </a:xfrm>
-          <a:prstGeom xmlns:a="http://schemas.openxmlformats.org/drawingml/2006/main" prst="rect">
-            <a:avLst/>
-          </a:prstGeom>
-          <a:noFill xmlns:a="http://schemas.openxmlformats.org/drawingml/2006/main"/>
-          <a:ln xmlns:a="http://schemas.openxmlformats.org/drawingml/2006/main" w="0">
-            <a:noFill/>
-          </a:ln>
-        </p:spPr>
-        <p:txBody>
-          <a:bodyPr xmlns:a="http://schemas.openxmlformats.org/drawingml/2006/main">
-            <a:normAutofit fontScale="100000"/>
-          </a:bodyPr>
-          <a:lstStyle xmlns:a="http://schemas.openxmlformats.org/drawingml/2006/main"/>
-          <a:p xmlns:a="http://schemas.openxmlformats.org/drawingml/2006/main">
-            <a:pPr>
-              <a:defRPr sz="1650" b="0">
-                <a:solidFill>
-                  <a:srgbClr val="142F43"/>
-                </a:solidFill>
-                <a:latin typeface="Microsoft JhengHei"/>
-                <a:ea typeface="Microsoft JhengHei"/>
-                <a:cs typeface="Microsoft JhengHei"/>
-              </a:defRPr>
-            </a:pPr>
-            <a:r>
-              <a:rPr sz="1650" b="0">
-                <a:solidFill>
-                  <a:srgbClr val="142F43"/>
-                </a:solidFill>
-                <a:latin typeface="Microsoft JhengHei"/>
-                <a:ea typeface="Microsoft JhengHei"/>
-                <a:cs typeface="Microsoft JhengHei"/>
-              </a:rPr>
-              <a:t>T-lineage candidate</a:t>
-            </a:r>
-          </a:p>
-          <a:p xmlns:a="http://schemas.openxmlformats.org/drawingml/2006/main">
-            <a:pPr>
-              <a:defRPr sz="1650" b="0">
-                <a:solidFill>
-                  <a:srgbClr val="142F43"/>
-                </a:solidFill>
-                <a:latin typeface="Microsoft JhengHei"/>
-                <a:ea typeface="Microsoft JhengHei"/>
-                <a:cs typeface="Microsoft JhengHei"/>
-              </a:defRPr>
-            </a:pPr>
-            <a:r>
-              <a:rPr sz="1650" b="0">
-                <a:solidFill>
-                  <a:srgbClr val="142F43"/>
-                </a:solidFill>
-                <a:latin typeface="Microsoft JhengHei"/>
-                <a:ea typeface="Microsoft JhengHei"/>
-                <a:cs typeface="Microsoft JhengHei"/>
-              </a:rPr>
-              <a:t>B cell / myeloid / pDC</a:t>
-            </a:r>
-          </a:p>
-          <a:p xmlns:a="http://schemas.openxmlformats.org/drawingml/2006/main">
-            <a:pPr>
-              <a:defRPr sz="1650" b="0">
-                <a:solidFill>
-                  <a:srgbClr val="142F43"/>
-                </a:solidFill>
-                <a:latin typeface="Microsoft JhengHei"/>
-                <a:ea typeface="Microsoft JhengHei"/>
-                <a:cs typeface="Microsoft JhengHei"/>
-              </a:defRPr>
-            </a:pPr>
-            <a:r>
-              <a:rPr sz="1650" b="0">
-                <a:solidFill>
-                  <a:srgbClr val="142F43"/>
-                </a:solidFill>
-                <a:latin typeface="Microsoft JhengHei"/>
-                <a:ea typeface="Microsoft JhengHei"/>
-                <a:cs typeface="Microsoft JhengHei"/>
-              </a:rPr>
-              <a:t>Erythroid</a:t>
-            </a:r>
-          </a:p>
-          <a:p xmlns:a="http://schemas.openxmlformats.org/drawingml/2006/main">
-            <a:pPr>
-              <a:defRPr sz="1650" b="0">
-                <a:solidFill>
-                  <a:srgbClr val="142F43"/>
-                </a:solidFill>
-                <a:latin typeface="Microsoft JhengHei"/>
-                <a:ea typeface="Microsoft JhengHei"/>
-                <a:cs typeface="Microsoft JhengHei"/>
-              </a:defRPr>
-            </a:pPr>
-            <a:r>
-              <a:rPr sz="1650" b="0">
-                <a:solidFill>
-                  <a:srgbClr val="142F43"/>
-                </a:solidFill>
-                <a:latin typeface="Microsoft JhengHei"/>
-                <a:ea typeface="Microsoft JhengHei"/>
-                <a:cs typeface="Microsoft JhengHei"/>
-              </a:rPr>
-              <a:t>Cytotoxic T/NK</a:t>
-            </a:r>
-          </a:p>
-        </p:txBody>
-      </p:sp>
-      <p:sp>
-        <p:nvSpPr>
-          <p:cNvPr id="8" name="">
-            <a:extLst xmlns:a="http://schemas.openxmlformats.org/drawingml/2006/main">
-              <a:ext uri="{FF2B5EF4-FFF2-40B4-BE49-F238E27FC236}">
-                <a16:creationId xmlns:a16="http://schemas.microsoft.com/office/drawing/2014/main" id="{C269F287-AA46-47F5-973D-5B8E27F1CE85}"/>
-              </a:ext>
-            </a:extLst>
-          </p:cNvPr>
-          <p:cNvSpPr>
-            <a:spLocks xmlns:a="http://schemas.openxmlformats.org/drawingml/2006/main" noGrp="1"/>
-          </p:cNvSpPr>
-          <p:nvPr/>
-        </p:nvSpPr>
-        <p:spPr>
-          <a:xfrm xmlns:a="http://schemas.openxmlformats.org/drawingml/2006/main">
-            <a:off x="8334375" y="4381500"/>
-            <a:ext cx="3143250" cy="1571625"/>
-          </a:xfrm>
-          <a:prstGeom xmlns:a="http://schemas.openxmlformats.org/drawingml/2006/main" prst="rect">
-            <a:avLst/>
-          </a:prstGeom>
-          <a:noFill xmlns:a="http://schemas.openxmlformats.org/drawingml/2006/main"/>
-          <a:ln xmlns:a="http://schemas.openxmlformats.org/drawingml/2006/main" w="0">
-            <a:noFill/>
-          </a:ln>
-        </p:spPr>
-        <p:txBody>
-          <a:bodyPr xmlns:a="http://schemas.openxmlformats.org/drawingml/2006/main">
-            <a:normAutofit fontScale="100000"/>
-          </a:bodyPr>
-          <a:lstStyle xmlns:a="http://schemas.openxmlformats.org/drawingml/2006/main"/>
-          <a:p xmlns:a="http://schemas.openxmlformats.org/drawingml/2006/main">
-            <a:pPr>
-              <a:defRPr sz="1650" b="0">
-                <a:solidFill>
-                  <a:srgbClr val="D55E00"/>
-                </a:solidFill>
-                <a:latin typeface="Microsoft JhengHei"/>
-                <a:ea typeface="Microsoft JhengHei"/>
-                <a:cs typeface="Microsoft JhengHei"/>
-              </a:defRPr>
-            </a:pPr>
-            <a:r>
-              <a:rPr sz="1650" b="0">
-                <a:solidFill>
-                  <a:srgbClr val="D55E00"/>
-                </a:solidFill>
-                <a:latin typeface="Microsoft JhengHei"/>
-                <a:ea typeface="Microsoft JhengHei"/>
-                <a:cs typeface="Microsoft JhengHei"/>
-              </a:rPr>
-              <a:t>HSC-like、quiescent 或 ER-stress 是待驗證的細胞狀態，不直接當成確定的 T-ALL subtype。</a:t>
-            </a:r>
-          </a:p>
-        </p:txBody>
-      </p:sp>
     </p:spTree>
     <p:extLst>
       <p:ext uri="{BB962C8B-B14F-4D97-AF65-F5344CB8AC3E}">
-        <p14:creationId xmlns:p14="http://schemas.microsoft.com/office/powerpoint/2010/main" val="2081831658"/>
+        <p14:creationId xmlns:p14="http://schemas.microsoft.com/office/powerpoint/2010/main" val="440043015"/>
       </p:ext>
     </p:extLst>
   </p:cSld>
@@ -6619,10 +4472,10 @@
       </p:grpSpPr>
       <p:sp>
         <p:nvSpPr>
-          <p:cNvPr id="7" name="">
+          <p:cNvPr id="3" name="">
             <a:extLst xmlns:a="http://schemas.openxmlformats.org/drawingml/2006/main">
               <a:ext uri="{FF2B5EF4-FFF2-40B4-BE49-F238E27FC236}">
-                <a16:creationId xmlns:a16="http://schemas.microsoft.com/office/drawing/2014/main" id="{C0D139C2-4C65-49A6-8BA7-34EC8EBBB884}"/>
+                <a16:creationId xmlns:a16="http://schemas.microsoft.com/office/drawing/2014/main" id="{89389599-AAE6-43CE-BCC6-B4379F999FC6}"/>
               </a:ext>
             </a:extLst>
           </p:cNvPr>
@@ -6633,8 +4486,8 @@
         </p:nvSpPr>
         <p:spPr>
           <a:xfrm xmlns:a="http://schemas.openxmlformats.org/drawingml/2006/main">
-            <a:off x="476250" y="190500"/>
-            <a:ext cx="10477500" cy="209550"/>
+            <a:off x="523875" y="333375"/>
+            <a:ext cx="11144250" cy="590550"/>
           </a:xfrm>
           <a:prstGeom xmlns:a="http://schemas.openxmlformats.org/drawingml/2006/main" prst="rect">
             <a:avLst/>
@@ -6646,14 +4499,14 @@
         </p:spPr>
         <p:txBody>
           <a:bodyPr xmlns:a="http://schemas.openxmlformats.org/drawingml/2006/main">
-            <a:normAutofit fontScale="79487"/>
+            <a:noAutofit/>
           </a:bodyPr>
           <a:lstStyle xmlns:a="http://schemas.openxmlformats.org/drawingml/2006/main"/>
           <a:p xmlns:a="http://schemas.openxmlformats.org/drawingml/2006/main">
             <a:pPr>
-              <a:defRPr sz="975" b="1">
-                <a:solidFill>
-                  <a:srgbClr val="D55E00"/>
+              <a:defRPr sz="2550" b="1">
+                <a:solidFill>
+                  <a:srgbClr val="202020"/>
                 </a:solidFill>
                 <a:latin typeface="Microsoft JhengHei"/>
                 <a:ea typeface="Microsoft JhengHei"/>
@@ -6661,273 +4514,45 @@
               </a:defRPr>
             </a:pPr>
             <a:r>
-              <a:rPr sz="975" b="1">
-                <a:solidFill>
-                  <a:srgbClr val="D55E00"/>
+              <a:rPr sz="2550" b="1">
+                <a:solidFill>
+                  <a:srgbClr val="202020"/>
                 </a:solidFill>
                 <a:latin typeface="Microsoft JhengHei"/>
                 <a:ea typeface="Microsoft JhengHei"/>
                 <a:cs typeface="Microsoft JhengHei"/>
               </a:rPr>
-              <a:t>ANNOTATION EVIDENCE</a:t>
+              <a:t>Cell type markers</a:t>
             </a:r>
           </a:p>
         </p:txBody>
       </p:sp>
-      <p:sp>
-        <p:nvSpPr>
-          <p:cNvPr id="2" name="">
-            <a:extLst xmlns:a="http://schemas.openxmlformats.org/drawingml/2006/main">
-              <a:ext uri="{FF2B5EF4-FFF2-40B4-BE49-F238E27FC236}">
-                <a16:creationId xmlns:a16="http://schemas.microsoft.com/office/drawing/2014/main" id="{025DA2B0-229A-4D39-A4DD-4F88E3DF327B}"/>
-              </a:ext>
-            </a:extLst>
-          </p:cNvPr>
-          <p:cNvSpPr>
-            <a:spLocks xmlns:a="http://schemas.openxmlformats.org/drawingml/2006/main" noGrp="1"/>
-          </p:cNvSpPr>
-          <p:nvPr/>
-        </p:nvSpPr>
-        <p:spPr>
-          <a:xfrm xmlns:a="http://schemas.openxmlformats.org/drawingml/2006/main">
-            <a:off x="476250" y="523875"/>
-            <a:ext cx="11144250" cy="476250"/>
-          </a:xfrm>
-          <a:prstGeom xmlns:a="http://schemas.openxmlformats.org/drawingml/2006/main" prst="rect">
-            <a:avLst/>
-          </a:prstGeom>
-          <a:noFill xmlns:a="http://schemas.openxmlformats.org/drawingml/2006/main"/>
-          <a:ln xmlns:a="http://schemas.openxmlformats.org/drawingml/2006/main" w="0">
-            <a:noFill/>
-          </a:ln>
-        </p:spPr>
-        <p:txBody>
-          <a:bodyPr xmlns:a="http://schemas.openxmlformats.org/drawingml/2006/main">
-            <a:normAutofit fontScale="100000"/>
-          </a:bodyPr>
-          <a:lstStyle xmlns:a="http://schemas.openxmlformats.org/drawingml/2006/main"/>
-          <a:p xmlns:a="http://schemas.openxmlformats.org/drawingml/2006/main">
-            <a:pPr>
-              <a:defRPr sz="2400" b="1">
-                <a:solidFill>
-                  <a:srgbClr val="142F43"/>
-                </a:solidFill>
-                <a:latin typeface="Microsoft JhengHei"/>
-                <a:ea typeface="Microsoft JhengHei"/>
-                <a:cs typeface="Microsoft JhengHei"/>
-              </a:defRPr>
-            </a:pPr>
-            <a:r>
-              <a:rPr sz="2400" b="1">
-                <a:solidFill>
-                  <a:srgbClr val="142F43"/>
-                </a:solidFill>
-                <a:latin typeface="Microsoft JhengHei"/>
-                <a:ea typeface="Microsoft JhengHei"/>
-                <a:cs typeface="Microsoft JhengHei"/>
-              </a:rPr>
-              <a:t>每個 cluster 的 marker 證據</a:t>
-            </a:r>
-          </a:p>
-        </p:txBody>
-      </p:sp>
-      <p:sp>
-        <p:nvSpPr>
-          <p:cNvPr id="3" name="">
-            <a:extLst xmlns:a="http://schemas.openxmlformats.org/drawingml/2006/main">
-              <a:ext uri="{FF2B5EF4-FFF2-40B4-BE49-F238E27FC236}">
-                <a16:creationId xmlns:a16="http://schemas.microsoft.com/office/drawing/2014/main" id="{CA2BF45E-2778-45B2-9F0B-CF0AA79959FC}"/>
-              </a:ext>
-            </a:extLst>
-          </p:cNvPr>
-          <p:cNvSpPr>
-            <a:spLocks xmlns:a="http://schemas.openxmlformats.org/drawingml/2006/main" noGrp="1"/>
-          </p:cNvSpPr>
-          <p:nvPr/>
-        </p:nvSpPr>
-        <p:spPr>
-          <a:xfrm xmlns:a="http://schemas.openxmlformats.org/drawingml/2006/main">
-            <a:off x="476250" y="6543675"/>
-            <a:ext cx="10287000" cy="171450"/>
-          </a:xfrm>
-          <a:prstGeom xmlns:a="http://schemas.openxmlformats.org/drawingml/2006/main" prst="rect">
-            <a:avLst/>
-          </a:prstGeom>
-          <a:noFill xmlns:a="http://schemas.openxmlformats.org/drawingml/2006/main"/>
-          <a:ln xmlns:a="http://schemas.openxmlformats.org/drawingml/2006/main" w="0">
-            <a:noFill/>
-          </a:ln>
-        </p:spPr>
-        <p:txBody>
-          <a:bodyPr xmlns:a="http://schemas.openxmlformats.org/drawingml/2006/main">
-            <a:normAutofit fontScale="63636"/>
-          </a:bodyPr>
-          <a:lstStyle xmlns:a="http://schemas.openxmlformats.org/drawingml/2006/main"/>
-          <a:p xmlns:a="http://schemas.openxmlformats.org/drawingml/2006/main">
-            <a:pPr>
-              <a:defRPr sz="825" b="0">
-                <a:solidFill>
-                  <a:srgbClr val="4D5B66"/>
-                </a:solidFill>
-                <a:latin typeface="Microsoft JhengHei"/>
-                <a:ea typeface="Microsoft JhengHei"/>
-                <a:cs typeface="Microsoft JhengHei"/>
-              </a:defRPr>
-            </a:pPr>
-            <a:r>
-              <a:rPr sz="825" b="0">
-                <a:solidFill>
-                  <a:srgbClr val="4D5B66"/>
-                </a:solidFill>
-                <a:latin typeface="Microsoft JhengHei"/>
-                <a:ea typeface="Microsoft JhengHei"/>
-                <a:cs typeface="Microsoft JhengHei"/>
-              </a:rPr>
-              <a:t>GSE262271 / GSE218858  |  Reviewed 15 September 2026</a:t>
-            </a:r>
-          </a:p>
-        </p:txBody>
-      </p:sp>
-      <p:sp>
-        <p:nvSpPr>
-          <p:cNvPr id="4" name="">
-            <a:extLst xmlns:a="http://schemas.openxmlformats.org/drawingml/2006/main">
-              <a:ext uri="{FF2B5EF4-FFF2-40B4-BE49-F238E27FC236}">
-                <a16:creationId xmlns:a16="http://schemas.microsoft.com/office/drawing/2014/main" id="{421B622F-DA73-4E1C-A2AB-EDA6538E8664}"/>
-              </a:ext>
-            </a:extLst>
-          </p:cNvPr>
-          <p:cNvSpPr>
-            <a:spLocks xmlns:a="http://schemas.openxmlformats.org/drawingml/2006/main" noGrp="1"/>
-          </p:cNvSpPr>
-          <p:nvPr/>
-        </p:nvSpPr>
-        <p:spPr>
-          <a:xfrm xmlns:a="http://schemas.openxmlformats.org/drawingml/2006/main">
-            <a:off x="11334750" y="6543675"/>
-            <a:ext cx="381000" cy="171450"/>
-          </a:xfrm>
-          <a:prstGeom xmlns:a="http://schemas.openxmlformats.org/drawingml/2006/main" prst="rect">
-            <a:avLst/>
-          </a:prstGeom>
-          <a:noFill xmlns:a="http://schemas.openxmlformats.org/drawingml/2006/main"/>
-          <a:ln xmlns:a="http://schemas.openxmlformats.org/drawingml/2006/main" w="0">
-            <a:noFill/>
-          </a:ln>
-        </p:spPr>
-        <p:txBody>
-          <a:bodyPr xmlns:a="http://schemas.openxmlformats.org/drawingml/2006/main">
-            <a:normAutofit fontScale="63636"/>
-          </a:bodyPr>
-          <a:lstStyle xmlns:a="http://schemas.openxmlformats.org/drawingml/2006/main"/>
-          <a:p xmlns:a="http://schemas.openxmlformats.org/drawingml/2006/main">
-            <a:pPr>
-              <a:defRPr sz="825" b="0">
-                <a:solidFill>
-                  <a:srgbClr val="142F43"/>
-                </a:solidFill>
-                <a:latin typeface="Microsoft JhengHei"/>
-                <a:ea typeface="Microsoft JhengHei"/>
-                <a:cs typeface="Microsoft JhengHei"/>
-              </a:defRPr>
-            </a:pPr>
-            <a:r>
-              <a:rPr sz="825" b="0">
-                <a:solidFill>
-                  <a:srgbClr val="142F43"/>
-                </a:solidFill>
-                <a:latin typeface="Microsoft JhengHei"/>
-                <a:ea typeface="Microsoft JhengHei"/>
-                <a:cs typeface="Microsoft JhengHei"/>
-              </a:rPr>
-              <a:t>04</a:t>
-            </a:r>
-          </a:p>
-        </p:txBody>
-      </p:sp>
       <p:pic>
         <p:nvPicPr>
-          <p:cNvPr id="11" name=""/>
+          <p:cNvPr id="4" name=""/>
           <p:cNvPicPr>
             <a:picLocks xmlns:a="http://schemas.openxmlformats.org/drawingml/2006/main" noChangeAspect="1"/>
           </p:cNvPicPr>
           <p:nvPr/>
         </p:nvPicPr>
         <p:blipFill>
-          <a:blip xmlns:r="http://schemas.openxmlformats.org/officeDocument/2006/relationships" xmlns:a="http://schemas.openxmlformats.org/drawingml/2006/main" r:embed="R1066eb65f81a4bc7"/>
+          <a:blip xmlns:r="http://schemas.openxmlformats.org/officeDocument/2006/relationships" xmlns:a="http://schemas.openxmlformats.org/drawingml/2006/main" r:embed="Rfac38ef2ae644efe"/>
           <a:stretch xmlns:a="http://schemas.openxmlformats.org/drawingml/2006/main"/>
         </p:blipFill>
         <p:spPr>
           <a:xfrm xmlns:a="http://schemas.openxmlformats.org/drawingml/2006/main">
-            <a:off x="1676256" y="1123950"/>
-            <a:ext cx="8839489" cy="4667250"/>
+            <a:off x="423522" y="1571625"/>
+            <a:ext cx="11344955" cy="4143375"/>
           </a:xfrm>
           <a:prstGeom xmlns:a="http://schemas.openxmlformats.org/drawingml/2006/main" prst="rect">
             <a:avLst/>
           </a:prstGeom>
         </p:spPr>
       </p:pic>
-      <p:sp>
-        <p:nvSpPr>
-          <p:cNvPr id="6" name="">
-            <a:extLst xmlns:a="http://schemas.openxmlformats.org/drawingml/2006/main">
-              <a:ext uri="{FF2B5EF4-FFF2-40B4-BE49-F238E27FC236}">
-                <a16:creationId xmlns:a16="http://schemas.microsoft.com/office/drawing/2014/main" id="{203D4FF8-74B0-420A-BB88-671EFFB5804E}"/>
-              </a:ext>
-            </a:extLst>
-          </p:cNvPr>
-          <p:cNvSpPr>
-            <a:spLocks xmlns:a="http://schemas.openxmlformats.org/drawingml/2006/main" noGrp="1"/>
-          </p:cNvSpPr>
-          <p:nvPr/>
-        </p:nvSpPr>
-        <p:spPr>
-          <a:xfrm xmlns:a="http://schemas.openxmlformats.org/drawingml/2006/main">
-            <a:off x="571500" y="5924550"/>
-            <a:ext cx="11049000" cy="447675"/>
-          </a:xfrm>
-          <a:prstGeom xmlns:a="http://schemas.openxmlformats.org/drawingml/2006/main" prst="rect">
-            <a:avLst/>
-          </a:prstGeom>
-          <a:noFill xmlns:a="http://schemas.openxmlformats.org/drawingml/2006/main"/>
-          <a:ln xmlns:a="http://schemas.openxmlformats.org/drawingml/2006/main" w="0">
-            <a:noFill/>
-          </a:ln>
-        </p:spPr>
-        <p:txBody>
-          <a:bodyPr xmlns:a="http://schemas.openxmlformats.org/drawingml/2006/main">
-            <a:normAutofit fontScale="100000"/>
-          </a:bodyPr>
-          <a:lstStyle xmlns:a="http://schemas.openxmlformats.org/drawingml/2006/main"/>
-          <a:p xmlns:a="http://schemas.openxmlformats.org/drawingml/2006/main">
-            <a:pPr>
-              <a:defRPr sz="1500" b="0">
-                <a:solidFill>
-                  <a:srgbClr val="142F43"/>
-                </a:solidFill>
-                <a:latin typeface="Microsoft JhengHei"/>
-                <a:ea typeface="Microsoft JhengHei"/>
-                <a:cs typeface="Microsoft JhengHei"/>
-              </a:defRPr>
-            </a:pPr>
-            <a:r>
-              <a:rPr sz="1500" b="0">
-                <a:solidFill>
-                  <a:srgbClr val="142F43"/>
-                </a:solidFill>
-                <a:latin typeface="Microsoft JhengHei"/>
-                <a:ea typeface="Microsoft JhengHei"/>
-                <a:cs typeface="Microsoft JhengHei"/>
-              </a:rPr>
-              <a:t>大小 = 表達細胞比例；顏色 = 同一基因跨 cluster 的平均表達。先辨 lineage，再另外判斷 CNV-high。</a:t>
-            </a:r>
-          </a:p>
-        </p:txBody>
-      </p:sp>
     </p:spTree>
     <p:extLst>
       <p:ext uri="{BB962C8B-B14F-4D97-AF65-F5344CB8AC3E}">
-        <p14:creationId xmlns:p14="http://schemas.microsoft.com/office/powerpoint/2010/main" val="253103858"/>
+        <p14:creationId xmlns:p14="http://schemas.microsoft.com/office/powerpoint/2010/main" val="562310929"/>
       </p:ext>
     </p:extLst>
   </p:cSld>
@@ -6955,10 +4580,10 @@
       </p:grpSpPr>
       <p:sp>
         <p:nvSpPr>
-          <p:cNvPr id="10" name="">
+          <p:cNvPr id="4" name="">
             <a:extLst xmlns:a="http://schemas.openxmlformats.org/drawingml/2006/main">
               <a:ext uri="{FF2B5EF4-FFF2-40B4-BE49-F238E27FC236}">
-                <a16:creationId xmlns:a16="http://schemas.microsoft.com/office/drawing/2014/main" id="{1B95842B-F7C2-4BEB-9168-C2F09ACD6E33}"/>
+                <a16:creationId xmlns:a16="http://schemas.microsoft.com/office/drawing/2014/main" id="{F0F079B0-0FEA-4D45-A70E-C35D4309ECBA}"/>
               </a:ext>
             </a:extLst>
           </p:cNvPr>
@@ -6969,8 +4594,8 @@
         </p:nvSpPr>
         <p:spPr>
           <a:xfrm xmlns:a="http://schemas.openxmlformats.org/drawingml/2006/main">
-            <a:off x="476250" y="190500"/>
-            <a:ext cx="10477500" cy="209550"/>
+            <a:off x="523875" y="333375"/>
+            <a:ext cx="11144250" cy="590550"/>
           </a:xfrm>
           <a:prstGeom xmlns:a="http://schemas.openxmlformats.org/drawingml/2006/main" prst="rect">
             <a:avLst/>
@@ -6982,14 +4607,14 @@
         </p:spPr>
         <p:txBody>
           <a:bodyPr xmlns:a="http://schemas.openxmlformats.org/drawingml/2006/main">
-            <a:normAutofit fontScale="79487"/>
+            <a:noAutofit/>
           </a:bodyPr>
           <a:lstStyle xmlns:a="http://schemas.openxmlformats.org/drawingml/2006/main"/>
           <a:p xmlns:a="http://schemas.openxmlformats.org/drawingml/2006/main">
             <a:pPr>
-              <a:defRPr sz="975" b="1">
-                <a:solidFill>
-                  <a:srgbClr val="D55E00"/>
+              <a:defRPr sz="2550" b="1">
+                <a:solidFill>
+                  <a:srgbClr val="202020"/>
                 </a:solidFill>
                 <a:latin typeface="Microsoft JhengHei"/>
                 <a:ea typeface="Microsoft JhengHei"/>
@@ -6997,15 +4622,15 @@
               </a:defRPr>
             </a:pPr>
             <a:r>
-              <a:rPr sz="975" b="1">
-                <a:solidFill>
-                  <a:srgbClr val="D55E00"/>
+              <a:rPr sz="2550" b="1">
+                <a:solidFill>
+                  <a:srgbClr val="202020"/>
                 </a:solidFill>
                 <a:latin typeface="Microsoft JhengHei"/>
                 <a:ea typeface="Microsoft JhengHei"/>
                 <a:cs typeface="Microsoft JhengHei"/>
               </a:rPr>
-              <a:t>ANALYSIS DEFINITIONS</a:t>
+              <a:t>Potential malignant T cells</a:t>
             </a:r>
           </a:p>
         </p:txBody>
@@ -7015,7 +4640,7 @@
           <p:cNvPr id="2" name="">
             <a:extLst xmlns:a="http://schemas.openxmlformats.org/drawingml/2006/main">
               <a:ext uri="{FF2B5EF4-FFF2-40B4-BE49-F238E27FC236}">
-                <a16:creationId xmlns:a16="http://schemas.microsoft.com/office/drawing/2014/main" id="{FEA8F80D-D2FD-4F86-AF34-BE98268E63C3}"/>
+                <a16:creationId xmlns:a16="http://schemas.microsoft.com/office/drawing/2014/main" id="{17158BD3-2B7E-4862-8138-4C0187750CC6}"/>
               </a:ext>
             </a:extLst>
           </p:cNvPr>
@@ -7026,8 +4651,8 @@
         </p:nvSpPr>
         <p:spPr>
           <a:xfrm xmlns:a="http://schemas.openxmlformats.org/drawingml/2006/main">
-            <a:off x="476250" y="523875"/>
-            <a:ext cx="11144250" cy="476250"/>
+            <a:off x="619125" y="1066800"/>
+            <a:ext cx="10763250" cy="428625"/>
           </a:xfrm>
           <a:prstGeom xmlns:a="http://schemas.openxmlformats.org/drawingml/2006/main" prst="rect">
             <a:avLst/>
@@ -7039,14 +4664,14 @@
         </p:spPr>
         <p:txBody>
           <a:bodyPr xmlns:a="http://schemas.openxmlformats.org/drawingml/2006/main">
-            <a:normAutofit fontScale="100000"/>
+            <a:noAutofit/>
           </a:bodyPr>
           <a:lstStyle xmlns:a="http://schemas.openxmlformats.org/drawingml/2006/main"/>
           <a:p xmlns:a="http://schemas.openxmlformats.org/drawingml/2006/main">
             <a:pPr>
-              <a:defRPr sz="2400" b="1">
-                <a:solidFill>
-                  <a:srgbClr val="142F43"/>
+              <a:defRPr sz="1875" b="0">
+                <a:solidFill>
+                  <a:srgbClr val="202020"/>
                 </a:solidFill>
                 <a:latin typeface="Microsoft JhengHei"/>
                 <a:ea typeface="Microsoft JhengHei"/>
@@ -7054,479 +4679,45 @@
               </a:defRPr>
             </a:pPr>
             <a:r>
-              <a:rPr sz="2400" b="1">
-                <a:solidFill>
-                  <a:srgbClr val="142F43"/>
+              <a:rPr sz="1875" b="0">
+                <a:solidFill>
+                  <a:srgbClr val="202020"/>
                 </a:solidFill>
                 <a:latin typeface="Microsoft JhengHei"/>
                 <a:ea typeface="Microsoft JhengHei"/>
                 <a:cs typeface="Microsoft JhengHei"/>
               </a:rPr>
-              <a:t>CNV 篩選與 paired pseudobulk</a:t>
+              <a:t>Within-sample CNV top 15%   ·   1,926 cells</a:t>
             </a:r>
           </a:p>
         </p:txBody>
       </p:sp>
-      <p:sp>
-        <p:nvSpPr>
-          <p:cNvPr id="3" name="">
-            <a:extLst xmlns:a="http://schemas.openxmlformats.org/drawingml/2006/main">
-              <a:ext uri="{FF2B5EF4-FFF2-40B4-BE49-F238E27FC236}">
-                <a16:creationId xmlns:a16="http://schemas.microsoft.com/office/drawing/2014/main" id="{E16E5AAD-8F8C-44C4-9FDF-D30005145481}"/>
-              </a:ext>
-            </a:extLst>
-          </p:cNvPr>
-          <p:cNvSpPr>
-            <a:spLocks xmlns:a="http://schemas.openxmlformats.org/drawingml/2006/main" noGrp="1"/>
-          </p:cNvSpPr>
-          <p:nvPr/>
-        </p:nvSpPr>
-        <p:spPr>
-          <a:xfrm xmlns:a="http://schemas.openxmlformats.org/drawingml/2006/main">
-            <a:off x="476250" y="6543675"/>
-            <a:ext cx="10287000" cy="171450"/>
-          </a:xfrm>
-          <a:prstGeom xmlns:a="http://schemas.openxmlformats.org/drawingml/2006/main" prst="rect">
-            <a:avLst/>
-          </a:prstGeom>
-          <a:noFill xmlns:a="http://schemas.openxmlformats.org/drawingml/2006/main"/>
-          <a:ln xmlns:a="http://schemas.openxmlformats.org/drawingml/2006/main" w="0">
-            <a:noFill/>
-          </a:ln>
-        </p:spPr>
-        <p:txBody>
-          <a:bodyPr xmlns:a="http://schemas.openxmlformats.org/drawingml/2006/main">
-            <a:normAutofit fontScale="63636"/>
-          </a:bodyPr>
-          <a:lstStyle xmlns:a="http://schemas.openxmlformats.org/drawingml/2006/main"/>
-          <a:p xmlns:a="http://schemas.openxmlformats.org/drawingml/2006/main">
-            <a:pPr>
-              <a:defRPr sz="825" b="0">
-                <a:solidFill>
-                  <a:srgbClr val="4D5B66"/>
-                </a:solidFill>
-                <a:latin typeface="Microsoft JhengHei"/>
-                <a:ea typeface="Microsoft JhengHei"/>
-                <a:cs typeface="Microsoft JhengHei"/>
-              </a:defRPr>
-            </a:pPr>
-            <a:r>
-              <a:rPr sz="825" b="0">
-                <a:solidFill>
-                  <a:srgbClr val="4D5B66"/>
-                </a:solidFill>
-                <a:latin typeface="Microsoft JhengHei"/>
-                <a:ea typeface="Microsoft JhengHei"/>
-                <a:cs typeface="Microsoft JhengHei"/>
-              </a:rPr>
-              <a:t>GSE262271 / GSE218858  |  Reviewed 15 September 2026</a:t>
-            </a:r>
-          </a:p>
-        </p:txBody>
-      </p:sp>
-      <p:sp>
-        <p:nvSpPr>
-          <p:cNvPr id="4" name="">
-            <a:extLst xmlns:a="http://schemas.openxmlformats.org/drawingml/2006/main">
-              <a:ext uri="{FF2B5EF4-FFF2-40B4-BE49-F238E27FC236}">
-                <a16:creationId xmlns:a16="http://schemas.microsoft.com/office/drawing/2014/main" id="{5A3B87DF-703D-4A68-B2D0-A3FE191AC092}"/>
-              </a:ext>
-            </a:extLst>
-          </p:cNvPr>
-          <p:cNvSpPr>
-            <a:spLocks xmlns:a="http://schemas.openxmlformats.org/drawingml/2006/main" noGrp="1"/>
-          </p:cNvSpPr>
-          <p:nvPr/>
-        </p:nvSpPr>
-        <p:spPr>
-          <a:xfrm xmlns:a="http://schemas.openxmlformats.org/drawingml/2006/main">
-            <a:off x="11334750" y="6543675"/>
-            <a:ext cx="381000" cy="171450"/>
-          </a:xfrm>
-          <a:prstGeom xmlns:a="http://schemas.openxmlformats.org/drawingml/2006/main" prst="rect">
-            <a:avLst/>
-          </a:prstGeom>
-          <a:noFill xmlns:a="http://schemas.openxmlformats.org/drawingml/2006/main"/>
-          <a:ln xmlns:a="http://schemas.openxmlformats.org/drawingml/2006/main" w="0">
-            <a:noFill/>
-          </a:ln>
-        </p:spPr>
-        <p:txBody>
-          <a:bodyPr xmlns:a="http://schemas.openxmlformats.org/drawingml/2006/main">
-            <a:normAutofit fontScale="63636"/>
-          </a:bodyPr>
-          <a:lstStyle xmlns:a="http://schemas.openxmlformats.org/drawingml/2006/main"/>
-          <a:p xmlns:a="http://schemas.openxmlformats.org/drawingml/2006/main">
-            <a:pPr>
-              <a:defRPr sz="825" b="0">
-                <a:solidFill>
-                  <a:srgbClr val="142F43"/>
-                </a:solidFill>
-                <a:latin typeface="Microsoft JhengHei"/>
-                <a:ea typeface="Microsoft JhengHei"/>
-                <a:cs typeface="Microsoft JhengHei"/>
-              </a:defRPr>
-            </a:pPr>
-            <a:r>
-              <a:rPr sz="825" b="0">
-                <a:solidFill>
-                  <a:srgbClr val="142F43"/>
-                </a:solidFill>
-                <a:latin typeface="Microsoft JhengHei"/>
-                <a:ea typeface="Microsoft JhengHei"/>
-                <a:cs typeface="Microsoft JhengHei"/>
-              </a:rPr>
-              <a:t>05</a:t>
-            </a:r>
-          </a:p>
-        </p:txBody>
-      </p:sp>
       <p:pic>
         <p:nvPicPr>
-          <p:cNvPr id="14" name=""/>
+          <p:cNvPr id="6" name=""/>
           <p:cNvPicPr>
             <a:picLocks xmlns:a="http://schemas.openxmlformats.org/drawingml/2006/main" noChangeAspect="1"/>
           </p:cNvPicPr>
           <p:nvPr/>
         </p:nvPicPr>
         <p:blipFill>
-          <a:blip xmlns:r="http://schemas.openxmlformats.org/officeDocument/2006/relationships" xmlns:a="http://schemas.openxmlformats.org/drawingml/2006/main" r:embed="R887bd4cac309448f"/>
+          <a:blip xmlns:r="http://schemas.openxmlformats.org/officeDocument/2006/relationships" xmlns:a="http://schemas.openxmlformats.org/drawingml/2006/main" r:embed="R3e915a9a41bb4e02"/>
           <a:stretch xmlns:a="http://schemas.openxmlformats.org/drawingml/2006/main"/>
         </p:blipFill>
         <p:spPr>
           <a:xfrm xmlns:a="http://schemas.openxmlformats.org/drawingml/2006/main">
-            <a:off x="557561" y="1066800"/>
-            <a:ext cx="7266878" cy="4381500"/>
+            <a:off x="2010218" y="1666875"/>
+            <a:ext cx="8171564" cy="4286250"/>
           </a:xfrm>
           <a:prstGeom xmlns:a="http://schemas.openxmlformats.org/drawingml/2006/main" prst="rect">
             <a:avLst/>
           </a:prstGeom>
         </p:spPr>
       </p:pic>
-      <p:sp>
-        <p:nvSpPr>
-          <p:cNvPr id="6" name="">
-            <a:extLst xmlns:a="http://schemas.openxmlformats.org/drawingml/2006/main">
-              <a:ext uri="{FF2B5EF4-FFF2-40B4-BE49-F238E27FC236}">
-                <a16:creationId xmlns:a16="http://schemas.microsoft.com/office/drawing/2014/main" id="{20D45C38-D371-4F84-AA82-E88270D5FA9A}"/>
-              </a:ext>
-            </a:extLst>
-          </p:cNvPr>
-          <p:cNvSpPr>
-            <a:spLocks xmlns:a="http://schemas.openxmlformats.org/drawingml/2006/main" noGrp="1"/>
-          </p:cNvSpPr>
-          <p:nvPr/>
-        </p:nvSpPr>
-        <p:spPr>
-          <a:xfrm xmlns:a="http://schemas.openxmlformats.org/drawingml/2006/main">
-            <a:off x="8143875" y="1428750"/>
-            <a:ext cx="3524250" cy="1000125"/>
-          </a:xfrm>
-          <a:prstGeom xmlns:a="http://schemas.openxmlformats.org/drawingml/2006/main" prst="rect">
-            <a:avLst/>
-          </a:prstGeom>
-          <a:noFill xmlns:a="http://schemas.openxmlformats.org/drawingml/2006/main"/>
-          <a:ln xmlns:a="http://schemas.openxmlformats.org/drawingml/2006/main" w="0">
-            <a:noFill/>
-          </a:ln>
-        </p:spPr>
-        <p:txBody>
-          <a:bodyPr xmlns:a="http://schemas.openxmlformats.org/drawingml/2006/main">
-            <a:normAutofit fontScale="100000"/>
-          </a:bodyPr>
-          <a:lstStyle xmlns:a="http://schemas.openxmlformats.org/drawingml/2006/main"/>
-          <a:p xmlns:a="http://schemas.openxmlformats.org/drawingml/2006/main">
-            <a:pPr>
-              <a:defRPr sz="1650" b="1">
-                <a:solidFill>
-                  <a:srgbClr val="142F43"/>
-                </a:solidFill>
-                <a:latin typeface="Microsoft JhengHei"/>
-                <a:ea typeface="Microsoft JhengHei"/>
-                <a:cs typeface="Microsoft JhengHei"/>
-              </a:defRPr>
-            </a:pPr>
-            <a:r>
-              <a:rPr sz="1650" b="1">
-                <a:solidFill>
-                  <a:srgbClr val="142F43"/>
-                </a:solidFill>
-                <a:latin typeface="Microsoft JhengHei"/>
-                <a:ea typeface="Microsoft JhengHei"/>
-                <a:cs typeface="Microsoft JhengHei"/>
-              </a:rPr>
-              <a:t>主分析：within-sample top 15%</a:t>
-            </a:r>
-          </a:p>
-          <a:p xmlns:a="http://schemas.openxmlformats.org/drawingml/2006/main">
-            <a:pPr>
-              <a:defRPr sz="1650" b="1">
-                <a:solidFill>
-                  <a:srgbClr val="142F43"/>
-                </a:solidFill>
-                <a:latin typeface="Microsoft JhengHei"/>
-                <a:ea typeface="Microsoft JhengHei"/>
-                <a:cs typeface="Microsoft JhengHei"/>
-              </a:defRPr>
-            </a:pPr>
-            <a:r>
-              <a:rPr sz="1650" b="1">
-                <a:solidFill>
-                  <a:srgbClr val="142F43"/>
-                </a:solidFill>
-                <a:latin typeface="Microsoft JhengHei"/>
-                <a:ea typeface="Microsoft JhengHei"/>
-                <a:cs typeface="Microsoft JhengHei"/>
-              </a:rPr>
-              <a:t>1,926 cells，最小 sample 107</a:t>
-            </a:r>
-          </a:p>
-        </p:txBody>
-      </p:sp>
-      <p:sp>
-        <p:nvSpPr>
-          <p:cNvPr id="7" name="">
-            <a:extLst xmlns:a="http://schemas.openxmlformats.org/drawingml/2006/main">
-              <a:ext uri="{FF2B5EF4-FFF2-40B4-BE49-F238E27FC236}">
-                <a16:creationId xmlns:a16="http://schemas.microsoft.com/office/drawing/2014/main" id="{B4579F57-71CA-4AB7-BED1-A65C0CC8D185}"/>
-              </a:ext>
-            </a:extLst>
-          </p:cNvPr>
-          <p:cNvSpPr>
-            <a:spLocks xmlns:a="http://schemas.openxmlformats.org/drawingml/2006/main" noGrp="1"/>
-          </p:cNvSpPr>
-          <p:nvPr/>
-        </p:nvSpPr>
-        <p:spPr>
-          <a:xfrm xmlns:a="http://schemas.openxmlformats.org/drawingml/2006/main">
-            <a:off x="8143875" y="2905125"/>
-            <a:ext cx="3524250" cy="1047750"/>
-          </a:xfrm>
-          <a:prstGeom xmlns:a="http://schemas.openxmlformats.org/drawingml/2006/main" prst="rect">
-            <a:avLst/>
-          </a:prstGeom>
-          <a:noFill xmlns:a="http://schemas.openxmlformats.org/drawingml/2006/main"/>
-          <a:ln xmlns:a="http://schemas.openxmlformats.org/drawingml/2006/main" w="0">
-            <a:noFill/>
-          </a:ln>
-        </p:spPr>
-        <p:txBody>
-          <a:bodyPr xmlns:a="http://schemas.openxmlformats.org/drawingml/2006/main">
-            <a:normAutofit fontScale="100000"/>
-          </a:bodyPr>
-          <a:lstStyle xmlns:a="http://schemas.openxmlformats.org/drawingml/2006/main"/>
-          <a:p xmlns:a="http://schemas.openxmlformats.org/drawingml/2006/main">
-            <a:pPr>
-              <a:defRPr sz="1650" b="0">
-                <a:solidFill>
-                  <a:srgbClr val="142F43"/>
-                </a:solidFill>
-                <a:latin typeface="Microsoft JhengHei"/>
-                <a:ea typeface="Microsoft JhengHei"/>
-                <a:cs typeface="Microsoft JhengHei"/>
-              </a:defRPr>
-            </a:pPr>
-            <a:r>
-              <a:rPr sz="1650" b="0">
-                <a:solidFill>
-                  <a:srgbClr val="142F43"/>
-                </a:solidFill>
-                <a:latin typeface="Microsoft JhengHei"/>
-                <a:ea typeface="Microsoft JhengHei"/>
-                <a:cs typeface="Microsoft JhengHei"/>
-              </a:rPr>
-              <a:t>Non-T reference q95 = 0.0269</a:t>
-            </a:r>
-          </a:p>
-          <a:p xmlns:a="http://schemas.openxmlformats.org/drawingml/2006/main">
-            <a:pPr>
-              <a:defRPr sz="1650" b="0">
-                <a:solidFill>
-                  <a:srgbClr val="142F43"/>
-                </a:solidFill>
-                <a:latin typeface="Microsoft JhengHei"/>
-                <a:ea typeface="Microsoft JhengHei"/>
-                <a:cs typeface="Microsoft JhengHei"/>
-              </a:defRPr>
-            </a:pPr>
-            <a:r>
-              <a:rPr sz="1650" b="0">
-                <a:solidFill>
-                  <a:srgbClr val="142F43"/>
-                </a:solidFill>
-                <a:latin typeface="Microsoft JhengHei"/>
-                <a:ea typeface="Microsoft JhengHei"/>
-                <a:cs typeface="Microsoft JhengHei"/>
-              </a:rPr>
-              <a:t>全體候選 T 細胞有 15.4% 高於此值</a:t>
-            </a:r>
-          </a:p>
-        </p:txBody>
-      </p:sp>
-      <p:sp>
-        <p:nvSpPr>
-          <p:cNvPr id="8" name="">
-            <a:extLst xmlns:a="http://schemas.openxmlformats.org/drawingml/2006/main">
-              <a:ext uri="{FF2B5EF4-FFF2-40B4-BE49-F238E27FC236}">
-                <a16:creationId xmlns:a16="http://schemas.microsoft.com/office/drawing/2014/main" id="{860A2576-0D4A-4D52-9891-50C6C1BFA89C}"/>
-              </a:ext>
-            </a:extLst>
-          </p:cNvPr>
-          <p:cNvSpPr>
-            <a:spLocks xmlns:a="http://schemas.openxmlformats.org/drawingml/2006/main" noGrp="1"/>
-          </p:cNvSpPr>
-          <p:nvPr/>
-        </p:nvSpPr>
-        <p:spPr>
-          <a:xfrm xmlns:a="http://schemas.openxmlformats.org/drawingml/2006/main">
-            <a:off x="8143875" y="4333875"/>
-            <a:ext cx="3524250" cy="1190625"/>
-          </a:xfrm>
-          <a:prstGeom xmlns:a="http://schemas.openxmlformats.org/drawingml/2006/main" prst="rect">
-            <a:avLst/>
-          </a:prstGeom>
-          <a:noFill xmlns:a="http://schemas.openxmlformats.org/drawingml/2006/main"/>
-          <a:ln xmlns:a="http://schemas.openxmlformats.org/drawingml/2006/main" w="0">
-            <a:noFill/>
-          </a:ln>
-        </p:spPr>
-        <p:txBody>
-          <a:bodyPr xmlns:a="http://schemas.openxmlformats.org/drawingml/2006/main">
-            <a:normAutofit fontScale="100000"/>
-          </a:bodyPr>
-          <a:lstStyle xmlns:a="http://schemas.openxmlformats.org/drawingml/2006/main"/>
-          <a:p xmlns:a="http://schemas.openxmlformats.org/drawingml/2006/main">
-            <a:pPr>
-              <a:defRPr sz="1575" b="0">
-                <a:solidFill>
-                  <a:srgbClr val="142F43"/>
-                </a:solidFill>
-                <a:latin typeface="Microsoft JhengHei"/>
-                <a:ea typeface="Microsoft JhengHei"/>
-                <a:cs typeface="Microsoft JhengHei"/>
-              </a:defRPr>
-            </a:pPr>
-            <a:r>
-              <a:rPr sz="1575" b="0">
-                <a:solidFill>
-                  <a:srgbClr val="142F43"/>
-                </a:solidFill>
-                <a:latin typeface="Microsoft JhengHei"/>
-                <a:ea typeface="Microsoft JhengHei"/>
-                <a:cs typeface="Microsoft JhengHei"/>
-              </a:rPr>
-              <a:t>~ patient_pair + condition</a:t>
-            </a:r>
-          </a:p>
-          <a:p xmlns:a="http://schemas.openxmlformats.org/drawingml/2006/main">
-            <a:pPr>
-              <a:defRPr sz="1575" b="0">
-                <a:solidFill>
-                  <a:srgbClr val="142F43"/>
-                </a:solidFill>
-                <a:latin typeface="Microsoft JhengHei"/>
-                <a:ea typeface="Microsoft JhengHei"/>
-                <a:cs typeface="Microsoft JhengHei"/>
-              </a:defRPr>
-            </a:pPr>
-            <a:r>
-              <a:rPr sz="1575" b="0">
-                <a:solidFill>
-                  <a:srgbClr val="142F43"/>
-                </a:solidFill>
-                <a:latin typeface="Microsoft JhengHei"/>
-                <a:ea typeface="Microsoft JhengHei"/>
-                <a:cs typeface="Microsoft JhengHei"/>
-              </a:rPr>
-              <a:t>以 condition coefficient 排名</a:t>
-            </a:r>
-          </a:p>
-          <a:p xmlns:a="http://schemas.openxmlformats.org/drawingml/2006/main">
-            <a:pPr>
-              <a:defRPr sz="1575" b="0">
-                <a:solidFill>
-                  <a:srgbClr val="142F43"/>
-                </a:solidFill>
-                <a:latin typeface="Microsoft JhengHei"/>
-                <a:ea typeface="Microsoft JhengHei"/>
-                <a:cs typeface="Microsoft JhengHei"/>
-              </a:defRPr>
-            </a:pPr>
-            <a:r>
-              <a:rPr sz="1575" b="0">
-                <a:solidFill>
-                  <a:srgbClr val="142F43"/>
-                </a:solidFill>
-                <a:latin typeface="Microsoft JhengHei"/>
-                <a:ea typeface="Microsoft JhengHei"/>
-                <a:cs typeface="Microsoft JhengHei"/>
-              </a:rPr>
-              <a:t>GSEA: sign(logFC) × √F</a:t>
-            </a:r>
-          </a:p>
-        </p:txBody>
-      </p:sp>
-      <p:sp>
-        <p:nvSpPr>
-          <p:cNvPr id="9" name="">
-            <a:extLst xmlns:a="http://schemas.openxmlformats.org/drawingml/2006/main">
-              <a:ext uri="{FF2B5EF4-FFF2-40B4-BE49-F238E27FC236}">
-                <a16:creationId xmlns:a16="http://schemas.microsoft.com/office/drawing/2014/main" id="{6809B340-5968-4508-9DA8-1CCDF8CCF0D2}"/>
-              </a:ext>
-            </a:extLst>
-          </p:cNvPr>
-          <p:cNvSpPr>
-            <a:spLocks xmlns:a="http://schemas.openxmlformats.org/drawingml/2006/main" noGrp="1"/>
-          </p:cNvSpPr>
-          <p:nvPr/>
-        </p:nvSpPr>
-        <p:spPr>
-          <a:xfrm xmlns:a="http://schemas.openxmlformats.org/drawingml/2006/main">
-            <a:off x="571500" y="5762625"/>
-            <a:ext cx="10953750" cy="571500"/>
-          </a:xfrm>
-          <a:prstGeom xmlns:a="http://schemas.openxmlformats.org/drawingml/2006/main" prst="rect">
-            <a:avLst/>
-          </a:prstGeom>
-          <a:noFill xmlns:a="http://schemas.openxmlformats.org/drawingml/2006/main"/>
-          <a:ln xmlns:a="http://schemas.openxmlformats.org/drawingml/2006/main" w="0">
-            <a:noFill/>
-          </a:ln>
-        </p:spPr>
-        <p:txBody>
-          <a:bodyPr xmlns:a="http://schemas.openxmlformats.org/drawingml/2006/main">
-            <a:normAutofit fontScale="100000"/>
-          </a:bodyPr>
-          <a:lstStyle xmlns:a="http://schemas.openxmlformats.org/drawingml/2006/main"/>
-          <a:p xmlns:a="http://schemas.openxmlformats.org/drawingml/2006/main">
-            <a:pPr>
-              <a:defRPr sz="1650" b="0">
-                <a:solidFill>
-                  <a:srgbClr val="D55E00"/>
-                </a:solidFill>
-                <a:latin typeface="Microsoft JhengHei"/>
-                <a:ea typeface="Microsoft JhengHei"/>
-                <a:cs typeface="Microsoft JhengHei"/>
-              </a:defRPr>
-            </a:pPr>
-            <a:r>
-              <a:rPr sz="1650" b="0">
-                <a:solidFill>
-                  <a:srgbClr val="D55E00"/>
-                </a:solidFill>
-                <a:latin typeface="Microsoft JhengHei"/>
-                <a:ea typeface="Microsoft JhengHei"/>
-                <a:cs typeface="Microsoft JhengHei"/>
-              </a:rPr>
-              <a:t>每個 sample 固定取 15%，無法用保留比例來證明 relapse 的 malignant population 增加。</a:t>
-            </a:r>
-          </a:p>
-        </p:txBody>
-      </p:sp>
     </p:spTree>
     <p:extLst>
       <p:ext uri="{BB962C8B-B14F-4D97-AF65-F5344CB8AC3E}">
-        <p14:creationId xmlns:p14="http://schemas.microsoft.com/office/powerpoint/2010/main" val="885940879"/>
+        <p14:creationId xmlns:p14="http://schemas.microsoft.com/office/powerpoint/2010/main" val="947316487"/>
       </p:ext>
     </p:extLst>
   </p:cSld>
@@ -7554,10 +4745,10 @@
       </p:grpSpPr>
       <p:sp>
         <p:nvSpPr>
-          <p:cNvPr id="8" name="">
+          <p:cNvPr id="4" name="">
             <a:extLst xmlns:a="http://schemas.openxmlformats.org/drawingml/2006/main">
               <a:ext uri="{FF2B5EF4-FFF2-40B4-BE49-F238E27FC236}">
-                <a16:creationId xmlns:a16="http://schemas.microsoft.com/office/drawing/2014/main" id="{17C21A11-1AA6-4741-9CBC-5EE1B6E0903C}"/>
+                <a16:creationId xmlns:a16="http://schemas.microsoft.com/office/drawing/2014/main" id="{0206108A-EFB2-4121-8944-C3C3D6374C3C}"/>
               </a:ext>
             </a:extLst>
           </p:cNvPr>
@@ -7568,8 +4759,8 @@
         </p:nvSpPr>
         <p:spPr>
           <a:xfrm xmlns:a="http://schemas.openxmlformats.org/drawingml/2006/main">
-            <a:off x="476250" y="190500"/>
-            <a:ext cx="10477500" cy="209550"/>
+            <a:off x="523875" y="333375"/>
+            <a:ext cx="11144250" cy="590550"/>
           </a:xfrm>
           <a:prstGeom xmlns:a="http://schemas.openxmlformats.org/drawingml/2006/main" prst="rect">
             <a:avLst/>
@@ -7581,14 +4772,14 @@
         </p:spPr>
         <p:txBody>
           <a:bodyPr xmlns:a="http://schemas.openxmlformats.org/drawingml/2006/main">
-            <a:normAutofit fontScale="79487"/>
+            <a:noAutofit/>
           </a:bodyPr>
           <a:lstStyle xmlns:a="http://schemas.openxmlformats.org/drawingml/2006/main"/>
           <a:p xmlns:a="http://schemas.openxmlformats.org/drawingml/2006/main">
             <a:pPr>
-              <a:defRPr sz="975" b="1">
-                <a:solidFill>
-                  <a:srgbClr val="D55E00"/>
+              <a:defRPr sz="2550" b="1">
+                <a:solidFill>
+                  <a:srgbClr val="202020"/>
                 </a:solidFill>
                 <a:latin typeface="Microsoft JhengHei"/>
                 <a:ea typeface="Microsoft JhengHei"/>
@@ -7596,15 +4787,15 @@
               </a:defRPr>
             </a:pPr>
             <a:r>
-              <a:rPr sz="975" b="1">
-                <a:solidFill>
-                  <a:srgbClr val="D55E00"/>
+              <a:rPr sz="2550" b="1">
+                <a:solidFill>
+                  <a:srgbClr val="202020"/>
                 </a:solidFill>
                 <a:latin typeface="Microsoft JhengHei"/>
                 <a:ea typeface="Microsoft JhengHei"/>
                 <a:cs typeface="Microsoft JhengHei"/>
               </a:rPr>
-              <a:t>DISCOVERY</a:t>
+              <a:t>Single-cell KEGG enrichment</a:t>
             </a:r>
           </a:p>
         </p:txBody>
@@ -7614,7 +4805,7 @@
           <p:cNvPr id="2" name="">
             <a:extLst xmlns:a="http://schemas.openxmlformats.org/drawingml/2006/main">
               <a:ext uri="{FF2B5EF4-FFF2-40B4-BE49-F238E27FC236}">
-                <a16:creationId xmlns:a16="http://schemas.microsoft.com/office/drawing/2014/main" id="{23305B07-191A-4A55-AE6C-282CBCDA3D70}"/>
+                <a16:creationId xmlns:a16="http://schemas.microsoft.com/office/drawing/2014/main" id="{7DDD9F91-5FE2-4060-850D-A56888C1433B}"/>
               </a:ext>
             </a:extLst>
           </p:cNvPr>
@@ -7625,8 +4816,8 @@
         </p:nvSpPr>
         <p:spPr>
           <a:xfrm xmlns:a="http://schemas.openxmlformats.org/drawingml/2006/main">
-            <a:off x="476250" y="523875"/>
-            <a:ext cx="11144250" cy="476250"/>
+            <a:off x="619125" y="971550"/>
+            <a:ext cx="10763250" cy="428625"/>
           </a:xfrm>
           <a:prstGeom xmlns:a="http://schemas.openxmlformats.org/drawingml/2006/main" prst="rect">
             <a:avLst/>
@@ -7638,14 +4829,14 @@
         </p:spPr>
         <p:txBody>
           <a:bodyPr xmlns:a="http://schemas.openxmlformats.org/drawingml/2006/main">
-            <a:normAutofit fontScale="100000"/>
+            <a:noAutofit/>
           </a:bodyPr>
           <a:lstStyle xmlns:a="http://schemas.openxmlformats.org/drawingml/2006/main"/>
           <a:p xmlns:a="http://schemas.openxmlformats.org/drawingml/2006/main">
             <a:pPr>
-              <a:defRPr sz="2400" b="1">
-                <a:solidFill>
-                  <a:srgbClr val="142F43"/>
+              <a:defRPr sz="1800" b="0">
+                <a:solidFill>
+                  <a:srgbClr val="202020"/>
                 </a:solidFill>
                 <a:latin typeface="Microsoft JhengHei"/>
                 <a:ea typeface="Microsoft JhengHei"/>
@@ -7653,324 +4844,45 @@
               </a:defRPr>
             </a:pPr>
             <a:r>
-              <a:rPr sz="2400" b="1">
-                <a:solidFill>
-                  <a:srgbClr val="142F43"/>
+              <a:rPr sz="1800" b="0">
+                <a:solidFill>
+                  <a:srgbClr val="202020"/>
                 </a:solidFill>
                 <a:latin typeface="Microsoft JhengHei"/>
                 <a:ea typeface="Microsoft JhengHei"/>
                 <a:cs typeface="Microsoft JhengHei"/>
               </a:rPr>
-              <a:t>Single-cell：完整 KEGG enrichment 概覽</a:t>
+              <a:t>61 上調，2 下調   (FDR &lt; 0.05)</a:t>
             </a:r>
           </a:p>
         </p:txBody>
       </p:sp>
-      <p:sp>
-        <p:nvSpPr>
-          <p:cNvPr id="3" name="">
-            <a:extLst xmlns:a="http://schemas.openxmlformats.org/drawingml/2006/main">
-              <a:ext uri="{FF2B5EF4-FFF2-40B4-BE49-F238E27FC236}">
-                <a16:creationId xmlns:a16="http://schemas.microsoft.com/office/drawing/2014/main" id="{B9D24181-6075-4B2F-8A0F-EC83AAAC963C}"/>
-              </a:ext>
-            </a:extLst>
-          </p:cNvPr>
-          <p:cNvSpPr>
-            <a:spLocks xmlns:a="http://schemas.openxmlformats.org/drawingml/2006/main" noGrp="1"/>
-          </p:cNvSpPr>
-          <p:nvPr/>
-        </p:nvSpPr>
-        <p:spPr>
-          <a:xfrm xmlns:a="http://schemas.openxmlformats.org/drawingml/2006/main">
-            <a:off x="476250" y="6543675"/>
-            <a:ext cx="10287000" cy="171450"/>
-          </a:xfrm>
-          <a:prstGeom xmlns:a="http://schemas.openxmlformats.org/drawingml/2006/main" prst="rect">
-            <a:avLst/>
-          </a:prstGeom>
-          <a:noFill xmlns:a="http://schemas.openxmlformats.org/drawingml/2006/main"/>
-          <a:ln xmlns:a="http://schemas.openxmlformats.org/drawingml/2006/main" w="0">
-            <a:noFill/>
-          </a:ln>
-        </p:spPr>
-        <p:txBody>
-          <a:bodyPr xmlns:a="http://schemas.openxmlformats.org/drawingml/2006/main">
-            <a:normAutofit fontScale="63636"/>
-          </a:bodyPr>
-          <a:lstStyle xmlns:a="http://schemas.openxmlformats.org/drawingml/2006/main"/>
-          <a:p xmlns:a="http://schemas.openxmlformats.org/drawingml/2006/main">
-            <a:pPr>
-              <a:defRPr sz="825" b="0">
-                <a:solidFill>
-                  <a:srgbClr val="4D5B66"/>
-                </a:solidFill>
-                <a:latin typeface="Microsoft JhengHei"/>
-                <a:ea typeface="Microsoft JhengHei"/>
-                <a:cs typeface="Microsoft JhengHei"/>
-              </a:defRPr>
-            </a:pPr>
-            <a:r>
-              <a:rPr sz="825" b="0">
-                <a:solidFill>
-                  <a:srgbClr val="4D5B66"/>
-                </a:solidFill>
-                <a:latin typeface="Microsoft JhengHei"/>
-                <a:ea typeface="Microsoft JhengHei"/>
-                <a:cs typeface="Microsoft JhengHei"/>
-              </a:rPr>
-              <a:t>GSE262271 / GSE218858  |  Reviewed 15 September 2026</a:t>
-            </a:r>
-          </a:p>
-        </p:txBody>
-      </p:sp>
-      <p:sp>
-        <p:nvSpPr>
-          <p:cNvPr id="4" name="">
-            <a:extLst xmlns:a="http://schemas.openxmlformats.org/drawingml/2006/main">
-              <a:ext uri="{FF2B5EF4-FFF2-40B4-BE49-F238E27FC236}">
-                <a16:creationId xmlns:a16="http://schemas.microsoft.com/office/drawing/2014/main" id="{745B384F-7D3A-4690-AE9F-AEEAF408CD5F}"/>
-              </a:ext>
-            </a:extLst>
-          </p:cNvPr>
-          <p:cNvSpPr>
-            <a:spLocks xmlns:a="http://schemas.openxmlformats.org/drawingml/2006/main" noGrp="1"/>
-          </p:cNvSpPr>
-          <p:nvPr/>
-        </p:nvSpPr>
-        <p:spPr>
-          <a:xfrm xmlns:a="http://schemas.openxmlformats.org/drawingml/2006/main">
-            <a:off x="11334750" y="6543675"/>
-            <a:ext cx="381000" cy="171450"/>
-          </a:xfrm>
-          <a:prstGeom xmlns:a="http://schemas.openxmlformats.org/drawingml/2006/main" prst="rect">
-            <a:avLst/>
-          </a:prstGeom>
-          <a:noFill xmlns:a="http://schemas.openxmlformats.org/drawingml/2006/main"/>
-          <a:ln xmlns:a="http://schemas.openxmlformats.org/drawingml/2006/main" w="0">
-            <a:noFill/>
-          </a:ln>
-        </p:spPr>
-        <p:txBody>
-          <a:bodyPr xmlns:a="http://schemas.openxmlformats.org/drawingml/2006/main">
-            <a:normAutofit fontScale="63636"/>
-          </a:bodyPr>
-          <a:lstStyle xmlns:a="http://schemas.openxmlformats.org/drawingml/2006/main"/>
-          <a:p xmlns:a="http://schemas.openxmlformats.org/drawingml/2006/main">
-            <a:pPr>
-              <a:defRPr sz="825" b="0">
-                <a:solidFill>
-                  <a:srgbClr val="142F43"/>
-                </a:solidFill>
-                <a:latin typeface="Microsoft JhengHei"/>
-                <a:ea typeface="Microsoft JhengHei"/>
-                <a:cs typeface="Microsoft JhengHei"/>
-              </a:defRPr>
-            </a:pPr>
-            <a:r>
-              <a:rPr sz="825" b="0">
-                <a:solidFill>
-                  <a:srgbClr val="142F43"/>
-                </a:solidFill>
-                <a:latin typeface="Microsoft JhengHei"/>
-                <a:ea typeface="Microsoft JhengHei"/>
-                <a:cs typeface="Microsoft JhengHei"/>
-              </a:rPr>
-              <a:t>06</a:t>
-            </a:r>
-          </a:p>
-        </p:txBody>
-      </p:sp>
       <p:pic>
         <p:nvPicPr>
-          <p:cNvPr id="12" name=""/>
+          <p:cNvPr id="6" name=""/>
           <p:cNvPicPr>
             <a:picLocks xmlns:a="http://schemas.openxmlformats.org/drawingml/2006/main" noChangeAspect="1"/>
           </p:cNvPicPr>
           <p:nvPr/>
         </p:nvPicPr>
         <p:blipFill>
-          <a:blip xmlns:r="http://schemas.openxmlformats.org/officeDocument/2006/relationships" xmlns:a="http://schemas.openxmlformats.org/drawingml/2006/main" r:embed="Rca7da34f50fb4169"/>
+          <a:blip xmlns:r="http://schemas.openxmlformats.org/officeDocument/2006/relationships" xmlns:a="http://schemas.openxmlformats.org/drawingml/2006/main" r:embed="Rd3532ff79e774dea"/>
           <a:stretch xmlns:a="http://schemas.openxmlformats.org/drawingml/2006/main"/>
         </p:blipFill>
         <p:spPr>
           <a:xfrm xmlns:a="http://schemas.openxmlformats.org/drawingml/2006/main">
-            <a:off x="333375" y="1190625"/>
-            <a:ext cx="9429750" cy="5143500"/>
+            <a:off x="1702136" y="1476375"/>
+            <a:ext cx="8787728" cy="4810125"/>
           </a:xfrm>
           <a:prstGeom xmlns:a="http://schemas.openxmlformats.org/drawingml/2006/main" prst="rect">
             <a:avLst/>
           </a:prstGeom>
         </p:spPr>
       </p:pic>
-      <p:sp>
-        <p:nvSpPr>
-          <p:cNvPr id="6" name="">
-            <a:extLst xmlns:a="http://schemas.openxmlformats.org/drawingml/2006/main">
-              <a:ext uri="{FF2B5EF4-FFF2-40B4-BE49-F238E27FC236}">
-                <a16:creationId xmlns:a16="http://schemas.microsoft.com/office/drawing/2014/main" id="{F1F56B0A-5F87-4F3E-8795-4D77BC0D82F2}"/>
-              </a:ext>
-            </a:extLst>
-          </p:cNvPr>
-          <p:cNvSpPr>
-            <a:spLocks xmlns:a="http://schemas.openxmlformats.org/drawingml/2006/main" noGrp="1"/>
-          </p:cNvSpPr>
-          <p:nvPr/>
-        </p:nvSpPr>
-        <p:spPr>
-          <a:xfrm xmlns:a="http://schemas.openxmlformats.org/drawingml/2006/main">
-            <a:off x="9763125" y="1809750"/>
-            <a:ext cx="2095500" cy="1762125"/>
-          </a:xfrm>
-          <a:prstGeom xmlns:a="http://schemas.openxmlformats.org/drawingml/2006/main" prst="rect">
-            <a:avLst/>
-          </a:prstGeom>
-          <a:noFill xmlns:a="http://schemas.openxmlformats.org/drawingml/2006/main"/>
-          <a:ln xmlns:a="http://schemas.openxmlformats.org/drawingml/2006/main" w="0">
-            <a:noFill/>
-          </a:ln>
-        </p:spPr>
-        <p:txBody>
-          <a:bodyPr xmlns:a="http://schemas.openxmlformats.org/drawingml/2006/main">
-            <a:normAutofit fontScale="100000"/>
-          </a:bodyPr>
-          <a:lstStyle xmlns:a="http://schemas.openxmlformats.org/drawingml/2006/main"/>
-          <a:p xmlns:a="http://schemas.openxmlformats.org/drawingml/2006/main">
-            <a:pPr>
-              <a:defRPr sz="1800" b="1">
-                <a:solidFill>
-                  <a:srgbClr val="142F43"/>
-                </a:solidFill>
-                <a:latin typeface="Microsoft JhengHei"/>
-                <a:ea typeface="Microsoft JhengHei"/>
-                <a:cs typeface="Microsoft JhengHei"/>
-              </a:defRPr>
-            </a:pPr>
-            <a:r>
-              <a:rPr sz="1800" b="1">
-                <a:solidFill>
-                  <a:srgbClr val="142F43"/>
-                </a:solidFill>
-                <a:latin typeface="Microsoft JhengHei"/>
-                <a:ea typeface="Microsoft JhengHei"/>
-                <a:cs typeface="Microsoft JhengHei"/>
-              </a:rPr>
-              <a:t>FDR &lt; 0.05</a:t>
-            </a:r>
-          </a:p>
-          <a:p xmlns:a="http://schemas.openxmlformats.org/drawingml/2006/main">
-            <a:r>
-              <a:t/>
-            </a:r>
-          </a:p>
-          <a:p xmlns:a="http://schemas.openxmlformats.org/drawingml/2006/main">
-            <a:pPr>
-              <a:defRPr sz="1800" b="1">
-                <a:solidFill>
-                  <a:srgbClr val="142F43"/>
-                </a:solidFill>
-                <a:latin typeface="Microsoft JhengHei"/>
-                <a:ea typeface="Microsoft JhengHei"/>
-                <a:cs typeface="Microsoft JhengHei"/>
-              </a:defRPr>
-            </a:pPr>
-            <a:r>
-              <a:rPr sz="1800" b="1">
-                <a:solidFill>
-                  <a:srgbClr val="142F43"/>
-                </a:solidFill>
-                <a:latin typeface="Microsoft JhengHei"/>
-                <a:ea typeface="Microsoft JhengHei"/>
-                <a:cs typeface="Microsoft JhengHei"/>
-              </a:rPr>
-              <a:t>上調 61 條</a:t>
-            </a:r>
-          </a:p>
-          <a:p xmlns:a="http://schemas.openxmlformats.org/drawingml/2006/main">
-            <a:pPr>
-              <a:defRPr sz="1800" b="1">
-                <a:solidFill>
-                  <a:srgbClr val="142F43"/>
-                </a:solidFill>
-                <a:latin typeface="Microsoft JhengHei"/>
-                <a:ea typeface="Microsoft JhengHei"/>
-                <a:cs typeface="Microsoft JhengHei"/>
-              </a:defRPr>
-            </a:pPr>
-            <a:r>
-              <a:rPr sz="1800" b="1">
-                <a:solidFill>
-                  <a:srgbClr val="142F43"/>
-                </a:solidFill>
-                <a:latin typeface="Microsoft JhengHei"/>
-                <a:ea typeface="Microsoft JhengHei"/>
-                <a:cs typeface="Microsoft JhengHei"/>
-              </a:rPr>
-              <a:t>下調 2 條</a:t>
-            </a:r>
-          </a:p>
-        </p:txBody>
-      </p:sp>
-      <p:sp>
-        <p:nvSpPr>
-          <p:cNvPr id="7" name="">
-            <a:extLst xmlns:a="http://schemas.openxmlformats.org/drawingml/2006/main">
-              <a:ext uri="{FF2B5EF4-FFF2-40B4-BE49-F238E27FC236}">
-                <a16:creationId xmlns:a16="http://schemas.microsoft.com/office/drawing/2014/main" id="{1201CD0A-77B3-4C9D-B967-B8CD68C0F4B4}"/>
-              </a:ext>
-            </a:extLst>
-          </p:cNvPr>
-          <p:cNvSpPr>
-            <a:spLocks xmlns:a="http://schemas.openxmlformats.org/drawingml/2006/main" noGrp="1"/>
-          </p:cNvSpPr>
-          <p:nvPr/>
-        </p:nvSpPr>
-        <p:spPr>
-          <a:xfrm xmlns:a="http://schemas.openxmlformats.org/drawingml/2006/main">
-            <a:off x="9763125" y="4095750"/>
-            <a:ext cx="2095500" cy="1619250"/>
-          </a:xfrm>
-          <a:prstGeom xmlns:a="http://schemas.openxmlformats.org/drawingml/2006/main" prst="rect">
-            <a:avLst/>
-          </a:prstGeom>
-          <a:noFill xmlns:a="http://schemas.openxmlformats.org/drawingml/2006/main"/>
-          <a:ln xmlns:a="http://schemas.openxmlformats.org/drawingml/2006/main" w="0">
-            <a:noFill/>
-          </a:ln>
-        </p:spPr>
-        <p:txBody>
-          <a:bodyPr xmlns:a="http://schemas.openxmlformats.org/drawingml/2006/main">
-            <a:normAutofit fontScale="100000"/>
-          </a:bodyPr>
-          <a:lstStyle xmlns:a="http://schemas.openxmlformats.org/drawingml/2006/main"/>
-          <a:p xmlns:a="http://schemas.openxmlformats.org/drawingml/2006/main">
-            <a:pPr>
-              <a:defRPr sz="1575" b="0">
-                <a:solidFill>
-                  <a:srgbClr val="142F43"/>
-                </a:solidFill>
-                <a:latin typeface="Microsoft JhengHei"/>
-                <a:ea typeface="Microsoft JhengHei"/>
-                <a:cs typeface="Microsoft JhengHei"/>
-              </a:defRPr>
-            </a:pPr>
-            <a:r>
-              <a:rPr sz="1575" b="0">
-                <a:solidFill>
-                  <a:srgbClr val="142F43"/>
-                </a:solidFill>
-                <a:latin typeface="Microsoft JhengHei"/>
-                <a:ea typeface="Microsoft JhengHei"/>
-                <a:cs typeface="Microsoft JhengHei"/>
-              </a:rPr>
-              <a:t>主圖依 FDR 排序。完整結果在 Table04，顯著清單在 Table11。</a:t>
-            </a:r>
-          </a:p>
-        </p:txBody>
-      </p:sp>
     </p:spTree>
     <p:extLst>
       <p:ext uri="{BB962C8B-B14F-4D97-AF65-F5344CB8AC3E}">
-        <p14:creationId xmlns:p14="http://schemas.microsoft.com/office/powerpoint/2010/main" val="1747707559"/>
+        <p14:creationId xmlns:p14="http://schemas.microsoft.com/office/powerpoint/2010/main" val="1012741706"/>
       </p:ext>
     </p:extLst>
   </p:cSld>
@@ -7998,10 +4910,10 @@
       </p:grpSpPr>
       <p:sp>
         <p:nvSpPr>
-          <p:cNvPr id="8" name="">
+          <p:cNvPr id="4" name="">
             <a:extLst xmlns:a="http://schemas.openxmlformats.org/drawingml/2006/main">
               <a:ext uri="{FF2B5EF4-FFF2-40B4-BE49-F238E27FC236}">
-                <a16:creationId xmlns:a16="http://schemas.microsoft.com/office/drawing/2014/main" id="{7E7A06DA-E801-4929-9415-B09C526CF8EC}"/>
+                <a16:creationId xmlns:a16="http://schemas.microsoft.com/office/drawing/2014/main" id="{5D076ED6-F29C-4C39-BB53-E8B773CA66FB}"/>
               </a:ext>
             </a:extLst>
           </p:cNvPr>
@@ -8012,8 +4924,8 @@
         </p:nvSpPr>
         <p:spPr>
           <a:xfrm xmlns:a="http://schemas.openxmlformats.org/drawingml/2006/main">
-            <a:off x="476250" y="190500"/>
-            <a:ext cx="10477500" cy="209550"/>
+            <a:off x="523875" y="333375"/>
+            <a:ext cx="11144250" cy="590550"/>
           </a:xfrm>
           <a:prstGeom xmlns:a="http://schemas.openxmlformats.org/drawingml/2006/main" prst="rect">
             <a:avLst/>
@@ -8025,14 +4937,14 @@
         </p:spPr>
         <p:txBody>
           <a:bodyPr xmlns:a="http://schemas.openxmlformats.org/drawingml/2006/main">
-            <a:normAutofit fontScale="79487"/>
+            <a:noAutofit/>
           </a:bodyPr>
           <a:lstStyle xmlns:a="http://schemas.openxmlformats.org/drawingml/2006/main"/>
           <a:p xmlns:a="http://schemas.openxmlformats.org/drawingml/2006/main">
             <a:pPr>
-              <a:defRPr sz="975" b="1">
-                <a:solidFill>
-                  <a:srgbClr val="D55E00"/>
+              <a:defRPr sz="2550" b="1">
+                <a:solidFill>
+                  <a:srgbClr val="202020"/>
                 </a:solidFill>
                 <a:latin typeface="Microsoft JhengHei"/>
                 <a:ea typeface="Microsoft JhengHei"/>
@@ -8040,15 +4952,15 @@
               </a:defRPr>
             </a:pPr>
             <a:r>
-              <a:rPr sz="975" b="1">
-                <a:solidFill>
-                  <a:srgbClr val="D55E00"/>
+              <a:rPr sz="2550" b="1">
+                <a:solidFill>
+                  <a:srgbClr val="202020"/>
                 </a:solidFill>
                 <a:latin typeface="Microsoft JhengHei"/>
                 <a:ea typeface="Microsoft JhengHei"/>
                 <a:cs typeface="Microsoft JhengHei"/>
               </a:rPr>
-              <a:t>STAT5B PERTURBATION</a:t>
+              <a:t>STAT5B N642H KEGG enrichment</a:t>
             </a:r>
           </a:p>
         </p:txBody>
@@ -8058,7 +4970,7 @@
           <p:cNvPr id="2" name="">
             <a:extLst xmlns:a="http://schemas.openxmlformats.org/drawingml/2006/main">
               <a:ext uri="{FF2B5EF4-FFF2-40B4-BE49-F238E27FC236}">
-                <a16:creationId xmlns:a16="http://schemas.microsoft.com/office/drawing/2014/main" id="{5B8A9C24-3A69-4C69-9447-7EFBC1785B9E}"/>
+                <a16:creationId xmlns:a16="http://schemas.microsoft.com/office/drawing/2014/main" id="{17C5144A-D9F4-49DB-85C2-7972DF037898}"/>
               </a:ext>
             </a:extLst>
           </p:cNvPr>
@@ -8069,8 +4981,8 @@
         </p:nvSpPr>
         <p:spPr>
           <a:xfrm xmlns:a="http://schemas.openxmlformats.org/drawingml/2006/main">
-            <a:off x="476250" y="523875"/>
-            <a:ext cx="11144250" cy="476250"/>
+            <a:off x="619125" y="971550"/>
+            <a:ext cx="10763250" cy="428625"/>
           </a:xfrm>
           <a:prstGeom xmlns:a="http://schemas.openxmlformats.org/drawingml/2006/main" prst="rect">
             <a:avLst/>
@@ -8082,14 +4994,14 @@
         </p:spPr>
         <p:txBody>
           <a:bodyPr xmlns:a="http://schemas.openxmlformats.org/drawingml/2006/main">
-            <a:normAutofit fontScale="100000"/>
+            <a:noAutofit/>
           </a:bodyPr>
           <a:lstStyle xmlns:a="http://schemas.openxmlformats.org/drawingml/2006/main"/>
           <a:p xmlns:a="http://schemas.openxmlformats.org/drawingml/2006/main">
             <a:pPr>
-              <a:defRPr sz="2400" b="1">
-                <a:solidFill>
-                  <a:srgbClr val="142F43"/>
+              <a:defRPr sz="1800" b="0">
+                <a:solidFill>
+                  <a:srgbClr val="202020"/>
                 </a:solidFill>
                 <a:latin typeface="Microsoft JhengHei"/>
                 <a:ea typeface="Microsoft JhengHei"/>
@@ -8097,324 +5009,45 @@
               </a:defRPr>
             </a:pPr>
             <a:r>
-              <a:rPr sz="2400" b="1">
-                <a:solidFill>
-                  <a:srgbClr val="142F43"/>
+              <a:rPr sz="1800" b="0">
+                <a:solidFill>
+                  <a:srgbClr val="202020"/>
                 </a:solidFill>
                 <a:latin typeface="Microsoft JhengHei"/>
                 <a:ea typeface="Microsoft JhengHei"/>
                 <a:cs typeface="Microsoft JhengHei"/>
               </a:rPr>
-              <a:t>Bulk：STAT5B N642H 的完整 KEGG enrichment</a:t>
+              <a:t>107 上調，6 下調   (FDR &lt; 0.05)</a:t>
             </a:r>
           </a:p>
         </p:txBody>
       </p:sp>
-      <p:sp>
-        <p:nvSpPr>
-          <p:cNvPr id="3" name="">
-            <a:extLst xmlns:a="http://schemas.openxmlformats.org/drawingml/2006/main">
-              <a:ext uri="{FF2B5EF4-FFF2-40B4-BE49-F238E27FC236}">
-                <a16:creationId xmlns:a16="http://schemas.microsoft.com/office/drawing/2014/main" id="{B465E2EE-573B-4907-A0C1-165962A4D5BF}"/>
-              </a:ext>
-            </a:extLst>
-          </p:cNvPr>
-          <p:cNvSpPr>
-            <a:spLocks xmlns:a="http://schemas.openxmlformats.org/drawingml/2006/main" noGrp="1"/>
-          </p:cNvSpPr>
-          <p:nvPr/>
-        </p:nvSpPr>
-        <p:spPr>
-          <a:xfrm xmlns:a="http://schemas.openxmlformats.org/drawingml/2006/main">
-            <a:off x="476250" y="6543675"/>
-            <a:ext cx="10287000" cy="171450"/>
-          </a:xfrm>
-          <a:prstGeom xmlns:a="http://schemas.openxmlformats.org/drawingml/2006/main" prst="rect">
-            <a:avLst/>
-          </a:prstGeom>
-          <a:noFill xmlns:a="http://schemas.openxmlformats.org/drawingml/2006/main"/>
-          <a:ln xmlns:a="http://schemas.openxmlformats.org/drawingml/2006/main" w="0">
-            <a:noFill/>
-          </a:ln>
-        </p:spPr>
-        <p:txBody>
-          <a:bodyPr xmlns:a="http://schemas.openxmlformats.org/drawingml/2006/main">
-            <a:normAutofit fontScale="63636"/>
-          </a:bodyPr>
-          <a:lstStyle xmlns:a="http://schemas.openxmlformats.org/drawingml/2006/main"/>
-          <a:p xmlns:a="http://schemas.openxmlformats.org/drawingml/2006/main">
-            <a:pPr>
-              <a:defRPr sz="825" b="0">
-                <a:solidFill>
-                  <a:srgbClr val="4D5B66"/>
-                </a:solidFill>
-                <a:latin typeface="Microsoft JhengHei"/>
-                <a:ea typeface="Microsoft JhengHei"/>
-                <a:cs typeface="Microsoft JhengHei"/>
-              </a:defRPr>
-            </a:pPr>
-            <a:r>
-              <a:rPr sz="825" b="0">
-                <a:solidFill>
-                  <a:srgbClr val="4D5B66"/>
-                </a:solidFill>
-                <a:latin typeface="Microsoft JhengHei"/>
-                <a:ea typeface="Microsoft JhengHei"/>
-                <a:cs typeface="Microsoft JhengHei"/>
-              </a:rPr>
-              <a:t>GSE262271 / GSE218858  |  Reviewed 15 September 2026</a:t>
-            </a:r>
-          </a:p>
-        </p:txBody>
-      </p:sp>
-      <p:sp>
-        <p:nvSpPr>
-          <p:cNvPr id="4" name="">
-            <a:extLst xmlns:a="http://schemas.openxmlformats.org/drawingml/2006/main">
-              <a:ext uri="{FF2B5EF4-FFF2-40B4-BE49-F238E27FC236}">
-                <a16:creationId xmlns:a16="http://schemas.microsoft.com/office/drawing/2014/main" id="{64596B98-24FE-4691-9681-718D715D2F46}"/>
-              </a:ext>
-            </a:extLst>
-          </p:cNvPr>
-          <p:cNvSpPr>
-            <a:spLocks xmlns:a="http://schemas.openxmlformats.org/drawingml/2006/main" noGrp="1"/>
-          </p:cNvSpPr>
-          <p:nvPr/>
-        </p:nvSpPr>
-        <p:spPr>
-          <a:xfrm xmlns:a="http://schemas.openxmlformats.org/drawingml/2006/main">
-            <a:off x="11334750" y="6543675"/>
-            <a:ext cx="381000" cy="171450"/>
-          </a:xfrm>
-          <a:prstGeom xmlns:a="http://schemas.openxmlformats.org/drawingml/2006/main" prst="rect">
-            <a:avLst/>
-          </a:prstGeom>
-          <a:noFill xmlns:a="http://schemas.openxmlformats.org/drawingml/2006/main"/>
-          <a:ln xmlns:a="http://schemas.openxmlformats.org/drawingml/2006/main" w="0">
-            <a:noFill/>
-          </a:ln>
-        </p:spPr>
-        <p:txBody>
-          <a:bodyPr xmlns:a="http://schemas.openxmlformats.org/drawingml/2006/main">
-            <a:normAutofit fontScale="63636"/>
-          </a:bodyPr>
-          <a:lstStyle xmlns:a="http://schemas.openxmlformats.org/drawingml/2006/main"/>
-          <a:p xmlns:a="http://schemas.openxmlformats.org/drawingml/2006/main">
-            <a:pPr>
-              <a:defRPr sz="825" b="0">
-                <a:solidFill>
-                  <a:srgbClr val="142F43"/>
-                </a:solidFill>
-                <a:latin typeface="Microsoft JhengHei"/>
-                <a:ea typeface="Microsoft JhengHei"/>
-                <a:cs typeface="Microsoft JhengHei"/>
-              </a:defRPr>
-            </a:pPr>
-            <a:r>
-              <a:rPr sz="825" b="0">
-                <a:solidFill>
-                  <a:srgbClr val="142F43"/>
-                </a:solidFill>
-                <a:latin typeface="Microsoft JhengHei"/>
-                <a:ea typeface="Microsoft JhengHei"/>
-                <a:cs typeface="Microsoft JhengHei"/>
-              </a:rPr>
-              <a:t>07</a:t>
-            </a:r>
-          </a:p>
-        </p:txBody>
-      </p:sp>
       <p:pic>
         <p:nvPicPr>
-          <p:cNvPr id="12" name=""/>
+          <p:cNvPr id="6" name=""/>
           <p:cNvPicPr>
             <a:picLocks xmlns:a="http://schemas.openxmlformats.org/drawingml/2006/main" noChangeAspect="1"/>
           </p:cNvPicPr>
           <p:nvPr/>
         </p:nvPicPr>
         <p:blipFill>
-          <a:blip xmlns:r="http://schemas.openxmlformats.org/officeDocument/2006/relationships" xmlns:a="http://schemas.openxmlformats.org/drawingml/2006/main" r:embed="R485437988e8545aa"/>
+          <a:blip xmlns:r="http://schemas.openxmlformats.org/officeDocument/2006/relationships" xmlns:a="http://schemas.openxmlformats.org/drawingml/2006/main" r:embed="Rc92b2674a4de4e16"/>
           <a:stretch xmlns:a="http://schemas.openxmlformats.org/drawingml/2006/main"/>
         </p:blipFill>
         <p:spPr>
           <a:xfrm xmlns:a="http://schemas.openxmlformats.org/drawingml/2006/main">
-            <a:off x="333375" y="1190625"/>
-            <a:ext cx="9429750" cy="5143500"/>
+            <a:off x="2047875" y="1476375"/>
+            <a:ext cx="8096250" cy="4857750"/>
           </a:xfrm>
           <a:prstGeom xmlns:a="http://schemas.openxmlformats.org/drawingml/2006/main" prst="rect">
             <a:avLst/>
           </a:prstGeom>
         </p:spPr>
       </p:pic>
-      <p:sp>
-        <p:nvSpPr>
-          <p:cNvPr id="6" name="">
-            <a:extLst xmlns:a="http://schemas.openxmlformats.org/drawingml/2006/main">
-              <a:ext uri="{FF2B5EF4-FFF2-40B4-BE49-F238E27FC236}">
-                <a16:creationId xmlns:a16="http://schemas.microsoft.com/office/drawing/2014/main" id="{BE7DED07-E4EB-489C-9063-3C6B6752AEE6}"/>
-              </a:ext>
-            </a:extLst>
-          </p:cNvPr>
-          <p:cNvSpPr>
-            <a:spLocks xmlns:a="http://schemas.openxmlformats.org/drawingml/2006/main" noGrp="1"/>
-          </p:cNvSpPr>
-          <p:nvPr/>
-        </p:nvSpPr>
-        <p:spPr>
-          <a:xfrm xmlns:a="http://schemas.openxmlformats.org/drawingml/2006/main">
-            <a:off x="9763125" y="1809750"/>
-            <a:ext cx="2095500" cy="1762125"/>
-          </a:xfrm>
-          <a:prstGeom xmlns:a="http://schemas.openxmlformats.org/drawingml/2006/main" prst="rect">
-            <a:avLst/>
-          </a:prstGeom>
-          <a:noFill xmlns:a="http://schemas.openxmlformats.org/drawingml/2006/main"/>
-          <a:ln xmlns:a="http://schemas.openxmlformats.org/drawingml/2006/main" w="0">
-            <a:noFill/>
-          </a:ln>
-        </p:spPr>
-        <p:txBody>
-          <a:bodyPr xmlns:a="http://schemas.openxmlformats.org/drawingml/2006/main">
-            <a:normAutofit fontScale="100000"/>
-          </a:bodyPr>
-          <a:lstStyle xmlns:a="http://schemas.openxmlformats.org/drawingml/2006/main"/>
-          <a:p xmlns:a="http://schemas.openxmlformats.org/drawingml/2006/main">
-            <a:pPr>
-              <a:defRPr sz="1800" b="1">
-                <a:solidFill>
-                  <a:srgbClr val="142F43"/>
-                </a:solidFill>
-                <a:latin typeface="Microsoft JhengHei"/>
-                <a:ea typeface="Microsoft JhengHei"/>
-                <a:cs typeface="Microsoft JhengHei"/>
-              </a:defRPr>
-            </a:pPr>
-            <a:r>
-              <a:rPr sz="1800" b="1">
-                <a:solidFill>
-                  <a:srgbClr val="142F43"/>
-                </a:solidFill>
-                <a:latin typeface="Microsoft JhengHei"/>
-                <a:ea typeface="Microsoft JhengHei"/>
-                <a:cs typeface="Microsoft JhengHei"/>
-              </a:rPr>
-              <a:t>FDR &lt; 0.05</a:t>
-            </a:r>
-          </a:p>
-          <a:p xmlns:a="http://schemas.openxmlformats.org/drawingml/2006/main">
-            <a:r>
-              <a:t/>
-            </a:r>
-          </a:p>
-          <a:p xmlns:a="http://schemas.openxmlformats.org/drawingml/2006/main">
-            <a:pPr>
-              <a:defRPr sz="1800" b="1">
-                <a:solidFill>
-                  <a:srgbClr val="142F43"/>
-                </a:solidFill>
-                <a:latin typeface="Microsoft JhengHei"/>
-                <a:ea typeface="Microsoft JhengHei"/>
-                <a:cs typeface="Microsoft JhengHei"/>
-              </a:defRPr>
-            </a:pPr>
-            <a:r>
-              <a:rPr sz="1800" b="1">
-                <a:solidFill>
-                  <a:srgbClr val="142F43"/>
-                </a:solidFill>
-                <a:latin typeface="Microsoft JhengHei"/>
-                <a:ea typeface="Microsoft JhengHei"/>
-                <a:cs typeface="Microsoft JhengHei"/>
-              </a:rPr>
-              <a:t>上調 107 條</a:t>
-            </a:r>
-          </a:p>
-          <a:p xmlns:a="http://schemas.openxmlformats.org/drawingml/2006/main">
-            <a:pPr>
-              <a:defRPr sz="1800" b="1">
-                <a:solidFill>
-                  <a:srgbClr val="142F43"/>
-                </a:solidFill>
-                <a:latin typeface="Microsoft JhengHei"/>
-                <a:ea typeface="Microsoft JhengHei"/>
-                <a:cs typeface="Microsoft JhengHei"/>
-              </a:defRPr>
-            </a:pPr>
-            <a:r>
-              <a:rPr sz="1800" b="1">
-                <a:solidFill>
-                  <a:srgbClr val="142F43"/>
-                </a:solidFill>
-                <a:latin typeface="Microsoft JhengHei"/>
-                <a:ea typeface="Microsoft JhengHei"/>
-                <a:cs typeface="Microsoft JhengHei"/>
-              </a:rPr>
-              <a:t>下調 6 條</a:t>
-            </a:r>
-          </a:p>
-        </p:txBody>
-      </p:sp>
-      <p:sp>
-        <p:nvSpPr>
-          <p:cNvPr id="7" name="">
-            <a:extLst xmlns:a="http://schemas.openxmlformats.org/drawingml/2006/main">
-              <a:ext uri="{FF2B5EF4-FFF2-40B4-BE49-F238E27FC236}">
-                <a16:creationId xmlns:a16="http://schemas.microsoft.com/office/drawing/2014/main" id="{51FAD001-AB5D-49D7-94E9-22A26DD0866B}"/>
-              </a:ext>
-            </a:extLst>
-          </p:cNvPr>
-          <p:cNvSpPr>
-            <a:spLocks xmlns:a="http://schemas.openxmlformats.org/drawingml/2006/main" noGrp="1"/>
-          </p:cNvSpPr>
-          <p:nvPr/>
-        </p:nvSpPr>
-        <p:spPr>
-          <a:xfrm xmlns:a="http://schemas.openxmlformats.org/drawingml/2006/main">
-            <a:off x="9763125" y="4095750"/>
-            <a:ext cx="2095500" cy="1762125"/>
-          </a:xfrm>
-          <a:prstGeom xmlns:a="http://schemas.openxmlformats.org/drawingml/2006/main" prst="rect">
-            <a:avLst/>
-          </a:prstGeom>
-          <a:noFill xmlns:a="http://schemas.openxmlformats.org/drawingml/2006/main"/>
-          <a:ln xmlns:a="http://schemas.openxmlformats.org/drawingml/2006/main" w="0">
-            <a:noFill/>
-          </a:ln>
-        </p:spPr>
-        <p:txBody>
-          <a:bodyPr xmlns:a="http://schemas.openxmlformats.org/drawingml/2006/main">
-            <a:normAutofit fontScale="100000"/>
-          </a:bodyPr>
-          <a:lstStyle xmlns:a="http://schemas.openxmlformats.org/drawingml/2006/main"/>
-          <a:p xmlns:a="http://schemas.openxmlformats.org/drawingml/2006/main">
-            <a:pPr>
-              <a:defRPr sz="1575" b="0">
-                <a:solidFill>
-                  <a:srgbClr val="142F43"/>
-                </a:solidFill>
-                <a:latin typeface="Microsoft JhengHei"/>
-                <a:ea typeface="Microsoft JhengHei"/>
-                <a:cs typeface="Microsoft JhengHei"/>
-              </a:defRPr>
-            </a:pPr>
-            <a:r>
-              <a:rPr sz="1575" b="0">
-                <a:solidFill>
-                  <a:srgbClr val="142F43"/>
-                </a:solidFill>
-                <a:latin typeface="Microsoft JhengHei"/>
-                <a:ea typeface="Microsoft JhengHei"/>
-                <a:cs typeface="Microsoft JhengHei"/>
-              </a:rPr>
-              <a:t>排名來自全部通過基因過濾的 DESeq2 Wald statistics。完整結果在 Table05。</a:t>
-            </a:r>
-          </a:p>
-        </p:txBody>
-      </p:sp>
     </p:spTree>
     <p:extLst>
       <p:ext uri="{BB962C8B-B14F-4D97-AF65-F5344CB8AC3E}">
-        <p14:creationId xmlns:p14="http://schemas.microsoft.com/office/powerpoint/2010/main" val="355638931"/>
+        <p14:creationId xmlns:p14="http://schemas.microsoft.com/office/powerpoint/2010/main" val="1000382846"/>
       </p:ext>
     </p:extLst>
   </p:cSld>
@@ -8442,10 +5075,10 @@
       </p:grpSpPr>
       <p:sp>
         <p:nvSpPr>
-          <p:cNvPr id="8" name="">
+          <p:cNvPr id="5" name="">
             <a:extLst xmlns:a="http://schemas.openxmlformats.org/drawingml/2006/main">
               <a:ext uri="{FF2B5EF4-FFF2-40B4-BE49-F238E27FC236}">
-                <a16:creationId xmlns:a16="http://schemas.microsoft.com/office/drawing/2014/main" id="{A2C23596-AC53-47A5-AD58-B6A2487AEC63}"/>
+                <a16:creationId xmlns:a16="http://schemas.microsoft.com/office/drawing/2014/main" id="{32E8BBDB-AC9E-48F4-9EB0-FD8B16D0A0F0}"/>
               </a:ext>
             </a:extLst>
           </p:cNvPr>
@@ -8456,8 +5089,8 @@
         </p:nvSpPr>
         <p:spPr>
           <a:xfrm xmlns:a="http://schemas.openxmlformats.org/drawingml/2006/main">
-            <a:off x="476250" y="190500"/>
-            <a:ext cx="10477500" cy="209550"/>
+            <a:off x="523875" y="333375"/>
+            <a:ext cx="11144250" cy="590550"/>
           </a:xfrm>
           <a:prstGeom xmlns:a="http://schemas.openxmlformats.org/drawingml/2006/main" prst="rect">
             <a:avLst/>
@@ -8469,14 +5102,14 @@
         </p:spPr>
         <p:txBody>
           <a:bodyPr xmlns:a="http://schemas.openxmlformats.org/drawingml/2006/main">
-            <a:normAutofit fontScale="79487"/>
+            <a:noAutofit/>
           </a:bodyPr>
           <a:lstStyle xmlns:a="http://schemas.openxmlformats.org/drawingml/2006/main"/>
           <a:p xmlns:a="http://schemas.openxmlformats.org/drawingml/2006/main">
             <a:pPr>
-              <a:defRPr sz="975" b="1">
-                <a:solidFill>
-                  <a:srgbClr val="D55E00"/>
+              <a:defRPr sz="2550" b="1">
+                <a:solidFill>
+                  <a:srgbClr val="202020"/>
                 </a:solidFill>
                 <a:latin typeface="Microsoft JhengHei"/>
                 <a:ea typeface="Microsoft JhengHei"/>
@@ -8484,15 +5117,15 @@
               </a:defRPr>
             </a:pPr>
             <a:r>
-              <a:rPr sz="975" b="1">
-                <a:solidFill>
-                  <a:srgbClr val="D55E00"/>
+              <a:rPr sz="2550" b="1">
+                <a:solidFill>
+                  <a:srgbClr val="202020"/>
                 </a:solidFill>
                 <a:latin typeface="Microsoft JhengHei"/>
                 <a:ea typeface="Microsoft JhengHei"/>
                 <a:cs typeface="Microsoft JhengHei"/>
               </a:rPr>
-              <a:t>CROSS-DATASET OVERLAP</a:t>
+              <a:t>同方向 KEGG pathway 交集</a:t>
             </a:r>
           </a:p>
         </p:txBody>
@@ -8502,7 +5135,7 @@
           <p:cNvPr id="2" name="">
             <a:extLst xmlns:a="http://schemas.openxmlformats.org/drawingml/2006/main">
               <a:ext uri="{FF2B5EF4-FFF2-40B4-BE49-F238E27FC236}">
-                <a16:creationId xmlns:a16="http://schemas.microsoft.com/office/drawing/2014/main" id="{62978758-00D8-49D9-89E7-560B1685C699}"/>
+                <a16:creationId xmlns:a16="http://schemas.microsoft.com/office/drawing/2014/main" id="{F95671FC-E972-4A3C-BACA-12D1A30E45D0}"/>
               </a:ext>
             </a:extLst>
           </p:cNvPr>
@@ -8513,8 +5146,8 @@
         </p:nvSpPr>
         <p:spPr>
           <a:xfrm xmlns:a="http://schemas.openxmlformats.org/drawingml/2006/main">
-            <a:off x="476250" y="523875"/>
-            <a:ext cx="11144250" cy="476250"/>
+            <a:off x="619125" y="1066800"/>
+            <a:ext cx="10763250" cy="428625"/>
           </a:xfrm>
           <a:prstGeom xmlns:a="http://schemas.openxmlformats.org/drawingml/2006/main" prst="rect">
             <a:avLst/>
@@ -8526,14 +5159,14 @@
         </p:spPr>
         <p:txBody>
           <a:bodyPr xmlns:a="http://schemas.openxmlformats.org/drawingml/2006/main">
-            <a:normAutofit fontScale="100000"/>
+            <a:noAutofit/>
           </a:bodyPr>
           <a:lstStyle xmlns:a="http://schemas.openxmlformats.org/drawingml/2006/main"/>
           <a:p xmlns:a="http://schemas.openxmlformats.org/drawingml/2006/main">
             <a:pPr>
-              <a:defRPr sz="2400" b="1">
-                <a:solidFill>
-                  <a:srgbClr val="142F43"/>
+              <a:defRPr sz="1875" b="0">
+                <a:solidFill>
+                  <a:srgbClr val="202020"/>
                 </a:solidFill>
                 <a:latin typeface="Microsoft JhengHei"/>
                 <a:ea typeface="Microsoft JhengHei"/>
@@ -8541,25 +5174,47 @@
               </a:defRPr>
             </a:pPr>
             <a:r>
-              <a:rPr sz="2400" b="1">
-                <a:solidFill>
-                  <a:srgbClr val="142F43"/>
+              <a:rPr sz="1875" b="0">
+                <a:solidFill>
+                  <a:srgbClr val="202020"/>
                 </a:solidFill>
                 <a:latin typeface="Microsoft JhengHei"/>
                 <a:ea typeface="Microsoft JhengHei"/>
                 <a:cs typeface="Microsoft JhengHei"/>
               </a:rPr>
-              <a:t>同方向 pathway 交集</a:t>
+              <a:t>兩組均 FDR &lt; 0.05，且 NES 同方向</a:t>
             </a:r>
           </a:p>
         </p:txBody>
       </p:sp>
-      <p:sp>
-        <p:nvSpPr>
-          <p:cNvPr id="3" name="">
+      <p:pic>
+        <p:nvPicPr>
+          <p:cNvPr id="7" name=""/>
+          <p:cNvPicPr>
+            <a:picLocks xmlns:a="http://schemas.openxmlformats.org/drawingml/2006/main" noChangeAspect="1"/>
+          </p:cNvPicPr>
+          <p:nvPr/>
+        </p:nvPicPr>
+        <p:blipFill>
+          <a:blip xmlns:r="http://schemas.openxmlformats.org/officeDocument/2006/relationships" xmlns:a="http://schemas.openxmlformats.org/drawingml/2006/main" r:embed="R39949db0c55a4608"/>
+          <a:stretch xmlns:a="http://schemas.openxmlformats.org/drawingml/2006/main"/>
+        </p:blipFill>
+        <p:spPr>
+          <a:xfrm xmlns:a="http://schemas.openxmlformats.org/drawingml/2006/main">
+            <a:off x="1111704" y="1809750"/>
+            <a:ext cx="9968593" cy="3876675"/>
+          </a:xfrm>
+          <a:prstGeom xmlns:a="http://schemas.openxmlformats.org/drawingml/2006/main" prst="rect">
+            <a:avLst/>
+          </a:prstGeom>
+        </p:spPr>
+      </p:pic>
+      <p:sp>
+        <p:nvSpPr>
+          <p:cNvPr id="4" name="">
             <a:extLst xmlns:a="http://schemas.openxmlformats.org/drawingml/2006/main">
               <a:ext uri="{FF2B5EF4-FFF2-40B4-BE49-F238E27FC236}">
-                <a16:creationId xmlns:a16="http://schemas.microsoft.com/office/drawing/2014/main" id="{1BBCB34D-A970-4539-BA81-E221387B7FEC}"/>
+                <a16:creationId xmlns:a16="http://schemas.microsoft.com/office/drawing/2014/main" id="{0D8D105E-049E-4C51-B87D-F1841A322438}"/>
               </a:ext>
             </a:extLst>
           </p:cNvPr>
@@ -8570,8 +5225,8 @@
         </p:nvSpPr>
         <p:spPr>
           <a:xfrm xmlns:a="http://schemas.openxmlformats.org/drawingml/2006/main">
-            <a:off x="476250" y="6543675"/>
-            <a:ext cx="10287000" cy="171450"/>
+            <a:off x="619125" y="5943600"/>
+            <a:ext cx="10763250" cy="400050"/>
           </a:xfrm>
           <a:prstGeom xmlns:a="http://schemas.openxmlformats.org/drawingml/2006/main" prst="rect">
             <a:avLst/>
@@ -8583,14 +5238,14 @@
         </p:spPr>
         <p:txBody>
           <a:bodyPr xmlns:a="http://schemas.openxmlformats.org/drawingml/2006/main">
-            <a:normAutofit fontScale="63636"/>
+            <a:noAutofit/>
           </a:bodyPr>
           <a:lstStyle xmlns:a="http://schemas.openxmlformats.org/drawingml/2006/main"/>
           <a:p xmlns:a="http://schemas.openxmlformats.org/drawingml/2006/main">
             <a:pPr>
-              <a:defRPr sz="825" b="0">
-                <a:solidFill>
-                  <a:srgbClr val="4D5B66"/>
+              <a:defRPr sz="1875" b="0">
+                <a:solidFill>
+                  <a:srgbClr val="202020"/>
                 </a:solidFill>
                 <a:latin typeface="Microsoft JhengHei"/>
                 <a:ea typeface="Microsoft JhengHei"/>
@@ -8598,310 +5253,15 @@
               </a:defRPr>
             </a:pPr>
             <a:r>
-              <a:rPr sz="825" b="0">
-                <a:solidFill>
-                  <a:srgbClr val="4D5B66"/>
+              <a:rPr sz="1875" b="0">
+                <a:solidFill>
+                  <a:srgbClr val="202020"/>
                 </a:solidFill>
                 <a:latin typeface="Microsoft JhengHei"/>
                 <a:ea typeface="Microsoft JhengHei"/>
                 <a:cs typeface="Microsoft JhengHei"/>
               </a:rPr>
-              <a:t>GSE262271 / GSE218858  |  Reviewed 15 September 2026</a:t>
-            </a:r>
-          </a:p>
-        </p:txBody>
-      </p:sp>
-      <p:sp>
-        <p:nvSpPr>
-          <p:cNvPr id="4" name="">
-            <a:extLst xmlns:a="http://schemas.openxmlformats.org/drawingml/2006/main">
-              <a:ext uri="{FF2B5EF4-FFF2-40B4-BE49-F238E27FC236}">
-                <a16:creationId xmlns:a16="http://schemas.microsoft.com/office/drawing/2014/main" id="{F52C1FCB-D323-4EE6-B32A-DDE399186D1B}"/>
-              </a:ext>
-            </a:extLst>
-          </p:cNvPr>
-          <p:cNvSpPr>
-            <a:spLocks xmlns:a="http://schemas.openxmlformats.org/drawingml/2006/main" noGrp="1"/>
-          </p:cNvSpPr>
-          <p:nvPr/>
-        </p:nvSpPr>
-        <p:spPr>
-          <a:xfrm xmlns:a="http://schemas.openxmlformats.org/drawingml/2006/main">
-            <a:off x="11334750" y="6543675"/>
-            <a:ext cx="381000" cy="171450"/>
-          </a:xfrm>
-          <a:prstGeom xmlns:a="http://schemas.openxmlformats.org/drawingml/2006/main" prst="rect">
-            <a:avLst/>
-          </a:prstGeom>
-          <a:noFill xmlns:a="http://schemas.openxmlformats.org/drawingml/2006/main"/>
-          <a:ln xmlns:a="http://schemas.openxmlformats.org/drawingml/2006/main" w="0">
-            <a:noFill/>
-          </a:ln>
-        </p:spPr>
-        <p:txBody>
-          <a:bodyPr xmlns:a="http://schemas.openxmlformats.org/drawingml/2006/main">
-            <a:normAutofit fontScale="63636"/>
-          </a:bodyPr>
-          <a:lstStyle xmlns:a="http://schemas.openxmlformats.org/drawingml/2006/main"/>
-          <a:p xmlns:a="http://schemas.openxmlformats.org/drawingml/2006/main">
-            <a:pPr>
-              <a:defRPr sz="825" b="0">
-                <a:solidFill>
-                  <a:srgbClr val="142F43"/>
-                </a:solidFill>
-                <a:latin typeface="Microsoft JhengHei"/>
-                <a:ea typeface="Microsoft JhengHei"/>
-                <a:cs typeface="Microsoft JhengHei"/>
-              </a:defRPr>
-            </a:pPr>
-            <a:r>
-              <a:rPr sz="825" b="0">
-                <a:solidFill>
-                  <a:srgbClr val="142F43"/>
-                </a:solidFill>
-                <a:latin typeface="Microsoft JhengHei"/>
-                <a:ea typeface="Microsoft JhengHei"/>
-                <a:cs typeface="Microsoft JhengHei"/>
-              </a:rPr>
-              <a:t>08</a:t>
-            </a:r>
-          </a:p>
-        </p:txBody>
-      </p:sp>
-      <p:pic>
-        <p:nvPicPr>
-          <p:cNvPr id="12" name=""/>
-          <p:cNvPicPr>
-            <a:picLocks xmlns:a="http://schemas.openxmlformats.org/drawingml/2006/main" noChangeAspect="1"/>
-          </p:cNvPicPr>
-          <p:nvPr/>
-        </p:nvPicPr>
-        <p:blipFill>
-          <a:blip xmlns:r="http://schemas.openxmlformats.org/officeDocument/2006/relationships" xmlns:a="http://schemas.openxmlformats.org/drawingml/2006/main" r:embed="R708e79115cb349f9"/>
-          <a:stretch xmlns:a="http://schemas.openxmlformats.org/drawingml/2006/main"/>
-        </p:blipFill>
-        <p:spPr>
-          <a:xfrm xmlns:a="http://schemas.openxmlformats.org/drawingml/2006/main">
-            <a:off x="333375" y="1381125"/>
-            <a:ext cx="8763000" cy="4381500"/>
-          </a:xfrm>
-          <a:prstGeom xmlns:a="http://schemas.openxmlformats.org/drawingml/2006/main" prst="rect">
-            <a:avLst/>
-          </a:prstGeom>
-        </p:spPr>
-      </p:pic>
-      <p:sp>
-        <p:nvSpPr>
-          <p:cNvPr id="6" name="">
-            <a:extLst xmlns:a="http://schemas.openxmlformats.org/drawingml/2006/main">
-              <a:ext uri="{FF2B5EF4-FFF2-40B4-BE49-F238E27FC236}">
-                <a16:creationId xmlns:a16="http://schemas.microsoft.com/office/drawing/2014/main" id="{1F045BC4-7F82-4BD6-8C3F-953DCC74BB45}"/>
-              </a:ext>
-            </a:extLst>
-          </p:cNvPr>
-          <p:cNvSpPr>
-            <a:spLocks xmlns:a="http://schemas.openxmlformats.org/drawingml/2006/main" noGrp="1"/>
-          </p:cNvSpPr>
-          <p:nvPr/>
-        </p:nvSpPr>
-        <p:spPr>
-          <a:xfrm xmlns:a="http://schemas.openxmlformats.org/drawingml/2006/main">
-            <a:off x="9239250" y="1647825"/>
-            <a:ext cx="2571750" cy="1857375"/>
-          </a:xfrm>
-          <a:prstGeom xmlns:a="http://schemas.openxmlformats.org/drawingml/2006/main" prst="rect">
-            <a:avLst/>
-          </a:prstGeom>
-          <a:noFill xmlns:a="http://schemas.openxmlformats.org/drawingml/2006/main"/>
-          <a:ln xmlns:a="http://schemas.openxmlformats.org/drawingml/2006/main" w="0">
-            <a:noFill/>
-          </a:ln>
-        </p:spPr>
-        <p:txBody>
-          <a:bodyPr xmlns:a="http://schemas.openxmlformats.org/drawingml/2006/main">
-            <a:normAutofit fontScale="100000"/>
-          </a:bodyPr>
-          <a:lstStyle xmlns:a="http://schemas.openxmlformats.org/drawingml/2006/main"/>
-          <a:p xmlns:a="http://schemas.openxmlformats.org/drawingml/2006/main">
-            <a:pPr>
-              <a:defRPr sz="1875" b="1">
-                <a:solidFill>
-                  <a:srgbClr val="142F43"/>
-                </a:solidFill>
-                <a:latin typeface="Microsoft JhengHei"/>
-                <a:ea typeface="Microsoft JhengHei"/>
-                <a:cs typeface="Microsoft JhengHei"/>
-              </a:defRPr>
-            </a:pPr>
-            <a:r>
-              <a:rPr sz="1875" b="1">
-                <a:solidFill>
-                  <a:srgbClr val="142F43"/>
-                </a:solidFill>
-                <a:latin typeface="Microsoft JhengHei"/>
-                <a:ea typeface="Microsoft JhengHei"/>
-                <a:cs typeface="Microsoft JhengHei"/>
-              </a:rPr>
-              <a:t>Top 15% 與 bulk</a:t>
-            </a:r>
-          </a:p>
-          <a:p xmlns:a="http://schemas.openxmlformats.org/drawingml/2006/main">
-            <a:r>
-              <a:t/>
-            </a:r>
-          </a:p>
-          <a:p xmlns:a="http://schemas.openxmlformats.org/drawingml/2006/main">
-            <a:pPr>
-              <a:defRPr sz="1875" b="1">
-                <a:solidFill>
-                  <a:srgbClr val="142F43"/>
-                </a:solidFill>
-                <a:latin typeface="Microsoft JhengHei"/>
-                <a:ea typeface="Microsoft JhengHei"/>
-                <a:cs typeface="Microsoft JhengHei"/>
-              </a:defRPr>
-            </a:pPr>
-            <a:r>
-              <a:rPr sz="1875" b="1">
-                <a:solidFill>
-                  <a:srgbClr val="142F43"/>
-                </a:solidFill>
-                <a:latin typeface="Microsoft JhengHei"/>
-                <a:ea typeface="Microsoft JhengHei"/>
-                <a:cs typeface="Microsoft JhengHei"/>
-              </a:rPr>
-              <a:t>共同上調 40 條</a:t>
-            </a:r>
-          </a:p>
-          <a:p xmlns:a="http://schemas.openxmlformats.org/drawingml/2006/main">
-            <a:pPr>
-              <a:defRPr sz="1875" b="1">
-                <a:solidFill>
-                  <a:srgbClr val="142F43"/>
-                </a:solidFill>
-                <a:latin typeface="Microsoft JhengHei"/>
-                <a:ea typeface="Microsoft JhengHei"/>
-                <a:cs typeface="Microsoft JhengHei"/>
-              </a:defRPr>
-            </a:pPr>
-            <a:r>
-              <a:rPr sz="1875" b="1">
-                <a:solidFill>
-                  <a:srgbClr val="142F43"/>
-                </a:solidFill>
-                <a:latin typeface="Microsoft JhengHei"/>
-                <a:ea typeface="Microsoft JhengHei"/>
-                <a:cs typeface="Microsoft JhengHei"/>
-              </a:rPr>
-              <a:t>共同下調 0 條</a:t>
-            </a:r>
-          </a:p>
-        </p:txBody>
-      </p:sp>
-      <p:sp>
-        <p:nvSpPr>
-          <p:cNvPr id="7" name="">
-            <a:extLst xmlns:a="http://schemas.openxmlformats.org/drawingml/2006/main">
-              <a:ext uri="{FF2B5EF4-FFF2-40B4-BE49-F238E27FC236}">
-                <a16:creationId xmlns:a16="http://schemas.microsoft.com/office/drawing/2014/main" id="{C4770083-A2A1-43CD-A93C-4458E143CABC}"/>
-              </a:ext>
-            </a:extLst>
-          </p:cNvPr>
-          <p:cNvSpPr>
-            <a:spLocks xmlns:a="http://schemas.openxmlformats.org/drawingml/2006/main" noGrp="1"/>
-          </p:cNvSpPr>
-          <p:nvPr/>
-        </p:nvSpPr>
-        <p:spPr>
-          <a:xfrm xmlns:a="http://schemas.openxmlformats.org/drawingml/2006/main">
-            <a:off x="9239250" y="3857625"/>
-            <a:ext cx="2571750" cy="2095500"/>
-          </a:xfrm>
-          <a:prstGeom xmlns:a="http://schemas.openxmlformats.org/drawingml/2006/main" prst="rect">
-            <a:avLst/>
-          </a:prstGeom>
-          <a:noFill xmlns:a="http://schemas.openxmlformats.org/drawingml/2006/main"/>
-          <a:ln xmlns:a="http://schemas.openxmlformats.org/drawingml/2006/main" w="0">
-            <a:noFill/>
-          </a:ln>
-        </p:spPr>
-        <p:txBody>
-          <a:bodyPr xmlns:a="http://schemas.openxmlformats.org/drawingml/2006/main">
-            <a:normAutofit fontScale="100000"/>
-          </a:bodyPr>
-          <a:lstStyle xmlns:a="http://schemas.openxmlformats.org/drawingml/2006/main"/>
-          <a:p xmlns:a="http://schemas.openxmlformats.org/drawingml/2006/main">
-            <a:pPr>
-              <a:defRPr sz="1575" b="0">
-                <a:solidFill>
-                  <a:srgbClr val="142F43"/>
-                </a:solidFill>
-                <a:latin typeface="Microsoft JhengHei"/>
-                <a:ea typeface="Microsoft JhengHei"/>
-                <a:cs typeface="Microsoft JhengHei"/>
-              </a:defRPr>
-            </a:pPr>
-            <a:r>
-              <a:rPr sz="1575" b="0">
-                <a:solidFill>
-                  <a:srgbClr val="142F43"/>
-                </a:solidFill>
-                <a:latin typeface="Microsoft JhengHei"/>
-                <a:ea typeface="Microsoft JhengHei"/>
-                <a:cs typeface="Microsoft JhengHei"/>
-              </a:rPr>
-              <a:t>只比較兩邊都測到的 pathway。</a:t>
-            </a:r>
-          </a:p>
-          <a:p xmlns:a="http://schemas.openxmlformats.org/drawingml/2006/main">
-            <a:pPr>
-              <a:defRPr sz="1575" b="0">
-                <a:solidFill>
-                  <a:srgbClr val="142F43"/>
-                </a:solidFill>
-                <a:latin typeface="Microsoft JhengHei"/>
-                <a:ea typeface="Microsoft JhengHei"/>
-                <a:cs typeface="Microsoft JhengHei"/>
-              </a:defRPr>
-            </a:pPr>
-            <a:r>
-              <a:rPr sz="1575" b="0">
-                <a:solidFill>
-                  <a:srgbClr val="142F43"/>
-                </a:solidFill>
-                <a:latin typeface="Microsoft JhengHei"/>
-                <a:ea typeface="Microsoft JhengHei"/>
-                <a:cs typeface="Microsoft JhengHei"/>
-              </a:rPr>
-              <a:t>兩邊都需 FDR &lt; 0.05，且 NES 同號。</a:t>
-            </a:r>
-          </a:p>
-          <a:p xmlns:a="http://schemas.openxmlformats.org/drawingml/2006/main">
-            <a:r>
-              <a:t/>
-            </a:r>
-          </a:p>
-          <a:p xmlns:a="http://schemas.openxmlformats.org/drawingml/2006/main">
-            <a:pPr>
-              <a:defRPr sz="1575" b="0">
-                <a:solidFill>
-                  <a:srgbClr val="142F43"/>
-                </a:solidFill>
-                <a:latin typeface="Microsoft JhengHei"/>
-                <a:ea typeface="Microsoft JhengHei"/>
-                <a:cs typeface="Microsoft JhengHei"/>
-              </a:defRPr>
-            </a:pPr>
-            <a:r>
-              <a:rPr sz="1575" b="0">
-                <a:solidFill>
-                  <a:srgbClr val="142F43"/>
-                </a:solidFill>
-                <a:latin typeface="Microsoft JhengHei"/>
-                <a:ea typeface="Microsoft JhengHei"/>
-                <a:cs typeface="Microsoft JhengHei"/>
-              </a:rPr>
-              <a:t>其他 cutoff 與原始 top 25% 放在補充分析。</a:t>
+              <a:t>共同上調 40 條，共同下調 0 條</a:t>
             </a:r>
           </a:p>
         </p:txBody>
@@ -8909,7 +5269,7 @@
     </p:spTree>
     <p:extLst>
       <p:ext uri="{BB962C8B-B14F-4D97-AF65-F5344CB8AC3E}">
-        <p14:creationId xmlns:p14="http://schemas.microsoft.com/office/powerpoint/2010/main" val="175331822"/>
+        <p14:creationId xmlns:p14="http://schemas.microsoft.com/office/powerpoint/2010/main" val="1054364017"/>
       </p:ext>
     </p:extLst>
   </p:cSld>
@@ -8937,10 +5297,10 @@
       </p:grpSpPr>
       <p:sp>
         <p:nvSpPr>
-          <p:cNvPr id="7" name="">
+          <p:cNvPr id="3" name="">
             <a:extLst xmlns:a="http://schemas.openxmlformats.org/drawingml/2006/main">
               <a:ext uri="{FF2B5EF4-FFF2-40B4-BE49-F238E27FC236}">
-                <a16:creationId xmlns:a16="http://schemas.microsoft.com/office/drawing/2014/main" id="{50A3073F-07BE-4090-80C9-C3AE1D7A2A4B}"/>
+                <a16:creationId xmlns:a16="http://schemas.microsoft.com/office/drawing/2014/main" id="{EEAEFBEB-12D1-4902-A759-E65FDFFA2DA7}"/>
               </a:ext>
             </a:extLst>
           </p:cNvPr>
@@ -8951,8 +5311,8 @@
         </p:nvSpPr>
         <p:spPr>
           <a:xfrm xmlns:a="http://schemas.openxmlformats.org/drawingml/2006/main">
-            <a:off x="476250" y="190500"/>
-            <a:ext cx="10477500" cy="209550"/>
+            <a:off x="523875" y="333375"/>
+            <a:ext cx="11144250" cy="590550"/>
           </a:xfrm>
           <a:prstGeom xmlns:a="http://schemas.openxmlformats.org/drawingml/2006/main" prst="rect">
             <a:avLst/>
@@ -8964,14 +5324,14 @@
         </p:spPr>
         <p:txBody>
           <a:bodyPr xmlns:a="http://schemas.openxmlformats.org/drawingml/2006/main">
-            <a:normAutofit fontScale="79487"/>
+            <a:noAutofit/>
           </a:bodyPr>
           <a:lstStyle xmlns:a="http://schemas.openxmlformats.org/drawingml/2006/main"/>
           <a:p xmlns:a="http://schemas.openxmlformats.org/drawingml/2006/main">
             <a:pPr>
-              <a:defRPr sz="975" b="1">
-                <a:solidFill>
-                  <a:srgbClr val="D55E00"/>
+              <a:defRPr sz="2550" b="1">
+                <a:solidFill>
+                  <a:srgbClr val="202020"/>
                 </a:solidFill>
                 <a:latin typeface="Microsoft JhengHei"/>
                 <a:ea typeface="Microsoft JhengHei"/>
@@ -8979,273 +5339,45 @@
               </a:defRPr>
             </a:pPr>
             <a:r>
-              <a:rPr sz="975" b="1">
-                <a:solidFill>
-                  <a:srgbClr val="D55E00"/>
+              <a:rPr sz="2550" b="1">
+                <a:solidFill>
+                  <a:srgbClr val="202020"/>
                 </a:solidFill>
                 <a:latin typeface="Microsoft JhengHei"/>
                 <a:ea typeface="Microsoft JhengHei"/>
                 <a:cs typeface="Microsoft JhengHei"/>
               </a:rPr>
-              <a:t>SHARED PROGRAMS</a:t>
+              <a:t>共同上調 pathways：1–20</a:t>
             </a:r>
           </a:p>
         </p:txBody>
       </p:sp>
-      <p:sp>
-        <p:nvSpPr>
-          <p:cNvPr id="2" name="">
-            <a:extLst xmlns:a="http://schemas.openxmlformats.org/drawingml/2006/main">
-              <a:ext uri="{FF2B5EF4-FFF2-40B4-BE49-F238E27FC236}">
-                <a16:creationId xmlns:a16="http://schemas.microsoft.com/office/drawing/2014/main" id="{55397E30-0ACF-4588-BDEF-DD2B152937BC}"/>
-              </a:ext>
-            </a:extLst>
-          </p:cNvPr>
-          <p:cNvSpPr>
-            <a:spLocks xmlns:a="http://schemas.openxmlformats.org/drawingml/2006/main" noGrp="1"/>
-          </p:cNvSpPr>
-          <p:nvPr/>
-        </p:nvSpPr>
-        <p:spPr>
-          <a:xfrm xmlns:a="http://schemas.openxmlformats.org/drawingml/2006/main">
-            <a:off x="476250" y="523875"/>
-            <a:ext cx="11144250" cy="476250"/>
-          </a:xfrm>
-          <a:prstGeom xmlns:a="http://schemas.openxmlformats.org/drawingml/2006/main" prst="rect">
-            <a:avLst/>
-          </a:prstGeom>
-          <a:noFill xmlns:a="http://schemas.openxmlformats.org/drawingml/2006/main"/>
-          <a:ln xmlns:a="http://schemas.openxmlformats.org/drawingml/2006/main" w="0">
-            <a:noFill/>
-          </a:ln>
-        </p:spPr>
-        <p:txBody>
-          <a:bodyPr xmlns:a="http://schemas.openxmlformats.org/drawingml/2006/main">
-            <a:normAutofit fontScale="100000"/>
-          </a:bodyPr>
-          <a:lstStyle xmlns:a="http://schemas.openxmlformats.org/drawingml/2006/main"/>
-          <a:p xmlns:a="http://schemas.openxmlformats.org/drawingml/2006/main">
-            <a:pPr>
-              <a:defRPr sz="2400" b="1">
-                <a:solidFill>
-                  <a:srgbClr val="142F43"/>
-                </a:solidFill>
-                <a:latin typeface="Microsoft JhengHei"/>
-                <a:ea typeface="Microsoft JhengHei"/>
-                <a:cs typeface="Microsoft JhengHei"/>
-              </a:defRPr>
-            </a:pPr>
-            <a:r>
-              <a:rPr sz="2400" b="1">
-                <a:solidFill>
-                  <a:srgbClr val="142F43"/>
-                </a:solidFill>
-                <a:latin typeface="Microsoft JhengHei"/>
-                <a:ea typeface="Microsoft JhengHei"/>
-                <a:cs typeface="Microsoft JhengHei"/>
-              </a:rPr>
-              <a:t>40 條共同上調 pathway：第 1–20 條</a:t>
-            </a:r>
-          </a:p>
-        </p:txBody>
-      </p:sp>
-      <p:sp>
-        <p:nvSpPr>
-          <p:cNvPr id="3" name="">
-            <a:extLst xmlns:a="http://schemas.openxmlformats.org/drawingml/2006/main">
-              <a:ext uri="{FF2B5EF4-FFF2-40B4-BE49-F238E27FC236}">
-                <a16:creationId xmlns:a16="http://schemas.microsoft.com/office/drawing/2014/main" id="{A28F24C2-1D3B-49C8-B018-585F776D7281}"/>
-              </a:ext>
-            </a:extLst>
-          </p:cNvPr>
-          <p:cNvSpPr>
-            <a:spLocks xmlns:a="http://schemas.openxmlformats.org/drawingml/2006/main" noGrp="1"/>
-          </p:cNvSpPr>
-          <p:nvPr/>
-        </p:nvSpPr>
-        <p:spPr>
-          <a:xfrm xmlns:a="http://schemas.openxmlformats.org/drawingml/2006/main">
-            <a:off x="476250" y="6543675"/>
-            <a:ext cx="10287000" cy="171450"/>
-          </a:xfrm>
-          <a:prstGeom xmlns:a="http://schemas.openxmlformats.org/drawingml/2006/main" prst="rect">
-            <a:avLst/>
-          </a:prstGeom>
-          <a:noFill xmlns:a="http://schemas.openxmlformats.org/drawingml/2006/main"/>
-          <a:ln xmlns:a="http://schemas.openxmlformats.org/drawingml/2006/main" w="0">
-            <a:noFill/>
-          </a:ln>
-        </p:spPr>
-        <p:txBody>
-          <a:bodyPr xmlns:a="http://schemas.openxmlformats.org/drawingml/2006/main">
-            <a:normAutofit fontScale="63636"/>
-          </a:bodyPr>
-          <a:lstStyle xmlns:a="http://schemas.openxmlformats.org/drawingml/2006/main"/>
-          <a:p xmlns:a="http://schemas.openxmlformats.org/drawingml/2006/main">
-            <a:pPr>
-              <a:defRPr sz="825" b="0">
-                <a:solidFill>
-                  <a:srgbClr val="4D5B66"/>
-                </a:solidFill>
-                <a:latin typeface="Microsoft JhengHei"/>
-                <a:ea typeface="Microsoft JhengHei"/>
-                <a:cs typeface="Microsoft JhengHei"/>
-              </a:defRPr>
-            </a:pPr>
-            <a:r>
-              <a:rPr sz="825" b="0">
-                <a:solidFill>
-                  <a:srgbClr val="4D5B66"/>
-                </a:solidFill>
-                <a:latin typeface="Microsoft JhengHei"/>
-                <a:ea typeface="Microsoft JhengHei"/>
-                <a:cs typeface="Microsoft JhengHei"/>
-              </a:rPr>
-              <a:t>GSE262271 / GSE218858  |  Reviewed 15 September 2026</a:t>
-            </a:r>
-          </a:p>
-        </p:txBody>
-      </p:sp>
-      <p:sp>
-        <p:nvSpPr>
-          <p:cNvPr id="4" name="">
-            <a:extLst xmlns:a="http://schemas.openxmlformats.org/drawingml/2006/main">
-              <a:ext uri="{FF2B5EF4-FFF2-40B4-BE49-F238E27FC236}">
-                <a16:creationId xmlns:a16="http://schemas.microsoft.com/office/drawing/2014/main" id="{56E1B56D-355B-498D-A6E0-2D53D1EAD002}"/>
-              </a:ext>
-            </a:extLst>
-          </p:cNvPr>
-          <p:cNvSpPr>
-            <a:spLocks xmlns:a="http://schemas.openxmlformats.org/drawingml/2006/main" noGrp="1"/>
-          </p:cNvSpPr>
-          <p:nvPr/>
-        </p:nvSpPr>
-        <p:spPr>
-          <a:xfrm xmlns:a="http://schemas.openxmlformats.org/drawingml/2006/main">
-            <a:off x="11334750" y="6543675"/>
-            <a:ext cx="381000" cy="171450"/>
-          </a:xfrm>
-          <a:prstGeom xmlns:a="http://schemas.openxmlformats.org/drawingml/2006/main" prst="rect">
-            <a:avLst/>
-          </a:prstGeom>
-          <a:noFill xmlns:a="http://schemas.openxmlformats.org/drawingml/2006/main"/>
-          <a:ln xmlns:a="http://schemas.openxmlformats.org/drawingml/2006/main" w="0">
-            <a:noFill/>
-          </a:ln>
-        </p:spPr>
-        <p:txBody>
-          <a:bodyPr xmlns:a="http://schemas.openxmlformats.org/drawingml/2006/main">
-            <a:normAutofit fontScale="63636"/>
-          </a:bodyPr>
-          <a:lstStyle xmlns:a="http://schemas.openxmlformats.org/drawingml/2006/main"/>
-          <a:p xmlns:a="http://schemas.openxmlformats.org/drawingml/2006/main">
-            <a:pPr>
-              <a:defRPr sz="825" b="0">
-                <a:solidFill>
-                  <a:srgbClr val="142F43"/>
-                </a:solidFill>
-                <a:latin typeface="Microsoft JhengHei"/>
-                <a:ea typeface="Microsoft JhengHei"/>
-                <a:cs typeface="Microsoft JhengHei"/>
-              </a:defRPr>
-            </a:pPr>
-            <a:r>
-              <a:rPr sz="825" b="0">
-                <a:solidFill>
-                  <a:srgbClr val="142F43"/>
-                </a:solidFill>
-                <a:latin typeface="Microsoft JhengHei"/>
-                <a:ea typeface="Microsoft JhengHei"/>
-                <a:cs typeface="Microsoft JhengHei"/>
-              </a:rPr>
-              <a:t>09</a:t>
-            </a:r>
-          </a:p>
-        </p:txBody>
-      </p:sp>
       <p:pic>
         <p:nvPicPr>
-          <p:cNvPr id="11" name=""/>
+          <p:cNvPr id="4" name=""/>
           <p:cNvPicPr>
             <a:picLocks xmlns:a="http://schemas.openxmlformats.org/drawingml/2006/main" noChangeAspect="1"/>
           </p:cNvPicPr>
           <p:nvPr/>
         </p:nvPicPr>
         <p:blipFill>
-          <a:blip xmlns:r="http://schemas.openxmlformats.org/officeDocument/2006/relationships" xmlns:a="http://schemas.openxmlformats.org/drawingml/2006/main" r:embed="R48f31e469148487b"/>
+          <a:blip xmlns:r="http://schemas.openxmlformats.org/officeDocument/2006/relationships" xmlns:a="http://schemas.openxmlformats.org/drawingml/2006/main" r:embed="R5ec7fe2eee4441e3"/>
           <a:stretch xmlns:a="http://schemas.openxmlformats.org/drawingml/2006/main"/>
         </p:blipFill>
         <p:spPr>
           <a:xfrm xmlns:a="http://schemas.openxmlformats.org/drawingml/2006/main">
-            <a:off x="996841" y="1028700"/>
-            <a:ext cx="10198319" cy="5143500"/>
+            <a:off x="902412" y="1057275"/>
+            <a:ext cx="10387177" cy="5238750"/>
           </a:xfrm>
           <a:prstGeom xmlns:a="http://schemas.openxmlformats.org/drawingml/2006/main" prst="rect">
             <a:avLst/>
           </a:prstGeom>
         </p:spPr>
       </p:pic>
-      <p:sp>
-        <p:nvSpPr>
-          <p:cNvPr id="6" name="">
-            <a:extLst xmlns:a="http://schemas.openxmlformats.org/drawingml/2006/main">
-              <a:ext uri="{FF2B5EF4-FFF2-40B4-BE49-F238E27FC236}">
-                <a16:creationId xmlns:a16="http://schemas.microsoft.com/office/drawing/2014/main" id="{BE85CEC0-0E0D-40E0-AA6E-7AD648E30AD9}"/>
-              </a:ext>
-            </a:extLst>
-          </p:cNvPr>
-          <p:cNvSpPr>
-            <a:spLocks xmlns:a="http://schemas.openxmlformats.org/drawingml/2006/main" noGrp="1"/>
-          </p:cNvSpPr>
-          <p:nvPr/>
-        </p:nvSpPr>
-        <p:spPr>
-          <a:xfrm xmlns:a="http://schemas.openxmlformats.org/drawingml/2006/main">
-            <a:off x="619125" y="6191250"/>
-            <a:ext cx="10953750" cy="285750"/>
-          </a:xfrm>
-          <a:prstGeom xmlns:a="http://schemas.openxmlformats.org/drawingml/2006/main" prst="rect">
-            <a:avLst/>
-          </a:prstGeom>
-          <a:noFill xmlns:a="http://schemas.openxmlformats.org/drawingml/2006/main"/>
-          <a:ln xmlns:a="http://schemas.openxmlformats.org/drawingml/2006/main" w="0">
-            <a:noFill/>
-          </a:ln>
-        </p:spPr>
-        <p:txBody>
-          <a:bodyPr xmlns:a="http://schemas.openxmlformats.org/drawingml/2006/main">
-            <a:normAutofit fontScale="94444"/>
-          </a:bodyPr>
-          <a:lstStyle xmlns:a="http://schemas.openxmlformats.org/drawingml/2006/main"/>
-          <a:p xmlns:a="http://schemas.openxmlformats.org/drawingml/2006/main">
-            <a:pPr>
-              <a:defRPr sz="1350" b="0">
-                <a:solidFill>
-                  <a:srgbClr val="142F43"/>
-                </a:solidFill>
-                <a:latin typeface="Microsoft JhengHei"/>
-                <a:ea typeface="Microsoft JhengHei"/>
-                <a:cs typeface="Microsoft JhengHei"/>
-              </a:defRPr>
-            </a:pPr>
-            <a:r>
-              <a:rPr sz="1350" b="0">
-                <a:solidFill>
-                  <a:srgbClr val="142F43"/>
-                </a:solidFill>
-                <a:latin typeface="Microsoft JhengHei"/>
-                <a:ea typeface="Microsoft JhengHei"/>
-                <a:cs typeface="Microsoft JhengHei"/>
-              </a:rPr>
-              <a:t>兩組均 FDR &lt; 0.05。依兩組較大的 FDR 由小到大排列，Proteasome 位於第 14 條。</a:t>
-            </a:r>
-          </a:p>
-        </p:txBody>
-      </p:sp>
     </p:spTree>
     <p:extLst>
       <p:ext uri="{BB962C8B-B14F-4D97-AF65-F5344CB8AC3E}">
-        <p14:creationId xmlns:p14="http://schemas.microsoft.com/office/powerpoint/2010/main" val="1313628065"/>
+        <p14:creationId xmlns:p14="http://schemas.microsoft.com/office/powerpoint/2010/main" val="1355940010"/>
       </p:ext>
     </p:extLst>
   </p:cSld>
